--- a/slides/NorthByte_FirstByte2026_template.pptx
+++ b/slides/NorthByte_FirstByte2026_template.pptx
@@ -32,6 +32,7 @@
     <p:sldId id="280" r:id="rId32"/>
     <p:sldId id="281" r:id="rId33"/>
     <p:sldId id="282" r:id="rId34"/>
+    <p:sldId id="283" r:id="rId35"/>
   </p:sldIdLst>
   <p:sldSz cx="12191695" cy="6858000" type="screen4x3"/>
   <p:notesSz cx="6858000" cy="9144000"/>
@@ -131,6 +132,1869 @@
     </a:lvl9pPr>
   </p:defaultTextStyle>
 </p:presentation>
+</file>
+
+<file path=ppt/charts/chart1.xml><?xml version="1.0" encoding="utf-8"?>
+<c:chartSpace xmlns:c="http://schemas.openxmlformats.org/drawingml/2006/chart" xmlns:a="http://schemas.openxmlformats.org/drawingml/2006/main" xmlns:r="http://schemas.openxmlformats.org/officeDocument/2006/relationships">
+  <c:date1904 val="0"/>
+  <c:chart>
+    <c:autoTitleDeleted val="0"/>
+    <c:plotArea>
+      <c:barChart>
+        <c:barDir val="bar"/>
+        <c:grouping val="clustered"/>
+        <c:ser>
+          <c:idx val="0"/>
+          <c:order val="0"/>
+          <c:tx>
+            <c:strRef>
+              <c:f>Sheet1!$B$1</c:f>
+              <c:strCache>
+                <c:ptCount val="1"/>
+                <c:pt idx="0">
+                  <c:v>Contribution</c:v>
+                </c:pt>
+              </c:strCache>
+            </c:strRef>
+          </c:tx>
+          <c:invertIfNegative val="0"/>
+          <c:dPt>
+            <c:idx val="0"/>
+            <c:spPr>
+              <a:solidFill>
+                <a:srgbClr val="2E7D5B"/>
+              </a:solidFill>
+            </c:spPr>
+          </c:dPt>
+          <c:dPt>
+            <c:idx val="1"/>
+            <c:spPr>
+              <a:solidFill>
+                <a:srgbClr val="E8692A"/>
+              </a:solidFill>
+            </c:spPr>
+          </c:dPt>
+          <c:dPt>
+            <c:idx val="2"/>
+            <c:spPr>
+              <a:solidFill>
+                <a:srgbClr val="E8692A"/>
+              </a:solidFill>
+            </c:spPr>
+          </c:dPt>
+          <c:dPt>
+            <c:idx val="3"/>
+            <c:spPr>
+              <a:solidFill>
+                <a:srgbClr val="E8692A"/>
+              </a:solidFill>
+            </c:spPr>
+          </c:dPt>
+          <c:dPt>
+            <c:idx val="4"/>
+            <c:spPr>
+              <a:solidFill>
+                <a:srgbClr val="0B1F3A"/>
+              </a:solidFill>
+            </c:spPr>
+          </c:dPt>
+          <c:cat>
+            <c:strRef>
+              <c:f>Sheet1!$A$2:$A$6</c:f>
+              <c:strCache>
+                <c:ptCount val="5"/>
+                <c:pt idx="0">
+                  <c:v>Rest of network (38 directions)</c:v>
+                </c:pt>
+                <c:pt idx="1">
+                  <c:v>Added trunk flights (8 directions)</c:v>
+                </c:pt>
+                <c:pt idx="2">
+                  <c:v>Montréal–Vancouver (2)</c:v>
+                </c:pt>
+                <c:pt idx="3">
+                  <c:v>3 new markets (6)</c:v>
+                </c:pt>
+                <c:pt idx="4">
+                  <c:v>Network total</c:v>
+                </c:pt>
+              </c:strCache>
+            </c:strRef>
+          </c:cat>
+          <c:val>
+            <c:numRef>
+              <c:f>Sheet1!$B$2:$B$6</c:f>
+              <c:numCache>
+                <c:formatCode>General</c:formatCode>
+                <c:ptCount val="5"/>
+                <c:pt idx="0">
+                  <c:v>10.6</c:v>
+                </c:pt>
+                <c:pt idx="1">
+                  <c:v>-29.0</c:v>
+                </c:pt>
+                <c:pt idx="2">
+                  <c:v>-19.7</c:v>
+                </c:pt>
+                <c:pt idx="3">
+                  <c:v>-10.3</c:v>
+                </c:pt>
+                <c:pt idx="4">
+                  <c:v>-48.4</c:v>
+                </c:pt>
+              </c:numCache>
+            </c:numRef>
+          </c:val>
+        </c:ser>
+        <c:dLbls>
+          <c:numFmt formatCode="&quot;+&quot;0.0;&quot;−&quot;0.0" sourceLinked="0"/>
+          <c:txPr>
+            <a:bodyPr/>
+            <a:lstStyle/>
+            <a:p>
+              <a:pPr>
+                <a:defRPr sz="1100" b="1"/>
+              </a:pPr>
+            </a:p>
+          </c:txPr>
+          <c:dLblPos val="outEnd"/>
+          <c:showLegendKey val="0"/>
+          <c:showVal val="1"/>
+          <c:showCatName val="0"/>
+          <c:showSerName val="0"/>
+          <c:showPercent val="0"/>
+          <c:showBubbleSize val="0"/>
+          <c:showLeaderLines val="1"/>
+        </c:dLbls>
+        <c:gapWidth val="45"/>
+        <c:axId val="-2068027336"/>
+        <c:axId val="-2113994440"/>
+      </c:barChart>
+      <c:catAx>
+        <c:axId val="-2068027336"/>
+        <c:scaling>
+          <c:orientation val="maxMin"/>
+        </c:scaling>
+        <c:delete val="0"/>
+        <c:axPos val="l"/>
+        <c:majorTickMark val="none"/>
+        <c:minorTickMark val="none"/>
+        <c:tickLblPos val="low"/>
+        <c:spPr>
+          <a:ln>
+            <a:solidFill>
+              <a:srgbClr val="D1D5DB"/>
+            </a:solidFill>
+          </a:ln>
+        </c:spPr>
+        <c:txPr>
+          <a:bodyPr/>
+          <a:lstStyle/>
+          <a:p>
+            <a:pPr>
+              <a:defRPr sz="1000"/>
+            </a:pPr>
+          </a:p>
+        </c:txPr>
+        <c:crossAx val="-2113994440"/>
+        <c:crosses val="autoZero"/>
+        <c:auto val="1"/>
+        <c:lblAlgn val="ctr"/>
+        <c:lblOffset val="100"/>
+        <c:noMultiLvlLbl val="0"/>
+      </c:catAx>
+      <c:valAx>
+        <c:axId val="-2113994440"/>
+        <c:scaling>
+          <c:max val="18.0"/>
+          <c:min val="-62.0"/>
+        </c:scaling>
+        <c:delete/>
+        <c:axPos val="b"/>
+        <c:majorTickMark val="out"/>
+        <c:minorTickMark val="none"/>
+        <c:tickLblPos val="nextTo"/>
+        <c:crossAx val="-2068027336"/>
+        <c:crosses val="autoZero"/>
+      </c:valAx>
+    </c:plotArea>
+    <c:dispBlanksAs val="gap"/>
+  </c:chart>
+  <c:txPr>
+    <a:bodyPr/>
+    <a:lstStyle/>
+    <a:p>
+      <a:pPr>
+        <a:defRPr sz="1000">
+          <a:solidFill>
+            <a:srgbClr val="1F2937"/>
+          </a:solidFill>
+          <a:latin typeface="Lato"/>
+        </a:defRPr>
+      </a:pPr>
+      <a:endParaRPr lang="en-US"/>
+    </a:p>
+  </c:txPr>
+  <c:externalData r:id="rId1">
+    <c:autoUpdate val="0"/>
+  </c:externalData>
+</c:chartSpace>
+</file>
+
+<file path=ppt/charts/chart2.xml><?xml version="1.0" encoding="utf-8"?>
+<c:chartSpace xmlns:c="http://schemas.openxmlformats.org/drawingml/2006/chart" xmlns:a="http://schemas.openxmlformats.org/drawingml/2006/main" xmlns:r="http://schemas.openxmlformats.org/officeDocument/2006/relationships">
+  <c:date1904 val="0"/>
+  <c:chart>
+    <c:autoTitleDeleted val="0"/>
+    <c:plotArea>
+      <c:barChart>
+        <c:barDir val="bar"/>
+        <c:grouping val="clustered"/>
+        <c:ser>
+          <c:idx val="0"/>
+          <c:order val="0"/>
+          <c:tx>
+            <c:strRef>
+              <c:f>Sheet1!$B$1</c:f>
+              <c:strCache>
+                <c:ptCount val="1"/>
+                <c:pt idx="0">
+                  <c:v>Contribution</c:v>
+                </c:pt>
+              </c:strCache>
+            </c:strRef>
+          </c:tx>
+          <c:invertIfNegative val="0"/>
+          <c:dPt>
+            <c:idx val="0"/>
+            <c:spPr>
+              <a:solidFill>
+                <a:srgbClr val="2E7D5B"/>
+              </a:solidFill>
+            </c:spPr>
+          </c:dPt>
+          <c:dPt>
+            <c:idx val="1"/>
+            <c:spPr>
+              <a:solidFill>
+                <a:srgbClr val="E8692A"/>
+              </a:solidFill>
+            </c:spPr>
+          </c:dPt>
+          <c:dPt>
+            <c:idx val="2"/>
+            <c:spPr>
+              <a:solidFill>
+                <a:srgbClr val="E8692A"/>
+              </a:solidFill>
+            </c:spPr>
+          </c:dPt>
+          <c:dPt>
+            <c:idx val="3"/>
+            <c:spPr>
+              <a:solidFill>
+                <a:srgbClr val="E8692A"/>
+              </a:solidFill>
+            </c:spPr>
+          </c:dPt>
+          <c:dPt>
+            <c:idx val="4"/>
+            <c:spPr>
+              <a:solidFill>
+                <a:srgbClr val="0B1F3A"/>
+              </a:solidFill>
+            </c:spPr>
+          </c:dPt>
+          <c:cat>
+            <c:strRef>
+              <c:f>Sheet1!$A$2:$A$6</c:f>
+              <c:strCache>
+                <c:ptCount val="5"/>
+                <c:pt idx="0">
+                  <c:v>Rest of network (38 directions)</c:v>
+                </c:pt>
+                <c:pt idx="1">
+                  <c:v>4 doubled trunk markets (8 directions)</c:v>
+                </c:pt>
+                <c:pt idx="2">
+                  <c:v>Montréal–Vancouver (2)</c:v>
+                </c:pt>
+                <c:pt idx="3">
+                  <c:v>3 new markets (6)</c:v>
+                </c:pt>
+                <c:pt idx="4">
+                  <c:v>Network total</c:v>
+                </c:pt>
+              </c:strCache>
+            </c:strRef>
+          </c:cat>
+          <c:val>
+            <c:numRef>
+              <c:f>Sheet1!$B$2:$B$6</c:f>
+              <c:numCache>
+                <c:formatCode>General</c:formatCode>
+                <c:ptCount val="5"/>
+                <c:pt idx="0">
+                  <c:v>10.6</c:v>
+                </c:pt>
+                <c:pt idx="1">
+                  <c:v>-29.0</c:v>
+                </c:pt>
+                <c:pt idx="2">
+                  <c:v>-19.7</c:v>
+                </c:pt>
+                <c:pt idx="3">
+                  <c:v>-10.3</c:v>
+                </c:pt>
+                <c:pt idx="4">
+                  <c:v>-48.4</c:v>
+                </c:pt>
+              </c:numCache>
+            </c:numRef>
+          </c:val>
+        </c:ser>
+        <c:dLbls>
+          <c:numFmt formatCode="&quot;+&quot;0.0;&quot;−&quot;0.0" sourceLinked="0"/>
+          <c:txPr>
+            <a:bodyPr/>
+            <a:lstStyle/>
+            <a:p>
+              <a:pPr>
+                <a:defRPr sz="1100" b="1"/>
+              </a:pPr>
+            </a:p>
+          </c:txPr>
+          <c:dLblPos val="outEnd"/>
+          <c:showLegendKey val="0"/>
+          <c:showVal val="1"/>
+          <c:showCatName val="0"/>
+          <c:showSerName val="0"/>
+          <c:showPercent val="0"/>
+          <c:showBubbleSize val="0"/>
+          <c:showLeaderLines val="1"/>
+        </c:dLbls>
+        <c:gapWidth val="45"/>
+        <c:axId val="-2068027336"/>
+        <c:axId val="-2113994440"/>
+      </c:barChart>
+      <c:catAx>
+        <c:axId val="-2068027336"/>
+        <c:scaling>
+          <c:orientation val="maxMin"/>
+        </c:scaling>
+        <c:delete val="0"/>
+        <c:axPos val="l"/>
+        <c:majorTickMark val="none"/>
+        <c:minorTickMark val="none"/>
+        <c:tickLblPos val="low"/>
+        <c:spPr>
+          <a:ln>
+            <a:solidFill>
+              <a:srgbClr val="D1D5DB"/>
+            </a:solidFill>
+          </a:ln>
+        </c:spPr>
+        <c:txPr>
+          <a:bodyPr/>
+          <a:lstStyle/>
+          <a:p>
+            <a:pPr>
+              <a:defRPr sz="1000"/>
+            </a:pPr>
+          </a:p>
+        </c:txPr>
+        <c:crossAx val="-2113994440"/>
+        <c:crosses val="autoZero"/>
+        <c:auto val="1"/>
+        <c:lblAlgn val="ctr"/>
+        <c:lblOffset val="100"/>
+        <c:noMultiLvlLbl val="0"/>
+      </c:catAx>
+      <c:valAx>
+        <c:axId val="-2113994440"/>
+        <c:scaling>
+          <c:max val="18.0"/>
+          <c:min val="-62.0"/>
+        </c:scaling>
+        <c:delete/>
+        <c:axPos val="b"/>
+        <c:majorTickMark val="out"/>
+        <c:minorTickMark val="none"/>
+        <c:tickLblPos val="nextTo"/>
+        <c:crossAx val="-2068027336"/>
+        <c:crosses val="autoZero"/>
+      </c:valAx>
+    </c:plotArea>
+    <c:dispBlanksAs val="gap"/>
+  </c:chart>
+  <c:txPr>
+    <a:bodyPr/>
+    <a:lstStyle/>
+    <a:p>
+      <a:pPr>
+        <a:defRPr sz="1000">
+          <a:solidFill>
+            <a:srgbClr val="1F2937"/>
+          </a:solidFill>
+          <a:latin typeface="Lato"/>
+        </a:defRPr>
+      </a:pPr>
+      <a:endParaRPr lang="en-US"/>
+    </a:p>
+  </c:txPr>
+  <c:externalData r:id="rId1">
+    <c:autoUpdate val="0"/>
+  </c:externalData>
+</c:chartSpace>
+</file>
+
+<file path=ppt/charts/chart3.xml><?xml version="1.0" encoding="utf-8"?>
+<c:chartSpace xmlns:c="http://schemas.openxmlformats.org/drawingml/2006/chart" xmlns:a="http://schemas.openxmlformats.org/drawingml/2006/main" xmlns:r="http://schemas.openxmlformats.org/officeDocument/2006/relationships">
+  <c:date1904 val="0"/>
+  <c:chart>
+    <c:autoTitleDeleted val="0"/>
+    <c:plotArea>
+      <c:barChart>
+        <c:barDir val="bar"/>
+        <c:grouping val="clustered"/>
+        <c:ser>
+          <c:idx val="0"/>
+          <c:order val="0"/>
+          <c:tx>
+            <c:strRef>
+              <c:f>Sheet1!$B$1</c:f>
+              <c:strCache>
+                <c:ptCount val="1"/>
+                <c:pt idx="0">
+                  <c:v>Contribution</c:v>
+                </c:pt>
+              </c:strCache>
+            </c:strRef>
+          </c:tx>
+          <c:invertIfNegative val="0"/>
+          <c:dPt>
+            <c:idx val="0"/>
+            <c:spPr>
+              <a:solidFill>
+                <a:srgbClr val="2E7D5B"/>
+              </a:solidFill>
+            </c:spPr>
+          </c:dPt>
+          <c:dPt>
+            <c:idx val="1"/>
+            <c:spPr>
+              <a:solidFill>
+                <a:srgbClr val="E8692A"/>
+              </a:solidFill>
+            </c:spPr>
+          </c:dPt>
+          <c:dPt>
+            <c:idx val="2"/>
+            <c:spPr>
+              <a:solidFill>
+                <a:srgbClr val="E8692A"/>
+              </a:solidFill>
+            </c:spPr>
+          </c:dPt>
+          <c:dPt>
+            <c:idx val="3"/>
+            <c:spPr>
+              <a:solidFill>
+                <a:srgbClr val="E8692A"/>
+              </a:solidFill>
+            </c:spPr>
+          </c:dPt>
+          <c:dPt>
+            <c:idx val="4"/>
+            <c:spPr>
+              <a:solidFill>
+                <a:srgbClr val="0B1F3A"/>
+              </a:solidFill>
+            </c:spPr>
+          </c:dPt>
+          <c:cat>
+            <c:strRef>
+              <c:f>Sheet1!$A$2:$A$6</c:f>
+              <c:strCache>
+                <c:ptCount val="5"/>
+                <c:pt idx="0">
+                  <c:v>Rest of network (38 directions)</c:v>
+                </c:pt>
+                <c:pt idx="1">
+                  <c:v>4 doubled trunk markets (8 directions)</c:v>
+                </c:pt>
+                <c:pt idx="2">
+                  <c:v>Montréal–Vancouver (2)</c:v>
+                </c:pt>
+                <c:pt idx="3">
+                  <c:v>3 new markets (6)</c:v>
+                </c:pt>
+                <c:pt idx="4">
+                  <c:v>Network total</c:v>
+                </c:pt>
+              </c:strCache>
+            </c:strRef>
+          </c:cat>
+          <c:val>
+            <c:numRef>
+              <c:f>Sheet1!$B$2:$B$6</c:f>
+              <c:numCache>
+                <c:formatCode>General</c:formatCode>
+                <c:ptCount val="5"/>
+                <c:pt idx="0">
+                  <c:v>10.6</c:v>
+                </c:pt>
+                <c:pt idx="1">
+                  <c:v>-29.0</c:v>
+                </c:pt>
+                <c:pt idx="2">
+                  <c:v>-19.7</c:v>
+                </c:pt>
+                <c:pt idx="3">
+                  <c:v>-10.3</c:v>
+                </c:pt>
+                <c:pt idx="4">
+                  <c:v>-48.4</c:v>
+                </c:pt>
+              </c:numCache>
+            </c:numRef>
+          </c:val>
+        </c:ser>
+        <c:dLbls>
+          <c:numFmt formatCode="&quot;+&quot;0.0;&quot;−&quot;0.0" sourceLinked="0"/>
+          <c:txPr>
+            <a:bodyPr/>
+            <a:lstStyle/>
+            <a:p>
+              <a:pPr>
+                <a:defRPr sz="1100" b="1"/>
+              </a:pPr>
+            </a:p>
+          </c:txPr>
+          <c:dLblPos val="outEnd"/>
+          <c:showLegendKey val="0"/>
+          <c:showVal val="1"/>
+          <c:showCatName val="0"/>
+          <c:showSerName val="0"/>
+          <c:showPercent val="0"/>
+          <c:showBubbleSize val="0"/>
+          <c:showLeaderLines val="1"/>
+        </c:dLbls>
+        <c:gapWidth val="45"/>
+        <c:axId val="-2068027336"/>
+        <c:axId val="-2113994440"/>
+      </c:barChart>
+      <c:catAx>
+        <c:axId val="-2068027336"/>
+        <c:scaling>
+          <c:orientation val="maxMin"/>
+        </c:scaling>
+        <c:delete val="0"/>
+        <c:axPos val="l"/>
+        <c:majorTickMark val="none"/>
+        <c:minorTickMark val="none"/>
+        <c:tickLblPos val="low"/>
+        <c:spPr>
+          <a:ln>
+            <a:solidFill>
+              <a:srgbClr val="D1D5DB"/>
+            </a:solidFill>
+          </a:ln>
+        </c:spPr>
+        <c:txPr>
+          <a:bodyPr/>
+          <a:lstStyle/>
+          <a:p>
+            <a:pPr>
+              <a:defRPr sz="1000"/>
+            </a:pPr>
+          </a:p>
+        </c:txPr>
+        <c:crossAx val="-2113994440"/>
+        <c:crosses val="autoZero"/>
+        <c:auto val="1"/>
+        <c:lblAlgn val="ctr"/>
+        <c:lblOffset val="100"/>
+        <c:noMultiLvlLbl val="0"/>
+      </c:catAx>
+      <c:valAx>
+        <c:axId val="-2113994440"/>
+        <c:scaling>
+          <c:max val="18.0"/>
+          <c:min val="-62.0"/>
+        </c:scaling>
+        <c:delete/>
+        <c:axPos val="b"/>
+        <c:majorTickMark val="out"/>
+        <c:minorTickMark val="none"/>
+        <c:tickLblPos val="nextTo"/>
+        <c:crossAx val="-2068027336"/>
+        <c:crosses val="autoZero"/>
+      </c:valAx>
+    </c:plotArea>
+    <c:dispBlanksAs val="gap"/>
+  </c:chart>
+  <c:txPr>
+    <a:bodyPr/>
+    <a:lstStyle/>
+    <a:p>
+      <a:pPr>
+        <a:defRPr sz="1000">
+          <a:solidFill>
+            <a:srgbClr val="1F2937"/>
+          </a:solidFill>
+          <a:latin typeface="Lato"/>
+        </a:defRPr>
+      </a:pPr>
+      <a:endParaRPr lang="en-US"/>
+    </a:p>
+  </c:txPr>
+  <c:externalData r:id="rId1">
+    <c:autoUpdate val="0"/>
+  </c:externalData>
+</c:chartSpace>
+</file>
+
+<file path=ppt/charts/chart4.xml><?xml version="1.0" encoding="utf-8"?>
+<c:chartSpace xmlns:c="http://schemas.openxmlformats.org/drawingml/2006/chart" xmlns:a="http://schemas.openxmlformats.org/drawingml/2006/main" xmlns:r="http://schemas.openxmlformats.org/officeDocument/2006/relationships">
+  <c:date1904 val="0"/>
+  <c:chart>
+    <c:autoTitleDeleted val="0"/>
+    <c:plotArea>
+      <c:barChart>
+        <c:barDir val="bar"/>
+        <c:grouping val="clustered"/>
+        <c:ser>
+          <c:idx val="0"/>
+          <c:order val="0"/>
+          <c:tx>
+            <c:strRef>
+              <c:f>Sheet1!$B$1</c:f>
+              <c:strCache>
+                <c:ptCount val="1"/>
+                <c:pt idx="0">
+                  <c:v>Contribution</c:v>
+                </c:pt>
+              </c:strCache>
+            </c:strRef>
+          </c:tx>
+          <c:invertIfNegative val="0"/>
+          <c:dPt>
+            <c:idx val="0"/>
+            <c:spPr>
+              <a:solidFill>
+                <a:srgbClr val="2E7D5B"/>
+              </a:solidFill>
+            </c:spPr>
+          </c:dPt>
+          <c:dPt>
+            <c:idx val="1"/>
+            <c:spPr>
+              <a:solidFill>
+                <a:srgbClr val="E8692A"/>
+              </a:solidFill>
+            </c:spPr>
+          </c:dPt>
+          <c:dPt>
+            <c:idx val="2"/>
+            <c:spPr>
+              <a:solidFill>
+                <a:srgbClr val="E8692A"/>
+              </a:solidFill>
+            </c:spPr>
+          </c:dPt>
+          <c:dPt>
+            <c:idx val="3"/>
+            <c:spPr>
+              <a:solidFill>
+                <a:srgbClr val="E8692A"/>
+              </a:solidFill>
+            </c:spPr>
+          </c:dPt>
+          <c:dPt>
+            <c:idx val="4"/>
+            <c:spPr>
+              <a:solidFill>
+                <a:srgbClr val="0B1F3A"/>
+              </a:solidFill>
+            </c:spPr>
+          </c:dPt>
+          <c:cat>
+            <c:strRef>
+              <c:f>Sheet1!$A$2:$A$6</c:f>
+              <c:strCache>
+                <c:ptCount val="5"/>
+                <c:pt idx="0">
+                  <c:v>Rest of network (38 directions)</c:v>
+                </c:pt>
+                <c:pt idx="1">
+                  <c:v>4 doubled trunk markets (8 directions)</c:v>
+                </c:pt>
+                <c:pt idx="2">
+                  <c:v>Montréal–Vancouver (2)</c:v>
+                </c:pt>
+                <c:pt idx="3">
+                  <c:v>3 new markets (6)</c:v>
+                </c:pt>
+                <c:pt idx="4">
+                  <c:v>Network total</c:v>
+                </c:pt>
+              </c:strCache>
+            </c:strRef>
+          </c:cat>
+          <c:val>
+            <c:numRef>
+              <c:f>Sheet1!$B$2:$B$6</c:f>
+              <c:numCache>
+                <c:formatCode>General</c:formatCode>
+                <c:ptCount val="5"/>
+                <c:pt idx="0">
+                  <c:v>10.6</c:v>
+                </c:pt>
+                <c:pt idx="1">
+                  <c:v>-29.0</c:v>
+                </c:pt>
+                <c:pt idx="2">
+                  <c:v>-19.7</c:v>
+                </c:pt>
+                <c:pt idx="3">
+                  <c:v>-10.3</c:v>
+                </c:pt>
+                <c:pt idx="4">
+                  <c:v>-48.4</c:v>
+                </c:pt>
+              </c:numCache>
+            </c:numRef>
+          </c:val>
+        </c:ser>
+        <c:dLbls>
+          <c:numFmt formatCode="&quot;+&quot;0.0;&quot;−&quot;0.0" sourceLinked="0"/>
+          <c:txPr>
+            <a:bodyPr/>
+            <a:lstStyle/>
+            <a:p>
+              <a:pPr>
+                <a:defRPr sz="1100" b="1"/>
+              </a:pPr>
+            </a:p>
+          </c:txPr>
+          <c:dLblPos val="outEnd"/>
+          <c:showLegendKey val="0"/>
+          <c:showVal val="1"/>
+          <c:showCatName val="0"/>
+          <c:showSerName val="0"/>
+          <c:showPercent val="0"/>
+          <c:showBubbleSize val="0"/>
+          <c:showLeaderLines val="1"/>
+        </c:dLbls>
+        <c:gapWidth val="45"/>
+        <c:axId val="-2068027336"/>
+        <c:axId val="-2113994440"/>
+      </c:barChart>
+      <c:catAx>
+        <c:axId val="-2068027336"/>
+        <c:scaling>
+          <c:orientation val="maxMin"/>
+        </c:scaling>
+        <c:delete val="0"/>
+        <c:axPos val="l"/>
+        <c:majorTickMark val="none"/>
+        <c:minorTickMark val="none"/>
+        <c:tickLblPos val="low"/>
+        <c:spPr>
+          <a:ln>
+            <a:solidFill>
+              <a:srgbClr val="D1D5DB"/>
+            </a:solidFill>
+          </a:ln>
+        </c:spPr>
+        <c:txPr>
+          <a:bodyPr/>
+          <a:lstStyle/>
+          <a:p>
+            <a:pPr>
+              <a:defRPr sz="1000"/>
+            </a:pPr>
+          </a:p>
+        </c:txPr>
+        <c:crossAx val="-2113994440"/>
+        <c:crosses val="autoZero"/>
+        <c:auto val="1"/>
+        <c:lblAlgn val="ctr"/>
+        <c:lblOffset val="100"/>
+        <c:noMultiLvlLbl val="0"/>
+      </c:catAx>
+      <c:valAx>
+        <c:axId val="-2113994440"/>
+        <c:scaling>
+          <c:max val="18.0"/>
+          <c:min val="-62.0"/>
+        </c:scaling>
+        <c:delete/>
+        <c:axPos val="b"/>
+        <c:majorTickMark val="out"/>
+        <c:minorTickMark val="none"/>
+        <c:tickLblPos val="nextTo"/>
+        <c:crossAx val="-2068027336"/>
+        <c:crosses val="autoZero"/>
+      </c:valAx>
+    </c:plotArea>
+    <c:dispBlanksAs val="gap"/>
+  </c:chart>
+  <c:txPr>
+    <a:bodyPr/>
+    <a:lstStyle/>
+    <a:p>
+      <a:pPr>
+        <a:defRPr sz="1000">
+          <a:solidFill>
+            <a:srgbClr val="1F2937"/>
+          </a:solidFill>
+          <a:latin typeface="Lato"/>
+        </a:defRPr>
+      </a:pPr>
+      <a:endParaRPr lang="en-US"/>
+    </a:p>
+  </c:txPr>
+  <c:externalData r:id="rId1">
+    <c:autoUpdate val="0"/>
+  </c:externalData>
+</c:chartSpace>
+</file>
+
+<file path=ppt/charts/chart5.xml><?xml version="1.0" encoding="utf-8"?>
+<c:chartSpace xmlns:c="http://schemas.openxmlformats.org/drawingml/2006/chart" xmlns:a="http://schemas.openxmlformats.org/drawingml/2006/main" xmlns:r="http://schemas.openxmlformats.org/officeDocument/2006/relationships">
+  <c:date1904 val="0"/>
+  <c:chart>
+    <c:autoTitleDeleted val="0"/>
+    <c:plotArea>
+      <c:barChart>
+        <c:barDir val="bar"/>
+        <c:grouping val="clustered"/>
+        <c:ser>
+          <c:idx val="0"/>
+          <c:order val="0"/>
+          <c:tx>
+            <c:strRef>
+              <c:f>Sheet1!$B$1</c:f>
+              <c:strCache>
+                <c:ptCount val="1"/>
+                <c:pt idx="0">
+                  <c:v>Contribution</c:v>
+                </c:pt>
+              </c:strCache>
+            </c:strRef>
+          </c:tx>
+          <c:invertIfNegative val="0"/>
+          <c:dPt>
+            <c:idx val="0"/>
+            <c:spPr>
+              <a:solidFill>
+                <a:srgbClr val="2E7D5B"/>
+              </a:solidFill>
+            </c:spPr>
+          </c:dPt>
+          <c:dPt>
+            <c:idx val="1"/>
+            <c:spPr>
+              <a:solidFill>
+                <a:srgbClr val="E8692A"/>
+              </a:solidFill>
+            </c:spPr>
+          </c:dPt>
+          <c:dPt>
+            <c:idx val="2"/>
+            <c:spPr>
+              <a:solidFill>
+                <a:srgbClr val="E8692A"/>
+              </a:solidFill>
+            </c:spPr>
+          </c:dPt>
+          <c:dPt>
+            <c:idx val="3"/>
+            <c:spPr>
+              <a:solidFill>
+                <a:srgbClr val="E8692A"/>
+              </a:solidFill>
+            </c:spPr>
+          </c:dPt>
+          <c:dPt>
+            <c:idx val="4"/>
+            <c:spPr>
+              <a:solidFill>
+                <a:srgbClr val="0B1F3A"/>
+              </a:solidFill>
+            </c:spPr>
+          </c:dPt>
+          <c:cat>
+            <c:strRef>
+              <c:f>Sheet1!$A$2:$A$6</c:f>
+              <c:strCache>
+                <c:ptCount val="5"/>
+                <c:pt idx="0">
+                  <c:v>Rest of network (38 directions)</c:v>
+                </c:pt>
+                <c:pt idx="1">
+                  <c:v>4 doubled trunk markets (8 directions)</c:v>
+                </c:pt>
+                <c:pt idx="2">
+                  <c:v>Montréal–Vancouver (2)</c:v>
+                </c:pt>
+                <c:pt idx="3">
+                  <c:v>3 new markets (6)</c:v>
+                </c:pt>
+                <c:pt idx="4">
+                  <c:v>Network total</c:v>
+                </c:pt>
+              </c:strCache>
+            </c:strRef>
+          </c:cat>
+          <c:val>
+            <c:numRef>
+              <c:f>Sheet1!$B$2:$B$6</c:f>
+              <c:numCache>
+                <c:formatCode>General</c:formatCode>
+                <c:ptCount val="5"/>
+                <c:pt idx="0">
+                  <c:v>10.6</c:v>
+                </c:pt>
+                <c:pt idx="1">
+                  <c:v>-29.0</c:v>
+                </c:pt>
+                <c:pt idx="2">
+                  <c:v>-19.7</c:v>
+                </c:pt>
+                <c:pt idx="3">
+                  <c:v>-10.3</c:v>
+                </c:pt>
+                <c:pt idx="4">
+                  <c:v>-48.4</c:v>
+                </c:pt>
+              </c:numCache>
+            </c:numRef>
+          </c:val>
+        </c:ser>
+        <c:dLbls>
+          <c:numFmt formatCode="&quot;+&quot;0.0;&quot;−&quot;0.0" sourceLinked="0"/>
+          <c:txPr>
+            <a:bodyPr/>
+            <a:lstStyle/>
+            <a:p>
+              <a:pPr>
+                <a:defRPr sz="1100" b="1"/>
+              </a:pPr>
+            </a:p>
+          </c:txPr>
+          <c:dLblPos val="outEnd"/>
+          <c:showLegendKey val="0"/>
+          <c:showVal val="1"/>
+          <c:showCatName val="0"/>
+          <c:showSerName val="0"/>
+          <c:showPercent val="0"/>
+          <c:showBubbleSize val="0"/>
+          <c:showLeaderLines val="1"/>
+        </c:dLbls>
+        <c:gapWidth val="45"/>
+        <c:axId val="-2068027336"/>
+        <c:axId val="-2113994440"/>
+      </c:barChart>
+      <c:catAx>
+        <c:axId val="-2068027336"/>
+        <c:scaling>
+          <c:orientation val="maxMin"/>
+        </c:scaling>
+        <c:delete val="0"/>
+        <c:axPos val="l"/>
+        <c:majorTickMark val="none"/>
+        <c:minorTickMark val="none"/>
+        <c:tickLblPos val="low"/>
+        <c:spPr>
+          <a:ln>
+            <a:solidFill>
+              <a:srgbClr val="D1D5DB"/>
+            </a:solidFill>
+          </a:ln>
+        </c:spPr>
+        <c:txPr>
+          <a:bodyPr/>
+          <a:lstStyle/>
+          <a:p>
+            <a:pPr>
+              <a:defRPr sz="1000"/>
+            </a:pPr>
+          </a:p>
+        </c:txPr>
+        <c:crossAx val="-2113994440"/>
+        <c:crosses val="autoZero"/>
+        <c:auto val="1"/>
+        <c:lblAlgn val="ctr"/>
+        <c:lblOffset val="100"/>
+        <c:noMultiLvlLbl val="0"/>
+      </c:catAx>
+      <c:valAx>
+        <c:axId val="-2113994440"/>
+        <c:scaling>
+          <c:max val="18.0"/>
+          <c:min val="-62.0"/>
+        </c:scaling>
+        <c:delete/>
+        <c:axPos val="b"/>
+        <c:majorTickMark val="out"/>
+        <c:minorTickMark val="none"/>
+        <c:tickLblPos val="nextTo"/>
+        <c:crossAx val="-2068027336"/>
+        <c:crosses val="autoZero"/>
+      </c:valAx>
+    </c:plotArea>
+    <c:dispBlanksAs val="gap"/>
+  </c:chart>
+  <c:txPr>
+    <a:bodyPr/>
+    <a:lstStyle/>
+    <a:p>
+      <a:pPr>
+        <a:defRPr sz="1000">
+          <a:solidFill>
+            <a:srgbClr val="1F2937"/>
+          </a:solidFill>
+          <a:latin typeface="Lato"/>
+        </a:defRPr>
+      </a:pPr>
+      <a:endParaRPr lang="en-US"/>
+    </a:p>
+  </c:txPr>
+  <c:externalData r:id="rId1">
+    <c:autoUpdate val="0"/>
+  </c:externalData>
+</c:chartSpace>
+</file>
+
+<file path=ppt/charts/chart6.xml><?xml version="1.0" encoding="utf-8"?>
+<c:chartSpace xmlns:c="http://schemas.openxmlformats.org/drawingml/2006/chart" xmlns:a="http://schemas.openxmlformats.org/drawingml/2006/main" xmlns:r="http://schemas.openxmlformats.org/officeDocument/2006/relationships">
+  <c:date1904 val="0"/>
+  <c:chart>
+    <c:autoTitleDeleted val="0"/>
+    <c:plotArea>
+      <c:barChart>
+        <c:barDir val="bar"/>
+        <c:grouping val="clustered"/>
+        <c:ser>
+          <c:idx val="0"/>
+          <c:order val="0"/>
+          <c:tx>
+            <c:strRef>
+              <c:f>Sheet1!$B$1</c:f>
+              <c:strCache>
+                <c:ptCount val="1"/>
+                <c:pt idx="0">
+                  <c:v>Contribution</c:v>
+                </c:pt>
+              </c:strCache>
+            </c:strRef>
+          </c:tx>
+          <c:invertIfNegative val="0"/>
+          <c:dPt>
+            <c:idx val="0"/>
+            <c:spPr>
+              <a:solidFill>
+                <a:srgbClr val="2E7D5B"/>
+              </a:solidFill>
+            </c:spPr>
+          </c:dPt>
+          <c:dPt>
+            <c:idx val="1"/>
+            <c:spPr>
+              <a:solidFill>
+                <a:srgbClr val="E8692A"/>
+              </a:solidFill>
+            </c:spPr>
+          </c:dPt>
+          <c:dPt>
+            <c:idx val="2"/>
+            <c:spPr>
+              <a:solidFill>
+                <a:srgbClr val="E8692A"/>
+              </a:solidFill>
+            </c:spPr>
+          </c:dPt>
+          <c:dPt>
+            <c:idx val="3"/>
+            <c:spPr>
+              <a:solidFill>
+                <a:srgbClr val="E8692A"/>
+              </a:solidFill>
+            </c:spPr>
+          </c:dPt>
+          <c:dPt>
+            <c:idx val="4"/>
+            <c:spPr>
+              <a:solidFill>
+                <a:srgbClr val="0B1F3A"/>
+              </a:solidFill>
+            </c:spPr>
+          </c:dPt>
+          <c:cat>
+            <c:strRef>
+              <c:f>Sheet1!$A$2:$A$6</c:f>
+              <c:strCache>
+                <c:ptCount val="5"/>
+                <c:pt idx="0">
+                  <c:v>Rest of network (38 directions)</c:v>
+                </c:pt>
+                <c:pt idx="1">
+                  <c:v>4 doubled trunk markets (8 directions)</c:v>
+                </c:pt>
+                <c:pt idx="2">
+                  <c:v>Montréal–Vancouver (2)</c:v>
+                </c:pt>
+                <c:pt idx="3">
+                  <c:v>3 new markets (6)</c:v>
+                </c:pt>
+                <c:pt idx="4">
+                  <c:v>Network total</c:v>
+                </c:pt>
+              </c:strCache>
+            </c:strRef>
+          </c:cat>
+          <c:val>
+            <c:numRef>
+              <c:f>Sheet1!$B$2:$B$6</c:f>
+              <c:numCache>
+                <c:formatCode>General</c:formatCode>
+                <c:ptCount val="5"/>
+                <c:pt idx="0">
+                  <c:v>10.6</c:v>
+                </c:pt>
+                <c:pt idx="1">
+                  <c:v>-29.0</c:v>
+                </c:pt>
+                <c:pt idx="2">
+                  <c:v>-19.7</c:v>
+                </c:pt>
+                <c:pt idx="3">
+                  <c:v>-10.3</c:v>
+                </c:pt>
+                <c:pt idx="4">
+                  <c:v>-48.4</c:v>
+                </c:pt>
+              </c:numCache>
+            </c:numRef>
+          </c:val>
+        </c:ser>
+        <c:dLbls>
+          <c:numFmt formatCode="&quot;+&quot;0.0;&quot;−&quot;0.0" sourceLinked="0"/>
+          <c:txPr>
+            <a:bodyPr/>
+            <a:lstStyle/>
+            <a:p>
+              <a:pPr>
+                <a:defRPr sz="1100" b="1"/>
+              </a:pPr>
+            </a:p>
+          </c:txPr>
+          <c:dLblPos val="outEnd"/>
+          <c:showLegendKey val="0"/>
+          <c:showVal val="1"/>
+          <c:showCatName val="0"/>
+          <c:showSerName val="0"/>
+          <c:showPercent val="0"/>
+          <c:showBubbleSize val="0"/>
+          <c:showLeaderLines val="1"/>
+        </c:dLbls>
+        <c:gapWidth val="45"/>
+        <c:axId val="-2068027336"/>
+        <c:axId val="-2113994440"/>
+      </c:barChart>
+      <c:catAx>
+        <c:axId val="-2068027336"/>
+        <c:scaling>
+          <c:orientation val="maxMin"/>
+        </c:scaling>
+        <c:delete val="0"/>
+        <c:axPos val="l"/>
+        <c:majorTickMark val="none"/>
+        <c:minorTickMark val="none"/>
+        <c:tickLblPos val="low"/>
+        <c:spPr>
+          <a:ln>
+            <a:solidFill>
+              <a:srgbClr val="D1D5DB"/>
+            </a:solidFill>
+          </a:ln>
+        </c:spPr>
+        <c:txPr>
+          <a:bodyPr/>
+          <a:lstStyle/>
+          <a:p>
+            <a:pPr>
+              <a:defRPr sz="1000"/>
+            </a:pPr>
+          </a:p>
+        </c:txPr>
+        <c:crossAx val="-2113994440"/>
+        <c:crosses val="autoZero"/>
+        <c:auto val="1"/>
+        <c:lblAlgn val="ctr"/>
+        <c:lblOffset val="100"/>
+        <c:noMultiLvlLbl val="0"/>
+      </c:catAx>
+      <c:valAx>
+        <c:axId val="-2113994440"/>
+        <c:scaling>
+          <c:max val="18.0"/>
+          <c:min val="-62.0"/>
+        </c:scaling>
+        <c:delete/>
+        <c:axPos val="b"/>
+        <c:majorTickMark val="out"/>
+        <c:minorTickMark val="none"/>
+        <c:tickLblPos val="nextTo"/>
+        <c:crossAx val="-2068027336"/>
+        <c:crosses val="autoZero"/>
+      </c:valAx>
+    </c:plotArea>
+    <c:dispBlanksAs val="gap"/>
+  </c:chart>
+  <c:txPr>
+    <a:bodyPr/>
+    <a:lstStyle/>
+    <a:p>
+      <a:pPr>
+        <a:defRPr sz="1000">
+          <a:solidFill>
+            <a:srgbClr val="1F2937"/>
+          </a:solidFill>
+          <a:latin typeface="Lato"/>
+        </a:defRPr>
+      </a:pPr>
+      <a:endParaRPr lang="en-US"/>
+    </a:p>
+  </c:txPr>
+  <c:externalData r:id="rId1">
+    <c:autoUpdate val="0"/>
+  </c:externalData>
+</c:chartSpace>
+</file>
+
+<file path=ppt/charts/chart7.xml><?xml version="1.0" encoding="utf-8"?>
+<c:chartSpace xmlns:c="http://schemas.openxmlformats.org/drawingml/2006/chart" xmlns:a="http://schemas.openxmlformats.org/drawingml/2006/main" xmlns:r="http://schemas.openxmlformats.org/officeDocument/2006/relationships">
+  <c:date1904 val="0"/>
+  <c:chart>
+    <c:autoTitleDeleted val="0"/>
+    <c:plotArea>
+      <c:barChart>
+        <c:barDir val="bar"/>
+        <c:grouping val="clustered"/>
+        <c:ser>
+          <c:idx val="0"/>
+          <c:order val="0"/>
+          <c:tx>
+            <c:strRef>
+              <c:f>Sheet1!$B$1</c:f>
+              <c:strCache>
+                <c:ptCount val="1"/>
+                <c:pt idx="0">
+                  <c:v>Contribution</c:v>
+                </c:pt>
+              </c:strCache>
+            </c:strRef>
+          </c:tx>
+          <c:invertIfNegative val="0"/>
+          <c:dPt>
+            <c:idx val="0"/>
+            <c:spPr>
+              <a:solidFill>
+                <a:srgbClr val="2E7D5B"/>
+              </a:solidFill>
+            </c:spPr>
+          </c:dPt>
+          <c:dPt>
+            <c:idx val="1"/>
+            <c:spPr>
+              <a:solidFill>
+                <a:srgbClr val="E8692A"/>
+              </a:solidFill>
+            </c:spPr>
+          </c:dPt>
+          <c:dPt>
+            <c:idx val="2"/>
+            <c:spPr>
+              <a:solidFill>
+                <a:srgbClr val="E8692A"/>
+              </a:solidFill>
+            </c:spPr>
+          </c:dPt>
+          <c:dPt>
+            <c:idx val="3"/>
+            <c:spPr>
+              <a:solidFill>
+                <a:srgbClr val="E8692A"/>
+              </a:solidFill>
+            </c:spPr>
+          </c:dPt>
+          <c:dPt>
+            <c:idx val="4"/>
+            <c:spPr>
+              <a:solidFill>
+                <a:srgbClr val="0B1F3A"/>
+              </a:solidFill>
+            </c:spPr>
+          </c:dPt>
+          <c:cat>
+            <c:strRef>
+              <c:f>Sheet1!$A$2:$A$6</c:f>
+              <c:strCache>
+                <c:ptCount val="5"/>
+                <c:pt idx="0">
+                  <c:v>Rest of network (38 directions)</c:v>
+                </c:pt>
+                <c:pt idx="1">
+                  <c:v>4 doubled trunk markets (8 directions)</c:v>
+                </c:pt>
+                <c:pt idx="2">
+                  <c:v>Montréal–Vancouver (2)</c:v>
+                </c:pt>
+                <c:pt idx="3">
+                  <c:v>3 new markets (6)</c:v>
+                </c:pt>
+                <c:pt idx="4">
+                  <c:v>Network total</c:v>
+                </c:pt>
+              </c:strCache>
+            </c:strRef>
+          </c:cat>
+          <c:val>
+            <c:numRef>
+              <c:f>Sheet1!$B$2:$B$6</c:f>
+              <c:numCache>
+                <c:formatCode>General</c:formatCode>
+                <c:ptCount val="5"/>
+                <c:pt idx="0">
+                  <c:v>10.6</c:v>
+                </c:pt>
+                <c:pt idx="1">
+                  <c:v>-29.0</c:v>
+                </c:pt>
+                <c:pt idx="2">
+                  <c:v>-19.7</c:v>
+                </c:pt>
+                <c:pt idx="3">
+                  <c:v>-10.3</c:v>
+                </c:pt>
+                <c:pt idx="4">
+                  <c:v>-48.4</c:v>
+                </c:pt>
+              </c:numCache>
+            </c:numRef>
+          </c:val>
+        </c:ser>
+        <c:dLbls>
+          <c:numFmt formatCode="&quot;+&quot;0.0;&quot;−&quot;0.0" sourceLinked="0"/>
+          <c:txPr>
+            <a:bodyPr/>
+            <a:lstStyle/>
+            <a:p>
+              <a:pPr>
+                <a:defRPr sz="1100" b="1"/>
+              </a:pPr>
+            </a:p>
+          </c:txPr>
+          <c:dLblPos val="outEnd"/>
+          <c:showLegendKey val="0"/>
+          <c:showVal val="1"/>
+          <c:showCatName val="0"/>
+          <c:showSerName val="0"/>
+          <c:showPercent val="0"/>
+          <c:showBubbleSize val="0"/>
+          <c:showLeaderLines val="1"/>
+        </c:dLbls>
+        <c:gapWidth val="45"/>
+        <c:axId val="-2068027336"/>
+        <c:axId val="-2113994440"/>
+      </c:barChart>
+      <c:catAx>
+        <c:axId val="-2068027336"/>
+        <c:scaling>
+          <c:orientation val="maxMin"/>
+        </c:scaling>
+        <c:delete val="0"/>
+        <c:axPos val="l"/>
+        <c:majorTickMark val="none"/>
+        <c:minorTickMark val="none"/>
+        <c:tickLblPos val="low"/>
+        <c:spPr>
+          <a:ln>
+            <a:solidFill>
+              <a:srgbClr val="D1D5DB"/>
+            </a:solidFill>
+          </a:ln>
+        </c:spPr>
+        <c:txPr>
+          <a:bodyPr/>
+          <a:lstStyle/>
+          <a:p>
+            <a:pPr>
+              <a:defRPr sz="1000"/>
+            </a:pPr>
+          </a:p>
+        </c:txPr>
+        <c:crossAx val="-2113994440"/>
+        <c:crosses val="autoZero"/>
+        <c:auto val="1"/>
+        <c:lblAlgn val="ctr"/>
+        <c:lblOffset val="100"/>
+        <c:noMultiLvlLbl val="0"/>
+      </c:catAx>
+      <c:valAx>
+        <c:axId val="-2113994440"/>
+        <c:scaling>
+          <c:max val="18.0"/>
+          <c:min val="-62.0"/>
+        </c:scaling>
+        <c:delete/>
+        <c:axPos val="b"/>
+        <c:majorTickMark val="out"/>
+        <c:minorTickMark val="none"/>
+        <c:tickLblPos val="nextTo"/>
+        <c:crossAx val="-2068027336"/>
+        <c:crosses val="autoZero"/>
+      </c:valAx>
+    </c:plotArea>
+    <c:dispBlanksAs val="gap"/>
+  </c:chart>
+  <c:txPr>
+    <a:bodyPr/>
+    <a:lstStyle/>
+    <a:p>
+      <a:pPr>
+        <a:defRPr sz="1000">
+          <a:solidFill>
+            <a:srgbClr val="1F2937"/>
+          </a:solidFill>
+          <a:latin typeface="Lato"/>
+        </a:defRPr>
+      </a:pPr>
+      <a:endParaRPr lang="en-US"/>
+    </a:p>
+  </c:txPr>
+  <c:externalData r:id="rId1">
+    <c:autoUpdate val="0"/>
+  </c:externalData>
+</c:chartSpace>
+</file>
+
+<file path=ppt/charts/chart8.xml><?xml version="1.0" encoding="utf-8"?>
+<c:chartSpace xmlns:c="http://schemas.openxmlformats.org/drawingml/2006/chart" xmlns:a="http://schemas.openxmlformats.org/drawingml/2006/main" xmlns:r="http://schemas.openxmlformats.org/officeDocument/2006/relationships">
+  <c:date1904 val="0"/>
+  <c:chart>
+    <c:autoTitleDeleted val="0"/>
+    <c:plotArea>
+      <c:barChart>
+        <c:barDir val="bar"/>
+        <c:grouping val="clustered"/>
+        <c:ser>
+          <c:idx val="0"/>
+          <c:order val="0"/>
+          <c:tx>
+            <c:strRef>
+              <c:f>Sheet1!$B$1</c:f>
+              <c:strCache>
+                <c:ptCount val="1"/>
+                <c:pt idx="0">
+                  <c:v>Contribution</c:v>
+                </c:pt>
+              </c:strCache>
+            </c:strRef>
+          </c:tx>
+          <c:invertIfNegative val="0"/>
+          <c:dPt>
+            <c:idx val="0"/>
+            <c:spPr>
+              <a:solidFill>
+                <a:srgbClr val="2E7D5B"/>
+              </a:solidFill>
+            </c:spPr>
+          </c:dPt>
+          <c:dPt>
+            <c:idx val="1"/>
+            <c:spPr>
+              <a:solidFill>
+                <a:srgbClr val="E8692A"/>
+              </a:solidFill>
+            </c:spPr>
+          </c:dPt>
+          <c:dPt>
+            <c:idx val="2"/>
+            <c:spPr>
+              <a:solidFill>
+                <a:srgbClr val="E8692A"/>
+              </a:solidFill>
+            </c:spPr>
+          </c:dPt>
+          <c:dPt>
+            <c:idx val="3"/>
+            <c:spPr>
+              <a:solidFill>
+                <a:srgbClr val="E8692A"/>
+              </a:solidFill>
+            </c:spPr>
+          </c:dPt>
+          <c:dPt>
+            <c:idx val="4"/>
+            <c:spPr>
+              <a:solidFill>
+                <a:srgbClr val="0B1F3A"/>
+              </a:solidFill>
+            </c:spPr>
+          </c:dPt>
+          <c:cat>
+            <c:strRef>
+              <c:f>Sheet1!$A$2:$A$6</c:f>
+              <c:strCache>
+                <c:ptCount val="5"/>
+                <c:pt idx="0">
+                  <c:v>Rest of network (38 directions)</c:v>
+                </c:pt>
+                <c:pt idx="1">
+                  <c:v>4 doubled trunk markets (8 directions)</c:v>
+                </c:pt>
+                <c:pt idx="2">
+                  <c:v>Montréal–Vancouver (2)</c:v>
+                </c:pt>
+                <c:pt idx="3">
+                  <c:v>3 new markets (6)</c:v>
+                </c:pt>
+                <c:pt idx="4">
+                  <c:v>Network total</c:v>
+                </c:pt>
+              </c:strCache>
+            </c:strRef>
+          </c:cat>
+          <c:val>
+            <c:numRef>
+              <c:f>Sheet1!$B$2:$B$6</c:f>
+              <c:numCache>
+                <c:formatCode>General</c:formatCode>
+                <c:ptCount val="5"/>
+                <c:pt idx="0">
+                  <c:v>10.6</c:v>
+                </c:pt>
+                <c:pt idx="1">
+                  <c:v>-29.0</c:v>
+                </c:pt>
+                <c:pt idx="2">
+                  <c:v>-19.7</c:v>
+                </c:pt>
+                <c:pt idx="3">
+                  <c:v>-10.3</c:v>
+                </c:pt>
+                <c:pt idx="4">
+                  <c:v>-48.4</c:v>
+                </c:pt>
+              </c:numCache>
+            </c:numRef>
+          </c:val>
+        </c:ser>
+        <c:dLbls>
+          <c:numFmt formatCode="&quot;+&quot;0.0;&quot;−&quot;0.0" sourceLinked="0"/>
+          <c:txPr>
+            <a:bodyPr/>
+            <a:lstStyle/>
+            <a:p>
+              <a:pPr>
+                <a:defRPr sz="1100" b="1"/>
+              </a:pPr>
+            </a:p>
+          </c:txPr>
+          <c:dLblPos val="outEnd"/>
+          <c:showLegendKey val="0"/>
+          <c:showVal val="1"/>
+          <c:showCatName val="0"/>
+          <c:showSerName val="0"/>
+          <c:showPercent val="0"/>
+          <c:showBubbleSize val="0"/>
+          <c:showLeaderLines val="1"/>
+        </c:dLbls>
+        <c:gapWidth val="45"/>
+        <c:axId val="-2068027336"/>
+        <c:axId val="-2113994440"/>
+      </c:barChart>
+      <c:catAx>
+        <c:axId val="-2068027336"/>
+        <c:scaling>
+          <c:orientation val="maxMin"/>
+        </c:scaling>
+        <c:delete val="0"/>
+        <c:axPos val="l"/>
+        <c:majorTickMark val="none"/>
+        <c:minorTickMark val="none"/>
+        <c:tickLblPos val="low"/>
+        <c:spPr>
+          <a:ln>
+            <a:solidFill>
+              <a:srgbClr val="D1D5DB"/>
+            </a:solidFill>
+          </a:ln>
+        </c:spPr>
+        <c:txPr>
+          <a:bodyPr/>
+          <a:lstStyle/>
+          <a:p>
+            <a:pPr>
+              <a:defRPr sz="1000"/>
+            </a:pPr>
+          </a:p>
+        </c:txPr>
+        <c:crossAx val="-2113994440"/>
+        <c:crosses val="autoZero"/>
+        <c:auto val="1"/>
+        <c:lblAlgn val="ctr"/>
+        <c:lblOffset val="100"/>
+        <c:noMultiLvlLbl val="0"/>
+      </c:catAx>
+      <c:valAx>
+        <c:axId val="-2113994440"/>
+        <c:scaling>
+          <c:max val="18.0"/>
+          <c:min val="-62.0"/>
+        </c:scaling>
+        <c:delete/>
+        <c:axPos val="b"/>
+        <c:majorTickMark val="out"/>
+        <c:minorTickMark val="none"/>
+        <c:tickLblPos val="nextTo"/>
+        <c:crossAx val="-2068027336"/>
+        <c:crosses val="autoZero"/>
+      </c:valAx>
+    </c:plotArea>
+    <c:dispBlanksAs val="gap"/>
+  </c:chart>
+  <c:txPr>
+    <a:bodyPr/>
+    <a:lstStyle/>
+    <a:p>
+      <a:pPr>
+        <a:defRPr sz="1000">
+          <a:solidFill>
+            <a:srgbClr val="1F2937"/>
+          </a:solidFill>
+          <a:latin typeface="Lato"/>
+        </a:defRPr>
+      </a:pPr>
+      <a:endParaRPr lang="en-US"/>
+    </a:p>
+  </c:txPr>
+  <c:externalData r:id="rId1">
+    <c:autoUpdate val="0"/>
+  </c:externalData>
+</c:chartSpace>
+</file>
+
+<file path=ppt/charts/chart9.xml><?xml version="1.0" encoding="utf-8"?>
+<c:chartSpace xmlns:c="http://schemas.openxmlformats.org/drawingml/2006/chart" xmlns:a="http://schemas.openxmlformats.org/drawingml/2006/main" xmlns:r="http://schemas.openxmlformats.org/officeDocument/2006/relationships">
+  <c:date1904 val="0"/>
+  <c:chart>
+    <c:autoTitleDeleted val="0"/>
+    <c:plotArea>
+      <c:barChart>
+        <c:barDir val="bar"/>
+        <c:grouping val="clustered"/>
+        <c:ser>
+          <c:idx val="0"/>
+          <c:order val="0"/>
+          <c:tx>
+            <c:strRef>
+              <c:f>Sheet1!$B$1</c:f>
+              <c:strCache>
+                <c:ptCount val="1"/>
+                <c:pt idx="0">
+                  <c:v>Contribution</c:v>
+                </c:pt>
+              </c:strCache>
+            </c:strRef>
+          </c:tx>
+          <c:invertIfNegative val="0"/>
+          <c:dPt>
+            <c:idx val="0"/>
+            <c:spPr>
+              <a:solidFill>
+                <a:srgbClr val="2E7D5B"/>
+              </a:solidFill>
+            </c:spPr>
+          </c:dPt>
+          <c:dPt>
+            <c:idx val="1"/>
+            <c:spPr>
+              <a:solidFill>
+                <a:srgbClr val="E8692A"/>
+              </a:solidFill>
+            </c:spPr>
+          </c:dPt>
+          <c:dPt>
+            <c:idx val="2"/>
+            <c:spPr>
+              <a:solidFill>
+                <a:srgbClr val="E8692A"/>
+              </a:solidFill>
+            </c:spPr>
+          </c:dPt>
+          <c:dPt>
+            <c:idx val="3"/>
+            <c:spPr>
+              <a:solidFill>
+                <a:srgbClr val="E8692A"/>
+              </a:solidFill>
+            </c:spPr>
+          </c:dPt>
+          <c:dPt>
+            <c:idx val="4"/>
+            <c:spPr>
+              <a:solidFill>
+                <a:srgbClr val="0B1F3A"/>
+              </a:solidFill>
+            </c:spPr>
+          </c:dPt>
+          <c:cat>
+            <c:strRef>
+              <c:f>Sheet1!$A$2:$A$6</c:f>
+              <c:strCache>
+                <c:ptCount val="5"/>
+                <c:pt idx="0">
+                  <c:v>Rest of network (38 directions)</c:v>
+                </c:pt>
+                <c:pt idx="1">
+                  <c:v>4 doubled trunk markets (8 directions)</c:v>
+                </c:pt>
+                <c:pt idx="2">
+                  <c:v>Montréal–Vancouver (2)</c:v>
+                </c:pt>
+                <c:pt idx="3">
+                  <c:v>3 new markets (6)</c:v>
+                </c:pt>
+                <c:pt idx="4">
+                  <c:v>Network total</c:v>
+                </c:pt>
+              </c:strCache>
+            </c:strRef>
+          </c:cat>
+          <c:val>
+            <c:numRef>
+              <c:f>Sheet1!$B$2:$B$6</c:f>
+              <c:numCache>
+                <c:formatCode>General</c:formatCode>
+                <c:ptCount val="5"/>
+                <c:pt idx="0">
+                  <c:v>10.6</c:v>
+                </c:pt>
+                <c:pt idx="1">
+                  <c:v>-29.0</c:v>
+                </c:pt>
+                <c:pt idx="2">
+                  <c:v>-19.7</c:v>
+                </c:pt>
+                <c:pt idx="3">
+                  <c:v>-10.3</c:v>
+                </c:pt>
+                <c:pt idx="4">
+                  <c:v>-48.4</c:v>
+                </c:pt>
+              </c:numCache>
+            </c:numRef>
+          </c:val>
+        </c:ser>
+        <c:dLbls>
+          <c:numFmt formatCode="&quot;+&quot;0.0;&quot;−&quot;0.0" sourceLinked="0"/>
+          <c:txPr>
+            <a:bodyPr/>
+            <a:lstStyle/>
+            <a:p>
+              <a:pPr>
+                <a:defRPr sz="1100" b="1"/>
+              </a:pPr>
+            </a:p>
+          </c:txPr>
+          <c:dLblPos val="outEnd"/>
+          <c:showLegendKey val="0"/>
+          <c:showVal val="1"/>
+          <c:showCatName val="0"/>
+          <c:showSerName val="0"/>
+          <c:showPercent val="0"/>
+          <c:showBubbleSize val="0"/>
+          <c:showLeaderLines val="1"/>
+        </c:dLbls>
+        <c:gapWidth val="45"/>
+        <c:axId val="-2068027336"/>
+        <c:axId val="-2113994440"/>
+      </c:barChart>
+      <c:catAx>
+        <c:axId val="-2068027336"/>
+        <c:scaling>
+          <c:orientation val="maxMin"/>
+        </c:scaling>
+        <c:delete val="0"/>
+        <c:axPos val="l"/>
+        <c:majorTickMark val="none"/>
+        <c:minorTickMark val="none"/>
+        <c:tickLblPos val="low"/>
+        <c:spPr>
+          <a:ln>
+            <a:solidFill>
+              <a:srgbClr val="D1D5DB"/>
+            </a:solidFill>
+          </a:ln>
+        </c:spPr>
+        <c:txPr>
+          <a:bodyPr/>
+          <a:lstStyle/>
+          <a:p>
+            <a:pPr>
+              <a:defRPr sz="1000"/>
+            </a:pPr>
+          </a:p>
+        </c:txPr>
+        <c:crossAx val="-2113994440"/>
+        <c:crosses val="autoZero"/>
+        <c:auto val="1"/>
+        <c:lblAlgn val="ctr"/>
+        <c:lblOffset val="100"/>
+        <c:noMultiLvlLbl val="0"/>
+      </c:catAx>
+      <c:valAx>
+        <c:axId val="-2113994440"/>
+        <c:scaling>
+          <c:max val="18.0"/>
+          <c:min val="-62.0"/>
+        </c:scaling>
+        <c:delete/>
+        <c:axPos val="b"/>
+        <c:majorTickMark val="out"/>
+        <c:minorTickMark val="none"/>
+        <c:tickLblPos val="nextTo"/>
+        <c:crossAx val="-2068027336"/>
+        <c:crosses val="autoZero"/>
+      </c:valAx>
+    </c:plotArea>
+    <c:dispBlanksAs val="gap"/>
+  </c:chart>
+  <c:txPr>
+    <a:bodyPr/>
+    <a:lstStyle/>
+    <a:p>
+      <a:pPr>
+        <a:defRPr sz="1000">
+          <a:solidFill>
+            <a:srgbClr val="1F2937"/>
+          </a:solidFill>
+          <a:latin typeface="Lato"/>
+        </a:defRPr>
+      </a:pPr>
+      <a:endParaRPr lang="en-US"/>
+    </a:p>
+  </c:txPr>
+  <c:externalData r:id="rId1">
+    <c:autoUpdate val="0"/>
+  </c:externalData>
+</c:chartSpace>
 </file>
 
 <file path=ppt/notesMasters/notesMaster1.xml><?xml version="1.0" encoding="utf-8"?>
@@ -1088,7 +2952,57 @@
           <a:lstStyle/>
           <a:p>
             <a:r>
-              <a:t>ISSUES. ~30 sec. To be written. Each issue should map to evidence on slides 5-12 (cite slide #).</a:t>
+              <a:t>KEY ISSUES. ~40 sec.</a:t>
+            </a:r>
+          </a:p>
+          <a:p>
+            <a:r>
+              <a:t>Say: "Record revenue, but a loss nearly four times last year's. Three issues explain it, and they are not the ones leadership suspected."</a:t>
+            </a:r>
+          </a:p>
+          <a:p>
+            <a:r>
+              <a:t>1. Capacity outran demand. The chart is the whole story: the 16 directions NorthByte added or doubled in 2025 lose about $59M; the other 38 still make +$10.6M (about +$5M after gates) and were profitable in all 24 months. That answers Q2: the rest of the network still earns, but covers only about a fifth of the expansion's −$59M.</a:t>
+            </a:r>
+          </a:p>
+          <a:p>
+            <a:r>
+              <a:t>   The 4 doubled trunk markets are Montréal–Toronto, Halifax–Toronto, Halifax–Montréal and Ottawa–Toronto. Name them; do not say "8 directions" without naming them (afternoon_findings uses a different 8).</a:t>
+            </a:r>
+          </a:p>
+          <a:p>
+            <a:r>
+              <a:t>   The staggered rollout is strongly consistent with cause and effect: each group's fare fell ~10% against control routes in the exact month its flights doubled (purchase-month revenue, so say "consistent with", not "proves").</a:t>
+            </a:r>
+          </a:p>
+          <a:p>
+            <a:r>
+              <a:t>2. Each flight earns less and costs more. Per flight on the same route and month, fuel +8.7% and crew +8.5% ($12.2M together); with maintenance (+4.7%, $3.1M) all cost lines rose $15.2M on that basis ($12.3M on identical flights), rising Jan–Jul 2025 on every route, then flat. If asked "what about maintenance +$13.0M?": mostly volume; only $3.1M is per-flight, and it falls with the flights Right-Size removes. By cost line fuel+crew are $31.2M of the decline; by cause, $19.0M of that is flying more and $12.2M is higher cost per flight. Trunk fares fell ~8% Sep–Feb. Do NOT add issue 2 to issue 1: about $6.5M of the cost rise is already inside issue 1's route losses.</a:t>
+            </a:r>
+          </a:p>
+          <a:p>
+            <a:r>
+              <a:t>3. Root cause: costs were reviewed company-wide, by category (case p.10). The routes later doubled already had a 5.4% margin vs 12.3% elsewhere, and 8,051 of 8,183 Mar–Aug 2026 flights repeat 2025 exactly. "Nobody reviewed it" is our inference from that; say so if asked.</a:t>
+            </a:r>
+          </a:p>
+          <a:p>
+            <a:r>
+              <a:t>Close with the strip: Five Forces explains why frequency was the wrong bet (competitor response is our inference; the data only shows NorthByte's own fares). Ancillaries, gates and seasonality are each an order of magnitude smaller; Rewards' cost isn't in the data, so we don't size it.</a:t>
+            </a:r>
+          </a:p>
+          <a:p>
+            <a:r>
+              <a:t>If asked "is it ALL the expansion?": no. The 16 added directions explain ~90% of the decline (the 10 doubled trunk directions alone 78%); the other 38 directions also slipped $3.4M (+$14.0M → +$10.6M) on the per-flight cost step, and 12 of them lose money individually.</a:t>
+            </a:r>
+          </a:p>
+          <a:p>
+            <a:r>
+              <a:t>The case's "~$40M" is our −$48.4M with refunds excluded (−$40.5M). Refunds $6.7M → $7.8M is about +9% like-for-like (Sep 2024 is a low data month).</a:t>
+            </a:r>
+          </a:p>
+          <a:p>
+            <a:r>
+              <a:t>Sources: analysis/airline_analysis.sqlite; slides/OUTLINE.md "Verification notes"; cross-checked against the teammate repo (differences are only date parsing, ≤ $0.3M).</a:t>
             </a:r>
           </a:p>
         </p:txBody>
@@ -1158,7 +3072,67 @@
           <a:lstStyle/>
           <a:p>
             <a:r>
-              <a:t>ALTERNATIVES. ~45 sec. To be written. Score 3-4 options on consistent criteria; criteria include the case's values (safety, fair to customers, connecting communities) since judges will check fit.</a:t>
+              <a:t>ALTERNATIVES. ~45 sec.</a:t>
+            </a:r>
+          </a:p>
+          <a:p>
+            <a:r>
+              <a:t>Say: "We tested four ways out, on one consistent FY25-26 basis, against NorthByte's own values."</a:t>
+            </a:r>
+          </a:p>
+          <a:p>
+            <a:r>
+              <a:t>- Stay the Course: the baseline, about −$58M after gates.</a:t>
+            </a:r>
+          </a:p>
+          <a:p>
+            <a:r>
+              <a:t>- Fill the Planes: keep every flight and sell more. It needs +25.5% revenue just to break even before gates (+30.7% after), roughly 5 years of record growth with ~$130M more losses on the way, and every lever we sized adds only ~$5M. The trunk already ran this experiment.</a:t>
+            </a:r>
+          </a:p>
+          <a:p>
+            <a:r>
+              <a:t>- Right-Size &amp; Recover: remove the 2025 trunk add-ons, exit Montréal–Vancouver, halve the 3 new markets, then use the revenue levers. Central case about +$1.4M after gates with all 20 airports kept; range about −$17M to +$6M (0–100% recapture plus lever low–high). Be upfront that the central case is thin: it breaks even only if ~90% of the trunk's cut-flight revenue moves to the kept flights (it beats Shrink above ~⅔), and ~1% more cost per flight or ~1% less retained revenue would erase it. Why we still expect high recapture: the added flights brought in almost no extra revenue (+3.7% vs +3.3–4.0% on unchanged routes), and 10 of 10 doubled directions cut fares while 0 of 38 unchanged directions did. Each added trunk flight brought ~1.9 extra tickets against ~19 needed to break even, so most of it should.</a:t>
+            </a:r>
+          </a:p>
+          <a:p>
+            <a:r>
+              <a:t>- Shrink to Core: exit the 22 directions that lost money in every FY25-26 season. Similar money, more certain, but 6 airports, $8M of connecting revenue and 56% of flights gone. It only wins if money is weighted 70%+ AND Right-Size recaptures nothing.</a:t>
+            </a:r>
+          </a:p>
+          <a:p>
+            <a:r>
+              <a:t>If asked "is +$1.4M a profit?": it is contribution after gates, i.e. break-even on the costs the data shows (fuel, crew, maintenance, food, gates). It excludes aircraft ownership and overhead, which the case does not give. The schedule changes alone get to about −$3.8M; the revenue levers (~$5.2M central) close the gap.</a:t>
+            </a:r>
+          </a:p>
+          <a:p>
+            <a:r>
+              <a:t>Assumption to disclose: fuel, crew, maintenance and food on removed flights are avoidable (case p.10: these costs "depend on the number of flights"). About $73.6M of flight cost is removed; each 10% that proves fixed costs ~$7.4M.</a:t>
+            </a:r>
+          </a:p>
+          <a:p>
+            <a:r>
+              <a:t>Gates: after-gates figures accrue leases by fiscal year: Sep–Dec 2025 at 2025 rates + Jan–Aug 2026 with each gate repeating its 2024→25 increase = $10.02M (teammate's gate analysis agrees to the cent).</a:t>
+            </a:r>
+          </a:p>
+          <a:p>
+            <a:r>
+              <a:t>If asked "why exit Montréal–Vancouver rather than go back to one flight?": the difference is only ~$0.9M ($19.7M vs $18.8M); even the one-rotation base schedule still loses ~$0.9M after the cost step, it has 0 connecting passengers, and the exit saving doesn't depend on recapture. Fallback: revert to one rotation and exit if it stays negative for two quarters.</a:t>
+            </a:r>
+          </a:p>
+          <a:p>
+            <a:r>
+              <a:t>Fill the Planes' −$28M ceiling assumes a −1.5 fare elasticity that our trunk evidence contradicts (fares −11%, tickets +11% vs control, revenue flat), so it is generous.</a:t>
+            </a:r>
+          </a:p>
+          <a:p>
+            <a:r>
+              <a:t>Safety is a pass/fail screen, not a score. Weights: financial 30%; communities, customers, employees 15% each.</a:t>
+            </a:r>
+          </a:p>
+          <a:p>
+            <a:r>
+              <a:t>OPEN TEAM DECISION: halved, the new markets still lose about −$3.9M at central recapture (revenue covers 49% of cost; −$2.6M and 65% even at full recapture), and reaching the 0.8 trigger needs ~63% more revenue. None of the 12,644 connection-compatible bookings uses them. A full exit adds ~+$3.9M more and frees $0.69M of gates (a real buffer for the thin central case), but London and Moncton lose service (20 → 18 airports) and the headline changes.</a:t>
             </a:r>
           </a:p>
         </p:txBody>
@@ -1859,6 +3833,96 @@
           <a:p>
             <a:r>
               <a:t>Backup for booking-channel questions. Direct Web 40%, App 22%, OTA 20%, Corporate 18% of FY25-26 revenue.</a:t>
+            </a:r>
+          </a:p>
+        </p:txBody>
+      </p:sp>
+      <p:sp>
+        <p:nvSpPr>
+          <p:cNvPr id="4" name="Slide Number Placeholder 3"/>
+          <p:cNvSpPr>
+            <a:spLocks noGrp="1"/>
+          </p:cNvSpPr>
+          <p:nvPr>
+            <p:ph type="sldNum" idx="5" sz="quarter"/>
+          </p:nvPr>
+        </p:nvSpPr>
+        <p:spPr/>
+      </p:sp>
+    </p:spTree>
+  </p:cSld>
+  <p:clrMapOvr>
+    <a:masterClrMapping/>
+  </p:clrMapOvr>
+</p:notes>
+</file>
+
+<file path=ppt/notesSlides/notesSlide28.xml><?xml version="1.0" encoding="utf-8"?>
+<p:notes xmlns:a="http://schemas.openxmlformats.org/drawingml/2006/main" xmlns:p="http://schemas.openxmlformats.org/presentationml/2006/main" xmlns:r="http://schemas.openxmlformats.org/officeDocument/2006/relationships">
+  <p:cSld>
+    <p:spTree>
+      <p:nvGrpSpPr>
+        <p:cNvPr id="1" name=""/>
+        <p:cNvGrpSpPr/>
+        <p:nvPr/>
+      </p:nvGrpSpPr>
+      <p:grpSpPr>
+        <a:xfrm>
+          <a:off x="0" y="0"/>
+          <a:ext cx="0" cy="0"/>
+          <a:chOff x="0" y="0"/>
+          <a:chExt cx="0" cy="0"/>
+        </a:xfrm>
+      </p:grpSpPr>
+      <p:sp>
+        <p:nvSpPr>
+          <p:cNvPr id="2" name="Slide Image Placeholder 1"/>
+          <p:cNvSpPr>
+            <a:spLocks noGrp="1"/>
+          </p:cNvSpPr>
+          <p:nvPr>
+            <p:ph type="sldImg" idx="2"/>
+          </p:nvPr>
+        </p:nvSpPr>
+        <p:spPr/>
+      </p:sp>
+      <p:sp>
+        <p:nvSpPr>
+          <p:cNvPr id="3" name="Notes Placeholder 2"/>
+          <p:cNvSpPr>
+            <a:spLocks noGrp="1"/>
+          </p:cNvSpPr>
+          <p:nvPr>
+            <p:ph type="body" idx="3" sz="quarter"/>
+          </p:nvPr>
+        </p:nvSpPr>
+        <p:spPr/>
+        <p:txBody>
+          <a:bodyPr/>
+          <a:lstStyle/>
+          <a:p>
+            <a:r>
+              <a:t>APPENDIX: STRATEGIC LENS. Q&amp;A only.</a:t>
+            </a:r>
+          </a:p>
+          <a:p>
+            <a:r>
+              <a:t>Use if a judge asks "what about competitors / the market?"</a:t>
+            </a:r>
+          </a:p>
+          <a:p>
+            <a:r>
+              <a:t>Five Forces: every force cites the case text or our data. Rivalry and buyer power explain why doubling the trunk cut fares: the extra passengers came only at lower fares, so revenue grew no faster than on unchanged routes. Supplier power explains why the largest cost lever NorthByte controls is how many flights it flies (fuel efficiency and maintenance purchasing are smaller, secondary levers). The case's own story of newer carriers that expanded and then shrank is the warning.</a:t>
+            </a:r>
+          </a:p>
+          <a:p>
+            <a:r>
+              <a:t>SWOT: weaknesses are the three issues; strengths are what Right-Size keeps (hubs, connections, communities) and Shrink gives up; opportunities are the recovery levers; threats feed the risk slide.</a:t>
+            </a:r>
+          </a:p>
+          <a:p>
+            <a:r>
+              <a:t>Do not claim outside market facts: assumption 11 (analysis/ASSUMPTIONS.md).</a:t>
             </a:r>
           </a:p>
         </p:txBody>
@@ -8684,7 +10748,7 @@
                 </a:solidFill>
                 <a:latin typeface="Montserrat"/>
               </a:rPr>
-              <a:t>[Headline: the 2-3 issues NorthByte must solve]</a:t>
+              <a:t>The loss comes from flights NorthByte added in 2025, not the network it already flew</a:t>
             </a:r>
           </a:p>
         </p:txBody>
@@ -8767,7 +10831,7 @@
                 </a:solidFill>
                 <a:latin typeface="Lato"/>
               </a:rPr>
-              <a:t>Evidence: slides 5–12</a:t>
+              <a:t>Source: NorthByte transactions &amp; costs, FY24-25 vs FY25-26; team analysis. Contribution = revenue − fuel, crew, maintenance, food (before gates).</a:t>
             </a:r>
           </a:p>
         </p:txBody>
@@ -8813,14 +10877,67 @@
       </p:sp>
       <p:sp>
         <p:nvSpPr>
-          <p:cNvPr id="8" name="Rectangle 7"/>
+          <p:cNvPr id="8" name="TextBox 7"/>
+          <p:cNvSpPr txBox="1"/>
+          <p:nvPr/>
+        </p:nvSpPr>
+        <p:spPr>
+          <a:xfrm>
+            <a:off x="548640" y="1481328"/>
+            <a:ext cx="11064240" cy="274320"/>
+          </a:xfrm>
+          <a:prstGeom prst="rect">
+            <a:avLst/>
+          </a:prstGeom>
+          <a:noFill/>
+        </p:spPr>
+        <p:txBody>
+          <a:bodyPr wrap="square" anchor="t" lIns="0" rIns="0" tIns="0" bIns="0">
+            <a:spAutoFit/>
+          </a:bodyPr>
+          <a:lstStyle/>
+          <a:p>
+            <a:pPr algn="l"/>
+            <a:r>
+              <a:rPr sz="1400" b="0" i="0">
+                <a:solidFill>
+                  <a:srgbClr val="1F2937"/>
+                </a:solidFill>
+                <a:latin typeface="Lato"/>
+              </a:rPr>
+              <a:t>On record revenue ($190.0M, +5.2%), NorthByte lost </a:t>
+            </a:r>
+            <a:r>
+              <a:rPr sz="1400" b="1" i="0">
+                <a:solidFill>
+                  <a:srgbClr val="0B1F3A"/>
+                </a:solidFill>
+                <a:latin typeface="Lato"/>
+              </a:rPr>
+              <a:t>−$48.4M before gates (−$58.4M after)</a:t>
+            </a:r>
+            <a:r>
+              <a:rPr sz="1400" b="0" i="0">
+                <a:solidFill>
+                  <a:srgbClr val="1F2937"/>
+                </a:solidFill>
+                <a:latin typeface="Lato"/>
+              </a:rPr>
+              <a:t>, nearly 4× the year before.</a:t>
+            </a:r>
+          </a:p>
+        </p:txBody>
+      </p:sp>
+      <p:sp>
+        <p:nvSpPr>
+          <p:cNvPr id="9" name="Rectangle 8"/>
           <p:cNvSpPr/>
           <p:nvPr/>
         </p:nvSpPr>
         <p:spPr>
           <a:xfrm>
-            <a:off x="548640" y="1600200"/>
-            <a:ext cx="3566160" cy="4572000"/>
+            <a:off x="548640" y="1901952"/>
+            <a:ext cx="4160520" cy="3383280"/>
           </a:xfrm>
           <a:prstGeom prst="rect">
             <a:avLst/>
@@ -8828,11 +10945,8 @@
           <a:solidFill>
             <a:srgbClr val="F3F5F8"/>
           </a:solidFill>
-          <a:ln w="15875">
-            <a:solidFill>
-              <a:srgbClr val="9CA3AF"/>
-            </a:solidFill>
-            <a:prstDash val="dash"/>
+          <a:ln>
+            <a:noFill/>
           </a:ln>
           <a:effectLst/>
         </p:spPr>
@@ -8860,14 +10974,14 @@
       </p:sp>
       <p:sp>
         <p:nvSpPr>
-          <p:cNvPr id="9" name="TextBox 8"/>
+          <p:cNvPr id="10" name="TextBox 9"/>
           <p:cNvSpPr txBox="1"/>
           <p:nvPr/>
         </p:nvSpPr>
         <p:spPr>
           <a:xfrm>
-            <a:off x="685800" y="1691640"/>
-            <a:ext cx="3291840" cy="4389120"/>
+            <a:off x="731520" y="1993392"/>
+            <a:ext cx="3840480" cy="457200"/>
           </a:xfrm>
           <a:prstGeom prst="rect">
             <a:avLst/>
@@ -8875,52 +10989,75 @@
           <a:noFill/>
         </p:spPr>
         <p:txBody>
-          <a:bodyPr wrap="square" anchor="ctr">
+          <a:bodyPr wrap="square" anchor="t" lIns="0" rIns="0" tIns="0" bIns="0">
             <a:spAutoFit/>
           </a:bodyPr>
           <a:lstStyle/>
           <a:p>
-            <a:pPr algn="ctr">
-              <a:spcAft>
-                <a:spcPts val="600"/>
-              </a:spcAft>
-            </a:pPr>
-            <a:r>
-              <a:rPr sz="1200" b="0">
-                <a:solidFill>
-                  <a:srgbClr val="9CA3AF"/>
+            <a:pPr algn="l"/>
+            <a:r>
+              <a:rPr sz="1200" b="1" i="0">
+                <a:solidFill>
+                  <a:srgbClr val="0B1F3A"/>
                 </a:solidFill>
                 <a:latin typeface="Lato"/>
               </a:rPr>
-              <a:t>[Issue 1]
-[Evidence]
-[$ impact]</a:t>
-            </a:r>
-          </a:p>
-        </p:txBody>
-      </p:sp>
-      <p:sp>
-        <p:nvSpPr>
-          <p:cNvPr id="10" name="Rectangle 9"/>
+              <a:t>Where FY25-26 contribution comes from</a:t>
+            </a:r>
+          </a:p>
+          <a:p>
+            <a:pPr algn="l"/>
+            <a:r>
+              <a:rPr sz="1000" b="0" i="0">
+                <a:solidFill>
+                  <a:srgbClr val="6B7280"/>
+                </a:solidFill>
+                <a:latin typeface="Lato"/>
+              </a:rPr>
+              <a:t>$M before gates, by route group</a:t>
+            </a:r>
+          </a:p>
+        </p:txBody>
+      </p:sp>
+      <p:graphicFrame>
+        <p:nvGraphicFramePr>
+          <p:cNvPr id="11" name="Chart 10"/>
+          <p:cNvGraphicFramePr>
+            <a:graphicFrameLocks noGrp="1"/>
+          </p:cNvGraphicFramePr>
+          <p:nvPr/>
+        </p:nvGraphicFramePr>
+        <p:xfrm>
+          <a:off x="640080" y="2487168"/>
+          <a:ext cx="3977639" cy="2743200"/>
+        </p:xfrm>
+        <a:graphic>
+          <a:graphicData uri="http://schemas.openxmlformats.org/drawingml/2006/chart">
+            <c:chart xmlns:c="http://schemas.openxmlformats.org/drawingml/2006/chart" r:id="rId11"/>
+          </a:graphicData>
+        </a:graphic>
+      </p:graphicFrame>
+      <p:sp>
+        <p:nvSpPr>
+          <p:cNvPr id="12" name="Rectangle 11"/>
           <p:cNvSpPr/>
           <p:nvPr/>
         </p:nvSpPr>
         <p:spPr>
           <a:xfrm>
-            <a:off x="4297679" y="1600200"/>
-            <a:ext cx="3566160" cy="4572000"/>
+            <a:off x="4937760" y="1901952"/>
+            <a:ext cx="6702552" cy="1078992"/>
           </a:xfrm>
           <a:prstGeom prst="rect">
             <a:avLst/>
           </a:prstGeom>
           <a:solidFill>
-            <a:srgbClr val="F3F5F8"/>
+            <a:srgbClr val="FFFFFF"/>
           </a:solidFill>
-          <a:ln w="15875">
+          <a:ln w="12700">
             <a:solidFill>
-              <a:srgbClr val="9CA3AF"/>
+              <a:srgbClr val="D1D5DB"/>
             </a:solidFill>
-            <a:prstDash val="dash"/>
           </a:ln>
           <a:effectLst/>
         </p:spPr>
@@ -8948,67 +11085,23 @@
       </p:sp>
       <p:sp>
         <p:nvSpPr>
-          <p:cNvPr id="11" name="TextBox 10"/>
-          <p:cNvSpPr txBox="1"/>
-          <p:nvPr/>
-        </p:nvSpPr>
-        <p:spPr>
-          <a:xfrm>
-            <a:off x="4434840" y="1691640"/>
-            <a:ext cx="3291840" cy="4389120"/>
-          </a:xfrm>
-          <a:prstGeom prst="rect">
-            <a:avLst/>
-          </a:prstGeom>
-          <a:noFill/>
-        </p:spPr>
-        <p:txBody>
-          <a:bodyPr wrap="square" anchor="ctr">
-            <a:spAutoFit/>
-          </a:bodyPr>
-          <a:lstStyle/>
-          <a:p>
-            <a:pPr algn="ctr">
-              <a:spcAft>
-                <a:spcPts val="600"/>
-              </a:spcAft>
-            </a:pPr>
-            <a:r>
-              <a:rPr sz="1200" b="0">
-                <a:solidFill>
-                  <a:srgbClr val="9CA3AF"/>
-                </a:solidFill>
-                <a:latin typeface="Lato"/>
-              </a:rPr>
-              <a:t>[Issue 2]
-[Evidence]
-[$ impact]</a:t>
-            </a:r>
-          </a:p>
-        </p:txBody>
-      </p:sp>
-      <p:sp>
-        <p:nvSpPr>
-          <p:cNvPr id="12" name="Rectangle 11"/>
+          <p:cNvPr id="13" name="Oval 12"/>
           <p:cNvSpPr/>
           <p:nvPr/>
         </p:nvSpPr>
         <p:spPr>
           <a:xfrm>
-            <a:off x="8046719" y="1600200"/>
-            <a:ext cx="3566160" cy="4572000"/>
-          </a:xfrm>
-          <a:prstGeom prst="rect">
+            <a:off x="5074920" y="2011680"/>
+            <a:ext cx="384048" cy="384048"/>
+          </a:xfrm>
+          <a:prstGeom prst="ellipse">
             <a:avLst/>
           </a:prstGeom>
           <a:solidFill>
-            <a:srgbClr val="F3F5F8"/>
+            <a:srgbClr val="E8692A"/>
           </a:solidFill>
-          <a:ln w="15875">
-            <a:solidFill>
-              <a:srgbClr val="9CA3AF"/>
-            </a:solidFill>
-            <a:prstDash val="dash"/>
+          <a:ln>
+            <a:noFill/>
           </a:ln>
           <a:effectLst/>
         </p:spPr>
@@ -9027,23 +11120,32 @@
           </a:fontRef>
         </p:style>
         <p:txBody>
-          <a:bodyPr rtlCol="0" anchor="ctr"/>
+          <a:bodyPr rtlCol="0" anchor="ctr" lIns="0" rIns="0"/>
           <a:lstStyle/>
           <a:p>
             <a:pPr algn="ctr"/>
-          </a:p>
-        </p:txBody>
-      </p:sp>
-      <p:sp>
-        <p:nvSpPr>
-          <p:cNvPr id="13" name="TextBox 12"/>
+            <a:r>
+              <a:rPr sz="1400" b="1">
+                <a:solidFill>
+                  <a:srgbClr val="FFFFFF"/>
+                </a:solidFill>
+                <a:latin typeface="Montserrat"/>
+              </a:rPr>
+              <a:t>1</a:t>
+            </a:r>
+          </a:p>
+        </p:txBody>
+      </p:sp>
+      <p:sp>
+        <p:nvSpPr>
+          <p:cNvPr id="14" name="TextBox 13"/>
           <p:cNvSpPr txBox="1"/>
           <p:nvPr/>
         </p:nvSpPr>
         <p:spPr>
           <a:xfrm>
-            <a:off x="8183879" y="1691640"/>
-            <a:ext cx="3291840" cy="4389120"/>
+            <a:off x="5596128" y="1975104"/>
+            <a:ext cx="4297680" cy="274320"/>
           </a:xfrm>
           <a:prstGeom prst="rect">
             <a:avLst/>
@@ -9051,26 +11153,858 @@
           <a:noFill/>
         </p:spPr>
         <p:txBody>
-          <a:bodyPr wrap="square" anchor="ctr">
+          <a:bodyPr wrap="square" anchor="t" lIns="0" rIns="0" tIns="0" bIns="0">
             <a:spAutoFit/>
           </a:bodyPr>
           <a:lstStyle/>
           <a:p>
-            <a:pPr algn="ctr">
-              <a:spcAft>
-                <a:spcPts val="600"/>
-              </a:spcAft>
-            </a:pPr>
-            <a:r>
-              <a:rPr sz="1200" b="0">
-                <a:solidFill>
-                  <a:srgbClr val="9CA3AF"/>
+            <a:pPr algn="l"/>
+            <a:r>
+              <a:rPr sz="1400" b="1" i="0">
+                <a:solidFill>
+                  <a:srgbClr val="0B1F3A"/>
+                </a:solidFill>
+                <a:latin typeface="Montserrat"/>
+              </a:rPr>
+              <a:t>Capacity outran demand</a:t>
+            </a:r>
+          </a:p>
+        </p:txBody>
+      </p:sp>
+      <p:sp>
+        <p:nvSpPr>
+          <p:cNvPr id="15" name="TextBox 14"/>
+          <p:cNvSpPr txBox="1"/>
+          <p:nvPr/>
+        </p:nvSpPr>
+        <p:spPr>
+          <a:xfrm>
+            <a:off x="5596128" y="2240280"/>
+            <a:ext cx="4343400" cy="502920"/>
+          </a:xfrm>
+          <a:prstGeom prst="rect">
+            <a:avLst/>
+          </a:prstGeom>
+          <a:noFill/>
+        </p:spPr>
+        <p:txBody>
+          <a:bodyPr wrap="square" anchor="t" lIns="0" rIns="0" tIns="0" bIns="0">
+            <a:spAutoFit/>
+          </a:bodyPr>
+          <a:lstStyle/>
+          <a:p>
+            <a:pPr algn="l"/>
+            <a:r>
+              <a:rPr sz="1050" b="0" i="0">
+                <a:solidFill>
+                  <a:srgbClr val="1F2937"/>
                 </a:solidFill>
                 <a:latin typeface="Lato"/>
               </a:rPr>
-              <a:t>[Issue 3]
-[Evidence]
-[$ impact]</a:t>
+              <a:t>10 trunk directions, Sep–Feb: flights +101%, revenue +3.1% (other routes +4.0%), tickets/flight −44%. Montréal–Vancouver lost money all year. New markets cover a third of cost.</a:t>
+            </a:r>
+          </a:p>
+        </p:txBody>
+      </p:sp>
+      <p:sp>
+        <p:nvSpPr>
+          <p:cNvPr id="16" name="TextBox 15"/>
+          <p:cNvSpPr txBox="1"/>
+          <p:nvPr/>
+        </p:nvSpPr>
+        <p:spPr>
+          <a:xfrm>
+            <a:off x="5596128" y="2724912"/>
+            <a:ext cx="5943600" cy="219456"/>
+          </a:xfrm>
+          <a:prstGeom prst="rect">
+            <a:avLst/>
+          </a:prstGeom>
+          <a:noFill/>
+        </p:spPr>
+        <p:txBody>
+          <a:bodyPr wrap="square" anchor="t" lIns="0" rIns="0" tIns="0" bIns="0">
+            <a:spAutoFit/>
+          </a:bodyPr>
+          <a:lstStyle/>
+          <a:p>
+            <a:pPr algn="l"/>
+            <a:r>
+              <a:rPr sz="1000" b="1" i="0">
+                <a:solidFill>
+                  <a:srgbClr val="E8692A"/>
+                </a:solidFill>
+                <a:latin typeface="Lato"/>
+              </a:rPr>
+              <a:t>→ Fix: right-size the schedule; re-add flights only on proven demand</a:t>
+            </a:r>
+          </a:p>
+        </p:txBody>
+      </p:sp>
+      <p:sp>
+        <p:nvSpPr>
+          <p:cNvPr id="17" name="TextBox 16"/>
+          <p:cNvSpPr txBox="1"/>
+          <p:nvPr/>
+        </p:nvSpPr>
+        <p:spPr>
+          <a:xfrm>
+            <a:off x="10012680" y="1975104"/>
+            <a:ext cx="1536192" cy="365760"/>
+          </a:xfrm>
+          <a:prstGeom prst="rect">
+            <a:avLst/>
+          </a:prstGeom>
+          <a:noFill/>
+        </p:spPr>
+        <p:txBody>
+          <a:bodyPr wrap="square" anchor="t" lIns="0" rIns="0" tIns="0" bIns="0">
+            <a:spAutoFit/>
+          </a:bodyPr>
+          <a:lstStyle/>
+          <a:p>
+            <a:pPr algn="r"/>
+            <a:r>
+              <a:rPr sz="1800" b="1" i="0">
+                <a:solidFill>
+                  <a:srgbClr val="0B1F3A"/>
+                </a:solidFill>
+                <a:latin typeface="Montserrat"/>
+              </a:rPr>
+              <a:t>−$59M</a:t>
+            </a:r>
+          </a:p>
+        </p:txBody>
+      </p:sp>
+      <p:sp>
+        <p:nvSpPr>
+          <p:cNvPr id="18" name="TextBox 17"/>
+          <p:cNvSpPr txBox="1"/>
+          <p:nvPr/>
+        </p:nvSpPr>
+        <p:spPr>
+          <a:xfrm>
+            <a:off x="10012680" y="2340864"/>
+            <a:ext cx="1536192" cy="329184"/>
+          </a:xfrm>
+          <a:prstGeom prst="rect">
+            <a:avLst/>
+          </a:prstGeom>
+          <a:noFill/>
+        </p:spPr>
+        <p:txBody>
+          <a:bodyPr wrap="square" anchor="t" lIns="0" rIns="0" tIns="0" bIns="0">
+            <a:spAutoFit/>
+          </a:bodyPr>
+          <a:lstStyle/>
+          <a:p>
+            <a:pPr algn="r"/>
+            <a:r>
+              <a:rPr sz="900" b="0" i="0">
+                <a:solidFill>
+                  <a:srgbClr val="6B7280"/>
+                </a:solidFill>
+                <a:latin typeface="Lato"/>
+              </a:rPr>
+              <a:t>contribution of the routes involved</a:t>
+            </a:r>
+          </a:p>
+        </p:txBody>
+      </p:sp>
+      <p:sp>
+        <p:nvSpPr>
+          <p:cNvPr id="19" name="Rectangle 18"/>
+          <p:cNvSpPr/>
+          <p:nvPr/>
+        </p:nvSpPr>
+        <p:spPr>
+          <a:xfrm>
+            <a:off x="4937760" y="3054096"/>
+            <a:ext cx="6702552" cy="1078992"/>
+          </a:xfrm>
+          <a:prstGeom prst="rect">
+            <a:avLst/>
+          </a:prstGeom>
+          <a:solidFill>
+            <a:srgbClr val="FFFFFF"/>
+          </a:solidFill>
+          <a:ln w="12700">
+            <a:solidFill>
+              <a:srgbClr val="D1D5DB"/>
+            </a:solidFill>
+          </a:ln>
+          <a:effectLst/>
+        </p:spPr>
+        <p:style>
+          <a:lnRef idx="1">
+            <a:schemeClr val="accent1"/>
+          </a:lnRef>
+          <a:fillRef idx="3">
+            <a:schemeClr val="accent1"/>
+          </a:fillRef>
+          <a:effectRef idx="2">
+            <a:schemeClr val="accent1"/>
+          </a:effectRef>
+          <a:fontRef idx="minor">
+            <a:schemeClr val="lt1"/>
+          </a:fontRef>
+        </p:style>
+        <p:txBody>
+          <a:bodyPr rtlCol="0" anchor="ctr"/>
+          <a:lstStyle/>
+          <a:p>
+            <a:pPr algn="ctr"/>
+          </a:p>
+        </p:txBody>
+      </p:sp>
+      <p:sp>
+        <p:nvSpPr>
+          <p:cNvPr id="20" name="Oval 19"/>
+          <p:cNvSpPr/>
+          <p:nvPr/>
+        </p:nvSpPr>
+        <p:spPr>
+          <a:xfrm>
+            <a:off x="5074920" y="3163824"/>
+            <a:ext cx="384048" cy="384048"/>
+          </a:xfrm>
+          <a:prstGeom prst="ellipse">
+            <a:avLst/>
+          </a:prstGeom>
+          <a:solidFill>
+            <a:srgbClr val="E8692A"/>
+          </a:solidFill>
+          <a:ln>
+            <a:noFill/>
+          </a:ln>
+          <a:effectLst/>
+        </p:spPr>
+        <p:style>
+          <a:lnRef idx="1">
+            <a:schemeClr val="accent1"/>
+          </a:lnRef>
+          <a:fillRef idx="3">
+            <a:schemeClr val="accent1"/>
+          </a:fillRef>
+          <a:effectRef idx="2">
+            <a:schemeClr val="accent1"/>
+          </a:effectRef>
+          <a:fontRef idx="minor">
+            <a:schemeClr val="lt1"/>
+          </a:fontRef>
+        </p:style>
+        <p:txBody>
+          <a:bodyPr rtlCol="0" anchor="ctr" lIns="0" rIns="0"/>
+          <a:lstStyle/>
+          <a:p>
+            <a:pPr algn="ctr"/>
+            <a:r>
+              <a:rPr sz="1400" b="1">
+                <a:solidFill>
+                  <a:srgbClr val="FFFFFF"/>
+                </a:solidFill>
+                <a:latin typeface="Montserrat"/>
+              </a:rPr>
+              <a:t>2</a:t>
+            </a:r>
+          </a:p>
+        </p:txBody>
+      </p:sp>
+      <p:sp>
+        <p:nvSpPr>
+          <p:cNvPr id="21" name="TextBox 20"/>
+          <p:cNvSpPr txBox="1"/>
+          <p:nvPr/>
+        </p:nvSpPr>
+        <p:spPr>
+          <a:xfrm>
+            <a:off x="5596128" y="3127248"/>
+            <a:ext cx="4297680" cy="274320"/>
+          </a:xfrm>
+          <a:prstGeom prst="rect">
+            <a:avLst/>
+          </a:prstGeom>
+          <a:noFill/>
+        </p:spPr>
+        <p:txBody>
+          <a:bodyPr wrap="square" anchor="t" lIns="0" rIns="0" tIns="0" bIns="0">
+            <a:spAutoFit/>
+          </a:bodyPr>
+          <a:lstStyle/>
+          <a:p>
+            <a:pPr algn="l"/>
+            <a:r>
+              <a:rPr sz="1400" b="1" i="0">
+                <a:solidFill>
+                  <a:srgbClr val="0B1F3A"/>
+                </a:solidFill>
+                <a:latin typeface="Montserrat"/>
+              </a:rPr>
+              <a:t>Each flight earns less and costs more</a:t>
+            </a:r>
+          </a:p>
+        </p:txBody>
+      </p:sp>
+      <p:sp>
+        <p:nvSpPr>
+          <p:cNvPr id="22" name="TextBox 21"/>
+          <p:cNvSpPr txBox="1"/>
+          <p:nvPr/>
+        </p:nvSpPr>
+        <p:spPr>
+          <a:xfrm>
+            <a:off x="5596128" y="3392424"/>
+            <a:ext cx="4343400" cy="502920"/>
+          </a:xfrm>
+          <a:prstGeom prst="rect">
+            <a:avLst/>
+          </a:prstGeom>
+          <a:noFill/>
+        </p:spPr>
+        <p:txBody>
+          <a:bodyPr wrap="square" anchor="t" lIns="0" rIns="0" tIns="0" bIns="0">
+            <a:spAutoFit/>
+          </a:bodyPr>
+          <a:lstStyle/>
+          <a:p>
+            <a:pPr algn="l"/>
+            <a:r>
+              <a:rPr sz="1050" b="0" i="0">
+                <a:solidFill>
+                  <a:srgbClr val="1F2937"/>
+                </a:solidFill>
+                <a:latin typeface="Lato"/>
+              </a:rPr>
+              <a:t>Per flight, same route &amp; month: fuel +8.7%, crew +8.5%, rising Jan–Jul 2025. Trunk fares −8% (Sep–Feb): extra seats sold only at lower fares. Refunds $6.7M → $7.8M.</a:t>
+            </a:r>
+          </a:p>
+        </p:txBody>
+      </p:sp>
+      <p:sp>
+        <p:nvSpPr>
+          <p:cNvPr id="23" name="TextBox 22"/>
+          <p:cNvSpPr txBox="1"/>
+          <p:nvPr/>
+        </p:nvSpPr>
+        <p:spPr>
+          <a:xfrm>
+            <a:off x="5596128" y="3877056"/>
+            <a:ext cx="5943600" cy="219456"/>
+          </a:xfrm>
+          <a:prstGeom prst="rect">
+            <a:avLst/>
+          </a:prstGeom>
+          <a:noFill/>
+        </p:spPr>
+        <p:txBody>
+          <a:bodyPr wrap="square" anchor="t" lIns="0" rIns="0" tIns="0" bIns="0">
+            <a:spAutoFit/>
+          </a:bodyPr>
+          <a:lstStyle/>
+          <a:p>
+            <a:pPr algn="l"/>
+            <a:r>
+              <a:rPr sz="1000" b="1" i="0">
+                <a:solidFill>
+                  <a:srgbClr val="E8692A"/>
+                </a:solidFill>
+                <a:latin typeface="Lato"/>
+              </a:rPr>
+              <a:t>→ Fix: restore trunk fares, rebook-first for disruptions, shift OTA bookings to direct</a:t>
+            </a:r>
+          </a:p>
+        </p:txBody>
+      </p:sp>
+      <p:sp>
+        <p:nvSpPr>
+          <p:cNvPr id="24" name="TextBox 23"/>
+          <p:cNvSpPr txBox="1"/>
+          <p:nvPr/>
+        </p:nvSpPr>
+        <p:spPr>
+          <a:xfrm>
+            <a:off x="10012680" y="3127248"/>
+            <a:ext cx="1536192" cy="365760"/>
+          </a:xfrm>
+          <a:prstGeom prst="rect">
+            <a:avLst/>
+          </a:prstGeom>
+          <a:noFill/>
+        </p:spPr>
+        <p:txBody>
+          <a:bodyPr wrap="square" anchor="t" lIns="0" rIns="0" tIns="0" bIns="0">
+            <a:spAutoFit/>
+          </a:bodyPr>
+          <a:lstStyle/>
+          <a:p>
+            <a:pPr algn="r"/>
+            <a:r>
+              <a:rPr sz="1800" b="1" i="0">
+                <a:solidFill>
+                  <a:srgbClr val="0B1F3A"/>
+                </a:solidFill>
+                <a:latin typeface="Montserrat"/>
+              </a:rPr>
+              <a:t>$15.2M</a:t>
+            </a:r>
+          </a:p>
+        </p:txBody>
+      </p:sp>
+      <p:sp>
+        <p:nvSpPr>
+          <p:cNvPr id="25" name="TextBox 24"/>
+          <p:cNvSpPr txBox="1"/>
+          <p:nvPr/>
+        </p:nvSpPr>
+        <p:spPr>
+          <a:xfrm>
+            <a:off x="10012680" y="3493008"/>
+            <a:ext cx="1536192" cy="329184"/>
+          </a:xfrm>
+          <a:prstGeom prst="rect">
+            <a:avLst/>
+          </a:prstGeom>
+          <a:noFill/>
+        </p:spPr>
+        <p:txBody>
+          <a:bodyPr wrap="square" anchor="t" lIns="0" rIns="0" tIns="0" bIns="0">
+            <a:spAutoFit/>
+          </a:bodyPr>
+          <a:lstStyle/>
+          <a:p>
+            <a:pPr algn="r"/>
+            <a:r>
+              <a:rPr sz="900" b="0" i="0">
+                <a:solidFill>
+                  <a:srgbClr val="6B7280"/>
+                </a:solidFill>
+                <a:latin typeface="Lato"/>
+              </a:rPr>
+              <a:t>cost rise, same route &amp; month (⅓ of growth)</a:t>
+            </a:r>
+          </a:p>
+        </p:txBody>
+      </p:sp>
+      <p:sp>
+        <p:nvSpPr>
+          <p:cNvPr id="26" name="Rectangle 25"/>
+          <p:cNvSpPr/>
+          <p:nvPr/>
+        </p:nvSpPr>
+        <p:spPr>
+          <a:xfrm>
+            <a:off x="4937760" y="4206240"/>
+            <a:ext cx="6702552" cy="1078992"/>
+          </a:xfrm>
+          <a:prstGeom prst="rect">
+            <a:avLst/>
+          </a:prstGeom>
+          <a:solidFill>
+            <a:srgbClr val="FFFFFF"/>
+          </a:solidFill>
+          <a:ln w="12700">
+            <a:solidFill>
+              <a:srgbClr val="D1D5DB"/>
+            </a:solidFill>
+          </a:ln>
+          <a:effectLst/>
+        </p:spPr>
+        <p:style>
+          <a:lnRef idx="1">
+            <a:schemeClr val="accent1"/>
+          </a:lnRef>
+          <a:fillRef idx="3">
+            <a:schemeClr val="accent1"/>
+          </a:fillRef>
+          <a:effectRef idx="2">
+            <a:schemeClr val="accent1"/>
+          </a:effectRef>
+          <a:fontRef idx="minor">
+            <a:schemeClr val="lt1"/>
+          </a:fontRef>
+        </p:style>
+        <p:txBody>
+          <a:bodyPr rtlCol="0" anchor="ctr"/>
+          <a:lstStyle/>
+          <a:p>
+            <a:pPr algn="ctr"/>
+          </a:p>
+        </p:txBody>
+      </p:sp>
+      <p:sp>
+        <p:nvSpPr>
+          <p:cNvPr id="27" name="Oval 26"/>
+          <p:cNvSpPr/>
+          <p:nvPr/>
+        </p:nvSpPr>
+        <p:spPr>
+          <a:xfrm>
+            <a:off x="5074920" y="4315968"/>
+            <a:ext cx="384048" cy="384048"/>
+          </a:xfrm>
+          <a:prstGeom prst="ellipse">
+            <a:avLst/>
+          </a:prstGeom>
+          <a:solidFill>
+            <a:srgbClr val="E8692A"/>
+          </a:solidFill>
+          <a:ln>
+            <a:noFill/>
+          </a:ln>
+          <a:effectLst/>
+        </p:spPr>
+        <p:style>
+          <a:lnRef idx="1">
+            <a:schemeClr val="accent1"/>
+          </a:lnRef>
+          <a:fillRef idx="3">
+            <a:schemeClr val="accent1"/>
+          </a:fillRef>
+          <a:effectRef idx="2">
+            <a:schemeClr val="accent1"/>
+          </a:effectRef>
+          <a:fontRef idx="minor">
+            <a:schemeClr val="lt1"/>
+          </a:fontRef>
+        </p:style>
+        <p:txBody>
+          <a:bodyPr rtlCol="0" anchor="ctr" lIns="0" rIns="0"/>
+          <a:lstStyle/>
+          <a:p>
+            <a:pPr algn="ctr"/>
+            <a:r>
+              <a:rPr sz="1400" b="1">
+                <a:solidFill>
+                  <a:srgbClr val="FFFFFF"/>
+                </a:solidFill>
+                <a:latin typeface="Montserrat"/>
+              </a:rPr>
+              <a:t>3</a:t>
+            </a:r>
+          </a:p>
+        </p:txBody>
+      </p:sp>
+      <p:sp>
+        <p:nvSpPr>
+          <p:cNvPr id="28" name="TextBox 27"/>
+          <p:cNvSpPr txBox="1"/>
+          <p:nvPr/>
+        </p:nvSpPr>
+        <p:spPr>
+          <a:xfrm>
+            <a:off x="5596128" y="4279392"/>
+            <a:ext cx="4297680" cy="274320"/>
+          </a:xfrm>
+          <a:prstGeom prst="rect">
+            <a:avLst/>
+          </a:prstGeom>
+          <a:noFill/>
+        </p:spPr>
+        <p:txBody>
+          <a:bodyPr wrap="square" anchor="t" lIns="0" rIns="0" tIns="0" bIns="0">
+            <a:spAutoFit/>
+          </a:bodyPr>
+          <a:lstStyle/>
+          <a:p>
+            <a:pPr algn="l"/>
+            <a:r>
+              <a:rPr sz="1400" b="1" i="0">
+                <a:solidFill>
+                  <a:srgbClr val="0B1F3A"/>
+                </a:solidFill>
+                <a:latin typeface="Montserrat"/>
+              </a:rPr>
+              <a:t>Decisions without route-level numbers</a:t>
+            </a:r>
+          </a:p>
+        </p:txBody>
+      </p:sp>
+      <p:sp>
+        <p:nvSpPr>
+          <p:cNvPr id="29" name="TextBox 28"/>
+          <p:cNvSpPr txBox="1"/>
+          <p:nvPr/>
+        </p:nvSpPr>
+        <p:spPr>
+          <a:xfrm>
+            <a:off x="5596128" y="4544568"/>
+            <a:ext cx="4343400" cy="502920"/>
+          </a:xfrm>
+          <a:prstGeom prst="rect">
+            <a:avLst/>
+          </a:prstGeom>
+          <a:noFill/>
+        </p:spPr>
+        <p:txBody>
+          <a:bodyPr wrap="square" anchor="t" lIns="0" rIns="0" tIns="0" bIns="0">
+            <a:spAutoFit/>
+          </a:bodyPr>
+          <a:lstStyle/>
+          <a:p>
+            <a:pPr algn="l"/>
+            <a:r>
+              <a:rPr sz="1050" b="0" i="0">
+                <a:solidFill>
+                  <a:srgbClr val="1F2937"/>
+                </a:solidFill>
+                <a:latin typeface="Lato"/>
+              </a:rPr>
+              <a:t>Finance “reviewed costs at the company level, by category, rather than route by route” (case). Doubled routes already earned less (5.4% vs 12.3% margin); 2026 repeated the schedule.</a:t>
+            </a:r>
+          </a:p>
+        </p:txBody>
+      </p:sp>
+      <p:sp>
+        <p:nvSpPr>
+          <p:cNvPr id="30" name="TextBox 29"/>
+          <p:cNvSpPr txBox="1"/>
+          <p:nvPr/>
+        </p:nvSpPr>
+        <p:spPr>
+          <a:xfrm>
+            <a:off x="5596128" y="5029200"/>
+            <a:ext cx="5943600" cy="219456"/>
+          </a:xfrm>
+          <a:prstGeom prst="rect">
+            <a:avLst/>
+          </a:prstGeom>
+          <a:noFill/>
+        </p:spPr>
+        <p:txBody>
+          <a:bodyPr wrap="square" anchor="t" lIns="0" rIns="0" tIns="0" bIns="0">
+            <a:spAutoFit/>
+          </a:bodyPr>
+          <a:lstStyle/>
+          <a:p>
+            <a:pPr algn="l"/>
+            <a:r>
+              <a:rPr sz="1000" b="1" i="0">
+                <a:solidFill>
+                  <a:srgbClr val="E8692A"/>
+                </a:solidFill>
+                <a:latin typeface="Lato"/>
+              </a:rPr>
+              <a:t>→ Fix: a route-level P&amp;L with add/remove triggers</a:t>
+            </a:r>
+          </a:p>
+        </p:txBody>
+      </p:sp>
+      <p:sp>
+        <p:nvSpPr>
+          <p:cNvPr id="31" name="TextBox 30"/>
+          <p:cNvSpPr txBox="1"/>
+          <p:nvPr/>
+        </p:nvSpPr>
+        <p:spPr>
+          <a:xfrm>
+            <a:off x="10012680" y="4279392"/>
+            <a:ext cx="1536192" cy="365760"/>
+          </a:xfrm>
+          <a:prstGeom prst="rect">
+            <a:avLst/>
+          </a:prstGeom>
+          <a:noFill/>
+        </p:spPr>
+        <p:txBody>
+          <a:bodyPr wrap="square" anchor="t" lIns="0" rIns="0" tIns="0" bIns="0">
+            <a:spAutoFit/>
+          </a:bodyPr>
+          <a:lstStyle/>
+          <a:p>
+            <a:pPr algn="r"/>
+            <a:r>
+              <a:rPr sz="1800" b="1" i="0">
+                <a:solidFill>
+                  <a:srgbClr val="0B1F3A"/>
+                </a:solidFill>
+                <a:latin typeface="Montserrat"/>
+              </a:rPr>
+              <a:t>−$4.9M/mo</a:t>
+            </a:r>
+          </a:p>
+        </p:txBody>
+      </p:sp>
+      <p:sp>
+        <p:nvSpPr>
+          <p:cNvPr id="32" name="TextBox 31"/>
+          <p:cNvSpPr txBox="1"/>
+          <p:nvPr/>
+        </p:nvSpPr>
+        <p:spPr>
+          <a:xfrm>
+            <a:off x="10012680" y="4645152"/>
+            <a:ext cx="1536192" cy="329184"/>
+          </a:xfrm>
+          <a:prstGeom prst="rect">
+            <a:avLst/>
+          </a:prstGeom>
+          <a:noFill/>
+        </p:spPr>
+        <p:txBody>
+          <a:bodyPr wrap="square" anchor="t" lIns="0" rIns="0" tIns="0" bIns="0">
+            <a:spAutoFit/>
+          </a:bodyPr>
+          <a:lstStyle/>
+          <a:p>
+            <a:pPr algn="r"/>
+            <a:r>
+              <a:rPr sz="900" b="0" i="0">
+                <a:solidFill>
+                  <a:srgbClr val="6B7280"/>
+                </a:solidFill>
+                <a:latin typeface="Lato"/>
+              </a:rPr>
+              <a:t>lost by the 16 added directions</a:t>
+            </a:r>
+          </a:p>
+        </p:txBody>
+      </p:sp>
+      <p:sp>
+        <p:nvSpPr>
+          <p:cNvPr id="33" name="Rectangle 32"/>
+          <p:cNvSpPr/>
+          <p:nvPr/>
+        </p:nvSpPr>
+        <p:spPr>
+          <a:xfrm>
+            <a:off x="548640" y="5358384"/>
+            <a:ext cx="11091672" cy="457200"/>
+          </a:xfrm>
+          <a:prstGeom prst="rect">
+            <a:avLst/>
+          </a:prstGeom>
+          <a:solidFill>
+            <a:srgbClr val="F3F5F8"/>
+          </a:solidFill>
+          <a:ln>
+            <a:noFill/>
+          </a:ln>
+          <a:effectLst/>
+        </p:spPr>
+        <p:style>
+          <a:lnRef idx="1">
+            <a:schemeClr val="accent1"/>
+          </a:lnRef>
+          <a:fillRef idx="3">
+            <a:schemeClr val="accent1"/>
+          </a:fillRef>
+          <a:effectRef idx="2">
+            <a:schemeClr val="accent1"/>
+          </a:effectRef>
+          <a:fontRef idx="minor">
+            <a:schemeClr val="lt1"/>
+          </a:fontRef>
+        </p:style>
+        <p:txBody>
+          <a:bodyPr rtlCol="0" anchor="ctr"/>
+          <a:lstStyle/>
+          <a:p>
+            <a:pPr algn="ctr"/>
+          </a:p>
+        </p:txBody>
+      </p:sp>
+      <p:sp>
+        <p:nvSpPr>
+          <p:cNvPr id="34" name="TextBox 33"/>
+          <p:cNvSpPr txBox="1"/>
+          <p:nvPr/>
+        </p:nvSpPr>
+        <p:spPr>
+          <a:xfrm>
+            <a:off x="713232" y="5394960"/>
+            <a:ext cx="10789920" cy="402336"/>
+          </a:xfrm>
+          <a:prstGeom prst="rect">
+            <a:avLst/>
+          </a:prstGeom>
+          <a:noFill/>
+        </p:spPr>
+        <p:txBody>
+          <a:bodyPr wrap="square" anchor="ctr" lIns="0" rIns="0" tIns="0" bIns="0">
+            <a:spAutoFit/>
+          </a:bodyPr>
+          <a:lstStyle/>
+          <a:p>
+            <a:pPr algn="l"/>
+            <a:r>
+              <a:rPr sz="1100" b="1" i="0">
+                <a:solidFill>
+                  <a:srgbClr val="0B1F3A"/>
+                </a:solidFill>
+                <a:latin typeface="Lato"/>
+              </a:rPr>
+              <a:t>Why the market punished it (Porter's Five Forces): </a:t>
+            </a:r>
+            <a:r>
+              <a:rPr sz="1100" b="0" i="0">
+                <a:solidFill>
+                  <a:srgbClr val="1F2937"/>
+                </a:solidFill>
+                <a:latin typeface="Lato"/>
+              </a:rPr>
+              <a:t>among strong rivals and price-sensitive buyers (case), NorthByte's extra frequency sold only at lower fares; powerful suppliers set the cost of each flight. A small carrier wins on coverage, not frequency (our inference).</a:t>
+            </a:r>
+          </a:p>
+        </p:txBody>
+      </p:sp>
+      <p:sp>
+        <p:nvSpPr>
+          <p:cNvPr id="35" name="TextBox 34"/>
+          <p:cNvSpPr txBox="1"/>
+          <p:nvPr/>
+        </p:nvSpPr>
+        <p:spPr>
+          <a:xfrm>
+            <a:off x="548640" y="5925312"/>
+            <a:ext cx="11091672" cy="365760"/>
+          </a:xfrm>
+          <a:prstGeom prst="rect">
+            <a:avLst/>
+          </a:prstGeom>
+          <a:noFill/>
+        </p:spPr>
+        <p:txBody>
+          <a:bodyPr wrap="square" anchor="t" lIns="0" rIns="0" tIns="0" bIns="0">
+            <a:spAutoFit/>
+          </a:bodyPr>
+          <a:lstStyle/>
+          <a:p>
+            <a:pPr algn="l"/>
+            <a:r>
+              <a:rPr sz="1100" b="1" i="0">
+                <a:solidFill>
+                  <a:srgbClr val="E8692A"/>
+                </a:solidFill>
+                <a:latin typeface="Lato"/>
+              </a:rPr>
+              <a:t>Not the problem:  </a:t>
+            </a:r>
+            <a:r>
+              <a:rPr sz="1100" b="0" i="0">
+                <a:solidFill>
+                  <a:srgbClr val="1F2937"/>
+                </a:solidFill>
+                <a:latin typeface="Lato"/>
+              </a:rPr>
+              <a:t>Ancillaries (2% of revenue; +10% ≈ $0.4M)  ·  Gates (+2.2%, mostly fixed)  ·  Seasonality (every season loses $11–13M).   </a:t>
+            </a:r>
+            <a:r>
+              <a:rPr sz="1100" b="1" i="0">
+                <a:solidFill>
+                  <a:srgbClr val="E8692A"/>
+                </a:solidFill>
+                <a:latin typeface="Lato"/>
+              </a:rPr>
+              <a:t>Not measurable: </a:t>
+            </a:r>
+            <a:r>
+              <a:rPr sz="1100" b="0" i="0">
+                <a:solidFill>
+                  <a:srgbClr val="1F2937"/>
+                </a:solidFill>
+                <a:latin typeface="Lato"/>
+              </a:rPr>
+              <a:t>Rewards program cost (not in the data; no fare premium by tier)</a:t>
             </a:r>
           </a:p>
         </p:txBody>
@@ -9210,7 +12144,7 @@
                 </a:solidFill>
                 <a:latin typeface="Montserrat"/>
               </a:rPr>
-              <a:t>[Headline: options considered and how they compare]</a:t>
+              <a:t>Right-Size &amp; Recover is the only option whose central case breaks even, and it keeps all 20 airports</a:t>
             </a:r>
           </a:p>
         </p:txBody>
@@ -9293,7 +12227,7 @@
                 </a:solidFill>
                 <a:latin typeface="Lato"/>
               </a:rPr>
-              <a:t>Evidence: slides 5–12</a:t>
+              <a:t>Source: analysis/alternatives.py, FY25-26; gates accrued by fiscal year ($10.0M); flight costs avoidable (case p.10). Range: 0–100% recapture, levers low–high.</a:t>
             </a:r>
           </a:p>
         </p:txBody>
@@ -9346,31 +12280,35 @@
           <p:nvPr/>
         </p:nvGraphicFramePr>
         <p:xfrm>
-          <a:off x="548640" y="1645920"/>
-          <a:ext cx="11091672" cy="4389120"/>
+          <a:off x="548640" y="1572768"/>
+          <a:ext cx="11091672" cy="3621024"/>
         </p:xfrm>
         <a:graphic>
           <a:graphicData uri="http://schemas.openxmlformats.org/drawingml/2006/table">
             <a:tbl>
-              <a:tblPr firstRow="1" bandRow="1">
+              <a:tblPr>
                 <a:tableStyleId>{5C22544A-7EE6-4342-B048-85BDC9FD1C3A}</a:tableStyleId>
               </a:tblPr>
               <a:tblGrid>
-                <a:gridCol w="1848612"/>
-                <a:gridCol w="1848612"/>
-                <a:gridCol w="1848612"/>
-                <a:gridCol w="1848612"/>
-                <a:gridCol w="1848612"/>
-                <a:gridCol w="1848612"/>
+                <a:gridCol w="2697480"/>
+                <a:gridCol w="868680"/>
+                <a:gridCol w="868680"/>
+                <a:gridCol w="777240"/>
+                <a:gridCol w="896112"/>
+                <a:gridCol w="868680"/>
+                <a:gridCol w="868680"/>
+                <a:gridCol w="777240"/>
+                <a:gridCol w="2468880"/>
               </a:tblGrid>
-              <a:tr h="877824">
+              <a:tr h="548640">
                 <a:tc>
                   <a:txBody>
-                    <a:bodyPr/>
+                    <a:bodyPr wrap="square"/>
                     <a:lstStyle/>
                     <a:p>
+                      <a:pPr algn="l"/>
                       <a:r>
-                        <a:rPr sz="1200" b="1">
+                        <a:rPr sz="1000" b="1">
                           <a:solidFill>
                             <a:srgbClr val="FFFFFF"/>
                           </a:solidFill>
@@ -9380,7 +12318,7 @@
                       </a:r>
                     </a:p>
                   </a:txBody>
-                  <a:tcPr>
+                  <a:tcPr marL="54864" marR="54864" marT="36576" marB="36576" anchor="ctr">
                     <a:solidFill>
                       <a:srgbClr val="0B1F3A"/>
                     </a:solidFill>
@@ -9388,21 +12326,34 @@
                 </a:tc>
                 <a:tc>
                   <a:txBody>
-                    <a:bodyPr/>
+                    <a:bodyPr wrap="square"/>
                     <a:lstStyle/>
                     <a:p>
+                      <a:pPr algn="ctr"/>
                       <a:r>
-                        <a:rPr sz="1200" b="1">
+                        <a:rPr sz="1000" b="1">
                           <a:solidFill>
                             <a:srgbClr val="FFFFFF"/>
                           </a:solidFill>
-                          <a:latin typeface="Montserrat"/>
+                          <a:latin typeface="Lato"/>
                         </a:rPr>
-                        <a:t>Profit impact</a:t>
+                        <a:t>Financial</a:t>
+                      </a:r>
+                    </a:p>
+                    <a:p>
+                      <a:pPr algn="ctr"/>
+                      <a:r>
+                        <a:rPr sz="900" b="0">
+                          <a:solidFill>
+                            <a:srgbClr val="C9D2DF"/>
+                          </a:solidFill>
+                          <a:latin typeface="Lato"/>
+                        </a:rPr>
+                        <a:t>30%</a:t>
                       </a:r>
                     </a:p>
                   </a:txBody>
-                  <a:tcPr>
+                  <a:tcPr marL="54864" marR="54864" marT="36576" marB="36576" anchor="ctr">
                     <a:solidFill>
                       <a:srgbClr val="0B1F3A"/>
                     </a:solidFill>
@@ -9410,21 +12361,34 @@
                 </a:tc>
                 <a:tc>
                   <a:txBody>
-                    <a:bodyPr/>
+                    <a:bodyPr wrap="square"/>
                     <a:lstStyle/>
                     <a:p>
+                      <a:pPr algn="ctr"/>
                       <a:r>
-                        <a:rPr sz="1200" b="1">
+                        <a:rPr sz="1000" b="1">
                           <a:solidFill>
                             <a:srgbClr val="FFFFFF"/>
                           </a:solidFill>
-                          <a:latin typeface="Montserrat"/>
+                          <a:latin typeface="Lato"/>
                         </a:rPr>
-                        <a:t>Cost / feasibility</a:t>
+                        <a:t>Evidence</a:t>
+                      </a:r>
+                    </a:p>
+                    <a:p>
+                      <a:pPr algn="ctr"/>
+                      <a:r>
+                        <a:rPr sz="900" b="0">
+                          <a:solidFill>
+                            <a:srgbClr val="C9D2DF"/>
+                          </a:solidFill>
+                          <a:latin typeface="Lato"/>
+                        </a:rPr>
+                        <a:t>15%</a:t>
                       </a:r>
                     </a:p>
                   </a:txBody>
-                  <a:tcPr>
+                  <a:tcPr marL="54864" marR="54864" marT="36576" marB="36576" anchor="ctr">
                     <a:solidFill>
                       <a:srgbClr val="0B1F3A"/>
                     </a:solidFill>
@@ -9432,21 +12396,34 @@
                 </a:tc>
                 <a:tc>
                   <a:txBody>
-                    <a:bodyPr/>
+                    <a:bodyPr wrap="square"/>
                     <a:lstStyle/>
                     <a:p>
+                      <a:pPr algn="ctr"/>
                       <a:r>
-                        <a:rPr sz="1200" b="1">
+                        <a:rPr sz="1000" b="1">
                           <a:solidFill>
                             <a:srgbClr val="FFFFFF"/>
                           </a:solidFill>
-                          <a:latin typeface="Montserrat"/>
+                          <a:latin typeface="Lato"/>
                         </a:rPr>
-                        <a:t>Customer impact</a:t>
+                        <a:t>Speed</a:t>
+                      </a:r>
+                    </a:p>
+                    <a:p>
+                      <a:pPr algn="ctr"/>
+                      <a:r>
+                        <a:rPr sz="900" b="0">
+                          <a:solidFill>
+                            <a:srgbClr val="C9D2DF"/>
+                          </a:solidFill>
+                          <a:latin typeface="Lato"/>
+                        </a:rPr>
+                        <a:t>10%</a:t>
                       </a:r>
                     </a:p>
                   </a:txBody>
-                  <a:tcPr>
+                  <a:tcPr marL="54864" marR="54864" marT="36576" marB="36576" anchor="ctr">
                     <a:solidFill>
                       <a:srgbClr val="0B1F3A"/>
                     </a:solidFill>
@@ -9454,21 +12431,34 @@
                 </a:tc>
                 <a:tc>
                   <a:txBody>
-                    <a:bodyPr/>
+                    <a:bodyPr wrap="square"/>
                     <a:lstStyle/>
                     <a:p>
+                      <a:pPr algn="ctr"/>
                       <a:r>
-                        <a:rPr sz="1200" b="1">
+                        <a:rPr sz="1000" b="1">
                           <a:solidFill>
                             <a:srgbClr val="FFFFFF"/>
                           </a:solidFill>
-                          <a:latin typeface="Montserrat"/>
+                          <a:latin typeface="Lato"/>
                         </a:rPr>
-                        <a:t>Values fit</a:t>
+                        <a:t>Communities</a:t>
+                      </a:r>
+                    </a:p>
+                    <a:p>
+                      <a:pPr algn="ctr"/>
+                      <a:r>
+                        <a:rPr sz="900" b="0">
+                          <a:solidFill>
+                            <a:srgbClr val="C9D2DF"/>
+                          </a:solidFill>
+                          <a:latin typeface="Lato"/>
+                        </a:rPr>
+                        <a:t>15%</a:t>
                       </a:r>
                     </a:p>
                   </a:txBody>
-                  <a:tcPr>
+                  <a:tcPr marL="54864" marR="54864" marT="36576" marB="36576" anchor="ctr">
                     <a:solidFill>
                       <a:srgbClr val="0B1F3A"/>
                     </a:solidFill>
@@ -9476,45 +12466,176 @@
                 </a:tc>
                 <a:tc>
                   <a:txBody>
-                    <a:bodyPr/>
+                    <a:bodyPr wrap="square"/>
                     <a:lstStyle/>
                     <a:p>
+                      <a:pPr algn="ctr"/>
                       <a:r>
-                        <a:rPr sz="1200" b="1">
+                        <a:rPr sz="1000" b="1">
+                          <a:solidFill>
+                            <a:srgbClr val="FFFFFF"/>
+                          </a:solidFill>
+                          <a:latin typeface="Lato"/>
+                        </a:rPr>
+                        <a:t>Customers</a:t>
+                      </a:r>
+                    </a:p>
+                    <a:p>
+                      <a:pPr algn="ctr"/>
+                      <a:r>
+                        <a:rPr sz="900" b="0">
+                          <a:solidFill>
+                            <a:srgbClr val="C9D2DF"/>
+                          </a:solidFill>
+                          <a:latin typeface="Lato"/>
+                        </a:rPr>
+                        <a:t>15%</a:t>
+                      </a:r>
+                    </a:p>
+                  </a:txBody>
+                  <a:tcPr marL="54864" marR="54864" marT="36576" marB="36576" anchor="ctr">
+                    <a:solidFill>
+                      <a:srgbClr val="0B1F3A"/>
+                    </a:solidFill>
+                  </a:tcPr>
+                </a:tc>
+                <a:tc>
+                  <a:txBody>
+                    <a:bodyPr wrap="square"/>
+                    <a:lstStyle/>
+                    <a:p>
+                      <a:pPr algn="ctr"/>
+                      <a:r>
+                        <a:rPr sz="1000" b="1">
+                          <a:solidFill>
+                            <a:srgbClr val="FFFFFF"/>
+                          </a:solidFill>
+                          <a:latin typeface="Lato"/>
+                        </a:rPr>
+                        <a:t>Employees</a:t>
+                      </a:r>
+                    </a:p>
+                    <a:p>
+                      <a:pPr algn="ctr"/>
+                      <a:r>
+                        <a:rPr sz="900" b="0">
+                          <a:solidFill>
+                            <a:srgbClr val="C9D2DF"/>
+                          </a:solidFill>
+                          <a:latin typeface="Lato"/>
+                        </a:rPr>
+                        <a:t>15%</a:t>
+                      </a:r>
+                    </a:p>
+                  </a:txBody>
+                  <a:tcPr marL="54864" marR="54864" marT="36576" marB="36576" anchor="ctr">
+                    <a:solidFill>
+                      <a:srgbClr val="0B1F3A"/>
+                    </a:solidFill>
+                  </a:tcPr>
+                </a:tc>
+                <a:tc>
+                  <a:txBody>
+                    <a:bodyPr wrap="square"/>
+                    <a:lstStyle/>
+                    <a:p>
+                      <a:pPr algn="ctr"/>
+                      <a:r>
+                        <a:rPr sz="1000" b="1">
+                          <a:solidFill>
+                            <a:srgbClr val="FFFFFF"/>
+                          </a:solidFill>
+                          <a:latin typeface="Lato"/>
+                        </a:rPr>
+                        <a:t>Weighted</a:t>
+                      </a:r>
+                    </a:p>
+                    <a:p>
+                      <a:pPr algn="ctr"/>
+                      <a:r>
+                        <a:rPr sz="1000" b="1">
+                          <a:solidFill>
+                            <a:srgbClr val="FFFFFF"/>
+                          </a:solidFill>
+                          <a:latin typeface="Lato"/>
+                        </a:rPr>
+                        <a:t>score</a:t>
+                      </a:r>
+                    </a:p>
+                  </a:txBody>
+                  <a:tcPr marL="54864" marR="54864" marT="36576" marB="36576" anchor="ctr">
+                    <a:solidFill>
+                      <a:srgbClr val="0B1F3A"/>
+                    </a:solidFill>
+                  </a:tcPr>
+                </a:tc>
+                <a:tc>
+                  <a:txBody>
+                    <a:bodyPr wrap="square"/>
+                    <a:lstStyle/>
+                    <a:p>
+                      <a:pPr algn="ctr"/>
+                      <a:r>
+                        <a:rPr sz="1000" b="1">
                           <a:solidFill>
                             <a:srgbClr val="FFFFFF"/>
                           </a:solidFill>
                           <a:latin typeface="Montserrat"/>
                         </a:rPr>
-                        <a:t>Time to impact</a:t>
+                        <a:t>After gates, $M</a:t>
+                      </a:r>
+                    </a:p>
+                    <a:p>
+                      <a:pPr algn="ctr"/>
+                      <a:r>
+                        <a:rPr sz="900" b="0">
+                          <a:solidFill>
+                            <a:srgbClr val="C9D2DF"/>
+                          </a:solidFill>
+                          <a:latin typeface="Lato"/>
+                        </a:rPr>
+                        <a:t>central (range)</a:t>
                       </a:r>
                     </a:p>
                   </a:txBody>
-                  <a:tcPr>
+                  <a:tcPr marL="54864" marR="54864" marT="36576" marB="36576" anchor="ctr">
                     <a:solidFill>
                       <a:srgbClr val="0B1F3A"/>
                     </a:solidFill>
                   </a:tcPr>
                 </a:tc>
               </a:tr>
-              <a:tr h="877824">
+              <a:tr h="768096">
                 <a:tc>
                   <a:txBody>
-                    <a:bodyPr/>
+                    <a:bodyPr wrap="square"/>
                     <a:lstStyle/>
                     <a:p>
+                      <a:pPr algn="l"/>
                       <a:r>
-                        <a:rPr sz="1200">
+                        <a:rPr sz="1200" b="1">
                           <a:solidFill>
-                            <a:srgbClr val="9CA3AF"/>
+                            <a:srgbClr val="0B1F3A"/>
+                          </a:solidFill>
+                          <a:latin typeface="Montserrat"/>
+                        </a:rPr>
+                        <a:t>Stay the Course</a:t>
+                      </a:r>
+                    </a:p>
+                    <a:p>
+                      <a:pPr algn="l"/>
+                      <a:r>
+                        <a:rPr sz="1000" b="0">
+                          <a:solidFill>
+                            <a:srgbClr val="1F2937"/>
                           </a:solidFill>
                           <a:latin typeface="Lato"/>
                         </a:rPr>
-                        <a:t>[Option A]</a:t>
+                        <a:t>Keep the 2025 schedule and absorb the loss</a:t>
                       </a:r>
                     </a:p>
                   </a:txBody>
-                  <a:tcPr>
+                  <a:tcPr marL="54864" marR="54864" marT="36576" marB="36576" anchor="ctr">
                     <a:solidFill>
                       <a:srgbClr val="F3F5F8"/>
                     </a:solidFill>
@@ -9522,21 +12643,160 @@
                 </a:tc>
                 <a:tc>
                   <a:txBody>
-                    <a:bodyPr/>
+                    <a:bodyPr wrap="square"/>
                     <a:lstStyle/>
                     <a:p>
+                      <a:pPr algn="ctr"/>
                       <a:r>
-                        <a:rPr sz="1200">
+                        <a:rPr sz="1300" b="1">
                           <a:solidFill>
-                            <a:srgbClr val="9CA3AF"/>
+                            <a:srgbClr val="1F2937"/>
                           </a:solidFill>
                           <a:latin typeface="Lato"/>
                         </a:rPr>
-                        <a:t>[ ]</a:t>
+                        <a:t>1.0</a:t>
                       </a:r>
                     </a:p>
                   </a:txBody>
-                  <a:tcPr>
+                  <a:tcPr marL="54864" marR="54864" marT="36576" marB="36576" anchor="ctr">
+                    <a:solidFill>
+                      <a:srgbClr val="EEF1F5"/>
+                    </a:solidFill>
+                  </a:tcPr>
+                </a:tc>
+                <a:tc>
+                  <a:txBody>
+                    <a:bodyPr wrap="square"/>
+                    <a:lstStyle/>
+                    <a:p>
+                      <a:pPr algn="ctr"/>
+                      <a:r>
+                        <a:rPr sz="1300" b="1">
+                          <a:solidFill>
+                            <a:srgbClr val="1F2937"/>
+                          </a:solidFill>
+                          <a:latin typeface="Lato"/>
+                        </a:rPr>
+                        <a:t>1</a:t>
+                      </a:r>
+                    </a:p>
+                  </a:txBody>
+                  <a:tcPr marL="54864" marR="54864" marT="36576" marB="36576" anchor="ctr">
+                    <a:solidFill>
+                      <a:srgbClr val="EEF1F5"/>
+                    </a:solidFill>
+                  </a:tcPr>
+                </a:tc>
+                <a:tc>
+                  <a:txBody>
+                    <a:bodyPr wrap="square"/>
+                    <a:lstStyle/>
+                    <a:p>
+                      <a:pPr algn="ctr"/>
+                      <a:r>
+                        <a:rPr sz="1300" b="1">
+                          <a:solidFill>
+                            <a:srgbClr val="1F2937"/>
+                          </a:solidFill>
+                          <a:latin typeface="Lato"/>
+                        </a:rPr>
+                        <a:t>1</a:t>
+                      </a:r>
+                    </a:p>
+                  </a:txBody>
+                  <a:tcPr marL="54864" marR="54864" marT="36576" marB="36576" anchor="ctr">
+                    <a:solidFill>
+                      <a:srgbClr val="EEF1F5"/>
+                    </a:solidFill>
+                  </a:tcPr>
+                </a:tc>
+                <a:tc>
+                  <a:txBody>
+                    <a:bodyPr wrap="square"/>
+                    <a:lstStyle/>
+                    <a:p>
+                      <a:pPr algn="ctr"/>
+                      <a:r>
+                        <a:rPr sz="1300" b="1">
+                          <a:solidFill>
+                            <a:srgbClr val="1F2937"/>
+                          </a:solidFill>
+                          <a:latin typeface="Lato"/>
+                        </a:rPr>
+                        <a:t>3</a:t>
+                      </a:r>
+                    </a:p>
+                  </a:txBody>
+                  <a:tcPr marL="54864" marR="54864" marT="36576" marB="36576" anchor="ctr">
+                    <a:solidFill>
+                      <a:srgbClr val="A9B6C9"/>
+                    </a:solidFill>
+                  </a:tcPr>
+                </a:tc>
+                <a:tc>
+                  <a:txBody>
+                    <a:bodyPr wrap="square"/>
+                    <a:lstStyle/>
+                    <a:p>
+                      <a:pPr algn="ctr"/>
+                      <a:r>
+                        <a:rPr sz="1300" b="1">
+                          <a:solidFill>
+                            <a:srgbClr val="1F2937"/>
+                          </a:solidFill>
+                          <a:latin typeface="Lato"/>
+                        </a:rPr>
+                        <a:t>3</a:t>
+                      </a:r>
+                    </a:p>
+                  </a:txBody>
+                  <a:tcPr marL="54864" marR="54864" marT="36576" marB="36576" anchor="ctr">
+                    <a:solidFill>
+                      <a:srgbClr val="A9B6C9"/>
+                    </a:solidFill>
+                  </a:tcPr>
+                </a:tc>
+                <a:tc>
+                  <a:txBody>
+                    <a:bodyPr wrap="square"/>
+                    <a:lstStyle/>
+                    <a:p>
+                      <a:pPr algn="ctr"/>
+                      <a:r>
+                        <a:rPr sz="1300" b="1">
+                          <a:solidFill>
+                            <a:srgbClr val="1F2937"/>
+                          </a:solidFill>
+                          <a:latin typeface="Lato"/>
+                        </a:rPr>
+                        <a:t>3</a:t>
+                      </a:r>
+                    </a:p>
+                  </a:txBody>
+                  <a:tcPr marL="54864" marR="54864" marT="36576" marB="36576" anchor="ctr">
+                    <a:solidFill>
+                      <a:srgbClr val="A9B6C9"/>
+                    </a:solidFill>
+                  </a:tcPr>
+                </a:tc>
+                <a:tc>
+                  <a:txBody>
+                    <a:bodyPr wrap="square"/>
+                    <a:lstStyle/>
+                    <a:p>
+                      <a:pPr algn="ctr"/>
+                      <a:r>
+                        <a:rPr sz="1600" b="1">
+                          <a:solidFill>
+                            <a:srgbClr val="0B1F3A"/>
+                          </a:solidFill>
+                          <a:latin typeface="Montserrat"/>
+                        </a:rPr>
+                        <a:t>1.9</a:t>
+                      </a:r>
+                    </a:p>
+                  </a:txBody>
+                  <a:tcPr marL="54864" marR="54864" marT="36576" marB="36576" anchor="ctr">
                     <a:solidFill>
                       <a:srgbClr val="F3F5F8"/>
                     </a:solidFill>
@@ -9544,111 +12804,59 @@
                 </a:tc>
                 <a:tc>
                   <a:txBody>
-                    <a:bodyPr/>
+                    <a:bodyPr wrap="square"/>
                     <a:lstStyle/>
                     <a:p>
+                      <a:pPr algn="l"/>
                       <a:r>
-                        <a:rPr sz="1200">
+                        <a:rPr sz="1000" b="1">
                           <a:solidFill>
-                            <a:srgbClr val="9CA3AF"/>
+                            <a:srgbClr val="0B1F3A"/>
                           </a:solidFill>
                           <a:latin typeface="Lato"/>
                         </a:rPr>
-                        <a:t>[ ]</a:t>
+                        <a:t>−58.4</a:t>
                       </a:r>
                     </a:p>
                   </a:txBody>
-                  <a:tcPr>
-                    <a:solidFill>
-                      <a:srgbClr val="F3F5F8"/>
-                    </a:solidFill>
-                  </a:tcPr>
-                </a:tc>
-                <a:tc>
-                  <a:txBody>
-                    <a:bodyPr/>
-                    <a:lstStyle/>
-                    <a:p>
-                      <a:r>
-                        <a:rPr sz="1200">
-                          <a:solidFill>
-                            <a:srgbClr val="9CA3AF"/>
-                          </a:solidFill>
-                          <a:latin typeface="Lato"/>
-                        </a:rPr>
-                        <a:t>[ ]</a:t>
-                      </a:r>
-                    </a:p>
-                  </a:txBody>
-                  <a:tcPr>
-                    <a:solidFill>
-                      <a:srgbClr val="F3F5F8"/>
-                    </a:solidFill>
-                  </a:tcPr>
-                </a:tc>
-                <a:tc>
-                  <a:txBody>
-                    <a:bodyPr/>
-                    <a:lstStyle/>
-                    <a:p>
-                      <a:r>
-                        <a:rPr sz="1200">
-                          <a:solidFill>
-                            <a:srgbClr val="9CA3AF"/>
-                          </a:solidFill>
-                          <a:latin typeface="Lato"/>
-                        </a:rPr>
-                        <a:t>[ ]</a:t>
-                      </a:r>
-                    </a:p>
-                  </a:txBody>
-                  <a:tcPr>
-                    <a:solidFill>
-                      <a:srgbClr val="F3F5F8"/>
-                    </a:solidFill>
-                  </a:tcPr>
-                </a:tc>
-                <a:tc>
-                  <a:txBody>
-                    <a:bodyPr/>
-                    <a:lstStyle/>
-                    <a:p>
-                      <a:r>
-                        <a:rPr sz="1200">
-                          <a:solidFill>
-                            <a:srgbClr val="9CA3AF"/>
-                          </a:solidFill>
-                          <a:latin typeface="Lato"/>
-                        </a:rPr>
-                        <a:t>[ ]</a:t>
-                      </a:r>
-                    </a:p>
-                  </a:txBody>
-                  <a:tcPr>
+                  <a:tcPr marL="54864" marR="54864" marT="36576" marB="36576" anchor="t">
                     <a:solidFill>
                       <a:srgbClr val="F3F5F8"/>
                     </a:solidFill>
                   </a:tcPr>
                 </a:tc>
               </a:tr>
-              <a:tr h="877824">
+              <a:tr h="768096">
                 <a:tc>
                   <a:txBody>
-                    <a:bodyPr/>
+                    <a:bodyPr wrap="square"/>
                     <a:lstStyle/>
                     <a:p>
+                      <a:pPr algn="l"/>
                       <a:r>
-                        <a:rPr sz="1200">
+                        <a:rPr sz="1200" b="1">
                           <a:solidFill>
-                            <a:srgbClr val="9CA3AF"/>
+                            <a:srgbClr val="0B1F3A"/>
+                          </a:solidFill>
+                          <a:latin typeface="Montserrat"/>
+                        </a:rPr>
+                        <a:t>Fill the Planes</a:t>
+                      </a:r>
+                    </a:p>
+                    <a:p>
+                      <a:pPr algn="l"/>
+                      <a:r>
+                        <a:rPr sz="1000" b="0">
+                          <a:solidFill>
+                            <a:srgbClr val="1F2937"/>
                           </a:solidFill>
                           <a:latin typeface="Lato"/>
                         </a:rPr>
-                        <a:t>[Option B]</a:t>
+                        <a:t>Keep every flight; grow revenue to fill the seats</a:t>
                       </a:r>
                     </a:p>
                   </a:txBody>
-                  <a:tcPr>
+                  <a:tcPr marL="54864" marR="54864" marT="36576" marB="36576" anchor="ctr">
                     <a:solidFill>
                       <a:srgbClr val="FFFFFF"/>
                     </a:solidFill>
@@ -9656,21 +12864,160 @@
                 </a:tc>
                 <a:tc>
                   <a:txBody>
-                    <a:bodyPr/>
+                    <a:bodyPr wrap="square"/>
                     <a:lstStyle/>
                     <a:p>
+                      <a:pPr algn="ctr"/>
                       <a:r>
-                        <a:rPr sz="1200">
+                        <a:rPr sz="1300" b="1">
                           <a:solidFill>
-                            <a:srgbClr val="9CA3AF"/>
+                            <a:srgbClr val="1F2937"/>
                           </a:solidFill>
                           <a:latin typeface="Lato"/>
                         </a:rPr>
-                        <a:t>[ ]</a:t>
+                        <a:t>1.4</a:t>
                       </a:r>
                     </a:p>
                   </a:txBody>
-                  <a:tcPr>
+                  <a:tcPr marL="54864" marR="54864" marT="36576" marB="36576" anchor="ctr">
+                    <a:solidFill>
+                      <a:srgbClr val="EEF1F5"/>
+                    </a:solidFill>
+                  </a:tcPr>
+                </a:tc>
+                <a:tc>
+                  <a:txBody>
+                    <a:bodyPr wrap="square"/>
+                    <a:lstStyle/>
+                    <a:p>
+                      <a:pPr algn="ctr"/>
+                      <a:r>
+                        <a:rPr sz="1300" b="1">
+                          <a:solidFill>
+                            <a:srgbClr val="1F2937"/>
+                          </a:solidFill>
+                          <a:latin typeface="Lato"/>
+                        </a:rPr>
+                        <a:t>2</a:t>
+                      </a:r>
+                    </a:p>
+                  </a:txBody>
+                  <a:tcPr marL="54864" marR="54864" marT="36576" marB="36576" anchor="ctr">
+                    <a:solidFill>
+                      <a:srgbClr val="D5DCE6"/>
+                    </a:solidFill>
+                  </a:tcPr>
+                </a:tc>
+                <a:tc>
+                  <a:txBody>
+                    <a:bodyPr wrap="square"/>
+                    <a:lstStyle/>
+                    <a:p>
+                      <a:pPr algn="ctr"/>
+                      <a:r>
+                        <a:rPr sz="1300" b="1">
+                          <a:solidFill>
+                            <a:srgbClr val="1F2937"/>
+                          </a:solidFill>
+                          <a:latin typeface="Lato"/>
+                        </a:rPr>
+                        <a:t>2</a:t>
+                      </a:r>
+                    </a:p>
+                  </a:txBody>
+                  <a:tcPr marL="54864" marR="54864" marT="36576" marB="36576" anchor="ctr">
+                    <a:solidFill>
+                      <a:srgbClr val="D5DCE6"/>
+                    </a:solidFill>
+                  </a:tcPr>
+                </a:tc>
+                <a:tc>
+                  <a:txBody>
+                    <a:bodyPr wrap="square"/>
+                    <a:lstStyle/>
+                    <a:p>
+                      <a:pPr algn="ctr"/>
+                      <a:r>
+                        <a:rPr sz="1300" b="1">
+                          <a:solidFill>
+                            <a:srgbClr val="1F2937"/>
+                          </a:solidFill>
+                          <a:latin typeface="Lato"/>
+                        </a:rPr>
+                        <a:t>3</a:t>
+                      </a:r>
+                    </a:p>
+                  </a:txBody>
+                  <a:tcPr marL="54864" marR="54864" marT="36576" marB="36576" anchor="ctr">
+                    <a:solidFill>
+                      <a:srgbClr val="A9B6C9"/>
+                    </a:solidFill>
+                  </a:tcPr>
+                </a:tc>
+                <a:tc>
+                  <a:txBody>
+                    <a:bodyPr wrap="square"/>
+                    <a:lstStyle/>
+                    <a:p>
+                      <a:pPr algn="ctr"/>
+                      <a:r>
+                        <a:rPr sz="1300" b="1">
+                          <a:solidFill>
+                            <a:srgbClr val="1F2937"/>
+                          </a:solidFill>
+                          <a:latin typeface="Lato"/>
+                        </a:rPr>
+                        <a:t>2</a:t>
+                      </a:r>
+                    </a:p>
+                  </a:txBody>
+                  <a:tcPr marL="54864" marR="54864" marT="36576" marB="36576" anchor="ctr">
+                    <a:solidFill>
+                      <a:srgbClr val="D5DCE6"/>
+                    </a:solidFill>
+                  </a:tcPr>
+                </a:tc>
+                <a:tc>
+                  <a:txBody>
+                    <a:bodyPr wrap="square"/>
+                    <a:lstStyle/>
+                    <a:p>
+                      <a:pPr algn="ctr"/>
+                      <a:r>
+                        <a:rPr sz="1300" b="1">
+                          <a:solidFill>
+                            <a:srgbClr val="1F2937"/>
+                          </a:solidFill>
+                          <a:latin typeface="Lato"/>
+                        </a:rPr>
+                        <a:t>3</a:t>
+                      </a:r>
+                    </a:p>
+                  </a:txBody>
+                  <a:tcPr marL="54864" marR="54864" marT="36576" marB="36576" anchor="ctr">
+                    <a:solidFill>
+                      <a:srgbClr val="A9B6C9"/>
+                    </a:solidFill>
+                  </a:tcPr>
+                </a:tc>
+                <a:tc>
+                  <a:txBody>
+                    <a:bodyPr wrap="square"/>
+                    <a:lstStyle/>
+                    <a:p>
+                      <a:pPr algn="ctr"/>
+                      <a:r>
+                        <a:rPr sz="1600" b="1">
+                          <a:solidFill>
+                            <a:srgbClr val="0B1F3A"/>
+                          </a:solidFill>
+                          <a:latin typeface="Montserrat"/>
+                        </a:rPr>
+                        <a:t>2.1</a:t>
+                      </a:r>
+                    </a:p>
+                  </a:txBody>
+                  <a:tcPr marL="54864" marR="54864" marT="36576" marB="36576" anchor="ctr">
                     <a:solidFill>
                       <a:srgbClr val="FFFFFF"/>
                     </a:solidFill>
@@ -9678,21 +13025,280 @@
                 </a:tc>
                 <a:tc>
                   <a:txBody>
-                    <a:bodyPr/>
+                    <a:bodyPr wrap="square"/>
                     <a:lstStyle/>
                     <a:p>
+                      <a:pPr algn="l"/>
                       <a:r>
-                        <a:rPr sz="1200">
+                        <a:rPr sz="1000" b="1">
                           <a:solidFill>
-                            <a:srgbClr val="9CA3AF"/>
+                            <a:srgbClr val="0B1F3A"/>
                           </a:solidFill>
                           <a:latin typeface="Lato"/>
                         </a:rPr>
-                        <a:t>[ ]</a:t>
+                        <a:t>−53.1  (−55.9 to −28.3)</a:t>
                       </a:r>
                     </a:p>
                   </a:txBody>
-                  <a:tcPr>
+                  <a:tcPr marL="54864" marR="54864" marT="36576" marB="36576" anchor="t">
+                    <a:solidFill>
+                      <a:srgbClr val="FFFFFF"/>
+                    </a:solidFill>
+                  </a:tcPr>
+                </a:tc>
+              </a:tr>
+              <a:tr h="768096">
+                <a:tc>
+                  <a:txBody>
+                    <a:bodyPr wrap="square"/>
+                    <a:lstStyle/>
+                    <a:p>
+                      <a:pPr algn="l"/>
+                      <a:r>
+                        <a:rPr sz="1200" b="1">
+                          <a:solidFill>
+                            <a:srgbClr val="0B1F3A"/>
+                          </a:solidFill>
+                          <a:latin typeface="Montserrat"/>
+                        </a:rPr>
+                        <a:t>Right-Size &amp; Recover</a:t>
+                      </a:r>
+                    </a:p>
+                    <a:p>
+                      <a:pPr algn="l"/>
+                      <a:r>
+                        <a:rPr sz="1000" b="0">
+                          <a:solidFill>
+                            <a:srgbClr val="1F2937"/>
+                          </a:solidFill>
+                          <a:latin typeface="Lato"/>
+                        </a:rPr>
+                        <a:t>Undo 2025 trunk add-ons, exit Montréal–Vancouver, halve 3 new markets, add revenue levers</a:t>
+                      </a:r>
+                    </a:p>
+                  </a:txBody>
+                  <a:tcPr marL="54864" marR="54864" marT="36576" marB="36576" anchor="ctr">
+                    <a:solidFill>
+                      <a:srgbClr val="FFF4EE"/>
+                    </a:solidFill>
+                  </a:tcPr>
+                </a:tc>
+                <a:tc>
+                  <a:txBody>
+                    <a:bodyPr wrap="square"/>
+                    <a:lstStyle/>
+                    <a:p>
+                      <a:pPr algn="ctr"/>
+                      <a:r>
+                        <a:rPr sz="1300" b="1">
+                          <a:solidFill>
+                            <a:srgbClr val="FFFFFF"/>
+                          </a:solidFill>
+                          <a:latin typeface="Lato"/>
+                        </a:rPr>
+                        <a:t>5.0</a:t>
+                      </a:r>
+                    </a:p>
+                  </a:txBody>
+                  <a:tcPr marL="54864" marR="54864" marT="36576" marB="36576" anchor="ctr">
+                    <a:solidFill>
+                      <a:srgbClr val="0B1F3A"/>
+                    </a:solidFill>
+                  </a:tcPr>
+                </a:tc>
+                <a:tc>
+                  <a:txBody>
+                    <a:bodyPr wrap="square"/>
+                    <a:lstStyle/>
+                    <a:p>
+                      <a:pPr algn="ctr"/>
+                      <a:r>
+                        <a:rPr sz="1300" b="1">
+                          <a:solidFill>
+                            <a:srgbClr val="FFFFFF"/>
+                          </a:solidFill>
+                          <a:latin typeface="Lato"/>
+                        </a:rPr>
+                        <a:t>5</a:t>
+                      </a:r>
+                    </a:p>
+                  </a:txBody>
+                  <a:tcPr marL="54864" marR="54864" marT="36576" marB="36576" anchor="ctr">
+                    <a:solidFill>
+                      <a:srgbClr val="0B1F3A"/>
+                    </a:solidFill>
+                  </a:tcPr>
+                </a:tc>
+                <a:tc>
+                  <a:txBody>
+                    <a:bodyPr wrap="square"/>
+                    <a:lstStyle/>
+                    <a:p>
+                      <a:pPr algn="ctr"/>
+                      <a:r>
+                        <a:rPr sz="1300" b="1">
+                          <a:solidFill>
+                            <a:srgbClr val="FFFFFF"/>
+                          </a:solidFill>
+                          <a:latin typeface="Lato"/>
+                        </a:rPr>
+                        <a:t>4</a:t>
+                      </a:r>
+                    </a:p>
+                  </a:txBody>
+                  <a:tcPr marL="54864" marR="54864" marT="36576" marB="36576" anchor="ctr">
+                    <a:solidFill>
+                      <a:srgbClr val="4F6A8F"/>
+                    </a:solidFill>
+                  </a:tcPr>
+                </a:tc>
+                <a:tc>
+                  <a:txBody>
+                    <a:bodyPr wrap="square"/>
+                    <a:lstStyle/>
+                    <a:p>
+                      <a:pPr algn="ctr"/>
+                      <a:r>
+                        <a:rPr sz="1300" b="1">
+                          <a:solidFill>
+                            <a:srgbClr val="FFFFFF"/>
+                          </a:solidFill>
+                          <a:latin typeface="Lato"/>
+                        </a:rPr>
+                        <a:t>4</a:t>
+                      </a:r>
+                    </a:p>
+                  </a:txBody>
+                  <a:tcPr marL="54864" marR="54864" marT="36576" marB="36576" anchor="ctr">
+                    <a:solidFill>
+                      <a:srgbClr val="4F6A8F"/>
+                    </a:solidFill>
+                  </a:tcPr>
+                </a:tc>
+                <a:tc>
+                  <a:txBody>
+                    <a:bodyPr wrap="square"/>
+                    <a:lstStyle/>
+                    <a:p>
+                      <a:pPr algn="ctr"/>
+                      <a:r>
+                        <a:rPr sz="1300" b="1">
+                          <a:solidFill>
+                            <a:srgbClr val="FFFFFF"/>
+                          </a:solidFill>
+                          <a:latin typeface="Lato"/>
+                        </a:rPr>
+                        <a:t>4</a:t>
+                      </a:r>
+                    </a:p>
+                  </a:txBody>
+                  <a:tcPr marL="54864" marR="54864" marT="36576" marB="36576" anchor="ctr">
+                    <a:solidFill>
+                      <a:srgbClr val="4F6A8F"/>
+                    </a:solidFill>
+                  </a:tcPr>
+                </a:tc>
+                <a:tc>
+                  <a:txBody>
+                    <a:bodyPr wrap="square"/>
+                    <a:lstStyle/>
+                    <a:p>
+                      <a:pPr algn="ctr"/>
+                      <a:r>
+                        <a:rPr sz="1300" b="1">
+                          <a:solidFill>
+                            <a:srgbClr val="1F2937"/>
+                          </a:solidFill>
+                          <a:latin typeface="Lato"/>
+                        </a:rPr>
+                        <a:t>3</a:t>
+                      </a:r>
+                    </a:p>
+                  </a:txBody>
+                  <a:tcPr marL="54864" marR="54864" marT="36576" marB="36576" anchor="ctr">
+                    <a:solidFill>
+                      <a:srgbClr val="A9B6C9"/>
+                    </a:solidFill>
+                  </a:tcPr>
+                </a:tc>
+                <a:tc>
+                  <a:txBody>
+                    <a:bodyPr wrap="square"/>
+                    <a:lstStyle/>
+                    <a:p>
+                      <a:pPr algn="ctr"/>
+                      <a:r>
+                        <a:rPr sz="1600" b="1">
+                          <a:solidFill>
+                            <a:srgbClr val="E8692A"/>
+                          </a:solidFill>
+                          <a:latin typeface="Montserrat"/>
+                        </a:rPr>
+                        <a:t>4.3</a:t>
+                      </a:r>
+                    </a:p>
+                  </a:txBody>
+                  <a:tcPr marL="54864" marR="54864" marT="36576" marB="36576" anchor="ctr">
+                    <a:solidFill>
+                      <a:srgbClr val="FFF4EE"/>
+                    </a:solidFill>
+                  </a:tcPr>
+                </a:tc>
+                <a:tc>
+                  <a:txBody>
+                    <a:bodyPr wrap="square"/>
+                    <a:lstStyle/>
+                    <a:p>
+                      <a:pPr algn="l"/>
+                      <a:r>
+                        <a:rPr sz="1000" b="1">
+                          <a:solidFill>
+                            <a:srgbClr val="0B1F3A"/>
+                          </a:solidFill>
+                          <a:latin typeface="Lato"/>
+                        </a:rPr>
+                        <a:t>+1.4  (−16.9 to +5.7)</a:t>
+                      </a:r>
+                    </a:p>
+                  </a:txBody>
+                  <a:tcPr marL="54864" marR="54864" marT="36576" marB="36576" anchor="t">
+                    <a:solidFill>
+                      <a:srgbClr val="FFF4EE"/>
+                    </a:solidFill>
+                  </a:tcPr>
+                </a:tc>
+              </a:tr>
+              <a:tr h="768096">
+                <a:tc>
+                  <a:txBody>
+                    <a:bodyPr wrap="square"/>
+                    <a:lstStyle/>
+                    <a:p>
+                      <a:pPr algn="l"/>
+                      <a:r>
+                        <a:rPr sz="1200" b="1">
+                          <a:solidFill>
+                            <a:srgbClr val="0B1F3A"/>
+                          </a:solidFill>
+                          <a:latin typeface="Montserrat"/>
+                        </a:rPr>
+                        <a:t>Shrink to Core</a:t>
+                      </a:r>
+                    </a:p>
+                    <a:p>
+                      <a:pPr algn="l"/>
+                      <a:r>
+                        <a:rPr sz="1000" b="0">
+                          <a:solidFill>
+                            <a:srgbClr val="1F2937"/>
+                          </a:solidFill>
+                          <a:latin typeface="Lato"/>
+                        </a:rPr>
+                        <a:t>Exit all 22 directions that lose money in every season</a:t>
+                      </a:r>
+                    </a:p>
+                  </a:txBody>
+                  <a:tcPr marL="54864" marR="54864" marT="36576" marB="36576" anchor="ctr">
                     <a:solidFill>
                       <a:srgbClr val="FFFFFF"/>
                     </a:solidFill>
@@ -9700,21 +13306,160 @@
                 </a:tc>
                 <a:tc>
                   <a:txBody>
-                    <a:bodyPr/>
+                    <a:bodyPr wrap="square"/>
                     <a:lstStyle/>
                     <a:p>
+                      <a:pPr algn="ctr"/>
                       <a:r>
-                        <a:rPr sz="1200">
+                        <a:rPr sz="1300" b="1">
                           <a:solidFill>
-                            <a:srgbClr val="9CA3AF"/>
+                            <a:srgbClr val="FFFFFF"/>
                           </a:solidFill>
                           <a:latin typeface="Lato"/>
                         </a:rPr>
-                        <a:t>[ ]</a:t>
+                        <a:t>4.8</a:t>
                       </a:r>
                     </a:p>
                   </a:txBody>
-                  <a:tcPr>
+                  <a:tcPr marL="54864" marR="54864" marT="36576" marB="36576" anchor="ctr">
+                    <a:solidFill>
+                      <a:srgbClr val="0B1F3A"/>
+                    </a:solidFill>
+                  </a:tcPr>
+                </a:tc>
+                <a:tc>
+                  <a:txBody>
+                    <a:bodyPr wrap="square"/>
+                    <a:lstStyle/>
+                    <a:p>
+                      <a:pPr algn="ctr"/>
+                      <a:r>
+                        <a:rPr sz="1300" b="1">
+                          <a:solidFill>
+                            <a:srgbClr val="1F2937"/>
+                          </a:solidFill>
+                          <a:latin typeface="Lato"/>
+                        </a:rPr>
+                        <a:t>3</a:t>
+                      </a:r>
+                    </a:p>
+                  </a:txBody>
+                  <a:tcPr marL="54864" marR="54864" marT="36576" marB="36576" anchor="ctr">
+                    <a:solidFill>
+                      <a:srgbClr val="A9B6C9"/>
+                    </a:solidFill>
+                  </a:tcPr>
+                </a:tc>
+                <a:tc>
+                  <a:txBody>
+                    <a:bodyPr wrap="square"/>
+                    <a:lstStyle/>
+                    <a:p>
+                      <a:pPr algn="ctr"/>
+                      <a:r>
+                        <a:rPr sz="1300" b="1">
+                          <a:solidFill>
+                            <a:srgbClr val="1F2937"/>
+                          </a:solidFill>
+                          <a:latin typeface="Lato"/>
+                        </a:rPr>
+                        <a:t>3</a:t>
+                      </a:r>
+                    </a:p>
+                  </a:txBody>
+                  <a:tcPr marL="54864" marR="54864" marT="36576" marB="36576" anchor="ctr">
+                    <a:solidFill>
+                      <a:srgbClr val="A9B6C9"/>
+                    </a:solidFill>
+                  </a:tcPr>
+                </a:tc>
+                <a:tc>
+                  <a:txBody>
+                    <a:bodyPr wrap="square"/>
+                    <a:lstStyle/>
+                    <a:p>
+                      <a:pPr algn="ctr"/>
+                      <a:r>
+                        <a:rPr sz="1300" b="1">
+                          <a:solidFill>
+                            <a:srgbClr val="1F2937"/>
+                          </a:solidFill>
+                          <a:latin typeface="Lato"/>
+                        </a:rPr>
+                        <a:t>1</a:t>
+                      </a:r>
+                    </a:p>
+                  </a:txBody>
+                  <a:tcPr marL="54864" marR="54864" marT="36576" marB="36576" anchor="ctr">
+                    <a:solidFill>
+                      <a:srgbClr val="EEF1F5"/>
+                    </a:solidFill>
+                  </a:tcPr>
+                </a:tc>
+                <a:tc>
+                  <a:txBody>
+                    <a:bodyPr wrap="square"/>
+                    <a:lstStyle/>
+                    <a:p>
+                      <a:pPr algn="ctr"/>
+                      <a:r>
+                        <a:rPr sz="1300" b="1">
+                          <a:solidFill>
+                            <a:srgbClr val="1F2937"/>
+                          </a:solidFill>
+                          <a:latin typeface="Lato"/>
+                        </a:rPr>
+                        <a:t>2</a:t>
+                      </a:r>
+                    </a:p>
+                  </a:txBody>
+                  <a:tcPr marL="54864" marR="54864" marT="36576" marB="36576" anchor="ctr">
+                    <a:solidFill>
+                      <a:srgbClr val="D5DCE6"/>
+                    </a:solidFill>
+                  </a:tcPr>
+                </a:tc>
+                <a:tc>
+                  <a:txBody>
+                    <a:bodyPr wrap="square"/>
+                    <a:lstStyle/>
+                    <a:p>
+                      <a:pPr algn="ctr"/>
+                      <a:r>
+                        <a:rPr sz="1300" b="1">
+                          <a:solidFill>
+                            <a:srgbClr val="1F2937"/>
+                          </a:solidFill>
+                          <a:latin typeface="Lato"/>
+                        </a:rPr>
+                        <a:t>1</a:t>
+                      </a:r>
+                    </a:p>
+                  </a:txBody>
+                  <a:tcPr marL="54864" marR="54864" marT="36576" marB="36576" anchor="ctr">
+                    <a:solidFill>
+                      <a:srgbClr val="EEF1F5"/>
+                    </a:solidFill>
+                  </a:tcPr>
+                </a:tc>
+                <a:tc>
+                  <a:txBody>
+                    <a:bodyPr wrap="square"/>
+                    <a:lstStyle/>
+                    <a:p>
+                      <a:pPr algn="ctr"/>
+                      <a:r>
+                        <a:rPr sz="1600" b="1">
+                          <a:solidFill>
+                            <a:srgbClr val="0B1F3A"/>
+                          </a:solidFill>
+                          <a:latin typeface="Montserrat"/>
+                        </a:rPr>
+                        <a:t>2.8</a:t>
+                      </a:r>
+                    </a:p>
+                  </a:txBody>
+                  <a:tcPr marL="54864" marR="54864" marT="36576" marB="36576" anchor="ctr">
                     <a:solidFill>
                       <a:srgbClr val="FFFFFF"/>
                     </a:solidFill>
@@ -9722,311 +13467,22 @@
                 </a:tc>
                 <a:tc>
                   <a:txBody>
-                    <a:bodyPr/>
+                    <a:bodyPr wrap="square"/>
                     <a:lstStyle/>
                     <a:p>
+                      <a:pPr algn="l"/>
                       <a:r>
-                        <a:rPr sz="1200">
+                        <a:rPr sz="1000" b="1">
                           <a:solidFill>
-                            <a:srgbClr val="9CA3AF"/>
+                            <a:srgbClr val="0B1F3A"/>
                           </a:solidFill>
                           <a:latin typeface="Lato"/>
                         </a:rPr>
-                        <a:t>[ ]</a:t>
+                        <a:t>−3.4</a:t>
                       </a:r>
                     </a:p>
                   </a:txBody>
-                  <a:tcPr>
-                    <a:solidFill>
-                      <a:srgbClr val="FFFFFF"/>
-                    </a:solidFill>
-                  </a:tcPr>
-                </a:tc>
-                <a:tc>
-                  <a:txBody>
-                    <a:bodyPr/>
-                    <a:lstStyle/>
-                    <a:p>
-                      <a:r>
-                        <a:rPr sz="1200">
-                          <a:solidFill>
-                            <a:srgbClr val="9CA3AF"/>
-                          </a:solidFill>
-                          <a:latin typeface="Lato"/>
-                        </a:rPr>
-                        <a:t>[ ]</a:t>
-                      </a:r>
-                    </a:p>
-                  </a:txBody>
-                  <a:tcPr>
-                    <a:solidFill>
-                      <a:srgbClr val="FFFFFF"/>
-                    </a:solidFill>
-                  </a:tcPr>
-                </a:tc>
-              </a:tr>
-              <a:tr h="877824">
-                <a:tc>
-                  <a:txBody>
-                    <a:bodyPr/>
-                    <a:lstStyle/>
-                    <a:p>
-                      <a:r>
-                        <a:rPr sz="1200">
-                          <a:solidFill>
-                            <a:srgbClr val="9CA3AF"/>
-                          </a:solidFill>
-                          <a:latin typeface="Lato"/>
-                        </a:rPr>
-                        <a:t>[Option C]</a:t>
-                      </a:r>
-                    </a:p>
-                  </a:txBody>
-                  <a:tcPr>
-                    <a:solidFill>
-                      <a:srgbClr val="F3F5F8"/>
-                    </a:solidFill>
-                  </a:tcPr>
-                </a:tc>
-                <a:tc>
-                  <a:txBody>
-                    <a:bodyPr/>
-                    <a:lstStyle/>
-                    <a:p>
-                      <a:r>
-                        <a:rPr sz="1200">
-                          <a:solidFill>
-                            <a:srgbClr val="9CA3AF"/>
-                          </a:solidFill>
-                          <a:latin typeface="Lato"/>
-                        </a:rPr>
-                        <a:t>[ ]</a:t>
-                      </a:r>
-                    </a:p>
-                  </a:txBody>
-                  <a:tcPr>
-                    <a:solidFill>
-                      <a:srgbClr val="F3F5F8"/>
-                    </a:solidFill>
-                  </a:tcPr>
-                </a:tc>
-                <a:tc>
-                  <a:txBody>
-                    <a:bodyPr/>
-                    <a:lstStyle/>
-                    <a:p>
-                      <a:r>
-                        <a:rPr sz="1200">
-                          <a:solidFill>
-                            <a:srgbClr val="9CA3AF"/>
-                          </a:solidFill>
-                          <a:latin typeface="Lato"/>
-                        </a:rPr>
-                        <a:t>[ ]</a:t>
-                      </a:r>
-                    </a:p>
-                  </a:txBody>
-                  <a:tcPr>
-                    <a:solidFill>
-                      <a:srgbClr val="F3F5F8"/>
-                    </a:solidFill>
-                  </a:tcPr>
-                </a:tc>
-                <a:tc>
-                  <a:txBody>
-                    <a:bodyPr/>
-                    <a:lstStyle/>
-                    <a:p>
-                      <a:r>
-                        <a:rPr sz="1200">
-                          <a:solidFill>
-                            <a:srgbClr val="9CA3AF"/>
-                          </a:solidFill>
-                          <a:latin typeface="Lato"/>
-                        </a:rPr>
-                        <a:t>[ ]</a:t>
-                      </a:r>
-                    </a:p>
-                  </a:txBody>
-                  <a:tcPr>
-                    <a:solidFill>
-                      <a:srgbClr val="F3F5F8"/>
-                    </a:solidFill>
-                  </a:tcPr>
-                </a:tc>
-                <a:tc>
-                  <a:txBody>
-                    <a:bodyPr/>
-                    <a:lstStyle/>
-                    <a:p>
-                      <a:r>
-                        <a:rPr sz="1200">
-                          <a:solidFill>
-                            <a:srgbClr val="9CA3AF"/>
-                          </a:solidFill>
-                          <a:latin typeface="Lato"/>
-                        </a:rPr>
-                        <a:t>[ ]</a:t>
-                      </a:r>
-                    </a:p>
-                  </a:txBody>
-                  <a:tcPr>
-                    <a:solidFill>
-                      <a:srgbClr val="F3F5F8"/>
-                    </a:solidFill>
-                  </a:tcPr>
-                </a:tc>
-                <a:tc>
-                  <a:txBody>
-                    <a:bodyPr/>
-                    <a:lstStyle/>
-                    <a:p>
-                      <a:r>
-                        <a:rPr sz="1200">
-                          <a:solidFill>
-                            <a:srgbClr val="9CA3AF"/>
-                          </a:solidFill>
-                          <a:latin typeface="Lato"/>
-                        </a:rPr>
-                        <a:t>[ ]</a:t>
-                      </a:r>
-                    </a:p>
-                  </a:txBody>
-                  <a:tcPr>
-                    <a:solidFill>
-                      <a:srgbClr val="F3F5F8"/>
-                    </a:solidFill>
-                  </a:tcPr>
-                </a:tc>
-              </a:tr>
-              <a:tr h="877824">
-                <a:tc>
-                  <a:txBody>
-                    <a:bodyPr/>
-                    <a:lstStyle/>
-                    <a:p>
-                      <a:r>
-                        <a:rPr sz="1200">
-                          <a:solidFill>
-                            <a:srgbClr val="9CA3AF"/>
-                          </a:solidFill>
-                          <a:latin typeface="Lato"/>
-                        </a:rPr>
-                        <a:t>[Option D]</a:t>
-                      </a:r>
-                    </a:p>
-                  </a:txBody>
-                  <a:tcPr>
-                    <a:solidFill>
-                      <a:srgbClr val="FFFFFF"/>
-                    </a:solidFill>
-                  </a:tcPr>
-                </a:tc>
-                <a:tc>
-                  <a:txBody>
-                    <a:bodyPr/>
-                    <a:lstStyle/>
-                    <a:p>
-                      <a:r>
-                        <a:rPr sz="1200">
-                          <a:solidFill>
-                            <a:srgbClr val="9CA3AF"/>
-                          </a:solidFill>
-                          <a:latin typeface="Lato"/>
-                        </a:rPr>
-                        <a:t>[ ]</a:t>
-                      </a:r>
-                    </a:p>
-                  </a:txBody>
-                  <a:tcPr>
-                    <a:solidFill>
-                      <a:srgbClr val="FFFFFF"/>
-                    </a:solidFill>
-                  </a:tcPr>
-                </a:tc>
-                <a:tc>
-                  <a:txBody>
-                    <a:bodyPr/>
-                    <a:lstStyle/>
-                    <a:p>
-                      <a:r>
-                        <a:rPr sz="1200">
-                          <a:solidFill>
-                            <a:srgbClr val="9CA3AF"/>
-                          </a:solidFill>
-                          <a:latin typeface="Lato"/>
-                        </a:rPr>
-                        <a:t>[ ]</a:t>
-                      </a:r>
-                    </a:p>
-                  </a:txBody>
-                  <a:tcPr>
-                    <a:solidFill>
-                      <a:srgbClr val="FFFFFF"/>
-                    </a:solidFill>
-                  </a:tcPr>
-                </a:tc>
-                <a:tc>
-                  <a:txBody>
-                    <a:bodyPr/>
-                    <a:lstStyle/>
-                    <a:p>
-                      <a:r>
-                        <a:rPr sz="1200">
-                          <a:solidFill>
-                            <a:srgbClr val="9CA3AF"/>
-                          </a:solidFill>
-                          <a:latin typeface="Lato"/>
-                        </a:rPr>
-                        <a:t>[ ]</a:t>
-                      </a:r>
-                    </a:p>
-                  </a:txBody>
-                  <a:tcPr>
-                    <a:solidFill>
-                      <a:srgbClr val="FFFFFF"/>
-                    </a:solidFill>
-                  </a:tcPr>
-                </a:tc>
-                <a:tc>
-                  <a:txBody>
-                    <a:bodyPr/>
-                    <a:lstStyle/>
-                    <a:p>
-                      <a:r>
-                        <a:rPr sz="1200">
-                          <a:solidFill>
-                            <a:srgbClr val="9CA3AF"/>
-                          </a:solidFill>
-                          <a:latin typeface="Lato"/>
-                        </a:rPr>
-                        <a:t>[ ]</a:t>
-                      </a:r>
-                    </a:p>
-                  </a:txBody>
-                  <a:tcPr>
-                    <a:solidFill>
-                      <a:srgbClr val="FFFFFF"/>
-                    </a:solidFill>
-                  </a:tcPr>
-                </a:tc>
-                <a:tc>
-                  <a:txBody>
-                    <a:bodyPr/>
-                    <a:lstStyle/>
-                    <a:p>
-                      <a:r>
-                        <a:rPr sz="1200">
-                          <a:solidFill>
-                            <a:srgbClr val="9CA3AF"/>
-                          </a:solidFill>
-                          <a:latin typeface="Lato"/>
-                        </a:rPr>
-                        <a:t>[ ]</a:t>
-                      </a:r>
-                    </a:p>
-                  </a:txBody>
-                  <a:tcPr>
+                  <a:tcPr marL="54864" marR="54864" marT="36576" marB="36576" anchor="t">
                     <a:solidFill>
                       <a:srgbClr val="FFFFFF"/>
                     </a:solidFill>
@@ -10037,6 +13493,705 @@
           </a:graphicData>
         </a:graphic>
       </p:graphicFrame>
+      <p:sp>
+        <p:nvSpPr>
+          <p:cNvPr id="9" name="Oval 8"/>
+          <p:cNvSpPr/>
+          <p:nvPr/>
+        </p:nvSpPr>
+        <p:spPr>
+          <a:xfrm>
+            <a:off x="9371537" y="2575133"/>
+            <a:ext cx="137160" cy="137160"/>
+          </a:xfrm>
+          <a:prstGeom prst="ellipse">
+            <a:avLst/>
+          </a:prstGeom>
+          <a:solidFill>
+            <a:srgbClr val="0B1F3A"/>
+          </a:solidFill>
+          <a:ln>
+            <a:noFill/>
+          </a:ln>
+          <a:effectLst/>
+        </p:spPr>
+        <p:style>
+          <a:lnRef idx="1">
+            <a:schemeClr val="accent1"/>
+          </a:lnRef>
+          <a:fillRef idx="3">
+            <a:schemeClr val="accent1"/>
+          </a:fillRef>
+          <a:effectRef idx="2">
+            <a:schemeClr val="accent1"/>
+          </a:effectRef>
+          <a:fontRef idx="minor">
+            <a:schemeClr val="lt1"/>
+          </a:fontRef>
+        </p:style>
+        <p:txBody>
+          <a:bodyPr rtlCol="0" anchor="ctr"/>
+          <a:lstStyle/>
+          <a:p>
+            <a:pPr algn="ctr"/>
+          </a:p>
+        </p:txBody>
+      </p:sp>
+      <p:cxnSp>
+        <p:nvCxnSpPr>
+          <p:cNvPr id="10" name="Connector 9"/>
+          <p:cNvCxnSpPr/>
+          <p:nvPr/>
+        </p:nvCxnSpPr>
+        <p:spPr>
+          <a:xfrm>
+            <a:off x="9512404" y="3411809"/>
+            <a:ext cx="798049" cy="0"/>
+          </a:xfrm>
+          <a:prstGeom prst="line">
+            <a:avLst/>
+          </a:prstGeom>
+          <a:ln w="38100">
+            <a:solidFill>
+              <a:srgbClr val="9AAAC0"/>
+            </a:solidFill>
+          </a:ln>
+        </p:spPr>
+        <p:style>
+          <a:lnRef idx="2">
+            <a:schemeClr val="accent1"/>
+          </a:lnRef>
+          <a:fillRef idx="0">
+            <a:schemeClr val="accent1"/>
+          </a:fillRef>
+          <a:effectRef idx="1">
+            <a:schemeClr val="accent1"/>
+          </a:effectRef>
+          <a:fontRef idx="minor">
+            <a:schemeClr val="tx1"/>
+          </a:fontRef>
+        </p:style>
+      </p:cxnSp>
+      <p:sp>
+        <p:nvSpPr>
+          <p:cNvPr id="11" name="Oval 10"/>
+          <p:cNvSpPr/>
+          <p:nvPr/>
+        </p:nvSpPr>
+        <p:spPr>
+          <a:xfrm>
+            <a:off x="9524785" y="3343229"/>
+            <a:ext cx="137160" cy="137160"/>
+          </a:xfrm>
+          <a:prstGeom prst="ellipse">
+            <a:avLst/>
+          </a:prstGeom>
+          <a:solidFill>
+            <a:srgbClr val="0B1F3A"/>
+          </a:solidFill>
+          <a:ln>
+            <a:noFill/>
+          </a:ln>
+          <a:effectLst/>
+        </p:spPr>
+        <p:style>
+          <a:lnRef idx="1">
+            <a:schemeClr val="accent1"/>
+          </a:lnRef>
+          <a:fillRef idx="3">
+            <a:schemeClr val="accent1"/>
+          </a:fillRef>
+          <a:effectRef idx="2">
+            <a:schemeClr val="accent1"/>
+          </a:effectRef>
+          <a:fontRef idx="minor">
+            <a:schemeClr val="lt1"/>
+          </a:fontRef>
+        </p:style>
+        <p:txBody>
+          <a:bodyPr rtlCol="0" anchor="ctr"/>
+          <a:lstStyle/>
+          <a:p>
+            <a:pPr algn="ctr"/>
+          </a:p>
+        </p:txBody>
+      </p:sp>
+      <p:cxnSp>
+        <p:nvCxnSpPr>
+          <p:cNvPr id="12" name="Connector 11"/>
+          <p:cNvCxnSpPr/>
+          <p:nvPr/>
+        </p:nvCxnSpPr>
+        <p:spPr>
+          <a:xfrm>
+            <a:off x="10640660" y="4179905"/>
+            <a:ext cx="653185" cy="0"/>
+          </a:xfrm>
+          <a:prstGeom prst="line">
+            <a:avLst/>
+          </a:prstGeom>
+          <a:ln w="38100">
+            <a:solidFill>
+              <a:srgbClr val="9AAAC0"/>
+            </a:solidFill>
+          </a:ln>
+        </p:spPr>
+        <p:style>
+          <a:lnRef idx="2">
+            <a:schemeClr val="accent1"/>
+          </a:lnRef>
+          <a:fillRef idx="0">
+            <a:schemeClr val="accent1"/>
+          </a:fillRef>
+          <a:effectRef idx="1">
+            <a:schemeClr val="accent1"/>
+          </a:effectRef>
+          <a:fontRef idx="minor">
+            <a:schemeClr val="tx1"/>
+          </a:fontRef>
+        </p:style>
+      </p:cxnSp>
+      <p:sp>
+        <p:nvSpPr>
+          <p:cNvPr id="13" name="Oval 12"/>
+          <p:cNvSpPr/>
+          <p:nvPr/>
+        </p:nvSpPr>
+        <p:spPr>
+          <a:xfrm>
+            <a:off x="11099775" y="4111325"/>
+            <a:ext cx="137160" cy="137160"/>
+          </a:xfrm>
+          <a:prstGeom prst="ellipse">
+            <a:avLst/>
+          </a:prstGeom>
+          <a:solidFill>
+            <a:srgbClr val="E8692A"/>
+          </a:solidFill>
+          <a:ln>
+            <a:noFill/>
+          </a:ln>
+          <a:effectLst/>
+        </p:spPr>
+        <p:style>
+          <a:lnRef idx="1">
+            <a:schemeClr val="accent1"/>
+          </a:lnRef>
+          <a:fillRef idx="3">
+            <a:schemeClr val="accent1"/>
+          </a:fillRef>
+          <a:effectRef idx="2">
+            <a:schemeClr val="accent1"/>
+          </a:effectRef>
+          <a:fontRef idx="minor">
+            <a:schemeClr val="lt1"/>
+          </a:fontRef>
+        </p:style>
+        <p:txBody>
+          <a:bodyPr rtlCol="0" anchor="ctr"/>
+          <a:lstStyle/>
+          <a:p>
+            <a:pPr algn="ctr"/>
+          </a:p>
+        </p:txBody>
+      </p:sp>
+      <p:sp>
+        <p:nvSpPr>
+          <p:cNvPr id="14" name="Oval 13"/>
+          <p:cNvSpPr/>
+          <p:nvPr/>
+        </p:nvSpPr>
+        <p:spPr>
+          <a:xfrm>
+            <a:off x="10960984" y="4879421"/>
+            <a:ext cx="137160" cy="137160"/>
+          </a:xfrm>
+          <a:prstGeom prst="ellipse">
+            <a:avLst/>
+          </a:prstGeom>
+          <a:solidFill>
+            <a:srgbClr val="0B1F3A"/>
+          </a:solidFill>
+          <a:ln>
+            <a:noFill/>
+          </a:ln>
+          <a:effectLst/>
+        </p:spPr>
+        <p:style>
+          <a:lnRef idx="1">
+            <a:schemeClr val="accent1"/>
+          </a:lnRef>
+          <a:fillRef idx="3">
+            <a:schemeClr val="accent1"/>
+          </a:fillRef>
+          <a:effectRef idx="2">
+            <a:schemeClr val="accent1"/>
+          </a:effectRef>
+          <a:fontRef idx="minor">
+            <a:schemeClr val="lt1"/>
+          </a:fontRef>
+        </p:style>
+        <p:txBody>
+          <a:bodyPr rtlCol="0" anchor="ctr"/>
+          <a:lstStyle/>
+          <a:p>
+            <a:pPr algn="ctr"/>
+          </a:p>
+        </p:txBody>
+      </p:sp>
+      <p:cxnSp>
+        <p:nvCxnSpPr>
+          <p:cNvPr id="15" name="Connector 14"/>
+          <p:cNvCxnSpPr/>
+          <p:nvPr/>
+        </p:nvCxnSpPr>
+        <p:spPr>
+          <a:xfrm>
+            <a:off x="11128742" y="2167127"/>
+            <a:ext cx="0" cy="3044952"/>
+          </a:xfrm>
+          <a:prstGeom prst="line">
+            <a:avLst/>
+          </a:prstGeom>
+          <a:ln w="15875">
+            <a:solidFill>
+              <a:srgbClr val="E8692A"/>
+            </a:solidFill>
+            <a:prstDash val="dash"/>
+          </a:ln>
+        </p:spPr>
+        <p:style>
+          <a:lnRef idx="2">
+            <a:schemeClr val="accent1"/>
+          </a:lnRef>
+          <a:fillRef idx="0">
+            <a:schemeClr val="accent1"/>
+          </a:fillRef>
+          <a:effectRef idx="1">
+            <a:schemeClr val="accent1"/>
+          </a:effectRef>
+          <a:fontRef idx="minor">
+            <a:schemeClr val="tx1"/>
+          </a:fontRef>
+        </p:style>
+      </p:cxnSp>
+      <p:sp>
+        <p:nvSpPr>
+          <p:cNvPr id="16" name="TextBox 15"/>
+          <p:cNvSpPr txBox="1"/>
+          <p:nvPr/>
+        </p:nvSpPr>
+        <p:spPr>
+          <a:xfrm>
+            <a:off x="10397222" y="2167127"/>
+            <a:ext cx="685800" cy="182880"/>
+          </a:xfrm>
+          <a:prstGeom prst="rect">
+            <a:avLst/>
+          </a:prstGeom>
+          <a:noFill/>
+        </p:spPr>
+        <p:txBody>
+          <a:bodyPr wrap="square" anchor="t" lIns="0" rIns="0" tIns="0" bIns="0">
+            <a:spAutoFit/>
+          </a:bodyPr>
+          <a:lstStyle/>
+          <a:p>
+            <a:pPr algn="r"/>
+            <a:r>
+              <a:rPr sz="800" b="0" i="0">
+                <a:solidFill>
+                  <a:srgbClr val="E8692A"/>
+                </a:solidFill>
+                <a:latin typeface="Lato"/>
+              </a:rPr>
+              <a:t>break-even</a:t>
+            </a:r>
+          </a:p>
+        </p:txBody>
+      </p:sp>
+      <p:sp>
+        <p:nvSpPr>
+          <p:cNvPr id="17" name="Rectangle 16"/>
+          <p:cNvSpPr/>
+          <p:nvPr/>
+        </p:nvSpPr>
+        <p:spPr>
+          <a:xfrm>
+            <a:off x="548640" y="3657600"/>
+            <a:ext cx="11091672" cy="768096"/>
+          </a:xfrm>
+          <a:prstGeom prst="rect">
+            <a:avLst/>
+          </a:prstGeom>
+          <a:noFill/>
+          <a:ln w="28575">
+            <a:solidFill>
+              <a:srgbClr val="E8692A"/>
+            </a:solidFill>
+          </a:ln>
+          <a:effectLst/>
+        </p:spPr>
+        <p:style>
+          <a:lnRef idx="1">
+            <a:schemeClr val="accent1"/>
+          </a:lnRef>
+          <a:fillRef idx="3">
+            <a:schemeClr val="accent1"/>
+          </a:fillRef>
+          <a:effectRef idx="2">
+            <a:schemeClr val="accent1"/>
+          </a:effectRef>
+          <a:fontRef idx="minor">
+            <a:schemeClr val="lt1"/>
+          </a:fontRef>
+        </p:style>
+        <p:txBody>
+          <a:bodyPr rtlCol="0" anchor="ctr"/>
+          <a:lstStyle/>
+          <a:p>
+            <a:pPr algn="ctr"/>
+          </a:p>
+        </p:txBody>
+      </p:sp>
+      <p:sp>
+        <p:nvSpPr>
+          <p:cNvPr id="18" name="Rounded Rectangle 17"/>
+          <p:cNvSpPr/>
+          <p:nvPr/>
+        </p:nvSpPr>
+        <p:spPr>
+          <a:xfrm>
+            <a:off x="621792" y="3557016"/>
+            <a:ext cx="1115568" cy="201168"/>
+          </a:xfrm>
+          <a:prstGeom prst="roundRect">
+            <a:avLst/>
+          </a:prstGeom>
+          <a:solidFill>
+            <a:srgbClr val="E8692A"/>
+          </a:solidFill>
+          <a:ln>
+            <a:noFill/>
+          </a:ln>
+          <a:effectLst/>
+        </p:spPr>
+        <p:style>
+          <a:lnRef idx="1">
+            <a:schemeClr val="accent1"/>
+          </a:lnRef>
+          <a:fillRef idx="3">
+            <a:schemeClr val="accent1"/>
+          </a:fillRef>
+          <a:effectRef idx="2">
+            <a:schemeClr val="accent1"/>
+          </a:effectRef>
+          <a:fontRef idx="minor">
+            <a:schemeClr val="lt1"/>
+          </a:fontRef>
+        </p:style>
+        <p:txBody>
+          <a:bodyPr rtlCol="0" anchor="ctr" tIns="0" bIns="0" lIns="0" rIns="0"/>
+          <a:lstStyle/>
+          <a:p>
+            <a:pPr algn="ctr"/>
+            <a:r>
+              <a:rPr sz="800" b="1">
+                <a:solidFill>
+                  <a:srgbClr val="FFFFFF"/>
+                </a:solidFill>
+                <a:latin typeface="Montserrat"/>
+              </a:rPr>
+              <a:t>RECOMMENDED</a:t>
+            </a:r>
+          </a:p>
+        </p:txBody>
+      </p:sp>
+      <p:sp>
+        <p:nvSpPr>
+          <p:cNvPr id="19" name="Rectangle 18"/>
+          <p:cNvSpPr/>
+          <p:nvPr/>
+        </p:nvSpPr>
+        <p:spPr>
+          <a:xfrm>
+            <a:off x="548640" y="5303520"/>
+            <a:ext cx="3575304" cy="1005840"/>
+          </a:xfrm>
+          <a:prstGeom prst="rect">
+            <a:avLst/>
+          </a:prstGeom>
+          <a:solidFill>
+            <a:srgbClr val="F3F5F8"/>
+          </a:solidFill>
+          <a:ln>
+            <a:noFill/>
+          </a:ln>
+          <a:effectLst/>
+        </p:spPr>
+        <p:style>
+          <a:lnRef idx="1">
+            <a:schemeClr val="accent1"/>
+          </a:lnRef>
+          <a:fillRef idx="3">
+            <a:schemeClr val="accent1"/>
+          </a:fillRef>
+          <a:effectRef idx="2">
+            <a:schemeClr val="accent1"/>
+          </a:effectRef>
+          <a:fontRef idx="minor">
+            <a:schemeClr val="lt1"/>
+          </a:fontRef>
+        </p:style>
+        <p:txBody>
+          <a:bodyPr rtlCol="0" anchor="ctr"/>
+          <a:lstStyle/>
+          <a:p>
+            <a:pPr algn="ctr"/>
+          </a:p>
+        </p:txBody>
+      </p:sp>
+      <p:sp>
+        <p:nvSpPr>
+          <p:cNvPr id="20" name="TextBox 19"/>
+          <p:cNvSpPr txBox="1"/>
+          <p:nvPr/>
+        </p:nvSpPr>
+        <p:spPr>
+          <a:xfrm>
+            <a:off x="685800" y="5394959"/>
+            <a:ext cx="3300984" cy="868680"/>
+          </a:xfrm>
+          <a:prstGeom prst="rect">
+            <a:avLst/>
+          </a:prstGeom>
+          <a:noFill/>
+        </p:spPr>
+        <p:txBody>
+          <a:bodyPr wrap="square" anchor="t" lIns="0" rIns="0" tIns="0" bIns="0">
+            <a:spAutoFit/>
+          </a:bodyPr>
+          <a:lstStyle/>
+          <a:p>
+            <a:pPr algn="l">
+              <a:spcAft>
+                <a:spcPts val="300"/>
+              </a:spcAft>
+            </a:pPr>
+            <a:r>
+              <a:rPr sz="1100" b="1" i="0">
+                <a:solidFill>
+                  <a:srgbClr val="0B1F3A"/>
+                </a:solidFill>
+                <a:latin typeface="Montserrat"/>
+              </a:rPr>
+              <a:t>Why not Fill the Planes?</a:t>
+            </a:r>
+          </a:p>
+          <a:p>
+            <a:pPr algn="l"/>
+            <a:r>
+              <a:rPr sz="1050" b="0" i="0">
+                <a:solidFill>
+                  <a:srgbClr val="1F2937"/>
+                </a:solidFill>
+                <a:latin typeface="Lato"/>
+              </a:rPr>
+              <a:t>Break-even needs +25.5% revenue (+30.7% after gates): ~5 years at this year's +5% growth. Levers ≈ $5M central; even a $30M ceiling leaves it negative. More trunk flights did not fill.</a:t>
+            </a:r>
+          </a:p>
+        </p:txBody>
+      </p:sp>
+      <p:sp>
+        <p:nvSpPr>
+          <p:cNvPr id="21" name="Rectangle 20"/>
+          <p:cNvSpPr/>
+          <p:nvPr/>
+        </p:nvSpPr>
+        <p:spPr>
+          <a:xfrm>
+            <a:off x="4306824" y="5303520"/>
+            <a:ext cx="3575304" cy="1005840"/>
+          </a:xfrm>
+          <a:prstGeom prst="rect">
+            <a:avLst/>
+          </a:prstGeom>
+          <a:solidFill>
+            <a:srgbClr val="F3F5F8"/>
+          </a:solidFill>
+          <a:ln>
+            <a:noFill/>
+          </a:ln>
+          <a:effectLst/>
+        </p:spPr>
+        <p:style>
+          <a:lnRef idx="1">
+            <a:schemeClr val="accent1"/>
+          </a:lnRef>
+          <a:fillRef idx="3">
+            <a:schemeClr val="accent1"/>
+          </a:fillRef>
+          <a:effectRef idx="2">
+            <a:schemeClr val="accent1"/>
+          </a:effectRef>
+          <a:fontRef idx="minor">
+            <a:schemeClr val="lt1"/>
+          </a:fontRef>
+        </p:style>
+        <p:txBody>
+          <a:bodyPr rtlCol="0" anchor="ctr"/>
+          <a:lstStyle/>
+          <a:p>
+            <a:pPr algn="ctr"/>
+          </a:p>
+        </p:txBody>
+      </p:sp>
+      <p:sp>
+        <p:nvSpPr>
+          <p:cNvPr id="22" name="TextBox 21"/>
+          <p:cNvSpPr txBox="1"/>
+          <p:nvPr/>
+        </p:nvSpPr>
+        <p:spPr>
+          <a:xfrm>
+            <a:off x="4443984" y="5394959"/>
+            <a:ext cx="3300984" cy="868680"/>
+          </a:xfrm>
+          <a:prstGeom prst="rect">
+            <a:avLst/>
+          </a:prstGeom>
+          <a:noFill/>
+        </p:spPr>
+        <p:txBody>
+          <a:bodyPr wrap="square" anchor="t" lIns="0" rIns="0" tIns="0" bIns="0">
+            <a:spAutoFit/>
+          </a:bodyPr>
+          <a:lstStyle/>
+          <a:p>
+            <a:pPr algn="l">
+              <a:spcAft>
+                <a:spcPts val="300"/>
+              </a:spcAft>
+            </a:pPr>
+            <a:r>
+              <a:rPr sz="1100" b="1" i="0">
+                <a:solidFill>
+                  <a:srgbClr val="0B1F3A"/>
+                </a:solidFill>
+                <a:latin typeface="Montserrat"/>
+              </a:rPr>
+              <a:t>Why not Shrink to Core?</a:t>
+            </a:r>
+          </a:p>
+          <a:p>
+            <a:pPr algn="l"/>
+            <a:r>
+              <a:rPr sz="1050" b="0" i="0">
+                <a:solidFill>
+                  <a:srgbClr val="1F2937"/>
+                </a:solidFill>
+                <a:latin typeface="Lato"/>
+              </a:rPr>
+              <a:t>Its −3.4 is more certain, but it drops 6 airports, $8.1M of connecting revenue and 56% of flights. Right-Size leads once ≥66% of the trunk's cut-flight revenue moves to kept flights.</a:t>
+            </a:r>
+          </a:p>
+        </p:txBody>
+      </p:sp>
+      <p:sp>
+        <p:nvSpPr>
+          <p:cNvPr id="23" name="Rectangle 22"/>
+          <p:cNvSpPr/>
+          <p:nvPr/>
+        </p:nvSpPr>
+        <p:spPr>
+          <a:xfrm>
+            <a:off x="8065008" y="5303520"/>
+            <a:ext cx="3575304" cy="1005840"/>
+          </a:xfrm>
+          <a:prstGeom prst="rect">
+            <a:avLst/>
+          </a:prstGeom>
+          <a:solidFill>
+            <a:srgbClr val="F3F5F8"/>
+          </a:solidFill>
+          <a:ln>
+            <a:noFill/>
+          </a:ln>
+          <a:effectLst/>
+        </p:spPr>
+        <p:style>
+          <a:lnRef idx="1">
+            <a:schemeClr val="accent1"/>
+          </a:lnRef>
+          <a:fillRef idx="3">
+            <a:schemeClr val="accent1"/>
+          </a:fillRef>
+          <a:effectRef idx="2">
+            <a:schemeClr val="accent1"/>
+          </a:effectRef>
+          <a:fontRef idx="minor">
+            <a:schemeClr val="lt1"/>
+          </a:fontRef>
+        </p:style>
+        <p:txBody>
+          <a:bodyPr rtlCol="0" anchor="ctr"/>
+          <a:lstStyle/>
+          <a:p>
+            <a:pPr algn="ctr"/>
+          </a:p>
+        </p:txBody>
+      </p:sp>
+      <p:sp>
+        <p:nvSpPr>
+          <p:cNvPr id="24" name="TextBox 23"/>
+          <p:cNvSpPr txBox="1"/>
+          <p:nvPr/>
+        </p:nvSpPr>
+        <p:spPr>
+          <a:xfrm>
+            <a:off x="8202168" y="5394959"/>
+            <a:ext cx="3300984" cy="868680"/>
+          </a:xfrm>
+          <a:prstGeom prst="rect">
+            <a:avLst/>
+          </a:prstGeom>
+          <a:noFill/>
+        </p:spPr>
+        <p:txBody>
+          <a:bodyPr wrap="square" anchor="t" lIns="0" rIns="0" tIns="0" bIns="0">
+            <a:spAutoFit/>
+          </a:bodyPr>
+          <a:lstStyle/>
+          <a:p>
+            <a:pPr algn="l">
+              <a:spcAft>
+                <a:spcPts val="300"/>
+              </a:spcAft>
+            </a:pPr>
+            <a:r>
+              <a:rPr sz="1100" b="1" i="0">
+                <a:solidFill>
+                  <a:srgbClr val="0B1F3A"/>
+                </a:solidFill>
+                <a:latin typeface="Montserrat"/>
+              </a:rPr>
+              <a:t>How we scored</a:t>
+            </a:r>
+          </a:p>
+          <a:p>
+            <a:pPr algn="l"/>
+            <a:r>
+              <a:rPr sz="1050" b="0" i="0">
+                <a:solidFill>
+                  <a:srgbClr val="1F2937"/>
+                </a:solidFill>
+                <a:latin typeface="Lato"/>
+              </a:rPr>
+              <a:t>Safety First is a pass/fail screen: all pass. Financial is linear (−$58.4M = 1, break-even = 5); the rest is team judgement. Even at Right-Size's 0%-recapture low, Shrink needs ≥70% Financial weight.</a:t>
+            </a:r>
+          </a:p>
+        </p:txBody>
+      </p:sp>
     </p:spTree>
   </p:cSld>
   <p:clrMapOvr>
@@ -14420,6 +18575,1705 @@
           </a:prstGeom>
         </p:spPr>
       </p:pic>
+    </p:spTree>
+  </p:cSld>
+  <p:clrMapOvr>
+    <a:masterClrMapping/>
+  </p:clrMapOvr>
+</p:sld>
+</file>
+
+<file path=ppt/slides/slide28.xml><?xml version="1.0" encoding="utf-8"?>
+<p:sld xmlns:a="http://schemas.openxmlformats.org/drawingml/2006/main" xmlns:p="http://schemas.openxmlformats.org/presentationml/2006/main" xmlns:r="http://schemas.openxmlformats.org/officeDocument/2006/relationships">
+  <p:cSld>
+    <p:spTree>
+      <p:nvGrpSpPr>
+        <p:cNvPr id="1" name=""/>
+        <p:cNvGrpSpPr/>
+        <p:nvPr/>
+      </p:nvGrpSpPr>
+      <p:grpSpPr/>
+      <p:sp>
+        <p:nvSpPr>
+          <p:cNvPr id="2" name="Rectangle 1"/>
+          <p:cNvSpPr/>
+          <p:nvPr/>
+        </p:nvSpPr>
+        <p:spPr>
+          <a:xfrm>
+            <a:off x="0" y="0"/>
+            <a:ext cx="12191695" cy="109728"/>
+          </a:xfrm>
+          <a:prstGeom prst="rect">
+            <a:avLst/>
+          </a:prstGeom>
+          <a:solidFill>
+            <a:srgbClr val="0B1F3A"/>
+          </a:solidFill>
+          <a:ln>
+            <a:noFill/>
+          </a:ln>
+          <a:effectLst/>
+        </p:spPr>
+        <p:style>
+          <a:lnRef idx="1">
+            <a:schemeClr val="accent1"/>
+          </a:lnRef>
+          <a:fillRef idx="3">
+            <a:schemeClr val="accent1"/>
+          </a:fillRef>
+          <a:effectRef idx="2">
+            <a:schemeClr val="accent1"/>
+          </a:effectRef>
+          <a:fontRef idx="minor">
+            <a:schemeClr val="lt1"/>
+          </a:fontRef>
+        </p:style>
+        <p:txBody>
+          <a:bodyPr rtlCol="0" anchor="ctr"/>
+          <a:lstStyle/>
+          <a:p>
+            <a:pPr algn="ctr"/>
+          </a:p>
+        </p:txBody>
+      </p:sp>
+      <p:sp>
+        <p:nvSpPr>
+          <p:cNvPr id="3" name="TextBox 2"/>
+          <p:cNvSpPr txBox="1"/>
+          <p:nvPr/>
+        </p:nvSpPr>
+        <p:spPr>
+          <a:xfrm>
+            <a:off x="548640" y="320040"/>
+            <a:ext cx="8229600" cy="274320"/>
+          </a:xfrm>
+          <a:prstGeom prst="rect">
+            <a:avLst/>
+          </a:prstGeom>
+          <a:noFill/>
+        </p:spPr>
+        <p:txBody>
+          <a:bodyPr wrap="square" anchor="t">
+            <a:spAutoFit/>
+          </a:bodyPr>
+          <a:lstStyle/>
+          <a:p>
+            <a:pPr algn="l">
+              <a:spcAft>
+                <a:spcPts val="600"/>
+              </a:spcAft>
+            </a:pPr>
+            <a:r>
+              <a:rPr sz="1100" b="1">
+                <a:solidFill>
+                  <a:srgbClr val="E8692A"/>
+                </a:solidFill>
+                <a:latin typeface="Montserrat"/>
+              </a:rPr>
+              <a:t>APPENDIX · STRATEGIC LENS</a:t>
+            </a:r>
+          </a:p>
+        </p:txBody>
+      </p:sp>
+      <p:sp>
+        <p:nvSpPr>
+          <p:cNvPr id="4" name="TextBox 3"/>
+          <p:cNvSpPr txBox="1"/>
+          <p:nvPr/>
+        </p:nvSpPr>
+        <p:spPr>
+          <a:xfrm>
+            <a:off x="548640" y="566928"/>
+            <a:ext cx="11064240" cy="914400"/>
+          </a:xfrm>
+          <a:prstGeom prst="rect">
+            <a:avLst/>
+          </a:prstGeom>
+          <a:noFill/>
+        </p:spPr>
+        <p:txBody>
+          <a:bodyPr wrap="square" anchor="t">
+            <a:spAutoFit/>
+          </a:bodyPr>
+          <a:lstStyle/>
+          <a:p>
+            <a:pPr algn="l">
+              <a:spcAft>
+                <a:spcPts val="600"/>
+              </a:spcAft>
+            </a:pPr>
+            <a:r>
+              <a:rPr sz="2400" b="1">
+                <a:solidFill>
+                  <a:srgbClr val="0B1F3A"/>
+                </a:solidFill>
+                <a:latin typeface="Montserrat"/>
+              </a:rPr>
+              <a:t>Five Forces explains why extra frequency failed; SWOT shows what any fix must protect</a:t>
+            </a:r>
+          </a:p>
+        </p:txBody>
+      </p:sp>
+      <p:sp>
+        <p:nvSpPr>
+          <p:cNvPr id="5" name="Rectangle 4"/>
+          <p:cNvSpPr/>
+          <p:nvPr/>
+        </p:nvSpPr>
+        <p:spPr>
+          <a:xfrm>
+            <a:off x="548640" y="6400800"/>
+            <a:ext cx="11091672" cy="9144"/>
+          </a:xfrm>
+          <a:prstGeom prst="rect">
+            <a:avLst/>
+          </a:prstGeom>
+          <a:solidFill>
+            <a:srgbClr val="F3F5F8"/>
+          </a:solidFill>
+          <a:ln>
+            <a:noFill/>
+          </a:ln>
+          <a:effectLst/>
+        </p:spPr>
+        <p:style>
+          <a:lnRef idx="1">
+            <a:schemeClr val="accent1"/>
+          </a:lnRef>
+          <a:fillRef idx="3">
+            <a:schemeClr val="accent1"/>
+          </a:fillRef>
+          <a:effectRef idx="2">
+            <a:schemeClr val="accent1"/>
+          </a:effectRef>
+          <a:fontRef idx="minor">
+            <a:schemeClr val="lt1"/>
+          </a:fontRef>
+        </p:style>
+        <p:txBody>
+          <a:bodyPr rtlCol="0" anchor="ctr"/>
+          <a:lstStyle/>
+          <a:p>
+            <a:pPr algn="ctr"/>
+          </a:p>
+        </p:txBody>
+      </p:sp>
+      <p:sp>
+        <p:nvSpPr>
+          <p:cNvPr id="6" name="TextBox 5"/>
+          <p:cNvSpPr txBox="1"/>
+          <p:nvPr/>
+        </p:nvSpPr>
+        <p:spPr>
+          <a:xfrm>
+            <a:off x="548640" y="6446520"/>
+            <a:ext cx="9601200" cy="274320"/>
+          </a:xfrm>
+          <a:prstGeom prst="rect">
+            <a:avLst/>
+          </a:prstGeom>
+          <a:noFill/>
+        </p:spPr>
+        <p:txBody>
+          <a:bodyPr wrap="square" anchor="t">
+            <a:spAutoFit/>
+          </a:bodyPr>
+          <a:lstStyle/>
+          <a:p>
+            <a:pPr algn="l">
+              <a:spcAft>
+                <a:spcPts val="600"/>
+              </a:spcAft>
+            </a:pPr>
+            <a:r>
+              <a:rPr sz="900" b="0">
+                <a:solidFill>
+                  <a:srgbClr val="6B7280"/>
+                </a:solidFill>
+                <a:latin typeface="Lato"/>
+              </a:rPr>
+              <a:t>Source: Case package p.6–10 (market context) and team analysis of FY25-26 data. * = inference, not stated in the case.</a:t>
+            </a:r>
+          </a:p>
+        </p:txBody>
+      </p:sp>
+      <p:sp>
+        <p:nvSpPr>
+          <p:cNvPr id="7" name="TextBox 6"/>
+          <p:cNvSpPr txBox="1"/>
+          <p:nvPr/>
+        </p:nvSpPr>
+        <p:spPr>
+          <a:xfrm>
+            <a:off x="10972800" y="6446520"/>
+            <a:ext cx="667512" cy="274320"/>
+          </a:xfrm>
+          <a:prstGeom prst="rect">
+            <a:avLst/>
+          </a:prstGeom>
+          <a:noFill/>
+        </p:spPr>
+        <p:txBody>
+          <a:bodyPr wrap="square" anchor="t">
+            <a:spAutoFit/>
+          </a:bodyPr>
+          <a:lstStyle/>
+          <a:p>
+            <a:pPr algn="r">
+              <a:spcAft>
+                <a:spcPts val="600"/>
+              </a:spcAft>
+            </a:pPr>
+            <a:r>
+              <a:rPr sz="900" b="0">
+                <a:solidFill>
+                  <a:srgbClr val="6B7280"/>
+                </a:solidFill>
+                <a:latin typeface="Lato"/>
+              </a:rPr>
+              <a:t>28</a:t>
+            </a:r>
+          </a:p>
+        </p:txBody>
+      </p:sp>
+      <p:sp>
+        <p:nvSpPr>
+          <p:cNvPr id="8" name="TextBox 7"/>
+          <p:cNvSpPr txBox="1"/>
+          <p:nvPr/>
+        </p:nvSpPr>
+        <p:spPr>
+          <a:xfrm>
+            <a:off x="548640" y="1481328"/>
+            <a:ext cx="5486400" cy="274320"/>
+          </a:xfrm>
+          <a:prstGeom prst="rect">
+            <a:avLst/>
+          </a:prstGeom>
+          <a:noFill/>
+        </p:spPr>
+        <p:txBody>
+          <a:bodyPr wrap="square" anchor="t" lIns="0" rIns="0" tIns="0" bIns="0">
+            <a:spAutoFit/>
+          </a:bodyPr>
+          <a:lstStyle/>
+          <a:p>
+            <a:pPr algn="l"/>
+            <a:r>
+              <a:rPr sz="1300" b="1" i="0">
+                <a:solidFill>
+                  <a:srgbClr val="0B1F3A"/>
+                </a:solidFill>
+                <a:latin typeface="Montserrat"/>
+              </a:rPr>
+              <a:t>Porter's Five Forces: Canadian domestic air</a:t>
+            </a:r>
+          </a:p>
+        </p:txBody>
+      </p:sp>
+      <p:sp>
+        <p:nvSpPr>
+          <p:cNvPr id="9" name="Rectangle 8"/>
+          <p:cNvSpPr/>
+          <p:nvPr/>
+        </p:nvSpPr>
+        <p:spPr>
+          <a:xfrm>
+            <a:off x="548640" y="1828800"/>
+            <a:ext cx="5486400" cy="786384"/>
+          </a:xfrm>
+          <a:prstGeom prst="rect">
+            <a:avLst/>
+          </a:prstGeom>
+          <a:solidFill>
+            <a:srgbClr val="F3F5F8"/>
+          </a:solidFill>
+          <a:ln>
+            <a:noFill/>
+          </a:ln>
+          <a:effectLst/>
+        </p:spPr>
+        <p:style>
+          <a:lnRef idx="1">
+            <a:schemeClr val="accent1"/>
+          </a:lnRef>
+          <a:fillRef idx="3">
+            <a:schemeClr val="accent1"/>
+          </a:fillRef>
+          <a:effectRef idx="2">
+            <a:schemeClr val="accent1"/>
+          </a:effectRef>
+          <a:fontRef idx="minor">
+            <a:schemeClr val="lt1"/>
+          </a:fontRef>
+        </p:style>
+        <p:txBody>
+          <a:bodyPr rtlCol="0" anchor="ctr"/>
+          <a:lstStyle/>
+          <a:p>
+            <a:pPr algn="ctr"/>
+          </a:p>
+        </p:txBody>
+      </p:sp>
+      <p:sp>
+        <p:nvSpPr>
+          <p:cNvPr id="10" name="TextBox 9"/>
+          <p:cNvSpPr txBox="1"/>
+          <p:nvPr/>
+        </p:nvSpPr>
+        <p:spPr>
+          <a:xfrm>
+            <a:off x="685800" y="1920240"/>
+            <a:ext cx="1463040" cy="274320"/>
+          </a:xfrm>
+          <a:prstGeom prst="rect">
+            <a:avLst/>
+          </a:prstGeom>
+          <a:noFill/>
+        </p:spPr>
+        <p:txBody>
+          <a:bodyPr wrap="square" anchor="t" lIns="0" rIns="0" tIns="0" bIns="0">
+            <a:spAutoFit/>
+          </a:bodyPr>
+          <a:lstStyle/>
+          <a:p>
+            <a:pPr algn="l"/>
+            <a:r>
+              <a:rPr sz="1200" b="1" i="0">
+                <a:solidFill>
+                  <a:srgbClr val="0B1F3A"/>
+                </a:solidFill>
+                <a:latin typeface="Montserrat"/>
+              </a:rPr>
+              <a:t>Rivalry</a:t>
+            </a:r>
+          </a:p>
+        </p:txBody>
+      </p:sp>
+      <p:sp>
+        <p:nvSpPr>
+          <p:cNvPr id="11" name="Rounded Rectangle 10"/>
+          <p:cNvSpPr/>
+          <p:nvPr/>
+        </p:nvSpPr>
+        <p:spPr>
+          <a:xfrm>
+            <a:off x="685800" y="2240280"/>
+            <a:ext cx="777240" cy="237744"/>
+          </a:xfrm>
+          <a:prstGeom prst="roundRect">
+            <a:avLst/>
+          </a:prstGeom>
+          <a:solidFill>
+            <a:srgbClr val="E8692A"/>
+          </a:solidFill>
+          <a:ln>
+            <a:noFill/>
+          </a:ln>
+          <a:effectLst/>
+        </p:spPr>
+        <p:style>
+          <a:lnRef idx="1">
+            <a:schemeClr val="accent1"/>
+          </a:lnRef>
+          <a:fillRef idx="3">
+            <a:schemeClr val="accent1"/>
+          </a:fillRef>
+          <a:effectRef idx="2">
+            <a:schemeClr val="accent1"/>
+          </a:effectRef>
+          <a:fontRef idx="minor">
+            <a:schemeClr val="lt1"/>
+          </a:fontRef>
+        </p:style>
+        <p:txBody>
+          <a:bodyPr rtlCol="0" anchor="ctr" tIns="0" bIns="0" lIns="0" rIns="0"/>
+          <a:lstStyle/>
+          <a:p>
+            <a:pPr algn="ctr"/>
+            <a:r>
+              <a:rPr sz="900" b="1">
+                <a:solidFill>
+                  <a:srgbClr val="FFFFFF"/>
+                </a:solidFill>
+                <a:latin typeface="Lato"/>
+              </a:rPr>
+              <a:t>High</a:t>
+            </a:r>
+          </a:p>
+        </p:txBody>
+      </p:sp>
+      <p:sp>
+        <p:nvSpPr>
+          <p:cNvPr id="12" name="TextBox 11"/>
+          <p:cNvSpPr txBox="1"/>
+          <p:nvPr/>
+        </p:nvSpPr>
+        <p:spPr>
+          <a:xfrm>
+            <a:off x="2240280" y="1901952"/>
+            <a:ext cx="3703320" cy="658368"/>
+          </a:xfrm>
+          <a:prstGeom prst="rect">
+            <a:avLst/>
+          </a:prstGeom>
+          <a:noFill/>
+        </p:spPr>
+        <p:txBody>
+          <a:bodyPr wrap="square" anchor="ctr" lIns="0" rIns="0" tIns="0" bIns="0">
+            <a:spAutoFit/>
+          </a:bodyPr>
+          <a:lstStyle/>
+          <a:p>
+            <a:pPr algn="l"/>
+            <a:r>
+              <a:rPr sz="1050" b="0" i="0">
+                <a:solidFill>
+                  <a:srgbClr val="1F2937"/>
+                </a:solidFill>
+                <a:latin typeface="Lato"/>
+              </a:rPr>
+              <a:t>Two national carriers plus low-cost airlines (case). Trunk fares fell ~8% when frequency doubled.</a:t>
+            </a:r>
+          </a:p>
+        </p:txBody>
+      </p:sp>
+      <p:sp>
+        <p:nvSpPr>
+          <p:cNvPr id="13" name="Rectangle 12"/>
+          <p:cNvSpPr/>
+          <p:nvPr/>
+        </p:nvSpPr>
+        <p:spPr>
+          <a:xfrm>
+            <a:off x="548640" y="2706624"/>
+            <a:ext cx="5486400" cy="786384"/>
+          </a:xfrm>
+          <a:prstGeom prst="rect">
+            <a:avLst/>
+          </a:prstGeom>
+          <a:solidFill>
+            <a:srgbClr val="F3F5F8"/>
+          </a:solidFill>
+          <a:ln>
+            <a:noFill/>
+          </a:ln>
+          <a:effectLst/>
+        </p:spPr>
+        <p:style>
+          <a:lnRef idx="1">
+            <a:schemeClr val="accent1"/>
+          </a:lnRef>
+          <a:fillRef idx="3">
+            <a:schemeClr val="accent1"/>
+          </a:fillRef>
+          <a:effectRef idx="2">
+            <a:schemeClr val="accent1"/>
+          </a:effectRef>
+          <a:fontRef idx="minor">
+            <a:schemeClr val="lt1"/>
+          </a:fontRef>
+        </p:style>
+        <p:txBody>
+          <a:bodyPr rtlCol="0" anchor="ctr"/>
+          <a:lstStyle/>
+          <a:p>
+            <a:pPr algn="ctr"/>
+          </a:p>
+        </p:txBody>
+      </p:sp>
+      <p:sp>
+        <p:nvSpPr>
+          <p:cNvPr id="14" name="TextBox 13"/>
+          <p:cNvSpPr txBox="1"/>
+          <p:nvPr/>
+        </p:nvSpPr>
+        <p:spPr>
+          <a:xfrm>
+            <a:off x="685800" y="2798064"/>
+            <a:ext cx="1463040" cy="274320"/>
+          </a:xfrm>
+          <a:prstGeom prst="rect">
+            <a:avLst/>
+          </a:prstGeom>
+          <a:noFill/>
+        </p:spPr>
+        <p:txBody>
+          <a:bodyPr wrap="square" anchor="t" lIns="0" rIns="0" tIns="0" bIns="0">
+            <a:spAutoFit/>
+          </a:bodyPr>
+          <a:lstStyle/>
+          <a:p>
+            <a:pPr algn="l"/>
+            <a:r>
+              <a:rPr sz="1200" b="1" i="0">
+                <a:solidFill>
+                  <a:srgbClr val="0B1F3A"/>
+                </a:solidFill>
+                <a:latin typeface="Montserrat"/>
+              </a:rPr>
+              <a:t>Buyer power</a:t>
+            </a:r>
+          </a:p>
+        </p:txBody>
+      </p:sp>
+      <p:sp>
+        <p:nvSpPr>
+          <p:cNvPr id="15" name="Rounded Rectangle 14"/>
+          <p:cNvSpPr/>
+          <p:nvPr/>
+        </p:nvSpPr>
+        <p:spPr>
+          <a:xfrm>
+            <a:off x="685800" y="3118104"/>
+            <a:ext cx="777240" cy="237744"/>
+          </a:xfrm>
+          <a:prstGeom prst="roundRect">
+            <a:avLst/>
+          </a:prstGeom>
+          <a:solidFill>
+            <a:srgbClr val="E8692A"/>
+          </a:solidFill>
+          <a:ln>
+            <a:noFill/>
+          </a:ln>
+          <a:effectLst/>
+        </p:spPr>
+        <p:style>
+          <a:lnRef idx="1">
+            <a:schemeClr val="accent1"/>
+          </a:lnRef>
+          <a:fillRef idx="3">
+            <a:schemeClr val="accent1"/>
+          </a:fillRef>
+          <a:effectRef idx="2">
+            <a:schemeClr val="accent1"/>
+          </a:effectRef>
+          <a:fontRef idx="minor">
+            <a:schemeClr val="lt1"/>
+          </a:fontRef>
+        </p:style>
+        <p:txBody>
+          <a:bodyPr rtlCol="0" anchor="ctr" tIns="0" bIns="0" lIns="0" rIns="0"/>
+          <a:lstStyle/>
+          <a:p>
+            <a:pPr algn="ctr"/>
+            <a:r>
+              <a:rPr sz="900" b="1">
+                <a:solidFill>
+                  <a:srgbClr val="FFFFFF"/>
+                </a:solidFill>
+                <a:latin typeface="Lato"/>
+              </a:rPr>
+              <a:t>High</a:t>
+            </a:r>
+          </a:p>
+        </p:txBody>
+      </p:sp>
+      <p:sp>
+        <p:nvSpPr>
+          <p:cNvPr id="16" name="TextBox 15"/>
+          <p:cNvSpPr txBox="1"/>
+          <p:nvPr/>
+        </p:nvSpPr>
+        <p:spPr>
+          <a:xfrm>
+            <a:off x="2240280" y="2779776"/>
+            <a:ext cx="3703320" cy="658368"/>
+          </a:xfrm>
+          <a:prstGeom prst="rect">
+            <a:avLst/>
+          </a:prstGeom>
+          <a:noFill/>
+        </p:spPr>
+        <p:txBody>
+          <a:bodyPr wrap="square" anchor="ctr" lIns="0" rIns="0" tIns="0" bIns="0">
+            <a:spAutoFit/>
+          </a:bodyPr>
+          <a:lstStyle/>
+          <a:p>
+            <a:pPr algn="l"/>
+            <a:r>
+              <a:rPr sz="1050" b="0" i="0">
+                <a:solidFill>
+                  <a:srgbClr val="1F2937"/>
+                </a:solidFill>
+                <a:latin typeface="Lato"/>
+              </a:rPr>
+              <a:t>Price-sensitive travellers (case); OTAs sell 20% of ticket revenue. Extra seats sold only at lower fares.</a:t>
+            </a:r>
+          </a:p>
+        </p:txBody>
+      </p:sp>
+      <p:sp>
+        <p:nvSpPr>
+          <p:cNvPr id="17" name="Rectangle 16"/>
+          <p:cNvSpPr/>
+          <p:nvPr/>
+        </p:nvSpPr>
+        <p:spPr>
+          <a:xfrm>
+            <a:off x="548640" y="3584448"/>
+            <a:ext cx="5486400" cy="786384"/>
+          </a:xfrm>
+          <a:prstGeom prst="rect">
+            <a:avLst/>
+          </a:prstGeom>
+          <a:solidFill>
+            <a:srgbClr val="F3F5F8"/>
+          </a:solidFill>
+          <a:ln>
+            <a:noFill/>
+          </a:ln>
+          <a:effectLst/>
+        </p:spPr>
+        <p:style>
+          <a:lnRef idx="1">
+            <a:schemeClr val="accent1"/>
+          </a:lnRef>
+          <a:fillRef idx="3">
+            <a:schemeClr val="accent1"/>
+          </a:fillRef>
+          <a:effectRef idx="2">
+            <a:schemeClr val="accent1"/>
+          </a:effectRef>
+          <a:fontRef idx="minor">
+            <a:schemeClr val="lt1"/>
+          </a:fontRef>
+        </p:style>
+        <p:txBody>
+          <a:bodyPr rtlCol="0" anchor="ctr"/>
+          <a:lstStyle/>
+          <a:p>
+            <a:pPr algn="ctr"/>
+          </a:p>
+        </p:txBody>
+      </p:sp>
+      <p:sp>
+        <p:nvSpPr>
+          <p:cNvPr id="18" name="TextBox 17"/>
+          <p:cNvSpPr txBox="1"/>
+          <p:nvPr/>
+        </p:nvSpPr>
+        <p:spPr>
+          <a:xfrm>
+            <a:off x="685800" y="3675887"/>
+            <a:ext cx="1463040" cy="274320"/>
+          </a:xfrm>
+          <a:prstGeom prst="rect">
+            <a:avLst/>
+          </a:prstGeom>
+          <a:noFill/>
+        </p:spPr>
+        <p:txBody>
+          <a:bodyPr wrap="square" anchor="t" lIns="0" rIns="0" tIns="0" bIns="0">
+            <a:spAutoFit/>
+          </a:bodyPr>
+          <a:lstStyle/>
+          <a:p>
+            <a:pPr algn="l"/>
+            <a:r>
+              <a:rPr sz="1200" b="1" i="0">
+                <a:solidFill>
+                  <a:srgbClr val="0B1F3A"/>
+                </a:solidFill>
+                <a:latin typeface="Montserrat"/>
+              </a:rPr>
+              <a:t>Supplier power</a:t>
+            </a:r>
+          </a:p>
+        </p:txBody>
+      </p:sp>
+      <p:sp>
+        <p:nvSpPr>
+          <p:cNvPr id="19" name="Rounded Rectangle 18"/>
+          <p:cNvSpPr/>
+          <p:nvPr/>
+        </p:nvSpPr>
+        <p:spPr>
+          <a:xfrm>
+            <a:off x="685800" y="3995928"/>
+            <a:ext cx="777240" cy="237744"/>
+          </a:xfrm>
+          <a:prstGeom prst="roundRect">
+            <a:avLst/>
+          </a:prstGeom>
+          <a:solidFill>
+            <a:srgbClr val="E8692A"/>
+          </a:solidFill>
+          <a:ln>
+            <a:noFill/>
+          </a:ln>
+          <a:effectLst/>
+        </p:spPr>
+        <p:style>
+          <a:lnRef idx="1">
+            <a:schemeClr val="accent1"/>
+          </a:lnRef>
+          <a:fillRef idx="3">
+            <a:schemeClr val="accent1"/>
+          </a:fillRef>
+          <a:effectRef idx="2">
+            <a:schemeClr val="accent1"/>
+          </a:effectRef>
+          <a:fontRef idx="minor">
+            <a:schemeClr val="lt1"/>
+          </a:fontRef>
+        </p:style>
+        <p:txBody>
+          <a:bodyPr rtlCol="0" anchor="ctr" tIns="0" bIns="0" lIns="0" rIns="0"/>
+          <a:lstStyle/>
+          <a:p>
+            <a:pPr algn="ctr"/>
+            <a:r>
+              <a:rPr sz="900" b="1">
+                <a:solidFill>
+                  <a:srgbClr val="FFFFFF"/>
+                </a:solidFill>
+                <a:latin typeface="Lato"/>
+              </a:rPr>
+              <a:t>High</a:t>
+            </a:r>
+          </a:p>
+        </p:txBody>
+      </p:sp>
+      <p:sp>
+        <p:nvSpPr>
+          <p:cNvPr id="20" name="TextBox 19"/>
+          <p:cNvSpPr txBox="1"/>
+          <p:nvPr/>
+        </p:nvSpPr>
+        <p:spPr>
+          <a:xfrm>
+            <a:off x="2240280" y="3657600"/>
+            <a:ext cx="3703320" cy="658368"/>
+          </a:xfrm>
+          <a:prstGeom prst="rect">
+            <a:avLst/>
+          </a:prstGeom>
+          <a:noFill/>
+        </p:spPr>
+        <p:txBody>
+          <a:bodyPr wrap="square" anchor="ctr" lIns="0" rIns="0" tIns="0" bIns="0">
+            <a:spAutoFit/>
+          </a:bodyPr>
+          <a:lstStyle/>
+          <a:p>
+            <a:pPr algn="l"/>
+            <a:r>
+              <a:rPr sz="1050" b="0" i="0">
+                <a:solidFill>
+                  <a:srgbClr val="1F2937"/>
+                </a:solidFill>
+                <a:latin typeface="Lato"/>
+              </a:rPr>
+              <a:t>Volatile fuel, pilot shortage, high airport fees (case). Same route &amp; month: fuel +8.7%, crew +8.5%.</a:t>
+            </a:r>
+          </a:p>
+        </p:txBody>
+      </p:sp>
+      <p:sp>
+        <p:nvSpPr>
+          <p:cNvPr id="21" name="Rectangle 20"/>
+          <p:cNvSpPr/>
+          <p:nvPr/>
+        </p:nvSpPr>
+        <p:spPr>
+          <a:xfrm>
+            <a:off x="548640" y="4462272"/>
+            <a:ext cx="5486400" cy="786384"/>
+          </a:xfrm>
+          <a:prstGeom prst="rect">
+            <a:avLst/>
+          </a:prstGeom>
+          <a:solidFill>
+            <a:srgbClr val="F3F5F8"/>
+          </a:solidFill>
+          <a:ln>
+            <a:noFill/>
+          </a:ln>
+          <a:effectLst/>
+        </p:spPr>
+        <p:style>
+          <a:lnRef idx="1">
+            <a:schemeClr val="accent1"/>
+          </a:lnRef>
+          <a:fillRef idx="3">
+            <a:schemeClr val="accent1"/>
+          </a:fillRef>
+          <a:effectRef idx="2">
+            <a:schemeClr val="accent1"/>
+          </a:effectRef>
+          <a:fontRef idx="minor">
+            <a:schemeClr val="lt1"/>
+          </a:fontRef>
+        </p:style>
+        <p:txBody>
+          <a:bodyPr rtlCol="0" anchor="ctr"/>
+          <a:lstStyle/>
+          <a:p>
+            <a:pPr algn="ctr"/>
+          </a:p>
+        </p:txBody>
+      </p:sp>
+      <p:sp>
+        <p:nvSpPr>
+          <p:cNvPr id="22" name="TextBox 21"/>
+          <p:cNvSpPr txBox="1"/>
+          <p:nvPr/>
+        </p:nvSpPr>
+        <p:spPr>
+          <a:xfrm>
+            <a:off x="685800" y="4553712"/>
+            <a:ext cx="1463040" cy="274320"/>
+          </a:xfrm>
+          <a:prstGeom prst="rect">
+            <a:avLst/>
+          </a:prstGeom>
+          <a:noFill/>
+        </p:spPr>
+        <p:txBody>
+          <a:bodyPr wrap="square" anchor="t" lIns="0" rIns="0" tIns="0" bIns="0">
+            <a:spAutoFit/>
+          </a:bodyPr>
+          <a:lstStyle/>
+          <a:p>
+            <a:pPr algn="l"/>
+            <a:r>
+              <a:rPr sz="1200" b="1" i="0">
+                <a:solidFill>
+                  <a:srgbClr val="0B1F3A"/>
+                </a:solidFill>
+                <a:latin typeface="Montserrat"/>
+              </a:rPr>
+              <a:t>New entrants</a:t>
+            </a:r>
+          </a:p>
+        </p:txBody>
+      </p:sp>
+      <p:sp>
+        <p:nvSpPr>
+          <p:cNvPr id="23" name="Rounded Rectangle 22"/>
+          <p:cNvSpPr/>
+          <p:nvPr/>
+        </p:nvSpPr>
+        <p:spPr>
+          <a:xfrm>
+            <a:off x="685800" y="4873752"/>
+            <a:ext cx="777240" cy="237744"/>
+          </a:xfrm>
+          <a:prstGeom prst="roundRect">
+            <a:avLst/>
+          </a:prstGeom>
+          <a:solidFill>
+            <a:srgbClr val="F4A97F"/>
+          </a:solidFill>
+          <a:ln>
+            <a:noFill/>
+          </a:ln>
+          <a:effectLst/>
+        </p:spPr>
+        <p:style>
+          <a:lnRef idx="1">
+            <a:schemeClr val="accent1"/>
+          </a:lnRef>
+          <a:fillRef idx="3">
+            <a:schemeClr val="accent1"/>
+          </a:fillRef>
+          <a:effectRef idx="2">
+            <a:schemeClr val="accent1"/>
+          </a:effectRef>
+          <a:fontRef idx="minor">
+            <a:schemeClr val="lt1"/>
+          </a:fontRef>
+        </p:style>
+        <p:txBody>
+          <a:bodyPr rtlCol="0" anchor="ctr" tIns="0" bIns="0" lIns="0" rIns="0"/>
+          <a:lstStyle/>
+          <a:p>
+            <a:pPr algn="ctr"/>
+            <a:r>
+              <a:rPr sz="900" b="1">
+                <a:solidFill>
+                  <a:srgbClr val="FFFFFF"/>
+                </a:solidFill>
+                <a:latin typeface="Lato"/>
+              </a:rPr>
+              <a:t>Medium</a:t>
+            </a:r>
+          </a:p>
+        </p:txBody>
+      </p:sp>
+      <p:sp>
+        <p:nvSpPr>
+          <p:cNvPr id="24" name="TextBox 23"/>
+          <p:cNvSpPr txBox="1"/>
+          <p:nvPr/>
+        </p:nvSpPr>
+        <p:spPr>
+          <a:xfrm>
+            <a:off x="2240280" y="4535424"/>
+            <a:ext cx="3703320" cy="658368"/>
+          </a:xfrm>
+          <a:prstGeom prst="rect">
+            <a:avLst/>
+          </a:prstGeom>
+          <a:noFill/>
+        </p:spPr>
+        <p:txBody>
+          <a:bodyPr wrap="square" anchor="ctr" lIns="0" rIns="0" tIns="0" bIns="0">
+            <a:spAutoFit/>
+          </a:bodyPr>
+          <a:lstStyle/>
+          <a:p>
+            <a:pPr algn="l"/>
+            <a:r>
+              <a:rPr sz="1050" b="0" i="0">
+                <a:solidFill>
+                  <a:srgbClr val="1F2937"/>
+                </a:solidFill>
+                <a:latin typeface="Lato"/>
+              </a:rPr>
+              <a:t>Newer carriers expanded, then scaled back or shut down (case): the path NorthByte took in 2025.*</a:t>
+            </a:r>
+          </a:p>
+        </p:txBody>
+      </p:sp>
+      <p:sp>
+        <p:nvSpPr>
+          <p:cNvPr id="25" name="Rectangle 24"/>
+          <p:cNvSpPr/>
+          <p:nvPr/>
+        </p:nvSpPr>
+        <p:spPr>
+          <a:xfrm>
+            <a:off x="548640" y="5340096"/>
+            <a:ext cx="5486400" cy="786384"/>
+          </a:xfrm>
+          <a:prstGeom prst="rect">
+            <a:avLst/>
+          </a:prstGeom>
+          <a:solidFill>
+            <a:srgbClr val="F3F5F8"/>
+          </a:solidFill>
+          <a:ln>
+            <a:noFill/>
+          </a:ln>
+          <a:effectLst/>
+        </p:spPr>
+        <p:style>
+          <a:lnRef idx="1">
+            <a:schemeClr val="accent1"/>
+          </a:lnRef>
+          <a:fillRef idx="3">
+            <a:schemeClr val="accent1"/>
+          </a:fillRef>
+          <a:effectRef idx="2">
+            <a:schemeClr val="accent1"/>
+          </a:effectRef>
+          <a:fontRef idx="minor">
+            <a:schemeClr val="lt1"/>
+          </a:fontRef>
+        </p:style>
+        <p:txBody>
+          <a:bodyPr rtlCol="0" anchor="ctr"/>
+          <a:lstStyle/>
+          <a:p>
+            <a:pPr algn="ctr"/>
+          </a:p>
+        </p:txBody>
+      </p:sp>
+      <p:sp>
+        <p:nvSpPr>
+          <p:cNvPr id="26" name="TextBox 25"/>
+          <p:cNvSpPr txBox="1"/>
+          <p:nvPr/>
+        </p:nvSpPr>
+        <p:spPr>
+          <a:xfrm>
+            <a:off x="685800" y="5431536"/>
+            <a:ext cx="1463040" cy="274320"/>
+          </a:xfrm>
+          <a:prstGeom prst="rect">
+            <a:avLst/>
+          </a:prstGeom>
+          <a:noFill/>
+        </p:spPr>
+        <p:txBody>
+          <a:bodyPr wrap="square" anchor="t" lIns="0" rIns="0" tIns="0" bIns="0">
+            <a:spAutoFit/>
+          </a:bodyPr>
+          <a:lstStyle/>
+          <a:p>
+            <a:pPr algn="l"/>
+            <a:r>
+              <a:rPr sz="1200" b="1" i="0">
+                <a:solidFill>
+                  <a:srgbClr val="0B1F3A"/>
+                </a:solidFill>
+                <a:latin typeface="Montserrat"/>
+              </a:rPr>
+              <a:t>Substitutes</a:t>
+            </a:r>
+          </a:p>
+        </p:txBody>
+      </p:sp>
+      <p:sp>
+        <p:nvSpPr>
+          <p:cNvPr id="27" name="Rounded Rectangle 26"/>
+          <p:cNvSpPr/>
+          <p:nvPr/>
+        </p:nvSpPr>
+        <p:spPr>
+          <a:xfrm>
+            <a:off x="685800" y="5751576"/>
+            <a:ext cx="777240" cy="237744"/>
+          </a:xfrm>
+          <a:prstGeom prst="roundRect">
+            <a:avLst/>
+          </a:prstGeom>
+          <a:solidFill>
+            <a:srgbClr val="D1D5DB"/>
+          </a:solidFill>
+          <a:ln>
+            <a:noFill/>
+          </a:ln>
+          <a:effectLst/>
+        </p:spPr>
+        <p:style>
+          <a:lnRef idx="1">
+            <a:schemeClr val="accent1"/>
+          </a:lnRef>
+          <a:fillRef idx="3">
+            <a:schemeClr val="accent1"/>
+          </a:fillRef>
+          <a:effectRef idx="2">
+            <a:schemeClr val="accent1"/>
+          </a:effectRef>
+          <a:fontRef idx="minor">
+            <a:schemeClr val="lt1"/>
+          </a:fontRef>
+        </p:style>
+        <p:txBody>
+          <a:bodyPr rtlCol="0" anchor="ctr" tIns="0" bIns="0" lIns="0" rIns="0"/>
+          <a:lstStyle/>
+          <a:p>
+            <a:pPr algn="ctr"/>
+            <a:r>
+              <a:rPr sz="900" b="1">
+                <a:solidFill>
+                  <a:srgbClr val="1F2937"/>
+                </a:solidFill>
+                <a:latin typeface="Lato"/>
+              </a:rPr>
+              <a:t>Low</a:t>
+            </a:r>
+          </a:p>
+        </p:txBody>
+      </p:sp>
+      <p:sp>
+        <p:nvSpPr>
+          <p:cNvPr id="28" name="TextBox 27"/>
+          <p:cNvSpPr txBox="1"/>
+          <p:nvPr/>
+        </p:nvSpPr>
+        <p:spPr>
+          <a:xfrm>
+            <a:off x="2240280" y="5413248"/>
+            <a:ext cx="3703320" cy="658368"/>
+          </a:xfrm>
+          <a:prstGeom prst="rect">
+            <a:avLst/>
+          </a:prstGeom>
+          <a:noFill/>
+        </p:spPr>
+        <p:txBody>
+          <a:bodyPr wrap="square" anchor="ctr" lIns="0" rIns="0" tIns="0" bIns="0">
+            <a:spAutoFit/>
+          </a:bodyPr>
+          <a:lstStyle/>
+          <a:p>
+            <a:pPr algn="l"/>
+            <a:r>
+              <a:rPr sz="1050" b="0" i="0">
+                <a:solidFill>
+                  <a:srgbClr val="1F2937"/>
+                </a:solidFill>
+                <a:latin typeface="Lato"/>
+              </a:rPr>
+              <a:t>Long distances and small communities: demand on community routes is captive.*</a:t>
+            </a:r>
+          </a:p>
+        </p:txBody>
+      </p:sp>
+      <p:sp>
+        <p:nvSpPr>
+          <p:cNvPr id="29" name="TextBox 28"/>
+          <p:cNvSpPr txBox="1"/>
+          <p:nvPr/>
+        </p:nvSpPr>
+        <p:spPr>
+          <a:xfrm>
+            <a:off x="6355080" y="1481328"/>
+            <a:ext cx="5303520" cy="274320"/>
+          </a:xfrm>
+          <a:prstGeom prst="rect">
+            <a:avLst/>
+          </a:prstGeom>
+          <a:noFill/>
+        </p:spPr>
+        <p:txBody>
+          <a:bodyPr wrap="square" anchor="t" lIns="0" rIns="0" tIns="0" bIns="0">
+            <a:spAutoFit/>
+          </a:bodyPr>
+          <a:lstStyle/>
+          <a:p>
+            <a:pPr algn="l"/>
+            <a:r>
+              <a:rPr sz="1300" b="1" i="0">
+                <a:solidFill>
+                  <a:srgbClr val="0B1F3A"/>
+                </a:solidFill>
+                <a:latin typeface="Montserrat"/>
+              </a:rPr>
+              <a:t>SWOT: NorthByte</a:t>
+            </a:r>
+          </a:p>
+        </p:txBody>
+      </p:sp>
+      <p:sp>
+        <p:nvSpPr>
+          <p:cNvPr id="30" name="Rectangle 29"/>
+          <p:cNvSpPr/>
+          <p:nvPr/>
+        </p:nvSpPr>
+        <p:spPr>
+          <a:xfrm>
+            <a:off x="6355080" y="1828800"/>
+            <a:ext cx="2596896" cy="2121408"/>
+          </a:xfrm>
+          <a:prstGeom prst="rect">
+            <a:avLst/>
+          </a:prstGeom>
+          <a:solidFill>
+            <a:srgbClr val="FFFFFF"/>
+          </a:solidFill>
+          <a:ln w="12700">
+            <a:solidFill>
+              <a:srgbClr val="D1D5DB"/>
+            </a:solidFill>
+          </a:ln>
+          <a:effectLst/>
+        </p:spPr>
+        <p:style>
+          <a:lnRef idx="1">
+            <a:schemeClr val="accent1"/>
+          </a:lnRef>
+          <a:fillRef idx="3">
+            <a:schemeClr val="accent1"/>
+          </a:fillRef>
+          <a:effectRef idx="2">
+            <a:schemeClr val="accent1"/>
+          </a:effectRef>
+          <a:fontRef idx="minor">
+            <a:schemeClr val="lt1"/>
+          </a:fontRef>
+        </p:style>
+        <p:txBody>
+          <a:bodyPr rtlCol="0" anchor="ctr"/>
+          <a:lstStyle/>
+          <a:p>
+            <a:pPr algn="ctr"/>
+          </a:p>
+        </p:txBody>
+      </p:sp>
+      <p:sp>
+        <p:nvSpPr>
+          <p:cNvPr id="31" name="TextBox 30"/>
+          <p:cNvSpPr txBox="1"/>
+          <p:nvPr/>
+        </p:nvSpPr>
+        <p:spPr>
+          <a:xfrm>
+            <a:off x="6483096" y="1938528"/>
+            <a:ext cx="2340863" cy="1938527"/>
+          </a:xfrm>
+          <a:prstGeom prst="rect">
+            <a:avLst/>
+          </a:prstGeom>
+          <a:noFill/>
+        </p:spPr>
+        <p:txBody>
+          <a:bodyPr wrap="square" anchor="t" lIns="0" rIns="0" tIns="0" bIns="0">
+            <a:spAutoFit/>
+          </a:bodyPr>
+          <a:lstStyle/>
+          <a:p>
+            <a:pPr algn="l">
+              <a:spcAft>
+                <a:spcPts val="400"/>
+              </a:spcAft>
+            </a:pPr>
+            <a:r>
+              <a:rPr sz="1200" b="1" i="0">
+                <a:solidFill>
+                  <a:srgbClr val="2E7D5B"/>
+                </a:solidFill>
+                <a:latin typeface="Montserrat"/>
+              </a:rPr>
+              <a:t>Strengths</a:t>
+            </a:r>
+          </a:p>
+          <a:p>
+            <a:pPr algn="l">
+              <a:spcAft>
+                <a:spcPts val="400"/>
+              </a:spcAft>
+            </a:pPr>
+            <a:r>
+              <a:rPr sz="1050" b="0" i="0">
+                <a:solidFill>
+                  <a:srgbClr val="1F2937"/>
+                </a:solidFill>
+                <a:latin typeface="Lato"/>
+              </a:rPr>
+              <a:t>•  Rest of network earns +$10.6M before gates</a:t>
+            </a:r>
+          </a:p>
+          <a:p>
+            <a:pPr algn="l">
+              <a:spcAft>
+                <a:spcPts val="400"/>
+              </a:spcAft>
+            </a:pPr>
+            <a:r>
+              <a:rPr sz="1050" b="0" i="0">
+                <a:solidFill>
+                  <a:srgbClr val="1F2937"/>
+                </a:solidFill>
+                <a:latin typeface="Lato"/>
+              </a:rPr>
+              <a:t>•  12,644 connection-compatible bookings</a:t>
+            </a:r>
+          </a:p>
+          <a:p>
+            <a:pPr algn="l">
+              <a:spcAft>
+                <a:spcPts val="400"/>
+              </a:spcAft>
+            </a:pPr>
+            <a:r>
+              <a:rPr sz="1050" b="0" i="0">
+                <a:solidFill>
+                  <a:srgbClr val="1F2937"/>
+                </a:solidFill>
+                <a:latin typeface="Lato"/>
+              </a:rPr>
+              <a:t>•  Community routes the mission is built on (case)</a:t>
+            </a:r>
+          </a:p>
+        </p:txBody>
+      </p:sp>
+      <p:sp>
+        <p:nvSpPr>
+          <p:cNvPr id="32" name="Rectangle 31"/>
+          <p:cNvSpPr/>
+          <p:nvPr/>
+        </p:nvSpPr>
+        <p:spPr>
+          <a:xfrm>
+            <a:off x="9061704" y="1828800"/>
+            <a:ext cx="2596896" cy="2121408"/>
+          </a:xfrm>
+          <a:prstGeom prst="rect">
+            <a:avLst/>
+          </a:prstGeom>
+          <a:solidFill>
+            <a:srgbClr val="FFFFFF"/>
+          </a:solidFill>
+          <a:ln w="12700">
+            <a:solidFill>
+              <a:srgbClr val="D1D5DB"/>
+            </a:solidFill>
+          </a:ln>
+          <a:effectLst/>
+        </p:spPr>
+        <p:style>
+          <a:lnRef idx="1">
+            <a:schemeClr val="accent1"/>
+          </a:lnRef>
+          <a:fillRef idx="3">
+            <a:schemeClr val="accent1"/>
+          </a:fillRef>
+          <a:effectRef idx="2">
+            <a:schemeClr val="accent1"/>
+          </a:effectRef>
+          <a:fontRef idx="minor">
+            <a:schemeClr val="lt1"/>
+          </a:fontRef>
+        </p:style>
+        <p:txBody>
+          <a:bodyPr rtlCol="0" anchor="ctr"/>
+          <a:lstStyle/>
+          <a:p>
+            <a:pPr algn="ctr"/>
+          </a:p>
+        </p:txBody>
+      </p:sp>
+      <p:sp>
+        <p:nvSpPr>
+          <p:cNvPr id="33" name="TextBox 32"/>
+          <p:cNvSpPr txBox="1"/>
+          <p:nvPr/>
+        </p:nvSpPr>
+        <p:spPr>
+          <a:xfrm>
+            <a:off x="9189720" y="1938528"/>
+            <a:ext cx="2340863" cy="1938527"/>
+          </a:xfrm>
+          <a:prstGeom prst="rect">
+            <a:avLst/>
+          </a:prstGeom>
+          <a:noFill/>
+        </p:spPr>
+        <p:txBody>
+          <a:bodyPr wrap="square" anchor="t" lIns="0" rIns="0" tIns="0" bIns="0">
+            <a:spAutoFit/>
+          </a:bodyPr>
+          <a:lstStyle/>
+          <a:p>
+            <a:pPr algn="l">
+              <a:spcAft>
+                <a:spcPts val="400"/>
+              </a:spcAft>
+            </a:pPr>
+            <a:r>
+              <a:rPr sz="1200" b="1" i="0">
+                <a:solidFill>
+                  <a:srgbClr val="E8692A"/>
+                </a:solidFill>
+                <a:latin typeface="Montserrat"/>
+              </a:rPr>
+              <a:t>Weaknesses → issues</a:t>
+            </a:r>
+          </a:p>
+          <a:p>
+            <a:pPr algn="l">
+              <a:spcAft>
+                <a:spcPts val="400"/>
+              </a:spcAft>
+            </a:pPr>
+            <a:r>
+              <a:rPr sz="1050" b="0" i="0">
+                <a:solidFill>
+                  <a:srgbClr val="1F2937"/>
+                </a:solidFill>
+                <a:latin typeface="Lato"/>
+              </a:rPr>
+              <a:t>•  No route-level P&amp;L (case p.10)</a:t>
+            </a:r>
+          </a:p>
+          <a:p>
+            <a:pPr algn="l">
+              <a:spcAft>
+                <a:spcPts val="400"/>
+              </a:spcAft>
+            </a:pPr>
+            <a:r>
+              <a:rPr sz="1050" b="0" i="0">
+                <a:solidFill>
+                  <a:srgbClr val="1F2937"/>
+                </a:solidFill>
+                <a:latin typeface="Lato"/>
+              </a:rPr>
+              <a:t>•  Frequency added faster than demand: trunk tickets/flight −44% (Sep–Feb)</a:t>
+            </a:r>
+          </a:p>
+          <a:p>
+            <a:pPr algn="l">
+              <a:spcAft>
+                <a:spcPts val="400"/>
+              </a:spcAft>
+            </a:pPr>
+            <a:r>
+              <a:rPr sz="1050" b="0" i="0">
+                <a:solidFill>
+                  <a:srgbClr val="1F2937"/>
+                </a:solidFill>
+                <a:latin typeface="Lato"/>
+              </a:rPr>
+              <a:t>•  New markets cover only a third of their cost</a:t>
+            </a:r>
+          </a:p>
+        </p:txBody>
+      </p:sp>
+      <p:sp>
+        <p:nvSpPr>
+          <p:cNvPr id="34" name="Rectangle 33"/>
+          <p:cNvSpPr/>
+          <p:nvPr/>
+        </p:nvSpPr>
+        <p:spPr>
+          <a:xfrm>
+            <a:off x="6355080" y="4059935"/>
+            <a:ext cx="2596896" cy="2121408"/>
+          </a:xfrm>
+          <a:prstGeom prst="rect">
+            <a:avLst/>
+          </a:prstGeom>
+          <a:solidFill>
+            <a:srgbClr val="FFFFFF"/>
+          </a:solidFill>
+          <a:ln w="12700">
+            <a:solidFill>
+              <a:srgbClr val="D1D5DB"/>
+            </a:solidFill>
+          </a:ln>
+          <a:effectLst/>
+        </p:spPr>
+        <p:style>
+          <a:lnRef idx="1">
+            <a:schemeClr val="accent1"/>
+          </a:lnRef>
+          <a:fillRef idx="3">
+            <a:schemeClr val="accent1"/>
+          </a:fillRef>
+          <a:effectRef idx="2">
+            <a:schemeClr val="accent1"/>
+          </a:effectRef>
+          <a:fontRef idx="minor">
+            <a:schemeClr val="lt1"/>
+          </a:fontRef>
+        </p:style>
+        <p:txBody>
+          <a:bodyPr rtlCol="0" anchor="ctr"/>
+          <a:lstStyle/>
+          <a:p>
+            <a:pPr algn="ctr"/>
+          </a:p>
+        </p:txBody>
+      </p:sp>
+      <p:sp>
+        <p:nvSpPr>
+          <p:cNvPr id="35" name="TextBox 34"/>
+          <p:cNvSpPr txBox="1"/>
+          <p:nvPr/>
+        </p:nvSpPr>
+        <p:spPr>
+          <a:xfrm>
+            <a:off x="6483096" y="4169663"/>
+            <a:ext cx="2340863" cy="1938527"/>
+          </a:xfrm>
+          <a:prstGeom prst="rect">
+            <a:avLst/>
+          </a:prstGeom>
+          <a:noFill/>
+        </p:spPr>
+        <p:txBody>
+          <a:bodyPr wrap="square" anchor="t" lIns="0" rIns="0" tIns="0" bIns="0">
+            <a:spAutoFit/>
+          </a:bodyPr>
+          <a:lstStyle/>
+          <a:p>
+            <a:pPr algn="l">
+              <a:spcAft>
+                <a:spcPts val="400"/>
+              </a:spcAft>
+            </a:pPr>
+            <a:r>
+              <a:rPr sz="1200" b="1" i="0">
+                <a:solidFill>
+                  <a:srgbClr val="0B1F3A"/>
+                </a:solidFill>
+                <a:latin typeface="Montserrat"/>
+              </a:rPr>
+              <a:t>Opportunities</a:t>
+            </a:r>
+          </a:p>
+          <a:p>
+            <a:pPr algn="l">
+              <a:spcAft>
+                <a:spcPts val="400"/>
+              </a:spcAft>
+            </a:pPr>
+            <a:r>
+              <a:rPr sz="1050" b="0" i="0">
+                <a:solidFill>
+                  <a:srgbClr val="1F2937"/>
+                </a:solidFill>
+                <a:latin typeface="Lato"/>
+              </a:rPr>
+              <a:t>•  Record passenger demand (case p.7)</a:t>
+            </a:r>
+          </a:p>
+          <a:p>
+            <a:pPr algn="l">
+              <a:spcAft>
+                <a:spcPts val="400"/>
+              </a:spcAft>
+            </a:pPr>
+            <a:r>
+              <a:rPr sz="1050" b="0" i="0">
+                <a:solidFill>
+                  <a:srgbClr val="1F2937"/>
+                </a:solidFill>
+                <a:latin typeface="Lato"/>
+              </a:rPr>
+              <a:t>•  Seasonal flex flying (summer, December); OTA → direct</a:t>
+            </a:r>
+          </a:p>
+          <a:p>
+            <a:pPr algn="l">
+              <a:spcAft>
+                <a:spcPts val="400"/>
+              </a:spcAft>
+            </a:pPr>
+            <a:r>
+              <a:rPr sz="1050" b="0" i="0">
+                <a:solidFill>
+                  <a:srgbClr val="1F2937"/>
+                </a:solidFill>
+                <a:latin typeface="Lato"/>
+              </a:rPr>
+              <a:t>•  Release 2 unassigned gates at the Jan 2027 renewal (≥$0.43M/yr)</a:t>
+            </a:r>
+          </a:p>
+        </p:txBody>
+      </p:sp>
+      <p:sp>
+        <p:nvSpPr>
+          <p:cNvPr id="36" name="Rectangle 35"/>
+          <p:cNvSpPr/>
+          <p:nvPr/>
+        </p:nvSpPr>
+        <p:spPr>
+          <a:xfrm>
+            <a:off x="9061704" y="4059935"/>
+            <a:ext cx="2596896" cy="2121408"/>
+          </a:xfrm>
+          <a:prstGeom prst="rect">
+            <a:avLst/>
+          </a:prstGeom>
+          <a:solidFill>
+            <a:srgbClr val="FFFFFF"/>
+          </a:solidFill>
+          <a:ln w="12700">
+            <a:solidFill>
+              <a:srgbClr val="D1D5DB"/>
+            </a:solidFill>
+          </a:ln>
+          <a:effectLst/>
+        </p:spPr>
+        <p:style>
+          <a:lnRef idx="1">
+            <a:schemeClr val="accent1"/>
+          </a:lnRef>
+          <a:fillRef idx="3">
+            <a:schemeClr val="accent1"/>
+          </a:fillRef>
+          <a:effectRef idx="2">
+            <a:schemeClr val="accent1"/>
+          </a:effectRef>
+          <a:fontRef idx="minor">
+            <a:schemeClr val="lt1"/>
+          </a:fontRef>
+        </p:style>
+        <p:txBody>
+          <a:bodyPr rtlCol="0" anchor="ctr"/>
+          <a:lstStyle/>
+          <a:p>
+            <a:pPr algn="ctr"/>
+          </a:p>
+        </p:txBody>
+      </p:sp>
+      <p:sp>
+        <p:nvSpPr>
+          <p:cNvPr id="37" name="TextBox 36"/>
+          <p:cNvSpPr txBox="1"/>
+          <p:nvPr/>
+        </p:nvSpPr>
+        <p:spPr>
+          <a:xfrm>
+            <a:off x="9189720" y="4169663"/>
+            <a:ext cx="2340863" cy="1938527"/>
+          </a:xfrm>
+          <a:prstGeom prst="rect">
+            <a:avLst/>
+          </a:prstGeom>
+          <a:noFill/>
+        </p:spPr>
+        <p:txBody>
+          <a:bodyPr wrap="square" anchor="t" lIns="0" rIns="0" tIns="0" bIns="0">
+            <a:spAutoFit/>
+          </a:bodyPr>
+          <a:lstStyle/>
+          <a:p>
+            <a:pPr algn="l">
+              <a:spcAft>
+                <a:spcPts val="400"/>
+              </a:spcAft>
+            </a:pPr>
+            <a:r>
+              <a:rPr sz="1200" b="1" i="0">
+                <a:solidFill>
+                  <a:srgbClr val="6B7280"/>
+                </a:solidFill>
+                <a:latin typeface="Montserrat"/>
+              </a:rPr>
+              <a:t>Threats</a:t>
+            </a:r>
+          </a:p>
+          <a:p>
+            <a:pPr algn="l">
+              <a:spcAft>
+                <a:spcPts val="400"/>
+              </a:spcAft>
+            </a:pPr>
+            <a:r>
+              <a:rPr sz="1050" b="0" i="0">
+                <a:solidFill>
+                  <a:srgbClr val="1F2937"/>
+                </a:solidFill>
+                <a:latin typeface="Lato"/>
+              </a:rPr>
+              <a:t>•  Two dominant rivals plus low-cost carriers</a:t>
+            </a:r>
+          </a:p>
+          <a:p>
+            <a:pPr algn="l">
+              <a:spcAft>
+                <a:spcPts val="400"/>
+              </a:spcAft>
+            </a:pPr>
+            <a:r>
+              <a:rPr sz="1050" b="0" i="0">
+                <a:solidFill>
+                  <a:srgbClr val="1F2937"/>
+                </a:solidFill>
+                <a:latin typeface="Lato"/>
+              </a:rPr>
+              <a:t>•  Fuel, pilot wages, airport fees</a:t>
+            </a:r>
+          </a:p>
+          <a:p>
+            <a:pPr algn="l">
+              <a:spcAft>
+                <a:spcPts val="400"/>
+              </a:spcAft>
+            </a:pPr>
+            <a:r>
+              <a:rPr sz="1050" b="0" i="0">
+                <a:solidFill>
+                  <a:srgbClr val="1F2937"/>
+                </a:solidFill>
+                <a:latin typeface="Lato"/>
+              </a:rPr>
+              <a:t>•  Winter disruption + refund rules (St. John's)</a:t>
+            </a:r>
+          </a:p>
+        </p:txBody>
+      </p:sp>
     </p:spTree>
   </p:cSld>
   <p:clrMapOvr>

--- a/slides/NorthByte_FirstByte2026_template.pptx
+++ b/slides/NorthByte_FirstByte2026_template.pptx
@@ -5051,7 +5051,7 @@
 </file>
 
 <file path=ppt/notesSlides/notesSlide19.xml><?xml version="1.0" encoding="utf-8"?>
-<p:notes xmlns:a="http://schemas.openxmlformats.org/drawingml/2006/main" xmlns:p="http://schemas.openxmlformats.org/presentationml/2006/main" xmlns:r="http://schemas.openxmlformats.org/officeDocument/2006/relationships">
+<p:notes xmlns:a="http://schemas.openxmlformats.org/drawingml/2006/main" xmlns:p="http://schemas.openxmlformats.org/presentationml/2006/main">
   <p:cSld>
     <p:spTree>
       <p:nvGrpSpPr>
@@ -5095,7 +5095,7 @@
           <a:lstStyle/>
           <a:p>
             <a:r>
-              <a:t>RECOMMENDATION. ~75 sec. Business Recommendation = 35% of score. To be written. Guiding Q6 asks for short- AND long-term actions and their effect on customers, employees and communities; the bottom strip covers that.</a:t>
+              <a:t>RECOMMENDATION. Suggested speaking time: 75 seconds. Recommend Right-Size &amp; Recover as a staged plan. Keep the existing deck's central scenario and all 20 airports initially. Four trunk markets: Montréal–Toronto, Halifax–Toronto, Halifax–Montréal and Ottawa–Toronto. New markets: London–Toronto, Montréal–Ottawa and Moncton–Halifax. The schedule improvement is $54.57M (28.49 + 19.71 + 6.37), plus $5.2M revenue recovery. Baseline contribution after fiscal-year gates is -$58.40M; result is +$1.37M. Range -$16.88M to +$5.71M combines recapture and revenue-lever scenarios; it is not a statistical confidence interval or a dated forecast. Target FY27–28 matches the executive summary. Central trunk recapture is 100%; the new-market central assumption is 50% recapture of revenue allocated to removed flights. Revenue is not directly matched to individual flights, so retained revenue must be verified in the pilot. All four cost categories on removed flights are assumed avoidable. These are model assumptions, not guaranteed savings. Contribution excludes aircraft ownership, overhead and taxes. No additional savings are added for long-term governance or gates. New-market halving still leaves about $3.9M annual loss centrally, about $2.6M even at full recapture. The proposed six-month trial therefore requires an explicit loss cap and a decision at its end; a 0.8 coverage trigger would already fail initially. The continuation or exit decision is conditional and is not included as extra gain in the headline. Employee effects are material with 27% fewer flights. Prioritize consultation, redeployment and retraining, without promising zero job losses. Voluntary rebooking must preserve the case's refund promise. Sources: analysis/tables/alternatives_matrix.csv; analysis/alternatives.py; analysis/teammate_crosscheck.md; case package pp.6,9,10,17.</a:t>
             </a:r>
           </a:p>
         </p:txBody>
@@ -5251,7 +5251,7 @@
 </file>
 
 <file path=ppt/notesSlides/notesSlide20.xml><?xml version="1.0" encoding="utf-8"?>
-<p:notes xmlns:a="http://schemas.openxmlformats.org/drawingml/2006/main" xmlns:p="http://schemas.openxmlformats.org/presentationml/2006/main" xmlns:r="http://schemas.openxmlformats.org/officeDocument/2006/relationships">
+<p:notes xmlns:a="http://schemas.openxmlformats.org/drawingml/2006/main" xmlns:p="http://schemas.openxmlformats.org/presentationml/2006/main">
   <p:cSld>
     <p:spTree>
       <p:nvGrpSpPr>
@@ -5295,7 +5295,7 @@
           <a:lstStyle/>
           <a:p>
             <a:r>
-              <a:t>IMPLEMENTATION. ~45 sec. To be written. Align phases to the budget cycle; add KPIs to track (e.g. contribution per flight, revenue per flight, refund rate, gate cost per departure).</a:t>
+              <a:t>IMPLEMENTATION. Suggested speaking time: 45 seconds. This is a proposed roadmap from plan approval, not completed actions. Phase 1: Finance validates costs that can actually be removed, including contracts and transition costs. Network Planning establishes route baselines using ticket-to-departure linkage, capacity, demand and connection information absent from the current files. Operations confirms staffing and service constraints. Phase 2: pilot a trunk reduction for an initial 90-day review, monitor weekly and review financial results monthly, then scale only if evidence supports it. Revenue recapture means the share of revenue assigned to cancelled rotations retained on remaining services, adjusted for normal seasonal demand; it is not directly observable from the supplied transaction dates alone. About 90% trunk recapture is the break-even threshold holding the other central assumptions fixed, not a guarantee or an arbitrary service KPI. Track realized savings against the approved avoidable-cost baseline; if either revenue retention or cost savings misses, pause further cuts and reforecast. Start a separate six-month trial when new-market halving begins; review against a pre-approved cumulative loss cap. If it fails, evaluate further reduction, funded community service or exit. Preserve the current 20-airport headline unless the team explicitly chooses a later exit. Confirm whether Halifax A3 and Ottawa A2 are operationally unnecessary, and contract termination/renewal dates, before releasing them; do not count the same gate savings twice or promise savings before contract changes. Phase 3: require positive incremental contribution for any peak-flight addition and review the whole network monthly. Sources: existing slide 17 and alternatives_matrix.csv; teammate_crosscheck.md. Owners, timing and pilot controls are team proposals.</a:t>
             </a:r>
           </a:p>
         </p:txBody>
@@ -5321,7 +5321,7 @@
 </file>
 
 <file path=ppt/notesSlides/notesSlide21.xml><?xml version="1.0" encoding="utf-8"?>
-<p:notes xmlns:a="http://schemas.openxmlformats.org/drawingml/2006/main" xmlns:p="http://schemas.openxmlformats.org/presentationml/2006/main" xmlns:r="http://schemas.openxmlformats.org/officeDocument/2006/relationships">
+<p:notes xmlns:a="http://schemas.openxmlformats.org/drawingml/2006/main" xmlns:p="http://schemas.openxmlformats.org/presentationml/2006/main">
   <p:cSld>
     <p:spTree>
       <p:nvGrpSpPr>
@@ -5365,7 +5365,7 @@
           <a:lstStyle/>
           <a:p>
             <a:r>
-              <a:t>RISKS &amp; MITIGATION. ~30 sec. To be written. Include data-limitation risk (no seats/load factor) and stakeholder risks (community service, crew, competitors).</a:t>
+              <a:t>RISKS. Suggested speaking time: 30 seconds. Prioritize revenue recapture and cost avoidability because the +$1.4M central contribution has little buffer. The model removes about $73.6M of recorded flight costs, so each 10% that cannot be avoided lowers the gain by about $7.4M. Revenue recovery initiatives are assumptions and may underperform; do not infer that moving an OTA booking directly removes its weather-driven refund risk. The roughly 90% trunk recapture threshold holds other central assumptions fixed. Lack of seats, passenger-to-flight allocation and full overhead costs limits feasibility claims; obtain these before broad rollout. New-market halving is deliberately a temporary trial, not an assertion that these routes become profitable. The downside range on slide 18 does not capture all cost and execution risks. Customer remedies must remain consistent with the case's full-fare refund promise. Safety and maintenance standards remain mandatory throughout any cost reduction. Likelihood labels are qualitative team judgements, not probabilities inferred from the data. Sources: analysis/alternatives.py; alternatives_matrix.csv; teammate_crosscheck.md; FirstByte case package pp.6,9,10,17.</a:t>
             </a:r>
           </a:p>
         </p:txBody>
@@ -18464,7 +18464,7 @@
 </file>
 
 <file path=ppt/slides/slide18.xml><?xml version="1.0" encoding="utf-8"?>
-<p:sld xmlns:a="http://schemas.openxmlformats.org/drawingml/2006/main" xmlns:p="http://schemas.openxmlformats.org/presentationml/2006/main" xmlns:r="http://schemas.openxmlformats.org/officeDocument/2006/relationships">
+<p:sld xmlns:a="http://schemas.openxmlformats.org/drawingml/2006/main" xmlns:ns2="http://schemas.microsoft.com/office/drawing/2014/main" xmlns:p="http://schemas.openxmlformats.org/presentationml/2006/main">
   <p:cSld>
     <p:spTree>
       <p:nvGrpSpPr>
@@ -18472,17 +18472,27 @@
         <p:cNvGrpSpPr/>
         <p:nvPr/>
       </p:nvGrpSpPr>
-      <p:grpSpPr/>
-      <p:sp>
-        <p:nvSpPr>
-          <p:cNvPr id="2" name="Rectangle 1"/>
-          <p:cNvSpPr/>
+      <p:grpSpPr>
+        <a:xfrm/>
+      </p:grpSpPr>
+      <p:sp>
+        <p:nvSpPr>
+          <p:cNvPr id="41" name="">
+            <a:extLst>
+              <a:ext uri="{FF2B5EF4-FFF2-40B4-BE49-F238E27FC236}">
+                <ns2:creationId id="{E6314256-0700-4EF3-A98F-6A6A0ED650A3}"/>
+              </a:ext>
+            </a:extLst>
+          </p:cNvPr>
+          <p:cNvSpPr>
+            <a:spLocks noGrp="1"/>
+          </p:cNvSpPr>
           <p:nvPr/>
         </p:nvSpPr>
         <p:spPr>
           <a:xfrm>
             <a:off x="0" y="0"/>
-            <a:ext cx="12191695" cy="109728"/>
+            <a:ext cx="12192000" cy="109728"/>
           </a:xfrm>
           <a:prstGeom prst="rect">
             <a:avLst/>
@@ -18490,668 +18500,2279 @@
           <a:solidFill>
             <a:srgbClr val="0B1F3A"/>
           </a:solidFill>
-          <a:ln>
+          <a:ln w="0">
             <a:noFill/>
           </a:ln>
-          <a:effectLst/>
-        </p:spPr>
-        <p:style>
-          <a:lnRef idx="1">
-            <a:schemeClr val="accent1"/>
-          </a:lnRef>
-          <a:fillRef idx="3">
-            <a:schemeClr val="accent1"/>
-          </a:fillRef>
-          <a:effectRef idx="2">
-            <a:schemeClr val="accent1"/>
-          </a:effectRef>
-          <a:fontRef idx="minor">
-            <a:schemeClr val="lt1"/>
-          </a:fontRef>
-        </p:style>
-        <p:txBody>
-          <a:bodyPr rtlCol="0" anchor="ctr"/>
-          <a:lstStyle/>
-          <a:p>
-            <a:pPr algn="ctr"/>
-          </a:p>
-        </p:txBody>
-      </p:sp>
-      <p:sp>
-        <p:nvSpPr>
-          <p:cNvPr id="3" name="TextBox 2"/>
-          <p:cNvSpPr txBox="1"/>
+        </p:spPr>
+      </p:sp>
+      <p:sp>
+        <p:nvSpPr>
+          <p:cNvPr id="2" name="">
+            <a:extLst>
+              <a:ext uri="{FF2B5EF4-FFF2-40B4-BE49-F238E27FC236}">
+                <ns2:creationId id="{C3C9F755-F283-4B3A-8C5C-4C3424FE84A3}"/>
+              </a:ext>
+            </a:extLst>
+          </p:cNvPr>
+          <p:cNvSpPr>
+            <a:spLocks noGrp="1"/>
+          </p:cNvSpPr>
           <p:nvPr/>
         </p:nvSpPr>
         <p:spPr>
           <a:xfrm>
             <a:off x="548640" y="320040"/>
-            <a:ext cx="8229600" cy="274320"/>
+            <a:ext cx="10477500" cy="276225"/>
           </a:xfrm>
           <a:prstGeom prst="rect">
             <a:avLst/>
           </a:prstGeom>
           <a:noFill/>
-        </p:spPr>
-        <p:txBody>
-          <a:bodyPr wrap="square" anchor="t">
-            <a:spAutoFit/>
-          </a:bodyPr>
-          <a:lstStyle/>
-          <a:p>
-            <a:pPr algn="l">
-              <a:spcAft>
-                <a:spcPts val="600"/>
-              </a:spcAft>
-            </a:pPr>
-            <a:r>
-              <a:rPr sz="1100" b="1">
-                <a:solidFill>
-                  <a:srgbClr val="E8692A"/>
-                </a:solidFill>
-                <a:latin typeface="Montserrat"/>
-              </a:rPr>
-              <a:t>RECOMMENDATION</a:t>
-            </a:r>
-          </a:p>
-        </p:txBody>
-      </p:sp>
-      <p:sp>
-        <p:nvSpPr>
-          <p:cNvPr id="4" name="TextBox 3"/>
-          <p:cNvSpPr txBox="1"/>
-          <p:nvPr/>
-        </p:nvSpPr>
-        <p:spPr>
-          <a:xfrm>
-            <a:off x="548640" y="566928"/>
-            <a:ext cx="11064240" cy="914400"/>
-          </a:xfrm>
-          <a:prstGeom prst="rect">
-            <a:avLst/>
-          </a:prstGeom>
-          <a:noFill/>
-        </p:spPr>
-        <p:txBody>
-          <a:bodyPr wrap="square" anchor="t">
-            <a:spAutoFit/>
-          </a:bodyPr>
-          <a:lstStyle/>
-          <a:p>
-            <a:pPr algn="l">
-              <a:spcAft>
-                <a:spcPts val="600"/>
-              </a:spcAft>
-            </a:pPr>
-            <a:r>
-              <a:rPr sz="2400" b="1">
-                <a:solidFill>
-                  <a:srgbClr val="0B1F3A"/>
-                </a:solidFill>
-                <a:latin typeface="Montserrat"/>
-              </a:rPr>
-              <a:t>[Headline: the recommendation and its $ impact]</a:t>
-            </a:r>
-          </a:p>
-        </p:txBody>
-      </p:sp>
-      <p:sp>
-        <p:nvSpPr>
-          <p:cNvPr id="5" name="Rectangle 4"/>
-          <p:cNvSpPr/>
-          <p:nvPr/>
-        </p:nvSpPr>
-        <p:spPr>
-          <a:xfrm>
-            <a:off x="548640" y="6400800"/>
-            <a:ext cx="11091672" cy="9144"/>
-          </a:xfrm>
-          <a:prstGeom prst="rect">
-            <a:avLst/>
-          </a:prstGeom>
-          <a:solidFill>
-            <a:srgbClr val="F3F5F8"/>
-          </a:solidFill>
-          <a:ln>
+          <a:ln w="0">
             <a:noFill/>
           </a:ln>
-          <a:effectLst/>
-        </p:spPr>
-        <p:style>
-          <a:lnRef idx="1">
-            <a:schemeClr val="accent1"/>
-          </a:lnRef>
-          <a:fillRef idx="3">
-            <a:schemeClr val="accent1"/>
-          </a:fillRef>
-          <a:effectRef idx="2">
-            <a:schemeClr val="accent1"/>
-          </a:effectRef>
-          <a:fontRef idx="minor">
-            <a:schemeClr val="lt1"/>
-          </a:fontRef>
-        </p:style>
-        <p:txBody>
-          <a:bodyPr rtlCol="0" anchor="ctr"/>
-          <a:lstStyle/>
-          <a:p>
-            <a:pPr algn="ctr"/>
-          </a:p>
-        </p:txBody>
-      </p:sp>
-      <p:sp>
-        <p:nvSpPr>
-          <p:cNvPr id="6" name="TextBox 5"/>
-          <p:cNvSpPr txBox="1"/>
-          <p:nvPr/>
-        </p:nvSpPr>
-        <p:spPr>
-          <a:xfrm>
-            <a:off x="548640" y="6446520"/>
-            <a:ext cx="9601200" cy="274320"/>
+        </p:spPr>
+        <p:txBody>
+          <a:bodyPr wrap="square" lIns="0" tIns="0" rIns="0" bIns="0" anchor="t">
+            <a:noAutofit/>
+          </a:bodyPr>
+          <a:lstStyle>
+            <a:defPPr>
+              <a:defRPr sz="1100" b="1">
+                <a:solidFill>
+                  <a:srgbClr val="E8692A"/>
+                </a:solidFill>
+                <a:latin typeface="Montserrat"/>
+                <a:ea typeface="Montserrat"/>
+                <a:cs typeface="Montserrat"/>
+              </a:defRPr>
+            </a:defPPr>
+          </a:lstStyle>
+          <a:p>
+            <a:pPr>
+              <a:defRPr sz="1100" b="1">
+                <a:solidFill>
+                  <a:srgbClr val="E8692A"/>
+                </a:solidFill>
+                <a:latin typeface="Montserrat"/>
+                <a:ea typeface="Montserrat"/>
+                <a:cs typeface="Montserrat"/>
+              </a:defRPr>
+            </a:pPr>
+            <a:r>
+              <a:rPr sz="1100" b="1">
+                <a:solidFill>
+                  <a:srgbClr val="E8692A"/>
+                </a:solidFill>
+                <a:latin typeface="Montserrat"/>
+                <a:ea typeface="Montserrat"/>
+                <a:cs typeface="Montserrat"/>
+              </a:rPr>
+              <a:t>RECOMMENDATION</a:t>
+            </a:r>
+          </a:p>
+        </p:txBody>
+      </p:sp>
+      <p:sp>
+        <p:nvSpPr>
+          <p:cNvPr id="3" name="">
+            <a:extLst>
+              <a:ext uri="{FF2B5EF4-FFF2-40B4-BE49-F238E27FC236}">
+                <ns2:creationId id="{406967C1-7ACC-4F2F-989F-D98BA9F93D0D}"/>
+              </a:ext>
+            </a:extLst>
+          </p:cNvPr>
+          <p:cNvSpPr>
+            <a:spLocks noGrp="1"/>
+          </p:cNvSpPr>
+          <p:nvPr/>
+        </p:nvSpPr>
+        <p:spPr>
+          <a:xfrm>
+            <a:off x="548640" y="619125"/>
+            <a:ext cx="11087100" cy="762000"/>
           </a:xfrm>
           <a:prstGeom prst="rect">
             <a:avLst/>
           </a:prstGeom>
           <a:noFill/>
-        </p:spPr>
-        <p:txBody>
-          <a:bodyPr wrap="square" anchor="t">
-            <a:spAutoFit/>
+          <a:ln w="0">
+            <a:noFill/>
+          </a:ln>
+        </p:spPr>
+        <p:txBody>
+          <a:bodyPr wrap="square" lIns="0" tIns="0" rIns="0" bIns="0" anchor="t">
+            <a:noAutofit/>
           </a:bodyPr>
-          <a:lstStyle/>
-          <a:p>
-            <a:pPr algn="l">
-              <a:spcAft>
-                <a:spcPts val="600"/>
-              </a:spcAft>
+          <a:lstStyle>
+            <a:defPPr>
+              <a:defRPr sz="2400" b="1">
+                <a:solidFill>
+                  <a:srgbClr val="0B1F3A"/>
+                </a:solidFill>
+                <a:latin typeface="Montserrat"/>
+                <a:ea typeface="Montserrat"/>
+                <a:cs typeface="Montserrat"/>
+              </a:defRPr>
+            </a:defPPr>
+          </a:lstStyle>
+          <a:p>
+            <a:pPr>
+              <a:defRPr sz="2400" b="1">
+                <a:solidFill>
+                  <a:srgbClr val="0B1F3A"/>
+                </a:solidFill>
+                <a:latin typeface="Montserrat"/>
+                <a:ea typeface="Montserrat"/>
+                <a:cs typeface="Montserrat"/>
+              </a:defRPr>
             </a:pPr>
             <a:r>
+              <a:rPr sz="2400" b="1">
+                <a:solidFill>
+                  <a:srgbClr val="0B1F3A"/>
+                </a:solidFill>
+                <a:latin typeface="Montserrat"/>
+                <a:ea typeface="Montserrat"/>
+                <a:cs typeface="Montserrat"/>
+              </a:rPr>
+              <a:t>Right-Size &amp; Recover targets break-even with a smaller schedule</a:t>
+            </a:r>
+          </a:p>
+        </p:txBody>
+      </p:sp>
+      <p:sp>
+        <p:nvSpPr>
+          <p:cNvPr id="4" name="">
+            <a:extLst>
+              <a:ext uri="{FF2B5EF4-FFF2-40B4-BE49-F238E27FC236}">
+                <ns2:creationId id="{3DD13E99-E09A-47E1-93BF-27D935337216}"/>
+              </a:ext>
+            </a:extLst>
+          </p:cNvPr>
+          <p:cNvSpPr>
+            <a:spLocks noGrp="1"/>
+          </p:cNvSpPr>
+          <p:nvPr/>
+        </p:nvSpPr>
+        <p:spPr>
+          <a:xfrm>
+            <a:off x="548640" y="6400800"/>
+            <a:ext cx="11087100" cy="9525"/>
+          </a:xfrm>
+          <a:prstGeom prst="rect">
+            <a:avLst/>
+          </a:prstGeom>
+          <a:solidFill>
+            <a:srgbClr val="D1D5DB"/>
+          </a:solidFill>
+          <a:ln w="0">
+            <a:noFill/>
+          </a:ln>
+        </p:spPr>
+      </p:sp>
+      <p:sp>
+        <p:nvSpPr>
+          <p:cNvPr id="5" name="">
+            <a:extLst>
+              <a:ext uri="{FF2B5EF4-FFF2-40B4-BE49-F238E27FC236}">
+                <ns2:creationId id="{1F65BB4F-17A7-4D45-BBE8-05503AD2DB0E}"/>
+              </a:ext>
+            </a:extLst>
+          </p:cNvPr>
+          <p:cNvSpPr>
+            <a:spLocks noGrp="1"/>
+          </p:cNvSpPr>
+          <p:nvPr/>
+        </p:nvSpPr>
+        <p:spPr>
+          <a:xfrm>
+            <a:off x="548640" y="6467475"/>
+            <a:ext cx="10477500" cy="285750"/>
+          </a:xfrm>
+          <a:prstGeom prst="rect">
+            <a:avLst/>
+          </a:prstGeom>
+          <a:noFill/>
+          <a:ln w="0">
+            <a:noFill/>
+          </a:ln>
+        </p:spPr>
+        <p:txBody>
+          <a:bodyPr wrap="square" lIns="0" tIns="0" rIns="0" bIns="0" anchor="t">
+            <a:noAutofit/>
+          </a:bodyPr>
+          <a:lstStyle>
+            <a:defPPr>
+              <a:defRPr sz="825" b="0">
+                <a:solidFill>
+                  <a:srgbClr val="6B7280"/>
+                </a:solidFill>
+                <a:latin typeface="Lato"/>
+                <a:ea typeface="Lato"/>
+                <a:cs typeface="Lato"/>
+              </a:defRPr>
+            </a:defPPr>
+          </a:lstStyle>
+          <a:p>
+            <a:pPr>
+              <a:defRPr sz="825" b="0">
+                <a:solidFill>
+                  <a:srgbClr val="6B7280"/>
+                </a:solidFill>
+                <a:latin typeface="Lato"/>
+                <a:ea typeface="Lato"/>
+                <a:cs typeface="Lato"/>
+              </a:defRPr>
+            </a:pPr>
+            <a:r>
+              <a:rPr sz="825" b="0">
+                <a:solidFill>
+                  <a:srgbClr val="6B7280"/>
+                </a:solidFill>
+                <a:latin typeface="Lato"/>
+                <a:ea typeface="Lato"/>
+                <a:cs typeface="Lato"/>
+              </a:rPr>
+              <a:t>Source: team alternatives model, FY25–26 basis. Scenario contribution after gates excludes aircraft ownership and overhead.</a:t>
+            </a:r>
+          </a:p>
+        </p:txBody>
+      </p:sp>
+      <p:sp>
+        <p:nvSpPr>
+          <p:cNvPr id="6" name="">
+            <a:extLst>
+              <a:ext uri="{FF2B5EF4-FFF2-40B4-BE49-F238E27FC236}">
+                <ns2:creationId id="{23092FF5-7480-4C8A-B786-D9A5C39C3D64}"/>
+              </a:ext>
+            </a:extLst>
+          </p:cNvPr>
+          <p:cNvSpPr>
+            <a:spLocks noGrp="1"/>
+          </p:cNvSpPr>
+          <p:nvPr/>
+        </p:nvSpPr>
+        <p:spPr>
+          <a:xfrm>
+            <a:off x="11191875" y="6467475"/>
+            <a:ext cx="428625" cy="228600"/>
+          </a:xfrm>
+          <a:prstGeom prst="rect">
+            <a:avLst/>
+          </a:prstGeom>
+          <a:noFill/>
+          <a:ln w="0">
+            <a:noFill/>
+          </a:ln>
+        </p:spPr>
+        <p:txBody>
+          <a:bodyPr wrap="square" lIns="0" tIns="0" rIns="0" bIns="0" anchor="t">
+            <a:noAutofit/>
+          </a:bodyPr>
+          <a:lstStyle>
+            <a:defPPr>
+              <a:defRPr sz="900" b="0">
+                <a:solidFill>
+                  <a:srgbClr val="6B7280"/>
+                </a:solidFill>
+                <a:latin typeface="Lato"/>
+                <a:ea typeface="Lato"/>
+                <a:cs typeface="Lato"/>
+              </a:defRPr>
+            </a:defPPr>
+          </a:lstStyle>
+          <a:p>
+            <a:pPr>
+              <a:defRPr sz="900" b="0">
+                <a:solidFill>
+                  <a:srgbClr val="6B7280"/>
+                </a:solidFill>
+                <a:latin typeface="Lato"/>
+                <a:ea typeface="Lato"/>
+                <a:cs typeface="Lato"/>
+              </a:defRPr>
+            </a:pPr>
+            <a:r>
               <a:rPr sz="900" b="0">
                 <a:solidFill>
                   <a:srgbClr val="6B7280"/>
                 </a:solidFill>
                 <a:latin typeface="Lato"/>
-              </a:rPr>
-              <a:t>Evidence: slides 5–12</a:t>
-            </a:r>
-          </a:p>
-        </p:txBody>
-      </p:sp>
-      <p:sp>
-        <p:nvSpPr>
-          <p:cNvPr id="7" name="TextBox 6"/>
-          <p:cNvSpPr txBox="1"/>
-          <p:nvPr/>
-        </p:nvSpPr>
-        <p:spPr>
-          <a:xfrm>
-            <a:off x="10972800" y="6446520"/>
-            <a:ext cx="667512" cy="274320"/>
+                <a:ea typeface="Lato"/>
+                <a:cs typeface="Lato"/>
+              </a:rPr>
+              <a:t>18</a:t>
+            </a:r>
+          </a:p>
+        </p:txBody>
+      </p:sp>
+      <p:sp>
+        <p:nvSpPr>
+          <p:cNvPr id="7" name="">
+            <a:extLst>
+              <a:ext uri="{FF2B5EF4-FFF2-40B4-BE49-F238E27FC236}">
+                <ns2:creationId id="{C0592E66-C70F-4F0F-B19F-C1CE71F0B010}"/>
+              </a:ext>
+            </a:extLst>
+          </p:cNvPr>
+          <p:cNvSpPr>
+            <a:spLocks noGrp="1"/>
+          </p:cNvSpPr>
+          <p:nvPr/>
+        </p:nvSpPr>
+        <p:spPr>
+          <a:xfrm>
+            <a:off x="552450" y="1524000"/>
+            <a:ext cx="438150" cy="361950"/>
           </a:xfrm>
           <a:prstGeom prst="rect">
             <a:avLst/>
           </a:prstGeom>
           <a:noFill/>
-        </p:spPr>
-        <p:txBody>
-          <a:bodyPr wrap="square" anchor="t">
-            <a:spAutoFit/>
+          <a:ln w="0">
+            <a:noFill/>
+          </a:ln>
+        </p:spPr>
+        <p:txBody>
+          <a:bodyPr wrap="square" lIns="0" tIns="0" rIns="0" bIns="0" anchor="t">
+            <a:noAutofit/>
           </a:bodyPr>
-          <a:lstStyle/>
-          <a:p>
-            <a:pPr algn="r">
-              <a:spcAft>
-                <a:spcPts val="600"/>
-              </a:spcAft>
+          <a:lstStyle>
+            <a:defPPr>
+              <a:defRPr sz="1950" b="1">
+                <a:solidFill>
+                  <a:srgbClr val="E8692A"/>
+                </a:solidFill>
+                <a:latin typeface="Montserrat"/>
+                <a:ea typeface="Montserrat"/>
+                <a:cs typeface="Montserrat"/>
+              </a:defRPr>
+            </a:defPPr>
+          </a:lstStyle>
+          <a:p>
+            <a:pPr>
+              <a:defRPr sz="1950" b="1">
+                <a:solidFill>
+                  <a:srgbClr val="E8692A"/>
+                </a:solidFill>
+                <a:latin typeface="Montserrat"/>
+                <a:ea typeface="Montserrat"/>
+                <a:cs typeface="Montserrat"/>
+              </a:defRPr>
             </a:pPr>
             <a:r>
-              <a:rPr sz="900" b="0">
+              <a:rPr sz="1950" b="1">
+                <a:solidFill>
+                  <a:srgbClr val="E8692A"/>
+                </a:solidFill>
+                <a:latin typeface="Montserrat"/>
+                <a:ea typeface="Montserrat"/>
+                <a:cs typeface="Montserrat"/>
+              </a:rPr>
+              <a:t>01</a:t>
+            </a:r>
+          </a:p>
+        </p:txBody>
+      </p:sp>
+      <p:sp>
+        <p:nvSpPr>
+          <p:cNvPr id="8" name="">
+            <a:extLst>
+              <a:ext uri="{FF2B5EF4-FFF2-40B4-BE49-F238E27FC236}">
+                <ns2:creationId id="{8411609A-0310-4DA7-A1F8-905492F33AF6}"/>
+              </a:ext>
+            </a:extLst>
+          </p:cNvPr>
+          <p:cNvSpPr>
+            <a:spLocks noGrp="1"/>
+          </p:cNvSpPr>
+          <p:nvPr/>
+        </p:nvSpPr>
+        <p:spPr>
+          <a:xfrm>
+            <a:off x="1028700" y="1543050"/>
+            <a:ext cx="3048000" cy="333375"/>
+          </a:xfrm>
+          <a:prstGeom prst="rect">
+            <a:avLst/>
+          </a:prstGeom>
+          <a:noFill/>
+          <a:ln w="0">
+            <a:noFill/>
+          </a:ln>
+        </p:spPr>
+        <p:txBody>
+          <a:bodyPr wrap="square" lIns="0" tIns="0" rIns="0" bIns="0" anchor="t">
+            <a:noAutofit/>
+          </a:bodyPr>
+          <a:lstStyle>
+            <a:defPPr>
+              <a:defRPr sz="1575" b="1">
+                <a:solidFill>
+                  <a:srgbClr val="0B1F3A"/>
+                </a:solidFill>
+                <a:latin typeface="Montserrat"/>
+                <a:ea typeface="Montserrat"/>
+                <a:cs typeface="Montserrat"/>
+              </a:defRPr>
+            </a:defPPr>
+          </a:lstStyle>
+          <a:p>
+            <a:pPr>
+              <a:defRPr sz="1575" b="1">
+                <a:solidFill>
+                  <a:srgbClr val="0B1F3A"/>
+                </a:solidFill>
+                <a:latin typeface="Montserrat"/>
+                <a:ea typeface="Montserrat"/>
+                <a:cs typeface="Montserrat"/>
+              </a:defRPr>
+            </a:pPr>
+            <a:r>
+              <a:rPr sz="1575" b="1">
+                <a:solidFill>
+                  <a:srgbClr val="0B1F3A"/>
+                </a:solidFill>
+                <a:latin typeface="Montserrat"/>
+                <a:ea typeface="Montserrat"/>
+                <a:cs typeface="Montserrat"/>
+              </a:rPr>
+              <a:t>Right-size capacity</a:t>
+            </a:r>
+          </a:p>
+        </p:txBody>
+      </p:sp>
+      <p:sp>
+        <p:nvSpPr>
+          <p:cNvPr id="9" name="">
+            <a:extLst>
+              <a:ext uri="{FF2B5EF4-FFF2-40B4-BE49-F238E27FC236}">
+                <ns2:creationId id="{4A67D475-D046-47B4-92CE-3ABABD439E80}"/>
+              </a:ext>
+            </a:extLst>
+          </p:cNvPr>
+          <p:cNvSpPr>
+            <a:spLocks noGrp="1"/>
+          </p:cNvSpPr>
+          <p:nvPr/>
+        </p:nvSpPr>
+        <p:spPr>
+          <a:xfrm>
+            <a:off x="552450" y="1933575"/>
+            <a:ext cx="3333750" cy="400050"/>
+          </a:xfrm>
+          <a:prstGeom prst="rect">
+            <a:avLst/>
+          </a:prstGeom>
+          <a:noFill/>
+          <a:ln w="0">
+            <a:noFill/>
+          </a:ln>
+        </p:spPr>
+        <p:txBody>
+          <a:bodyPr wrap="square" lIns="0" tIns="0" rIns="0" bIns="0" anchor="t">
+            <a:noAutofit/>
+          </a:bodyPr>
+          <a:lstStyle>
+            <a:defPPr>
+              <a:defRPr sz="2250" b="1">
+                <a:solidFill>
+                  <a:srgbClr val="2E7D5B"/>
+                </a:solidFill>
+                <a:latin typeface="Montserrat"/>
+                <a:ea typeface="Montserrat"/>
+                <a:cs typeface="Montserrat"/>
+              </a:defRPr>
+            </a:defPPr>
+          </a:lstStyle>
+          <a:p>
+            <a:pPr>
+              <a:defRPr sz="2250" b="1">
+                <a:solidFill>
+                  <a:srgbClr val="2E7D5B"/>
+                </a:solidFill>
+                <a:latin typeface="Montserrat"/>
+                <a:ea typeface="Montserrat"/>
+                <a:cs typeface="Montserrat"/>
+              </a:defRPr>
+            </a:pPr>
+            <a:r>
+              <a:rPr sz="2250" b="1">
+                <a:solidFill>
+                  <a:srgbClr val="2E7D5B"/>
+                </a:solidFill>
+                <a:latin typeface="Montserrat"/>
+                <a:ea typeface="Montserrat"/>
+                <a:cs typeface="Montserrat"/>
+              </a:rPr>
+              <a:t>+$54.6M</a:t>
+            </a:r>
+          </a:p>
+        </p:txBody>
+      </p:sp>
+      <p:sp>
+        <p:nvSpPr>
+          <p:cNvPr id="10" name="">
+            <a:extLst>
+              <a:ext uri="{FF2B5EF4-FFF2-40B4-BE49-F238E27FC236}">
+                <ns2:creationId id="{4815C7CE-1E6B-4956-81A3-35343CBD3C09}"/>
+              </a:ext>
+            </a:extLst>
+          </p:cNvPr>
+          <p:cNvSpPr>
+            <a:spLocks noGrp="1"/>
+          </p:cNvSpPr>
+          <p:nvPr/>
+        </p:nvSpPr>
+        <p:spPr>
+          <a:xfrm>
+            <a:off x="552450" y="2419350"/>
+            <a:ext cx="3333750" cy="952500"/>
+          </a:xfrm>
+          <a:prstGeom prst="rect">
+            <a:avLst/>
+          </a:prstGeom>
+          <a:noFill/>
+          <a:ln w="0">
+            <a:noFill/>
+          </a:ln>
+        </p:spPr>
+        <p:txBody>
+          <a:bodyPr wrap="square" lIns="0" tIns="0" rIns="0" bIns="0" anchor="t">
+            <a:noAutofit/>
+          </a:bodyPr>
+          <a:lstStyle>
+            <a:defPPr>
+              <a:defRPr sz="1275" b="0">
+                <a:solidFill>
+                  <a:srgbClr val="1F2937"/>
+                </a:solidFill>
+                <a:latin typeface="Lato"/>
+                <a:ea typeface="Lato"/>
+                <a:cs typeface="Lato"/>
+              </a:defRPr>
+            </a:defPPr>
+          </a:lstStyle>
+          <a:p>
+            <a:pPr>
+              <a:defRPr sz="1275" b="0">
+                <a:solidFill>
+                  <a:srgbClr val="1F2937"/>
+                </a:solidFill>
+                <a:latin typeface="Lato"/>
+                <a:ea typeface="Lato"/>
+                <a:cs typeface="Lato"/>
+              </a:defRPr>
+            </a:pPr>
+            <a:r>
+              <a:rPr sz="1275" b="0">
+                <a:solidFill>
+                  <a:srgbClr val="1F2937"/>
+                </a:solidFill>
+                <a:latin typeface="Lato"/>
+                <a:ea typeface="Lato"/>
+                <a:cs typeface="Lato"/>
+              </a:rPr>
+              <a:t>Remove added trunk rotations (+$28.5M). Exit Montréal–Vancouver (+$19.7M). Halve new-market flights for a six-month trial (+$6.4M).</a:t>
+            </a:r>
+          </a:p>
+        </p:txBody>
+      </p:sp>
+      <p:sp>
+        <p:nvSpPr>
+          <p:cNvPr id="11" name="">
+            <a:extLst>
+              <a:ext uri="{FF2B5EF4-FFF2-40B4-BE49-F238E27FC236}">
+                <ns2:creationId id="{97D1E790-858F-4ED0-9F63-40066C29BFF4}"/>
+              </a:ext>
+            </a:extLst>
+          </p:cNvPr>
+          <p:cNvSpPr>
+            <a:spLocks noGrp="1"/>
+          </p:cNvSpPr>
+          <p:nvPr/>
+        </p:nvSpPr>
+        <p:spPr>
+          <a:xfrm>
+            <a:off x="4381500" y="1524000"/>
+            <a:ext cx="438150" cy="361950"/>
+          </a:xfrm>
+          <a:prstGeom prst="rect">
+            <a:avLst/>
+          </a:prstGeom>
+          <a:noFill/>
+          <a:ln w="0">
+            <a:noFill/>
+          </a:ln>
+        </p:spPr>
+        <p:txBody>
+          <a:bodyPr wrap="square" lIns="0" tIns="0" rIns="0" bIns="0" anchor="t">
+            <a:noAutofit/>
+          </a:bodyPr>
+          <a:lstStyle>
+            <a:defPPr>
+              <a:defRPr sz="1950" b="1">
+                <a:solidFill>
+                  <a:srgbClr val="E8692A"/>
+                </a:solidFill>
+                <a:latin typeface="Montserrat"/>
+                <a:ea typeface="Montserrat"/>
+                <a:cs typeface="Montserrat"/>
+              </a:defRPr>
+            </a:defPPr>
+          </a:lstStyle>
+          <a:p>
+            <a:pPr>
+              <a:defRPr sz="1950" b="1">
+                <a:solidFill>
+                  <a:srgbClr val="E8692A"/>
+                </a:solidFill>
+                <a:latin typeface="Montserrat"/>
+                <a:ea typeface="Montserrat"/>
+                <a:cs typeface="Montserrat"/>
+              </a:defRPr>
+            </a:pPr>
+            <a:r>
+              <a:rPr sz="1950" b="1">
+                <a:solidFill>
+                  <a:srgbClr val="E8692A"/>
+                </a:solidFill>
+                <a:latin typeface="Montserrat"/>
+                <a:ea typeface="Montserrat"/>
+                <a:cs typeface="Montserrat"/>
+              </a:rPr>
+              <a:t>02</a:t>
+            </a:r>
+          </a:p>
+        </p:txBody>
+      </p:sp>
+      <p:sp>
+        <p:nvSpPr>
+          <p:cNvPr id="12" name="">
+            <a:extLst>
+              <a:ext uri="{FF2B5EF4-FFF2-40B4-BE49-F238E27FC236}">
+                <ns2:creationId id="{B85C4D52-2C96-4707-8D23-46B43B443123}"/>
+              </a:ext>
+            </a:extLst>
+          </p:cNvPr>
+          <p:cNvSpPr>
+            <a:spLocks noGrp="1"/>
+          </p:cNvSpPr>
+          <p:nvPr/>
+        </p:nvSpPr>
+        <p:spPr>
+          <a:xfrm>
+            <a:off x="4857750" y="1543050"/>
+            <a:ext cx="3048000" cy="333375"/>
+          </a:xfrm>
+          <a:prstGeom prst="rect">
+            <a:avLst/>
+          </a:prstGeom>
+          <a:noFill/>
+          <a:ln w="0">
+            <a:noFill/>
+          </a:ln>
+        </p:spPr>
+        <p:txBody>
+          <a:bodyPr wrap="square" lIns="0" tIns="0" rIns="0" bIns="0" anchor="t">
+            <a:noAutofit/>
+          </a:bodyPr>
+          <a:lstStyle>
+            <a:defPPr>
+              <a:defRPr sz="1575" b="1">
+                <a:solidFill>
+                  <a:srgbClr val="0B1F3A"/>
+                </a:solidFill>
+                <a:latin typeface="Montserrat"/>
+                <a:ea typeface="Montserrat"/>
+                <a:cs typeface="Montserrat"/>
+              </a:defRPr>
+            </a:defPPr>
+          </a:lstStyle>
+          <a:p>
+            <a:pPr>
+              <a:defRPr sz="1575" b="1">
+                <a:solidFill>
+                  <a:srgbClr val="0B1F3A"/>
+                </a:solidFill>
+                <a:latin typeface="Montserrat"/>
+                <a:ea typeface="Montserrat"/>
+                <a:cs typeface="Montserrat"/>
+              </a:defRPr>
+            </a:pPr>
+            <a:r>
+              <a:rPr sz="1575" b="1">
+                <a:solidFill>
+                  <a:srgbClr val="0B1F3A"/>
+                </a:solidFill>
+                <a:latin typeface="Montserrat"/>
+                <a:ea typeface="Montserrat"/>
+                <a:cs typeface="Montserrat"/>
+              </a:rPr>
+              <a:t>Recover revenue</a:t>
+            </a:r>
+          </a:p>
+        </p:txBody>
+      </p:sp>
+      <p:sp>
+        <p:nvSpPr>
+          <p:cNvPr id="13" name="">
+            <a:extLst>
+              <a:ext uri="{FF2B5EF4-FFF2-40B4-BE49-F238E27FC236}">
+                <ns2:creationId id="{1359668E-6524-4179-A052-9DB554FCB445}"/>
+              </a:ext>
+            </a:extLst>
+          </p:cNvPr>
+          <p:cNvSpPr>
+            <a:spLocks noGrp="1"/>
+          </p:cNvSpPr>
+          <p:nvPr/>
+        </p:nvSpPr>
+        <p:spPr>
+          <a:xfrm>
+            <a:off x="4381500" y="1933575"/>
+            <a:ext cx="3333750" cy="400050"/>
+          </a:xfrm>
+          <a:prstGeom prst="rect">
+            <a:avLst/>
+          </a:prstGeom>
+          <a:noFill/>
+          <a:ln w="0">
+            <a:noFill/>
+          </a:ln>
+        </p:spPr>
+        <p:txBody>
+          <a:bodyPr wrap="square" lIns="0" tIns="0" rIns="0" bIns="0" anchor="t">
+            <a:noAutofit/>
+          </a:bodyPr>
+          <a:lstStyle>
+            <a:defPPr>
+              <a:defRPr sz="2250" b="1">
+                <a:solidFill>
+                  <a:srgbClr val="2E7D5B"/>
+                </a:solidFill>
+                <a:latin typeface="Montserrat"/>
+                <a:ea typeface="Montserrat"/>
+                <a:cs typeface="Montserrat"/>
+              </a:defRPr>
+            </a:defPPr>
+          </a:lstStyle>
+          <a:p>
+            <a:pPr>
+              <a:defRPr sz="2250" b="1">
+                <a:solidFill>
+                  <a:srgbClr val="2E7D5B"/>
+                </a:solidFill>
+                <a:latin typeface="Montserrat"/>
+                <a:ea typeface="Montserrat"/>
+                <a:cs typeface="Montserrat"/>
+              </a:defRPr>
+            </a:pPr>
+            <a:r>
+              <a:rPr sz="2250" b="1">
+                <a:solidFill>
+                  <a:srgbClr val="2E7D5B"/>
+                </a:solidFill>
+                <a:latin typeface="Montserrat"/>
+                <a:ea typeface="Montserrat"/>
+                <a:cs typeface="Montserrat"/>
+              </a:rPr>
+              <a:t>+$5.2M</a:t>
+            </a:r>
+          </a:p>
+        </p:txBody>
+      </p:sp>
+      <p:sp>
+        <p:nvSpPr>
+          <p:cNvPr id="14" name="">
+            <a:extLst>
+              <a:ext uri="{FF2B5EF4-FFF2-40B4-BE49-F238E27FC236}">
+                <ns2:creationId id="{8BB634BA-A322-44A5-AA56-A92C9437CDA9}"/>
+              </a:ext>
+            </a:extLst>
+          </p:cNvPr>
+          <p:cNvSpPr>
+            <a:spLocks noGrp="1"/>
+          </p:cNvSpPr>
+          <p:nvPr/>
+        </p:nvSpPr>
+        <p:spPr>
+          <a:xfrm>
+            <a:off x="4381500" y="2419350"/>
+            <a:ext cx="3333750" cy="952500"/>
+          </a:xfrm>
+          <a:prstGeom prst="rect">
+            <a:avLst/>
+          </a:prstGeom>
+          <a:noFill/>
+          <a:ln w="0">
+            <a:noFill/>
+          </a:ln>
+        </p:spPr>
+        <p:txBody>
+          <a:bodyPr wrap="square" lIns="0" tIns="0" rIns="0" bIns="0" anchor="t">
+            <a:noAutofit/>
+          </a:bodyPr>
+          <a:lstStyle>
+            <a:defPPr>
+              <a:defRPr sz="1275" b="0">
+                <a:solidFill>
+                  <a:srgbClr val="1F2937"/>
+                </a:solidFill>
+                <a:latin typeface="Lato"/>
+                <a:ea typeface="Lato"/>
+                <a:cs typeface="Lato"/>
+              </a:defRPr>
+            </a:defPPr>
+          </a:lstStyle>
+          <a:p>
+            <a:pPr>
+              <a:defRPr sz="1275" b="0">
+                <a:solidFill>
+                  <a:srgbClr val="1F2937"/>
+                </a:solidFill>
+                <a:latin typeface="Lato"/>
+                <a:ea typeface="Lato"/>
+                <a:cs typeface="Lato"/>
+              </a:defRPr>
+            </a:pPr>
+            <a:r>
+              <a:rPr sz="1275" b="0">
+                <a:solidFill>
+                  <a:srgbClr val="1F2937"/>
+                </a:solidFill>
+                <a:latin typeface="Lato"/>
+                <a:ea typeface="Lato"/>
+                <a:cs typeface="Lato"/>
+              </a:rPr>
+              <a:t>Test fares and direct booking offers. Offer voluntary rebooking during disruptions and promote hub connections.</a:t>
+            </a:r>
+          </a:p>
+        </p:txBody>
+      </p:sp>
+      <p:sp>
+        <p:nvSpPr>
+          <p:cNvPr id="15" name="">
+            <a:extLst>
+              <a:ext uri="{FF2B5EF4-FFF2-40B4-BE49-F238E27FC236}">
+                <ns2:creationId id="{B3B01848-9685-41E1-8C6E-62D850B5B0E4}"/>
+              </a:ext>
+            </a:extLst>
+          </p:cNvPr>
+          <p:cNvSpPr>
+            <a:spLocks noGrp="1"/>
+          </p:cNvSpPr>
+          <p:nvPr/>
+        </p:nvSpPr>
+        <p:spPr>
+          <a:xfrm>
+            <a:off x="8210550" y="1524000"/>
+            <a:ext cx="438150" cy="361950"/>
+          </a:xfrm>
+          <a:prstGeom prst="rect">
+            <a:avLst/>
+          </a:prstGeom>
+          <a:noFill/>
+          <a:ln w="0">
+            <a:noFill/>
+          </a:ln>
+        </p:spPr>
+        <p:txBody>
+          <a:bodyPr wrap="square" lIns="0" tIns="0" rIns="0" bIns="0" anchor="t">
+            <a:noAutofit/>
+          </a:bodyPr>
+          <a:lstStyle>
+            <a:defPPr>
+              <a:defRPr sz="1950" b="1">
+                <a:solidFill>
+                  <a:srgbClr val="E8692A"/>
+                </a:solidFill>
+                <a:latin typeface="Montserrat"/>
+                <a:ea typeface="Montserrat"/>
+                <a:cs typeface="Montserrat"/>
+              </a:defRPr>
+            </a:defPPr>
+          </a:lstStyle>
+          <a:p>
+            <a:pPr>
+              <a:defRPr sz="1950" b="1">
+                <a:solidFill>
+                  <a:srgbClr val="E8692A"/>
+                </a:solidFill>
+                <a:latin typeface="Montserrat"/>
+                <a:ea typeface="Montserrat"/>
+                <a:cs typeface="Montserrat"/>
+              </a:defRPr>
+            </a:pPr>
+            <a:r>
+              <a:rPr sz="1950" b="1">
+                <a:solidFill>
+                  <a:srgbClr val="E8692A"/>
+                </a:solidFill>
+                <a:latin typeface="Montserrat"/>
+                <a:ea typeface="Montserrat"/>
+                <a:cs typeface="Montserrat"/>
+              </a:rPr>
+              <a:t>03</a:t>
+            </a:r>
+          </a:p>
+        </p:txBody>
+      </p:sp>
+      <p:sp>
+        <p:nvSpPr>
+          <p:cNvPr id="16" name="">
+            <a:extLst>
+              <a:ext uri="{FF2B5EF4-FFF2-40B4-BE49-F238E27FC236}">
+                <ns2:creationId id="{3D0357D6-6820-41BD-AC32-56CB3E863C98}"/>
+              </a:ext>
+            </a:extLst>
+          </p:cNvPr>
+          <p:cNvSpPr>
+            <a:spLocks noGrp="1"/>
+          </p:cNvSpPr>
+          <p:nvPr/>
+        </p:nvSpPr>
+        <p:spPr>
+          <a:xfrm>
+            <a:off x="8686800" y="1543050"/>
+            <a:ext cx="3048000" cy="333375"/>
+          </a:xfrm>
+          <a:prstGeom prst="rect">
+            <a:avLst/>
+          </a:prstGeom>
+          <a:noFill/>
+          <a:ln w="0">
+            <a:noFill/>
+          </a:ln>
+        </p:spPr>
+        <p:txBody>
+          <a:bodyPr wrap="square" lIns="0" tIns="0" rIns="0" bIns="0" anchor="t">
+            <a:noAutofit/>
+          </a:bodyPr>
+          <a:lstStyle>
+            <a:defPPr>
+              <a:defRPr sz="1575" b="1">
+                <a:solidFill>
+                  <a:srgbClr val="0B1F3A"/>
+                </a:solidFill>
+                <a:latin typeface="Montserrat"/>
+                <a:ea typeface="Montserrat"/>
+                <a:cs typeface="Montserrat"/>
+              </a:defRPr>
+            </a:defPPr>
+          </a:lstStyle>
+          <a:p>
+            <a:pPr>
+              <a:defRPr sz="1575" b="1">
+                <a:solidFill>
+                  <a:srgbClr val="0B1F3A"/>
+                </a:solidFill>
+                <a:latin typeface="Montserrat"/>
+                <a:ea typeface="Montserrat"/>
+                <a:cs typeface="Montserrat"/>
+              </a:defRPr>
+            </a:pPr>
+            <a:r>
+              <a:rPr sz="1575" b="1">
+                <a:solidFill>
+                  <a:srgbClr val="0B1F3A"/>
+                </a:solidFill>
+                <a:latin typeface="Montserrat"/>
+                <a:ea typeface="Montserrat"/>
+                <a:cs typeface="Montserrat"/>
+              </a:rPr>
+              <a:t>Manage route profitability</a:t>
+            </a:r>
+          </a:p>
+        </p:txBody>
+      </p:sp>
+      <p:sp>
+        <p:nvSpPr>
+          <p:cNvPr id="17" name="">
+            <a:extLst>
+              <a:ext uri="{FF2B5EF4-FFF2-40B4-BE49-F238E27FC236}">
+                <ns2:creationId id="{A6084A09-FFEC-4B40-93B2-A12DF40C0DB2}"/>
+              </a:ext>
+            </a:extLst>
+          </p:cNvPr>
+          <p:cNvSpPr>
+            <a:spLocks noGrp="1"/>
+          </p:cNvSpPr>
+          <p:nvPr/>
+        </p:nvSpPr>
+        <p:spPr>
+          <a:xfrm>
+            <a:off x="8210550" y="1933575"/>
+            <a:ext cx="3333750" cy="400050"/>
+          </a:xfrm>
+          <a:prstGeom prst="rect">
+            <a:avLst/>
+          </a:prstGeom>
+          <a:noFill/>
+          <a:ln w="0">
+            <a:noFill/>
+          </a:ln>
+        </p:spPr>
+        <p:txBody>
+          <a:bodyPr wrap="square" lIns="0" tIns="0" rIns="0" bIns="0" anchor="t">
+            <a:noAutofit/>
+          </a:bodyPr>
+          <a:lstStyle>
+            <a:defPPr>
+              <a:defRPr sz="2250" b="1">
+                <a:solidFill>
+                  <a:srgbClr val="0B1F3A"/>
+                </a:solidFill>
+                <a:latin typeface="Montserrat"/>
+                <a:ea typeface="Montserrat"/>
+                <a:cs typeface="Montserrat"/>
+              </a:defRPr>
+            </a:defPPr>
+          </a:lstStyle>
+          <a:p>
+            <a:pPr>
+              <a:defRPr sz="2250" b="1">
+                <a:solidFill>
+                  <a:srgbClr val="0B1F3A"/>
+                </a:solidFill>
+                <a:latin typeface="Montserrat"/>
+                <a:ea typeface="Montserrat"/>
+                <a:cs typeface="Montserrat"/>
+              </a:defRPr>
+            </a:pPr>
+            <a:r>
+              <a:rPr sz="2250" b="1">
+                <a:solidFill>
+                  <a:srgbClr val="0B1F3A"/>
+                </a:solidFill>
+                <a:latin typeface="Montserrat"/>
+                <a:ea typeface="Montserrat"/>
+                <a:cs typeface="Montserrat"/>
+              </a:rPr>
+              <a:t>Monthly review</a:t>
+            </a:r>
+          </a:p>
+        </p:txBody>
+      </p:sp>
+      <p:sp>
+        <p:nvSpPr>
+          <p:cNvPr id="18" name="">
+            <a:extLst>
+              <a:ext uri="{FF2B5EF4-FFF2-40B4-BE49-F238E27FC236}">
+                <ns2:creationId id="{180795E7-45E5-472E-976D-56579F03DEBF}"/>
+              </a:ext>
+            </a:extLst>
+          </p:cNvPr>
+          <p:cNvSpPr>
+            <a:spLocks noGrp="1"/>
+          </p:cNvSpPr>
+          <p:nvPr/>
+        </p:nvSpPr>
+        <p:spPr>
+          <a:xfrm>
+            <a:off x="8210550" y="2419350"/>
+            <a:ext cx="3333750" cy="952500"/>
+          </a:xfrm>
+          <a:prstGeom prst="rect">
+            <a:avLst/>
+          </a:prstGeom>
+          <a:noFill/>
+          <a:ln w="0">
+            <a:noFill/>
+          </a:ln>
+        </p:spPr>
+        <p:txBody>
+          <a:bodyPr wrap="square" lIns="0" tIns="0" rIns="0" bIns="0" anchor="t">
+            <a:noAutofit/>
+          </a:bodyPr>
+          <a:lstStyle>
+            <a:defPPr>
+              <a:defRPr sz="1275" b="0">
+                <a:solidFill>
+                  <a:srgbClr val="1F2937"/>
+                </a:solidFill>
+                <a:latin typeface="Lato"/>
+                <a:ea typeface="Lato"/>
+                <a:cs typeface="Lato"/>
+              </a:defRPr>
+            </a:defPPr>
+          </a:lstStyle>
+          <a:p>
+            <a:pPr>
+              <a:defRPr sz="1275" b="0">
+                <a:solidFill>
+                  <a:srgbClr val="1F2937"/>
+                </a:solidFill>
+                <a:latin typeface="Lato"/>
+                <a:ea typeface="Lato"/>
+                <a:cs typeface="Lato"/>
+              </a:defRPr>
+            </a:pPr>
+            <a:r>
+              <a:rPr sz="1275" b="0">
+                <a:solidFill>
+                  <a:srgbClr val="1F2937"/>
+                </a:solidFill>
+                <a:latin typeface="Lato"/>
+                <a:ea typeface="Lato"/>
+                <a:cs typeface="Lato"/>
+              </a:rPr>
+              <a:t>Add flights only when incremental demand covers avoidable costs. Continue new-market trials only with a credible recovery plan or explicit service funding.</a:t>
+            </a:r>
+          </a:p>
+        </p:txBody>
+      </p:sp>
+      <p:sp>
+        <p:nvSpPr>
+          <p:cNvPr id="19" name="">
+            <a:extLst>
+              <a:ext uri="{FF2B5EF4-FFF2-40B4-BE49-F238E27FC236}">
+                <ns2:creationId id="{992D956F-92D4-44F1-A5F0-E331B081F3F7}"/>
+              </a:ext>
+            </a:extLst>
+          </p:cNvPr>
+          <p:cNvSpPr>
+            <a:spLocks noGrp="1"/>
+          </p:cNvSpPr>
+          <p:nvPr/>
+        </p:nvSpPr>
+        <p:spPr>
+          <a:xfrm>
+            <a:off x="552450" y="3476625"/>
+            <a:ext cx="11087100" cy="9525"/>
+          </a:xfrm>
+          <a:prstGeom prst="rect">
+            <a:avLst/>
+          </a:prstGeom>
+          <a:solidFill>
+            <a:srgbClr val="D1D5DB"/>
+          </a:solidFill>
+          <a:ln w="0">
+            <a:noFill/>
+          </a:ln>
+        </p:spPr>
+      </p:sp>
+      <p:sp>
+        <p:nvSpPr>
+          <p:cNvPr id="20" name="">
+            <a:extLst>
+              <a:ext uri="{FF2B5EF4-FFF2-40B4-BE49-F238E27FC236}">
+                <ns2:creationId id="{C763944D-1DE6-41D9-90CE-7B451096ACF1}"/>
+              </a:ext>
+            </a:extLst>
+          </p:cNvPr>
+          <p:cNvSpPr>
+            <a:spLocks noGrp="1"/>
+          </p:cNvSpPr>
+          <p:nvPr/>
+        </p:nvSpPr>
+        <p:spPr>
+          <a:xfrm>
+            <a:off x="552450" y="3638550"/>
+            <a:ext cx="7239000" cy="257175"/>
+          </a:xfrm>
+          <a:prstGeom prst="rect">
+            <a:avLst/>
+          </a:prstGeom>
+          <a:noFill/>
+          <a:ln w="0">
+            <a:noFill/>
+          </a:ln>
+        </p:spPr>
+        <p:txBody>
+          <a:bodyPr wrap="square" lIns="0" tIns="0" rIns="0" bIns="0" anchor="t">
+            <a:noAutofit/>
+          </a:bodyPr>
+          <a:lstStyle>
+            <a:defPPr>
+              <a:defRPr sz="1100" b="1">
                 <a:solidFill>
                   <a:srgbClr val="6B7280"/>
                 </a:solidFill>
+                <a:latin typeface="Montserrat"/>
+                <a:ea typeface="Montserrat"/>
+                <a:cs typeface="Montserrat"/>
+              </a:defRPr>
+            </a:defPPr>
+          </a:lstStyle>
+          <a:p>
+            <a:pPr>
+              <a:defRPr sz="1100" b="1">
+                <a:solidFill>
+                  <a:srgbClr val="6B7280"/>
+                </a:solidFill>
+                <a:latin typeface="Montserrat"/>
+                <a:ea typeface="Montserrat"/>
+                <a:cs typeface="Montserrat"/>
+              </a:defRPr>
+            </a:pPr>
+            <a:r>
+              <a:rPr sz="1100" b="1">
+                <a:solidFill>
+                  <a:srgbClr val="6B7280"/>
+                </a:solidFill>
+                <a:latin typeface="Montserrat"/>
+                <a:ea typeface="Montserrat"/>
+                <a:cs typeface="Montserrat"/>
+              </a:rPr>
+              <a:t>CENTRAL ANNUAL CONTRIBUTION AFTER GATES ($M)</a:t>
+            </a:r>
+          </a:p>
+        </p:txBody>
+      </p:sp>
+      <p:sp>
+        <p:nvSpPr>
+          <p:cNvPr id="21" name="">
+            <a:extLst>
+              <a:ext uri="{FF2B5EF4-FFF2-40B4-BE49-F238E27FC236}">
+                <ns2:creationId id="{C867058D-2E86-4883-A761-06D8ABBA70D4}"/>
+              </a:ext>
+            </a:extLst>
+          </p:cNvPr>
+          <p:cNvSpPr>
+            <a:spLocks noGrp="1"/>
+          </p:cNvSpPr>
+          <p:nvPr/>
+        </p:nvSpPr>
+        <p:spPr>
+          <a:xfrm>
+            <a:off x="552450" y="4086225"/>
+            <a:ext cx="7429500" cy="9525"/>
+          </a:xfrm>
+          <a:prstGeom prst="rect">
+            <a:avLst/>
+          </a:prstGeom>
+          <a:solidFill>
+            <a:srgbClr val="D1D5DB"/>
+          </a:solidFill>
+          <a:ln w="0">
+            <a:noFill/>
+          </a:ln>
+        </p:spPr>
+      </p:sp>
+      <p:sp>
+        <p:nvSpPr>
+          <p:cNvPr id="22" name="">
+            <a:extLst>
+              <a:ext uri="{FF2B5EF4-FFF2-40B4-BE49-F238E27FC236}">
+                <ns2:creationId id="{98384424-DD9F-46D0-86C2-3FF524FC4484}"/>
+              </a:ext>
+            </a:extLst>
+          </p:cNvPr>
+          <p:cNvSpPr>
+            <a:spLocks noGrp="1"/>
+          </p:cNvSpPr>
+          <p:nvPr/>
+        </p:nvSpPr>
+        <p:spPr>
+          <a:xfrm>
+            <a:off x="819150" y="4086225"/>
+            <a:ext cx="1028700" cy="1195959"/>
+          </a:xfrm>
+          <a:prstGeom prst="rect">
+            <a:avLst/>
+          </a:prstGeom>
+          <a:solidFill>
+            <a:srgbClr val="E8692A"/>
+          </a:solidFill>
+          <a:ln w="0">
+            <a:noFill/>
+          </a:ln>
+        </p:spPr>
+      </p:sp>
+      <p:sp>
+        <p:nvSpPr>
+          <p:cNvPr id="23" name="">
+            <a:extLst>
+              <a:ext uri="{FF2B5EF4-FFF2-40B4-BE49-F238E27FC236}">
+                <ns2:creationId id="{4D3F790C-80E9-487E-835A-415E3F3994DF}"/>
+              </a:ext>
+            </a:extLst>
+          </p:cNvPr>
+          <p:cNvSpPr>
+            <a:spLocks noGrp="1"/>
+          </p:cNvSpPr>
+          <p:nvPr/>
+        </p:nvSpPr>
+        <p:spPr>
+          <a:xfrm>
+            <a:off x="704850" y="5329809"/>
+            <a:ext cx="1381125" cy="266700"/>
+          </a:xfrm>
+          <a:prstGeom prst="rect">
+            <a:avLst/>
+          </a:prstGeom>
+          <a:noFill/>
+          <a:ln w="0">
+            <a:noFill/>
+          </a:ln>
+        </p:spPr>
+        <p:txBody>
+          <a:bodyPr wrap="square" lIns="0" tIns="0" rIns="0" bIns="0" anchor="t">
+            <a:noAutofit/>
+          </a:bodyPr>
+          <a:lstStyle>
+            <a:defPPr>
+              <a:defRPr sz="1650" b="1">
+                <a:solidFill>
+                  <a:srgbClr val="E8692A"/>
+                </a:solidFill>
+                <a:latin typeface="Montserrat"/>
+                <a:ea typeface="Montserrat"/>
+                <a:cs typeface="Montserrat"/>
+              </a:defRPr>
+            </a:defPPr>
+          </a:lstStyle>
+          <a:p>
+            <a:pPr>
+              <a:defRPr sz="1650" b="1">
+                <a:solidFill>
+                  <a:srgbClr val="E8692A"/>
+                </a:solidFill>
+                <a:latin typeface="Montserrat"/>
+                <a:ea typeface="Montserrat"/>
+                <a:cs typeface="Montserrat"/>
+              </a:defRPr>
+            </a:pPr>
+            <a:r>
+              <a:rPr sz="1650" b="1">
+                <a:solidFill>
+                  <a:srgbClr val="E8692A"/>
+                </a:solidFill>
+                <a:latin typeface="Montserrat"/>
+                <a:ea typeface="Montserrat"/>
+                <a:cs typeface="Montserrat"/>
+              </a:rPr>
+              <a:t>−58.4</a:t>
+            </a:r>
+          </a:p>
+        </p:txBody>
+      </p:sp>
+      <p:sp>
+        <p:nvSpPr>
+          <p:cNvPr id="24" name="">
+            <a:extLst>
+              <a:ext uri="{FF2B5EF4-FFF2-40B4-BE49-F238E27FC236}">
+                <ns2:creationId id="{62747C97-029F-40C7-913A-834115DA6D51}"/>
+              </a:ext>
+            </a:extLst>
+          </p:cNvPr>
+          <p:cNvSpPr>
+            <a:spLocks noGrp="1"/>
+          </p:cNvSpPr>
+          <p:nvPr/>
+        </p:nvSpPr>
+        <p:spPr>
+          <a:xfrm>
+            <a:off x="628650" y="5657850"/>
+            <a:ext cx="1524000" cy="266700"/>
+          </a:xfrm>
+          <a:prstGeom prst="rect">
+            <a:avLst/>
+          </a:prstGeom>
+          <a:noFill/>
+          <a:ln w="0">
+            <a:noFill/>
+          </a:ln>
+        </p:spPr>
+        <p:txBody>
+          <a:bodyPr wrap="square" lIns="0" tIns="0" rIns="0" bIns="0" anchor="t">
+            <a:noAutofit/>
+          </a:bodyPr>
+          <a:lstStyle>
+            <a:defPPr>
+              <a:defRPr sz="1200" b="0">
+                <a:solidFill>
+                  <a:srgbClr val="6B7280"/>
+                </a:solidFill>
                 <a:latin typeface="Lato"/>
-              </a:rPr>
-              <a:t>18</a:t>
-            </a:r>
-          </a:p>
-        </p:txBody>
-      </p:sp>
-      <p:sp>
-        <p:nvSpPr>
-          <p:cNvPr id="8" name="Rectangle 7"/>
-          <p:cNvSpPr/>
-          <p:nvPr/>
-        </p:nvSpPr>
-        <p:spPr>
-          <a:xfrm>
-            <a:off x="548640" y="1600200"/>
-            <a:ext cx="5440680" cy="3108960"/>
+                <a:ea typeface="Lato"/>
+                <a:cs typeface="Lato"/>
+              </a:defRPr>
+            </a:defPPr>
+          </a:lstStyle>
+          <a:p>
+            <a:pPr>
+              <a:defRPr sz="1200" b="0">
+                <a:solidFill>
+                  <a:srgbClr val="6B7280"/>
+                </a:solidFill>
+                <a:latin typeface="Lato"/>
+                <a:ea typeface="Lato"/>
+                <a:cs typeface="Lato"/>
+              </a:defRPr>
+            </a:pPr>
+            <a:r>
+              <a:rPr sz="1200" b="0">
+                <a:solidFill>
+                  <a:srgbClr val="6B7280"/>
+                </a:solidFill>
+                <a:latin typeface="Lato"/>
+                <a:ea typeface="Lato"/>
+                <a:cs typeface="Lato"/>
+              </a:rPr>
+              <a:t>Current</a:t>
+            </a:r>
+          </a:p>
+        </p:txBody>
+      </p:sp>
+      <p:sp>
+        <p:nvSpPr>
+          <p:cNvPr id="25" name="">
+            <a:extLst>
+              <a:ext uri="{FF2B5EF4-FFF2-40B4-BE49-F238E27FC236}">
+                <ns2:creationId id="{C4857F76-55B9-44B7-B5B4-EBCB2957E47B}"/>
+              </a:ext>
+            </a:extLst>
+          </p:cNvPr>
+          <p:cNvSpPr>
+            <a:spLocks noGrp="1"/>
+          </p:cNvSpPr>
+          <p:nvPr/>
+        </p:nvSpPr>
+        <p:spPr>
+          <a:xfrm>
+            <a:off x="1847850" y="5282184"/>
+            <a:ext cx="771525" cy="9525"/>
           </a:xfrm>
           <a:prstGeom prst="rect">
             <a:avLst/>
           </a:prstGeom>
           <a:solidFill>
-            <a:srgbClr val="F3F5F8"/>
+            <a:srgbClr val="D1D5DB"/>
           </a:solidFill>
-          <a:ln w="15875">
-            <a:solidFill>
-              <a:srgbClr val="9CA3AF"/>
-            </a:solidFill>
-            <a:prstDash val="dash"/>
+          <a:ln w="0">
+            <a:noFill/>
           </a:ln>
-          <a:effectLst/>
-        </p:spPr>
-        <p:style>
-          <a:lnRef idx="1">
-            <a:schemeClr val="accent1"/>
-          </a:lnRef>
-          <a:fillRef idx="3">
-            <a:schemeClr val="accent1"/>
-          </a:fillRef>
-          <a:effectRef idx="2">
-            <a:schemeClr val="accent1"/>
-          </a:effectRef>
-          <a:fontRef idx="minor">
-            <a:schemeClr val="lt1"/>
-          </a:fontRef>
-        </p:style>
-        <p:txBody>
-          <a:bodyPr rtlCol="0" anchor="ctr"/>
-          <a:lstStyle/>
-          <a:p>
-            <a:pPr algn="ctr"/>
-          </a:p>
-        </p:txBody>
-      </p:sp>
-      <p:sp>
-        <p:nvSpPr>
-          <p:cNvPr id="9" name="TextBox 8"/>
-          <p:cNvSpPr txBox="1"/>
-          <p:nvPr/>
-        </p:nvSpPr>
-        <p:spPr>
-          <a:xfrm>
-            <a:off x="685800" y="1691640"/>
-            <a:ext cx="5166360" cy="2926079"/>
+        </p:spPr>
+      </p:sp>
+      <p:sp>
+        <p:nvSpPr>
+          <p:cNvPr id="26" name="">
+            <a:extLst>
+              <a:ext uri="{FF2B5EF4-FFF2-40B4-BE49-F238E27FC236}">
+                <ns2:creationId id="{C7A83733-E565-4EC2-B1B5-0BA4EE7060A3}"/>
+              </a:ext>
+            </a:extLst>
+          </p:cNvPr>
+          <p:cNvSpPr>
+            <a:spLocks noGrp="1"/>
+          </p:cNvSpPr>
+          <p:nvPr/>
+        </p:nvSpPr>
+        <p:spPr>
+          <a:xfrm>
+            <a:off x="2619375" y="4164044"/>
+            <a:ext cx="1028700" cy="1118140"/>
+          </a:xfrm>
+          <a:prstGeom prst="rect">
+            <a:avLst/>
+          </a:prstGeom>
+          <a:solidFill>
+            <a:srgbClr val="2E7D5B"/>
+          </a:solidFill>
+          <a:ln w="0">
+            <a:noFill/>
+          </a:ln>
+        </p:spPr>
+      </p:sp>
+      <p:sp>
+        <p:nvSpPr>
+          <p:cNvPr id="27" name="">
+            <a:extLst>
+              <a:ext uri="{FF2B5EF4-FFF2-40B4-BE49-F238E27FC236}">
+                <ns2:creationId id="{0ECD949A-36A5-4F1B-A893-46FEFA1A85A9}"/>
+              </a:ext>
+            </a:extLst>
+          </p:cNvPr>
+          <p:cNvSpPr>
+            <a:spLocks noGrp="1"/>
+          </p:cNvSpPr>
+          <p:nvPr/>
+        </p:nvSpPr>
+        <p:spPr>
+          <a:xfrm>
+            <a:off x="2505075" y="3906869"/>
+            <a:ext cx="1381125" cy="266700"/>
           </a:xfrm>
           <a:prstGeom prst="rect">
             <a:avLst/>
           </a:prstGeom>
           <a:noFill/>
-        </p:spPr>
-        <p:txBody>
-          <a:bodyPr wrap="square" anchor="ctr">
-            <a:spAutoFit/>
+          <a:ln w="0">
+            <a:noFill/>
+          </a:ln>
+        </p:spPr>
+        <p:txBody>
+          <a:bodyPr wrap="square" lIns="0" tIns="0" rIns="0" bIns="0" anchor="t">
+            <a:noAutofit/>
           </a:bodyPr>
-          <a:lstStyle/>
-          <a:p>
-            <a:pPr algn="ctr">
-              <a:spcAft>
-                <a:spcPts val="600"/>
-              </a:spcAft>
+          <a:lstStyle>
+            <a:defPPr>
+              <a:defRPr sz="1650" b="1">
+                <a:solidFill>
+                  <a:srgbClr val="0B1F3A"/>
+                </a:solidFill>
+                <a:latin typeface="Montserrat"/>
+                <a:ea typeface="Montserrat"/>
+                <a:cs typeface="Montserrat"/>
+              </a:defRPr>
+            </a:defPPr>
+          </a:lstStyle>
+          <a:p>
+            <a:pPr>
+              <a:defRPr sz="1650" b="1">
+                <a:solidFill>
+                  <a:srgbClr val="0B1F3A"/>
+                </a:solidFill>
+                <a:latin typeface="Montserrat"/>
+                <a:ea typeface="Montserrat"/>
+                <a:cs typeface="Montserrat"/>
+              </a:defRPr>
             </a:pPr>
             <a:r>
+              <a:rPr sz="1650" b="1">
+                <a:solidFill>
+                  <a:srgbClr val="0B1F3A"/>
+                </a:solidFill>
+                <a:latin typeface="Montserrat"/>
+                <a:ea typeface="Montserrat"/>
+                <a:cs typeface="Montserrat"/>
+              </a:rPr>
+              <a:t>+54.6</a:t>
+            </a:r>
+          </a:p>
+        </p:txBody>
+      </p:sp>
+      <p:sp>
+        <p:nvSpPr>
+          <p:cNvPr id="28" name="">
+            <a:extLst>
+              <a:ext uri="{FF2B5EF4-FFF2-40B4-BE49-F238E27FC236}">
+                <ns2:creationId id="{E5216E27-7FAC-4021-B51B-1F6914AE7511}"/>
+              </a:ext>
+            </a:extLst>
+          </p:cNvPr>
+          <p:cNvSpPr>
+            <a:spLocks noGrp="1"/>
+          </p:cNvSpPr>
+          <p:nvPr/>
+        </p:nvSpPr>
+        <p:spPr>
+          <a:xfrm>
+            <a:off x="2428875" y="5657850"/>
+            <a:ext cx="1524000" cy="266700"/>
+          </a:xfrm>
+          <a:prstGeom prst="rect">
+            <a:avLst/>
+          </a:prstGeom>
+          <a:noFill/>
+          <a:ln w="0">
+            <a:noFill/>
+          </a:ln>
+        </p:spPr>
+        <p:txBody>
+          <a:bodyPr wrap="square" lIns="0" tIns="0" rIns="0" bIns="0" anchor="t">
+            <a:noAutofit/>
+          </a:bodyPr>
+          <a:lstStyle>
+            <a:defPPr>
+              <a:defRPr sz="1200" b="0">
+                <a:solidFill>
+                  <a:srgbClr val="6B7280"/>
+                </a:solidFill>
+                <a:latin typeface="Lato"/>
+                <a:ea typeface="Lato"/>
+                <a:cs typeface="Lato"/>
+              </a:defRPr>
+            </a:defPPr>
+          </a:lstStyle>
+          <a:p>
+            <a:pPr>
+              <a:defRPr sz="1200" b="0">
+                <a:solidFill>
+                  <a:srgbClr val="6B7280"/>
+                </a:solidFill>
+                <a:latin typeface="Lato"/>
+                <a:ea typeface="Lato"/>
+                <a:cs typeface="Lato"/>
+              </a:defRPr>
+            </a:pPr>
+            <a:r>
               <a:rPr sz="1200" b="0">
                 <a:solidFill>
-                  <a:srgbClr val="9CA3AF"/>
+                  <a:srgbClr val="6B7280"/>
                 </a:solidFill>
                 <a:latin typeface="Lato"/>
-              </a:rPr>
-              <a:t>SHORT TERM (0–12 months)
-[Action 1]
-[Action 2]
-[$ impact]</a:t>
-            </a:r>
-          </a:p>
-        </p:txBody>
-      </p:sp>
-      <p:sp>
-        <p:nvSpPr>
-          <p:cNvPr id="10" name="Rectangle 9"/>
-          <p:cNvSpPr/>
-          <p:nvPr/>
-        </p:nvSpPr>
-        <p:spPr>
-          <a:xfrm>
-            <a:off x="6199632" y="1600200"/>
-            <a:ext cx="5440680" cy="3108960"/>
+                <a:ea typeface="Lato"/>
+                <a:cs typeface="Lato"/>
+              </a:rPr>
+              <a:t>Schedule changes</a:t>
+            </a:r>
+          </a:p>
+        </p:txBody>
+      </p:sp>
+      <p:sp>
+        <p:nvSpPr>
+          <p:cNvPr id="29" name="">
+            <a:extLst>
+              <a:ext uri="{FF2B5EF4-FFF2-40B4-BE49-F238E27FC236}">
+                <ns2:creationId id="{0251236C-E482-4542-B55C-25CBBFFA5F41}"/>
+              </a:ext>
+            </a:extLst>
+          </p:cNvPr>
+          <p:cNvSpPr>
+            <a:spLocks noGrp="1"/>
+          </p:cNvSpPr>
+          <p:nvPr/>
+        </p:nvSpPr>
+        <p:spPr>
+          <a:xfrm>
+            <a:off x="3648075" y="4164044"/>
+            <a:ext cx="771525" cy="9525"/>
           </a:xfrm>
           <a:prstGeom prst="rect">
             <a:avLst/>
           </a:prstGeom>
           <a:solidFill>
-            <a:srgbClr val="F3F5F8"/>
+            <a:srgbClr val="D1D5DB"/>
           </a:solidFill>
-          <a:ln w="15875">
-            <a:solidFill>
-              <a:srgbClr val="9CA3AF"/>
-            </a:solidFill>
-            <a:prstDash val="dash"/>
+          <a:ln w="0">
+            <a:noFill/>
           </a:ln>
-          <a:effectLst/>
-        </p:spPr>
-        <p:style>
-          <a:lnRef idx="1">
-            <a:schemeClr val="accent1"/>
-          </a:lnRef>
-          <a:fillRef idx="3">
-            <a:schemeClr val="accent1"/>
-          </a:fillRef>
-          <a:effectRef idx="2">
-            <a:schemeClr val="accent1"/>
-          </a:effectRef>
-          <a:fontRef idx="minor">
-            <a:schemeClr val="lt1"/>
-          </a:fontRef>
-        </p:style>
-        <p:txBody>
-          <a:bodyPr rtlCol="0" anchor="ctr"/>
-          <a:lstStyle/>
-          <a:p>
-            <a:pPr algn="ctr"/>
-          </a:p>
-        </p:txBody>
-      </p:sp>
-      <p:sp>
-        <p:nvSpPr>
-          <p:cNvPr id="11" name="TextBox 10"/>
-          <p:cNvSpPr txBox="1"/>
-          <p:nvPr/>
-        </p:nvSpPr>
-        <p:spPr>
-          <a:xfrm>
-            <a:off x="6336792" y="1691640"/>
-            <a:ext cx="5166360" cy="2926079"/>
+        </p:spPr>
+      </p:sp>
+      <p:sp>
+        <p:nvSpPr>
+          <p:cNvPr id="30" name="">
+            <a:extLst>
+              <a:ext uri="{FF2B5EF4-FFF2-40B4-BE49-F238E27FC236}">
+                <ns2:creationId id="{DEE3DE5C-7D46-40A2-880C-E83A68228B58}"/>
+              </a:ext>
+            </a:extLst>
+          </p:cNvPr>
+          <p:cNvSpPr>
+            <a:spLocks noGrp="1"/>
+          </p:cNvSpPr>
+          <p:nvPr/>
+        </p:nvSpPr>
+        <p:spPr>
+          <a:xfrm>
+            <a:off x="4419600" y="4057555"/>
+            <a:ext cx="1028700" cy="106489"/>
+          </a:xfrm>
+          <a:prstGeom prst="rect">
+            <a:avLst/>
+          </a:prstGeom>
+          <a:solidFill>
+            <a:srgbClr val="2E7D5B"/>
+          </a:solidFill>
+          <a:ln w="0">
+            <a:noFill/>
+          </a:ln>
+        </p:spPr>
+      </p:sp>
+      <p:sp>
+        <p:nvSpPr>
+          <p:cNvPr id="31" name="">
+            <a:extLst>
+              <a:ext uri="{FF2B5EF4-FFF2-40B4-BE49-F238E27FC236}">
+                <ns2:creationId id="{5489F308-BD39-462B-8ACF-B494CBDDEBA6}"/>
+              </a:ext>
+            </a:extLst>
+          </p:cNvPr>
+          <p:cNvSpPr>
+            <a:spLocks noGrp="1"/>
+          </p:cNvSpPr>
+          <p:nvPr/>
+        </p:nvSpPr>
+        <p:spPr>
+          <a:xfrm>
+            <a:off x="4305300" y="3857625"/>
+            <a:ext cx="1381125" cy="266700"/>
           </a:xfrm>
           <a:prstGeom prst="rect">
             <a:avLst/>
           </a:prstGeom>
           <a:noFill/>
-        </p:spPr>
-        <p:txBody>
-          <a:bodyPr wrap="square" anchor="ctr">
-            <a:spAutoFit/>
+          <a:ln w="0">
+            <a:noFill/>
+          </a:ln>
+        </p:spPr>
+        <p:txBody>
+          <a:bodyPr wrap="square" lIns="0" tIns="0" rIns="0" bIns="0" anchor="t">
+            <a:noAutofit/>
           </a:bodyPr>
-          <a:lstStyle/>
-          <a:p>
-            <a:pPr algn="ctr">
-              <a:spcAft>
-                <a:spcPts val="600"/>
-              </a:spcAft>
+          <a:lstStyle>
+            <a:defPPr>
+              <a:defRPr sz="1650" b="1">
+                <a:solidFill>
+                  <a:srgbClr val="0B1F3A"/>
+                </a:solidFill>
+                <a:latin typeface="Montserrat"/>
+                <a:ea typeface="Montserrat"/>
+                <a:cs typeface="Montserrat"/>
+              </a:defRPr>
+            </a:defPPr>
+          </a:lstStyle>
+          <a:p>
+            <a:pPr>
+              <a:defRPr sz="1650" b="1">
+                <a:solidFill>
+                  <a:srgbClr val="0B1F3A"/>
+                </a:solidFill>
+                <a:latin typeface="Montserrat"/>
+                <a:ea typeface="Montserrat"/>
+                <a:cs typeface="Montserrat"/>
+              </a:defRPr>
             </a:pPr>
             <a:r>
+              <a:rPr sz="1650" b="1">
+                <a:solidFill>
+                  <a:srgbClr val="0B1F3A"/>
+                </a:solidFill>
+                <a:latin typeface="Montserrat"/>
+                <a:ea typeface="Montserrat"/>
+                <a:cs typeface="Montserrat"/>
+              </a:rPr>
+              <a:t>+5.2</a:t>
+            </a:r>
+          </a:p>
+        </p:txBody>
+      </p:sp>
+      <p:sp>
+        <p:nvSpPr>
+          <p:cNvPr id="32" name="">
+            <a:extLst>
+              <a:ext uri="{FF2B5EF4-FFF2-40B4-BE49-F238E27FC236}">
+                <ns2:creationId id="{0E7BA877-FB82-408B-ACEE-438AFB41E21E}"/>
+              </a:ext>
+            </a:extLst>
+          </p:cNvPr>
+          <p:cNvSpPr>
+            <a:spLocks noGrp="1"/>
+          </p:cNvSpPr>
+          <p:nvPr/>
+        </p:nvSpPr>
+        <p:spPr>
+          <a:xfrm>
+            <a:off x="4229100" y="5657850"/>
+            <a:ext cx="1524000" cy="266700"/>
+          </a:xfrm>
+          <a:prstGeom prst="rect">
+            <a:avLst/>
+          </a:prstGeom>
+          <a:noFill/>
+          <a:ln w="0">
+            <a:noFill/>
+          </a:ln>
+        </p:spPr>
+        <p:txBody>
+          <a:bodyPr wrap="square" lIns="0" tIns="0" rIns="0" bIns="0" anchor="t">
+            <a:noAutofit/>
+          </a:bodyPr>
+          <a:lstStyle>
+            <a:defPPr>
+              <a:defRPr sz="1200" b="0">
+                <a:solidFill>
+                  <a:srgbClr val="6B7280"/>
+                </a:solidFill>
+                <a:latin typeface="Lato"/>
+                <a:ea typeface="Lato"/>
+                <a:cs typeface="Lato"/>
+              </a:defRPr>
+            </a:defPPr>
+          </a:lstStyle>
+          <a:p>
+            <a:pPr>
+              <a:defRPr sz="1200" b="0">
+                <a:solidFill>
+                  <a:srgbClr val="6B7280"/>
+                </a:solidFill>
+                <a:latin typeface="Lato"/>
+                <a:ea typeface="Lato"/>
+                <a:cs typeface="Lato"/>
+              </a:defRPr>
+            </a:pPr>
+            <a:r>
               <a:rPr sz="1200" b="0">
                 <a:solidFill>
-                  <a:srgbClr val="9CA3AF"/>
+                  <a:srgbClr val="6B7280"/>
                 </a:solidFill>
                 <a:latin typeface="Lato"/>
-              </a:rPr>
-              <a:t>LONG TERM (12+ months)
-[Action 1]
-[Action 2]
-[$ impact]</a:t>
-            </a:r>
-          </a:p>
-        </p:txBody>
-      </p:sp>
-      <p:sp>
-        <p:nvSpPr>
-          <p:cNvPr id="12" name="Rectangle 11"/>
-          <p:cNvSpPr/>
-          <p:nvPr/>
-        </p:nvSpPr>
-        <p:spPr>
-          <a:xfrm>
-            <a:off x="548640" y="4892040"/>
-            <a:ext cx="3566160" cy="1280160"/>
+                <a:ea typeface="Lato"/>
+                <a:cs typeface="Lato"/>
+              </a:rPr>
+              <a:t>Revenue recovery</a:t>
+            </a:r>
+          </a:p>
+        </p:txBody>
+      </p:sp>
+      <p:sp>
+        <p:nvSpPr>
+          <p:cNvPr id="33" name="">
+            <a:extLst>
+              <a:ext uri="{FF2B5EF4-FFF2-40B4-BE49-F238E27FC236}">
+                <ns2:creationId id="{3203DAA1-B53A-4CD9-BBDD-5E611A727830}"/>
+              </a:ext>
+            </a:extLst>
+          </p:cNvPr>
+          <p:cNvSpPr>
+            <a:spLocks noGrp="1"/>
+          </p:cNvSpPr>
+          <p:nvPr/>
+        </p:nvSpPr>
+        <p:spPr>
+          <a:xfrm>
+            <a:off x="5448300" y="4057555"/>
+            <a:ext cx="771525" cy="9525"/>
           </a:xfrm>
           <a:prstGeom prst="rect">
             <a:avLst/>
           </a:prstGeom>
           <a:solidFill>
-            <a:srgbClr val="F3F5F8"/>
+            <a:srgbClr val="D1D5DB"/>
           </a:solidFill>
-          <a:ln w="15875">
-            <a:solidFill>
-              <a:srgbClr val="9CA3AF"/>
-            </a:solidFill>
-            <a:prstDash val="dash"/>
+          <a:ln w="0">
+            <a:noFill/>
           </a:ln>
-          <a:effectLst/>
-        </p:spPr>
-        <p:style>
-          <a:lnRef idx="1">
-            <a:schemeClr val="accent1"/>
-          </a:lnRef>
-          <a:fillRef idx="3">
-            <a:schemeClr val="accent1"/>
-          </a:fillRef>
-          <a:effectRef idx="2">
-            <a:schemeClr val="accent1"/>
-          </a:effectRef>
-          <a:fontRef idx="minor">
-            <a:schemeClr val="lt1"/>
-          </a:fontRef>
-        </p:style>
-        <p:txBody>
-          <a:bodyPr rtlCol="0" anchor="ctr"/>
-          <a:lstStyle/>
-          <a:p>
-            <a:pPr algn="ctr"/>
-          </a:p>
-        </p:txBody>
-      </p:sp>
-      <p:sp>
-        <p:nvSpPr>
-          <p:cNvPr id="13" name="TextBox 12"/>
-          <p:cNvSpPr txBox="1"/>
-          <p:nvPr/>
-        </p:nvSpPr>
-        <p:spPr>
-          <a:xfrm>
-            <a:off x="685800" y="4983479"/>
-            <a:ext cx="3291840" cy="1097280"/>
+        </p:spPr>
+      </p:sp>
+      <p:sp>
+        <p:nvSpPr>
+          <p:cNvPr id="34" name="">
+            <a:extLst>
+              <a:ext uri="{FF2B5EF4-FFF2-40B4-BE49-F238E27FC236}">
+                <ns2:creationId id="{0DEAC2D6-C812-4E6B-AE4C-B057B4AE3D49}"/>
+              </a:ext>
+            </a:extLst>
+          </p:cNvPr>
+          <p:cNvSpPr>
+            <a:spLocks noGrp="1"/>
+          </p:cNvSpPr>
+          <p:nvPr/>
+        </p:nvSpPr>
+        <p:spPr>
+          <a:xfrm>
+            <a:off x="6219825" y="4057555"/>
+            <a:ext cx="1028700" cy="38100"/>
+          </a:xfrm>
+          <a:prstGeom prst="rect">
+            <a:avLst/>
+          </a:prstGeom>
+          <a:solidFill>
+            <a:srgbClr val="0B1F3A"/>
+          </a:solidFill>
+          <a:ln w="0">
+            <a:noFill/>
+          </a:ln>
+        </p:spPr>
+      </p:sp>
+      <p:sp>
+        <p:nvSpPr>
+          <p:cNvPr id="35" name="">
+            <a:extLst>
+              <a:ext uri="{FF2B5EF4-FFF2-40B4-BE49-F238E27FC236}">
+                <ns2:creationId id="{701D8DB4-A14F-4206-BB45-D55BB2BEF0FA}"/>
+              </a:ext>
+            </a:extLst>
+          </p:cNvPr>
+          <p:cNvSpPr>
+            <a:spLocks noGrp="1"/>
+          </p:cNvSpPr>
+          <p:nvPr/>
+        </p:nvSpPr>
+        <p:spPr>
+          <a:xfrm>
+            <a:off x="6105525" y="3857625"/>
+            <a:ext cx="1381125" cy="266700"/>
           </a:xfrm>
           <a:prstGeom prst="rect">
             <a:avLst/>
           </a:prstGeom>
           <a:noFill/>
-        </p:spPr>
-        <p:txBody>
-          <a:bodyPr wrap="square" anchor="ctr">
-            <a:spAutoFit/>
+          <a:ln w="0">
+            <a:noFill/>
+          </a:ln>
+        </p:spPr>
+        <p:txBody>
+          <a:bodyPr wrap="square" lIns="0" tIns="0" rIns="0" bIns="0" anchor="t">
+            <a:noAutofit/>
           </a:bodyPr>
-          <a:lstStyle/>
-          <a:p>
-            <a:pPr algn="ctr">
-              <a:spcAft>
-                <a:spcPts val="600"/>
-              </a:spcAft>
+          <a:lstStyle>
+            <a:defPPr>
+              <a:defRPr sz="1650" b="1">
+                <a:solidFill>
+                  <a:srgbClr val="0B1F3A"/>
+                </a:solidFill>
+                <a:latin typeface="Montserrat"/>
+                <a:ea typeface="Montserrat"/>
+                <a:cs typeface="Montserrat"/>
+              </a:defRPr>
+            </a:defPPr>
+          </a:lstStyle>
+          <a:p>
+            <a:pPr>
+              <a:defRPr sz="1650" b="1">
+                <a:solidFill>
+                  <a:srgbClr val="0B1F3A"/>
+                </a:solidFill>
+                <a:latin typeface="Montserrat"/>
+                <a:ea typeface="Montserrat"/>
+                <a:cs typeface="Montserrat"/>
+              </a:defRPr>
             </a:pPr>
             <a:r>
-              <a:rPr sz="1100" b="0">
-                <a:solidFill>
-                  <a:srgbClr val="9CA3AF"/>
+              <a:rPr sz="1650" b="1">
+                <a:solidFill>
+                  <a:srgbClr val="0B1F3A"/>
+                </a:solidFill>
+                <a:latin typeface="Montserrat"/>
+                <a:ea typeface="Montserrat"/>
+                <a:cs typeface="Montserrat"/>
+              </a:rPr>
+              <a:t>+1.4</a:t>
+            </a:r>
+          </a:p>
+        </p:txBody>
+      </p:sp>
+      <p:sp>
+        <p:nvSpPr>
+          <p:cNvPr id="36" name="">
+            <a:extLst>
+              <a:ext uri="{FF2B5EF4-FFF2-40B4-BE49-F238E27FC236}">
+                <ns2:creationId id="{CE60864F-9280-48DD-B8BB-C15DF3DE9992}"/>
+              </a:ext>
+            </a:extLst>
+          </p:cNvPr>
+          <p:cNvSpPr>
+            <a:spLocks noGrp="1"/>
+          </p:cNvSpPr>
+          <p:nvPr/>
+        </p:nvSpPr>
+        <p:spPr>
+          <a:xfrm>
+            <a:off x="6029325" y="5657850"/>
+            <a:ext cx="1524000" cy="266700"/>
+          </a:xfrm>
+          <a:prstGeom prst="rect">
+            <a:avLst/>
+          </a:prstGeom>
+          <a:noFill/>
+          <a:ln w="0">
+            <a:noFill/>
+          </a:ln>
+        </p:spPr>
+        <p:txBody>
+          <a:bodyPr wrap="square" lIns="0" tIns="0" rIns="0" bIns="0" anchor="t">
+            <a:noAutofit/>
+          </a:bodyPr>
+          <a:lstStyle>
+            <a:defPPr>
+              <a:defRPr sz="1200" b="0">
+                <a:solidFill>
+                  <a:srgbClr val="6B7280"/>
                 </a:solidFill>
                 <a:latin typeface="Lato"/>
-              </a:rPr>
-              <a:t>CUSTOMERS
-[effect]</a:t>
-            </a:r>
-          </a:p>
-        </p:txBody>
-      </p:sp>
-      <p:sp>
-        <p:nvSpPr>
-          <p:cNvPr id="14" name="Rectangle 13"/>
-          <p:cNvSpPr/>
-          <p:nvPr/>
-        </p:nvSpPr>
-        <p:spPr>
-          <a:xfrm>
-            <a:off x="4297679" y="4892040"/>
-            <a:ext cx="3566160" cy="1280160"/>
-          </a:xfrm>
-          <a:prstGeom prst="rect">
-            <a:avLst/>
-          </a:prstGeom>
-          <a:solidFill>
-            <a:srgbClr val="F3F5F8"/>
-          </a:solidFill>
-          <a:ln w="15875">
-            <a:solidFill>
-              <a:srgbClr val="9CA3AF"/>
-            </a:solidFill>
-            <a:prstDash val="dash"/>
+                <a:ea typeface="Lato"/>
+                <a:cs typeface="Lato"/>
+              </a:defRPr>
+            </a:defPPr>
+          </a:lstStyle>
+          <a:p>
+            <a:pPr>
+              <a:defRPr sz="1200" b="0">
+                <a:solidFill>
+                  <a:srgbClr val="6B7280"/>
+                </a:solidFill>
+                <a:latin typeface="Lato"/>
+                <a:ea typeface="Lato"/>
+                <a:cs typeface="Lato"/>
+              </a:defRPr>
+            </a:pPr>
+            <a:r>
+              <a:rPr sz="1200" b="0">
+                <a:solidFill>
+                  <a:srgbClr val="6B7280"/>
+                </a:solidFill>
+                <a:latin typeface="Lato"/>
+                <a:ea typeface="Lato"/>
+                <a:cs typeface="Lato"/>
+              </a:rPr>
+              <a:t>Central case</a:t>
+            </a:r>
+          </a:p>
+        </p:txBody>
+      </p:sp>
+      <p:sp>
+        <p:nvSpPr>
+          <p:cNvPr id="37" name="">
+            <a:extLst>
+              <a:ext uri="{FF2B5EF4-FFF2-40B4-BE49-F238E27FC236}">
+                <ns2:creationId id="{CEF22526-A361-403E-84CF-5E23620EE0C6}"/>
+              </a:ext>
+            </a:extLst>
+          </p:cNvPr>
+          <p:cNvSpPr>
+            <a:spLocks noGrp="1"/>
+          </p:cNvSpPr>
+          <p:nvPr/>
+        </p:nvSpPr>
+        <p:spPr>
+          <a:xfrm>
+            <a:off x="8429625" y="3714750"/>
+            <a:ext cx="3143250" cy="285750"/>
+          </a:xfrm>
+          <a:prstGeom prst="rect">
+            <a:avLst/>
+          </a:prstGeom>
+          <a:noFill/>
+          <a:ln w="0">
+            <a:noFill/>
           </a:ln>
-          <a:effectLst/>
-        </p:spPr>
-        <p:style>
-          <a:lnRef idx="1">
-            <a:schemeClr val="accent1"/>
-          </a:lnRef>
-          <a:fillRef idx="3">
-            <a:schemeClr val="accent1"/>
-          </a:fillRef>
-          <a:effectRef idx="2">
-            <a:schemeClr val="accent1"/>
-          </a:effectRef>
-          <a:fontRef idx="minor">
-            <a:schemeClr val="lt1"/>
-          </a:fontRef>
-        </p:style>
-        <p:txBody>
-          <a:bodyPr rtlCol="0" anchor="ctr"/>
-          <a:lstStyle/>
-          <a:p>
-            <a:pPr algn="ctr"/>
-          </a:p>
-        </p:txBody>
-      </p:sp>
-      <p:sp>
-        <p:nvSpPr>
-          <p:cNvPr id="15" name="TextBox 14"/>
-          <p:cNvSpPr txBox="1"/>
-          <p:nvPr/>
-        </p:nvSpPr>
-        <p:spPr>
-          <a:xfrm>
-            <a:off x="4434840" y="4983479"/>
-            <a:ext cx="3291840" cy="1097280"/>
+        </p:spPr>
+        <p:txBody>
+          <a:bodyPr wrap="square" lIns="0" tIns="0" rIns="0" bIns="0" anchor="t">
+            <a:noAutofit/>
+          </a:bodyPr>
+          <a:lstStyle>
+            <a:defPPr>
+              <a:defRPr sz="1125" b="1">
+                <a:solidFill>
+                  <a:srgbClr val="E8692A"/>
+                </a:solidFill>
+                <a:latin typeface="Montserrat"/>
+                <a:ea typeface="Montserrat"/>
+                <a:cs typeface="Montserrat"/>
+              </a:defRPr>
+            </a:defPPr>
+          </a:lstStyle>
+          <a:p>
+            <a:pPr>
+              <a:defRPr sz="1125" b="1">
+                <a:solidFill>
+                  <a:srgbClr val="E8692A"/>
+                </a:solidFill>
+                <a:latin typeface="Montserrat"/>
+                <a:ea typeface="Montserrat"/>
+                <a:cs typeface="Montserrat"/>
+              </a:defRPr>
+            </a:pPr>
+            <a:r>
+              <a:rPr sz="1125" b="1">
+                <a:solidFill>
+                  <a:srgbClr val="E8692A"/>
+                </a:solidFill>
+                <a:latin typeface="Montserrat"/>
+                <a:ea typeface="Montserrat"/>
+                <a:cs typeface="Montserrat"/>
+              </a:rPr>
+              <a:t>WHAT MUST HOLD</a:t>
+            </a:r>
+          </a:p>
+        </p:txBody>
+      </p:sp>
+      <p:sp>
+        <p:nvSpPr>
+          <p:cNvPr id="38" name="">
+            <a:extLst>
+              <a:ext uri="{FF2B5EF4-FFF2-40B4-BE49-F238E27FC236}">
+                <ns2:creationId id="{90BAFB9F-0817-4203-977E-1D02481187C2}"/>
+              </a:ext>
+            </a:extLst>
+          </p:cNvPr>
+          <p:cNvSpPr>
+            <a:spLocks noGrp="1"/>
+          </p:cNvSpPr>
+          <p:nvPr/>
+        </p:nvSpPr>
+        <p:spPr>
+          <a:xfrm>
+            <a:off x="8429625" y="4095750"/>
+            <a:ext cx="3143250" cy="1000125"/>
           </a:xfrm>
           <a:prstGeom prst="rect">
             <a:avLst/>
           </a:prstGeom>
           <a:noFill/>
-        </p:spPr>
-        <p:txBody>
-          <a:bodyPr wrap="square" anchor="ctr">
-            <a:spAutoFit/>
+          <a:ln w="0">
+            <a:noFill/>
+          </a:ln>
+        </p:spPr>
+        <p:txBody>
+          <a:bodyPr wrap="square" lIns="0" tIns="0" rIns="0" bIns="0" anchor="t">
+            <a:noAutofit/>
           </a:bodyPr>
-          <a:lstStyle/>
-          <a:p>
-            <a:pPr algn="ctr">
-              <a:spcAft>
-                <a:spcPts val="600"/>
-              </a:spcAft>
+          <a:lstStyle>
+            <a:defPPr>
+              <a:defRPr sz="1425" b="1">
+                <a:solidFill>
+                  <a:srgbClr val="0B1F3A"/>
+                </a:solidFill>
+                <a:latin typeface="Lato"/>
+                <a:ea typeface="Lato"/>
+                <a:cs typeface="Lato"/>
+              </a:defRPr>
+            </a:defPPr>
+          </a:lstStyle>
+          <a:p>
+            <a:pPr>
+              <a:defRPr sz="1425" b="1">
+                <a:solidFill>
+                  <a:srgbClr val="0B1F3A"/>
+                </a:solidFill>
+                <a:latin typeface="Lato"/>
+                <a:ea typeface="Lato"/>
+                <a:cs typeface="Lato"/>
+              </a:defRPr>
             </a:pPr>
             <a:r>
-              <a:rPr sz="1100" b="0">
-                <a:solidFill>
-                  <a:srgbClr val="9CA3AF"/>
+              <a:rPr sz="1425" b="1">
+                <a:solidFill>
+                  <a:srgbClr val="0B1F3A"/>
                 </a:solidFill>
                 <a:latin typeface="Lato"/>
-              </a:rPr>
-              <a:t>EMPLOYEES
-[effect]</a:t>
-            </a:r>
-          </a:p>
-        </p:txBody>
-      </p:sp>
-      <p:sp>
-        <p:nvSpPr>
-          <p:cNvPr id="16" name="Rectangle 15"/>
-          <p:cNvSpPr/>
-          <p:nvPr/>
-        </p:nvSpPr>
-        <p:spPr>
-          <a:xfrm>
-            <a:off x="8046719" y="4892040"/>
-            <a:ext cx="3566160" cy="1280160"/>
-          </a:xfrm>
-          <a:prstGeom prst="rect">
-            <a:avLst/>
-          </a:prstGeom>
-          <a:solidFill>
-            <a:srgbClr val="F3F5F8"/>
-          </a:solidFill>
-          <a:ln w="15875">
-            <a:solidFill>
-              <a:srgbClr val="9CA3AF"/>
-            </a:solidFill>
-            <a:prstDash val="dash"/>
+                <a:ea typeface="Lato"/>
+                <a:cs typeface="Lato"/>
+              </a:rPr>
+              <a:t>Full trunk revenue recapture in the central case. Removed flight costs must be avoidable.</a:t>
+            </a:r>
+          </a:p>
+        </p:txBody>
+      </p:sp>
+      <p:sp>
+        <p:nvSpPr>
+          <p:cNvPr id="39" name="">
+            <a:extLst>
+              <a:ext uri="{FF2B5EF4-FFF2-40B4-BE49-F238E27FC236}">
+                <ns2:creationId id="{3E0B64DC-BC3C-4B1A-92B1-6D4B3ACF86FB}"/>
+              </a:ext>
+            </a:extLst>
+          </p:cNvPr>
+          <p:cNvSpPr>
+            <a:spLocks noGrp="1"/>
+          </p:cNvSpPr>
+          <p:nvPr/>
+        </p:nvSpPr>
+        <p:spPr>
+          <a:xfrm>
+            <a:off x="8429625" y="5153025"/>
+            <a:ext cx="3143250" cy="542925"/>
+          </a:xfrm>
+          <a:prstGeom prst="rect">
+            <a:avLst/>
+          </a:prstGeom>
+          <a:noFill/>
+          <a:ln w="0">
+            <a:noFill/>
           </a:ln>
-          <a:effectLst/>
-        </p:spPr>
-        <p:style>
-          <a:lnRef idx="1">
-            <a:schemeClr val="accent1"/>
-          </a:lnRef>
-          <a:fillRef idx="3">
-            <a:schemeClr val="accent1"/>
-          </a:fillRef>
-          <a:effectRef idx="2">
-            <a:schemeClr val="accent1"/>
-          </a:effectRef>
-          <a:fontRef idx="minor">
-            <a:schemeClr val="lt1"/>
-          </a:fontRef>
-        </p:style>
-        <p:txBody>
-          <a:bodyPr rtlCol="0" anchor="ctr"/>
-          <a:lstStyle/>
-          <a:p>
-            <a:pPr algn="ctr"/>
-          </a:p>
-        </p:txBody>
-      </p:sp>
-      <p:sp>
-        <p:nvSpPr>
-          <p:cNvPr id="17" name="TextBox 16"/>
-          <p:cNvSpPr txBox="1"/>
-          <p:nvPr/>
-        </p:nvSpPr>
-        <p:spPr>
-          <a:xfrm>
-            <a:off x="8183879" y="4983479"/>
-            <a:ext cx="3291840" cy="1097280"/>
+        </p:spPr>
+        <p:txBody>
+          <a:bodyPr wrap="square" lIns="0" tIns="0" rIns="0" bIns="0" anchor="t">
+            <a:noAutofit/>
+          </a:bodyPr>
+          <a:lstStyle>
+            <a:defPPr>
+              <a:defRPr sz="1275" b="0">
+                <a:solidFill>
+                  <a:srgbClr val="6B7280"/>
+                </a:solidFill>
+                <a:latin typeface="Lato"/>
+                <a:ea typeface="Lato"/>
+                <a:cs typeface="Lato"/>
+              </a:defRPr>
+            </a:defPPr>
+          </a:lstStyle>
+          <a:p>
+            <a:pPr>
+              <a:defRPr sz="1275" b="0">
+                <a:solidFill>
+                  <a:srgbClr val="6B7280"/>
+                </a:solidFill>
+                <a:latin typeface="Lato"/>
+                <a:ea typeface="Lato"/>
+                <a:cs typeface="Lato"/>
+              </a:defRPr>
+            </a:pPr>
+            <a:r>
+              <a:rPr sz="1275" b="0">
+                <a:solidFill>
+                  <a:srgbClr val="6B7280"/>
+                </a:solidFill>
+                <a:latin typeface="Lato"/>
+                <a:ea typeface="Lato"/>
+                <a:cs typeface="Lato"/>
+              </a:rPr>
+              <a:t>Scenario range: −$16.9M to +$5.7M. Target: FY27–28 break-even.</a:t>
+            </a:r>
+          </a:p>
+        </p:txBody>
+      </p:sp>
+      <p:sp>
+        <p:nvSpPr>
+          <p:cNvPr id="40" name="">
+            <a:extLst>
+              <a:ext uri="{FF2B5EF4-FFF2-40B4-BE49-F238E27FC236}">
+                <ns2:creationId id="{F62A3228-9D6D-48D5-9D6A-E5B6022483A8}"/>
+              </a:ext>
+            </a:extLst>
+          </p:cNvPr>
+          <p:cNvSpPr>
+            <a:spLocks noGrp="1"/>
+          </p:cNvSpPr>
+          <p:nvPr/>
+        </p:nvSpPr>
+        <p:spPr>
+          <a:xfrm>
+            <a:off x="552450" y="6048375"/>
+            <a:ext cx="11049000" cy="266700"/>
           </a:xfrm>
           <a:prstGeom prst="rect">
             <a:avLst/>
           </a:prstGeom>
           <a:noFill/>
-        </p:spPr>
-        <p:txBody>
-          <a:bodyPr wrap="square" anchor="ctr">
-            <a:spAutoFit/>
+          <a:ln w="0">
+            <a:noFill/>
+          </a:ln>
+        </p:spPr>
+        <p:txBody>
+          <a:bodyPr wrap="square" lIns="0" tIns="0" rIns="0" bIns="0" anchor="t">
+            <a:noAutofit/>
           </a:bodyPr>
-          <a:lstStyle/>
-          <a:p>
-            <a:pPr algn="ctr">
-              <a:spcAft>
-                <a:spcPts val="600"/>
-              </a:spcAft>
+          <a:lstStyle>
+            <a:defPPr>
+              <a:defRPr sz="1275" b="0">
+                <a:solidFill>
+                  <a:srgbClr val="0B1F3A"/>
+                </a:solidFill>
+                <a:latin typeface="Lato"/>
+                <a:ea typeface="Lato"/>
+                <a:cs typeface="Lato"/>
+              </a:defRPr>
+            </a:defPPr>
+          </a:lstStyle>
+          <a:p>
+            <a:pPr>
+              <a:defRPr sz="1275" b="0">
+                <a:solidFill>
+                  <a:srgbClr val="0B1F3A"/>
+                </a:solidFill>
+                <a:latin typeface="Lato"/>
+                <a:ea typeface="Lato"/>
+                <a:cs typeface="Lato"/>
+              </a:defRPr>
             </a:pPr>
             <a:r>
-              <a:rPr sz="1100" b="0">
-                <a:solidFill>
-                  <a:srgbClr val="9CA3AF"/>
+              <a:rPr sz="1275" b="0">
+                <a:solidFill>
+                  <a:srgbClr val="0B1F3A"/>
                 </a:solidFill>
                 <a:latin typeface="Lato"/>
-              </a:rPr>
-              <a:t>COMMUNITIES
-[effect]</a:t>
+                <a:ea typeface="Lato"/>
+                <a:cs typeface="Lato"/>
+              </a:rPr>
+              <a:t>Customers: protect connections     Employees: redeploy and retrain     Communities: keep all 20 airports initially</a:t>
             </a:r>
           </a:p>
         </p:txBody>
@@ -19165,7 +20786,7 @@
 </file>
 
 <file path=ppt/slides/slide19.xml><?xml version="1.0" encoding="utf-8"?>
-<p:sld xmlns:a="http://schemas.openxmlformats.org/drawingml/2006/main" xmlns:p="http://schemas.openxmlformats.org/presentationml/2006/main" xmlns:r="http://schemas.openxmlformats.org/officeDocument/2006/relationships">
+<p:sld xmlns:a="http://schemas.openxmlformats.org/drawingml/2006/main" xmlns:ns2="http://schemas.microsoft.com/office/drawing/2014/main" xmlns:p="http://schemas.openxmlformats.org/presentationml/2006/main">
   <p:cSld>
     <p:spTree>
       <p:nvGrpSpPr>
@@ -19173,17 +20794,27 @@
         <p:cNvGrpSpPr/>
         <p:nvPr/>
       </p:nvGrpSpPr>
-      <p:grpSpPr/>
-      <p:sp>
-        <p:nvSpPr>
-          <p:cNvPr id="2" name="Rectangle 1"/>
-          <p:cNvSpPr/>
+      <p:grpSpPr>
+        <a:xfrm/>
+      </p:grpSpPr>
+      <p:sp>
+        <p:nvSpPr>
+          <p:cNvPr id="35" name="">
+            <a:extLst>
+              <a:ext uri="{FF2B5EF4-FFF2-40B4-BE49-F238E27FC236}">
+                <ns2:creationId id="{86E3BE2E-B764-43E3-B5D4-F61D07C14BF2}"/>
+              </a:ext>
+            </a:extLst>
+          </p:cNvPr>
+          <p:cNvSpPr>
+            <a:spLocks noGrp="1"/>
+          </p:cNvSpPr>
           <p:nvPr/>
         </p:nvSpPr>
         <p:spPr>
           <a:xfrm>
             <a:off x="0" y="0"/>
-            <a:ext cx="12191695" cy="109728"/>
+            <a:ext cx="12192000" cy="109728"/>
           </a:xfrm>
           <a:prstGeom prst="rect">
             <a:avLst/>
@@ -19191,59 +20822,64 @@
           <a:solidFill>
             <a:srgbClr val="0B1F3A"/>
           </a:solidFill>
-          <a:ln>
+          <a:ln w="0">
             <a:noFill/>
           </a:ln>
-          <a:effectLst/>
-        </p:spPr>
-        <p:style>
-          <a:lnRef idx="1">
-            <a:schemeClr val="accent1"/>
-          </a:lnRef>
-          <a:fillRef idx="3">
-            <a:schemeClr val="accent1"/>
-          </a:fillRef>
-          <a:effectRef idx="2">
-            <a:schemeClr val="accent1"/>
-          </a:effectRef>
-          <a:fontRef idx="minor">
-            <a:schemeClr val="lt1"/>
-          </a:fontRef>
-        </p:style>
-        <p:txBody>
-          <a:bodyPr rtlCol="0" anchor="ctr"/>
-          <a:lstStyle/>
-          <a:p>
-            <a:pPr algn="ctr"/>
-          </a:p>
-        </p:txBody>
-      </p:sp>
-      <p:sp>
-        <p:nvSpPr>
-          <p:cNvPr id="3" name="TextBox 2"/>
-          <p:cNvSpPr txBox="1"/>
+        </p:spPr>
+      </p:sp>
+      <p:sp>
+        <p:nvSpPr>
+          <p:cNvPr id="2" name="">
+            <a:extLst>
+              <a:ext uri="{FF2B5EF4-FFF2-40B4-BE49-F238E27FC236}">
+                <ns2:creationId id="{46730A8D-BB41-46D3-A015-F82509DBD292}"/>
+              </a:ext>
+            </a:extLst>
+          </p:cNvPr>
+          <p:cNvSpPr>
+            <a:spLocks noGrp="1"/>
+          </p:cNvSpPr>
           <p:nvPr/>
         </p:nvSpPr>
         <p:spPr>
           <a:xfrm>
             <a:off x="548640" y="320040"/>
-            <a:ext cx="8229600" cy="274320"/>
+            <a:ext cx="10477500" cy="276225"/>
           </a:xfrm>
           <a:prstGeom prst="rect">
             <a:avLst/>
           </a:prstGeom>
           <a:noFill/>
-        </p:spPr>
-        <p:txBody>
-          <a:bodyPr wrap="square" anchor="t">
-            <a:spAutoFit/>
+          <a:ln w="0">
+            <a:noFill/>
+          </a:ln>
+        </p:spPr>
+        <p:txBody>
+          <a:bodyPr wrap="square" lIns="0" tIns="0" rIns="0" bIns="0" anchor="t">
+            <a:noAutofit/>
           </a:bodyPr>
-          <a:lstStyle/>
-          <a:p>
-            <a:pPr algn="l">
-              <a:spcAft>
-                <a:spcPts val="600"/>
-              </a:spcAft>
+          <a:lstStyle>
+            <a:defPPr>
+              <a:defRPr sz="1100" b="1">
+                <a:solidFill>
+                  <a:srgbClr val="E8692A"/>
+                </a:solidFill>
+                <a:latin typeface="Montserrat"/>
+                <a:ea typeface="Montserrat"/>
+                <a:cs typeface="Montserrat"/>
+              </a:defRPr>
+            </a:defPPr>
+          </a:lstStyle>
+          <a:p>
+            <a:pPr>
+              <a:defRPr sz="1100" b="1">
+                <a:solidFill>
+                  <a:srgbClr val="E8692A"/>
+                </a:solidFill>
+                <a:latin typeface="Montserrat"/>
+                <a:ea typeface="Montserrat"/>
+                <a:cs typeface="Montserrat"/>
+              </a:defRPr>
             </a:pPr>
             <a:r>
               <a:rPr sz="1100" b="1">
@@ -19251,6 +20887,8 @@
                   <a:srgbClr val="E8692A"/>
                 </a:solidFill>
                 <a:latin typeface="Montserrat"/>
+                <a:ea typeface="Montserrat"/>
+                <a:cs typeface="Montserrat"/>
               </a:rPr>
               <a:t>IMPLEMENTATION</a:t>
             </a:r>
@@ -19259,30 +20897,57 @@
       </p:sp>
       <p:sp>
         <p:nvSpPr>
-          <p:cNvPr id="4" name="TextBox 3"/>
-          <p:cNvSpPr txBox="1"/>
-          <p:nvPr/>
-        </p:nvSpPr>
-        <p:spPr>
-          <a:xfrm>
-            <a:off x="548640" y="566928"/>
-            <a:ext cx="11064240" cy="914400"/>
+          <p:cNvPr id="3" name="">
+            <a:extLst>
+              <a:ext uri="{FF2B5EF4-FFF2-40B4-BE49-F238E27FC236}">
+                <ns2:creationId id="{C1021F07-28B0-46FB-A51E-702A2D13828E}"/>
+              </a:ext>
+            </a:extLst>
+          </p:cNvPr>
+          <p:cNvSpPr>
+            <a:spLocks noGrp="1"/>
+          </p:cNvSpPr>
+          <p:nvPr/>
+        </p:nvSpPr>
+        <p:spPr>
+          <a:xfrm>
+            <a:off x="548640" y="619125"/>
+            <a:ext cx="11087100" cy="762000"/>
           </a:xfrm>
           <a:prstGeom prst="rect">
             <a:avLst/>
           </a:prstGeom>
           <a:noFill/>
-        </p:spPr>
-        <p:txBody>
-          <a:bodyPr wrap="square" anchor="t">
-            <a:spAutoFit/>
+          <a:ln w="0">
+            <a:noFill/>
+          </a:ln>
+        </p:spPr>
+        <p:txBody>
+          <a:bodyPr wrap="square" lIns="0" tIns="0" rIns="0" bIns="0" anchor="t">
+            <a:noAutofit/>
           </a:bodyPr>
-          <a:lstStyle/>
-          <a:p>
-            <a:pPr algn="l">
-              <a:spcAft>
-                <a:spcPts val="600"/>
-              </a:spcAft>
+          <a:lstStyle>
+            <a:defPPr>
+              <a:defRPr sz="2400" b="1">
+                <a:solidFill>
+                  <a:srgbClr val="0B1F3A"/>
+                </a:solidFill>
+                <a:latin typeface="Montserrat"/>
+                <a:ea typeface="Montserrat"/>
+                <a:cs typeface="Montserrat"/>
+              </a:defRPr>
+            </a:defPPr>
+          </a:lstStyle>
+          <a:p>
+            <a:pPr>
+              <a:defRPr sz="2400" b="1">
+                <a:solidFill>
+                  <a:srgbClr val="0B1F3A"/>
+                </a:solidFill>
+                <a:latin typeface="Montserrat"/>
+                <a:ea typeface="Montserrat"/>
+                <a:cs typeface="Montserrat"/>
+              </a:defRPr>
             </a:pPr>
             <a:r>
               <a:rPr sz="2400" b="1">
@@ -19290,22 +20955,1512 @@
                   <a:srgbClr val="0B1F3A"/>
                 </a:solidFill>
                 <a:latin typeface="Montserrat"/>
-              </a:rPr>
-              <a:t>[Headline: roadmap and milestones]</a:t>
-            </a:r>
-          </a:p>
-        </p:txBody>
-      </p:sp>
-      <p:sp>
-        <p:nvSpPr>
-          <p:cNvPr id="5" name="Rectangle 4"/>
-          <p:cNvSpPr/>
+                <a:ea typeface="Montserrat"/>
+                <a:cs typeface="Montserrat"/>
+              </a:rPr>
+              <a:t>Two decision gates keep the rollout tied to actual results</a:t>
+            </a:r>
+          </a:p>
+        </p:txBody>
+      </p:sp>
+      <p:sp>
+        <p:nvSpPr>
+          <p:cNvPr id="4" name="">
+            <a:extLst>
+              <a:ext uri="{FF2B5EF4-FFF2-40B4-BE49-F238E27FC236}">
+                <ns2:creationId id="{2115508E-4D5F-48F5-8FA8-FCB8CD5054ED}"/>
+              </a:ext>
+            </a:extLst>
+          </p:cNvPr>
+          <p:cNvSpPr>
+            <a:spLocks noGrp="1"/>
+          </p:cNvSpPr>
           <p:nvPr/>
         </p:nvSpPr>
         <p:spPr>
           <a:xfrm>
             <a:off x="548640" y="6400800"/>
-            <a:ext cx="11091672" cy="9144"/>
+            <a:ext cx="11087100" cy="9525"/>
+          </a:xfrm>
+          <a:prstGeom prst="rect">
+            <a:avLst/>
+          </a:prstGeom>
+          <a:solidFill>
+            <a:srgbClr val="D1D5DB"/>
+          </a:solidFill>
+          <a:ln w="0">
+            <a:noFill/>
+          </a:ln>
+        </p:spPr>
+      </p:sp>
+      <p:sp>
+        <p:nvSpPr>
+          <p:cNvPr id="5" name="">
+            <a:extLst>
+              <a:ext uri="{FF2B5EF4-FFF2-40B4-BE49-F238E27FC236}">
+                <ns2:creationId id="{C1835FD1-7128-43CD-86C7-4F07536F7C2F}"/>
+              </a:ext>
+            </a:extLst>
+          </p:cNvPr>
+          <p:cNvSpPr>
+            <a:spLocks noGrp="1"/>
+          </p:cNvSpPr>
+          <p:nvPr/>
+        </p:nvSpPr>
+        <p:spPr>
+          <a:xfrm>
+            <a:off x="548640" y="6467475"/>
+            <a:ext cx="10477500" cy="285750"/>
+          </a:xfrm>
+          <a:prstGeom prst="rect">
+            <a:avLst/>
+          </a:prstGeom>
+          <a:noFill/>
+          <a:ln w="0">
+            <a:noFill/>
+          </a:ln>
+        </p:spPr>
+        <p:txBody>
+          <a:bodyPr wrap="square" lIns="0" tIns="0" rIns="0" bIns="0" anchor="t">
+            <a:noAutofit/>
+          </a:bodyPr>
+          <a:lstStyle>
+            <a:defPPr>
+              <a:defRPr sz="825" b="0">
+                <a:solidFill>
+                  <a:srgbClr val="6B7280"/>
+                </a:solidFill>
+                <a:latin typeface="Lato"/>
+                <a:ea typeface="Lato"/>
+                <a:cs typeface="Lato"/>
+              </a:defRPr>
+            </a:defPPr>
+          </a:lstStyle>
+          <a:p>
+            <a:pPr>
+              <a:defRPr sz="825" b="0">
+                <a:solidFill>
+                  <a:srgbClr val="6B7280"/>
+                </a:solidFill>
+                <a:latin typeface="Lato"/>
+                <a:ea typeface="Lato"/>
+                <a:cs typeface="Lato"/>
+              </a:defRPr>
+            </a:pPr>
+            <a:r>
+              <a:rPr sz="825" b="0">
+                <a:solidFill>
+                  <a:srgbClr val="6B7280"/>
+                </a:solidFill>
+                <a:latin typeface="Lato"/>
+                <a:ea typeface="Lato"/>
+                <a:cs typeface="Lato"/>
+              </a:rPr>
+              <a:t>Proposed timing from approval. ~90% trunk recapture is the model break-even threshold with other central assumptions fixed.</a:t>
+            </a:r>
+          </a:p>
+        </p:txBody>
+      </p:sp>
+      <p:sp>
+        <p:nvSpPr>
+          <p:cNvPr id="6" name="">
+            <a:extLst>
+              <a:ext uri="{FF2B5EF4-FFF2-40B4-BE49-F238E27FC236}">
+                <ns2:creationId id="{70611F1E-C8D8-46C2-A06E-9BE01A739E67}"/>
+              </a:ext>
+            </a:extLst>
+          </p:cNvPr>
+          <p:cNvSpPr>
+            <a:spLocks noGrp="1"/>
+          </p:cNvSpPr>
+          <p:nvPr/>
+        </p:nvSpPr>
+        <p:spPr>
+          <a:xfrm>
+            <a:off x="11191875" y="6467475"/>
+            <a:ext cx="428625" cy="228600"/>
+          </a:xfrm>
+          <a:prstGeom prst="rect">
+            <a:avLst/>
+          </a:prstGeom>
+          <a:noFill/>
+          <a:ln w="0">
+            <a:noFill/>
+          </a:ln>
+        </p:spPr>
+        <p:txBody>
+          <a:bodyPr wrap="square" lIns="0" tIns="0" rIns="0" bIns="0" anchor="t">
+            <a:noAutofit/>
+          </a:bodyPr>
+          <a:lstStyle>
+            <a:defPPr>
+              <a:defRPr sz="900" b="0">
+                <a:solidFill>
+                  <a:srgbClr val="6B7280"/>
+                </a:solidFill>
+                <a:latin typeface="Lato"/>
+                <a:ea typeface="Lato"/>
+                <a:cs typeface="Lato"/>
+              </a:defRPr>
+            </a:defPPr>
+          </a:lstStyle>
+          <a:p>
+            <a:pPr>
+              <a:defRPr sz="900" b="0">
+                <a:solidFill>
+                  <a:srgbClr val="6B7280"/>
+                </a:solidFill>
+                <a:latin typeface="Lato"/>
+                <a:ea typeface="Lato"/>
+                <a:cs typeface="Lato"/>
+              </a:defRPr>
+            </a:pPr>
+            <a:r>
+              <a:rPr sz="900" b="0">
+                <a:solidFill>
+                  <a:srgbClr val="6B7280"/>
+                </a:solidFill>
+                <a:latin typeface="Lato"/>
+                <a:ea typeface="Lato"/>
+                <a:cs typeface="Lato"/>
+              </a:rPr>
+              <a:t>19</a:t>
+            </a:r>
+          </a:p>
+        </p:txBody>
+      </p:sp>
+      <p:sp>
+        <p:nvSpPr>
+          <p:cNvPr id="7" name="">
+            <a:extLst>
+              <a:ext uri="{FF2B5EF4-FFF2-40B4-BE49-F238E27FC236}">
+                <ns2:creationId id="{04112BD2-CA05-4BCF-A77A-DD84C6ED8961}"/>
+              </a:ext>
+            </a:extLst>
+          </p:cNvPr>
+          <p:cNvSpPr>
+            <a:spLocks noGrp="1"/>
+          </p:cNvSpPr>
+          <p:nvPr/>
+        </p:nvSpPr>
+        <p:spPr>
+          <a:xfrm>
+            <a:off x="552450" y="1552575"/>
+            <a:ext cx="3381375" cy="276225"/>
+          </a:xfrm>
+          <a:prstGeom prst="rect">
+            <a:avLst/>
+          </a:prstGeom>
+          <a:noFill/>
+          <a:ln w="0">
+            <a:noFill/>
+          </a:ln>
+        </p:spPr>
+        <p:txBody>
+          <a:bodyPr wrap="square" lIns="0" tIns="0" rIns="0" bIns="0" anchor="t">
+            <a:noAutofit/>
+          </a:bodyPr>
+          <a:lstStyle>
+            <a:defPPr>
+              <a:defRPr sz="1200" b="1">
+                <a:solidFill>
+                  <a:srgbClr val="E8692A"/>
+                </a:solidFill>
+                <a:latin typeface="Montserrat"/>
+                <a:ea typeface="Montserrat"/>
+                <a:cs typeface="Montserrat"/>
+              </a:defRPr>
+            </a:defPPr>
+          </a:lstStyle>
+          <a:p>
+            <a:pPr>
+              <a:defRPr sz="1200" b="1">
+                <a:solidFill>
+                  <a:srgbClr val="E8692A"/>
+                </a:solidFill>
+                <a:latin typeface="Montserrat"/>
+                <a:ea typeface="Montserrat"/>
+                <a:cs typeface="Montserrat"/>
+              </a:defRPr>
+            </a:pPr>
+            <a:r>
+              <a:rPr sz="1200" b="1">
+                <a:solidFill>
+                  <a:srgbClr val="E8692A"/>
+                </a:solidFill>
+                <a:latin typeface="Montserrat"/>
+                <a:ea typeface="Montserrat"/>
+                <a:cs typeface="Montserrat"/>
+              </a:rPr>
+              <a:t>0–3 MONTHS</a:t>
+            </a:r>
+          </a:p>
+        </p:txBody>
+      </p:sp>
+      <p:sp>
+        <p:nvSpPr>
+          <p:cNvPr id="8" name="">
+            <a:extLst>
+              <a:ext uri="{FF2B5EF4-FFF2-40B4-BE49-F238E27FC236}">
+                <ns2:creationId id="{AA9C6323-B480-432A-86D1-8D32378016D6}"/>
+              </a:ext>
+            </a:extLst>
+          </p:cNvPr>
+          <p:cNvSpPr>
+            <a:spLocks noGrp="1"/>
+          </p:cNvSpPr>
+          <p:nvPr/>
+        </p:nvSpPr>
+        <p:spPr>
+          <a:xfrm>
+            <a:off x="552450" y="1943100"/>
+            <a:ext cx="3333750" cy="9525"/>
+          </a:xfrm>
+          <a:prstGeom prst="rect">
+            <a:avLst/>
+          </a:prstGeom>
+          <a:solidFill>
+            <a:srgbClr val="0B1F3A"/>
+          </a:solidFill>
+          <a:ln w="0">
+            <a:noFill/>
+          </a:ln>
+        </p:spPr>
+      </p:sp>
+      <p:sp>
+        <p:nvSpPr>
+          <p:cNvPr id="9" name="">
+            <a:extLst>
+              <a:ext uri="{FF2B5EF4-FFF2-40B4-BE49-F238E27FC236}">
+                <ns2:creationId id="{63B59DD7-1BBA-4678-A99E-1ABB02C93954}"/>
+              </a:ext>
+            </a:extLst>
+          </p:cNvPr>
+          <p:cNvSpPr>
+            <a:spLocks noGrp="1"/>
+          </p:cNvSpPr>
+          <p:nvPr/>
+        </p:nvSpPr>
+        <p:spPr>
+          <a:xfrm>
+            <a:off x="552450" y="2143125"/>
+            <a:ext cx="3381375" cy="352425"/>
+          </a:xfrm>
+          <a:prstGeom prst="rect">
+            <a:avLst/>
+          </a:prstGeom>
+          <a:noFill/>
+          <a:ln w="0">
+            <a:noFill/>
+          </a:ln>
+        </p:spPr>
+        <p:txBody>
+          <a:bodyPr wrap="square" lIns="0" tIns="0" rIns="0" bIns="0" anchor="t">
+            <a:noAutofit/>
+          </a:bodyPr>
+          <a:lstStyle>
+            <a:defPPr>
+              <a:defRPr sz="1800" b="1">
+                <a:solidFill>
+                  <a:srgbClr val="0B1F3A"/>
+                </a:solidFill>
+                <a:latin typeface="Montserrat"/>
+                <a:ea typeface="Montserrat"/>
+                <a:cs typeface="Montserrat"/>
+              </a:defRPr>
+            </a:defPPr>
+          </a:lstStyle>
+          <a:p>
+            <a:pPr>
+              <a:defRPr sz="1800" b="1">
+                <a:solidFill>
+                  <a:srgbClr val="0B1F3A"/>
+                </a:solidFill>
+                <a:latin typeface="Montserrat"/>
+                <a:ea typeface="Montserrat"/>
+                <a:cs typeface="Montserrat"/>
+              </a:defRPr>
+            </a:pPr>
+            <a:r>
+              <a:rPr sz="1800" b="1">
+                <a:solidFill>
+                  <a:srgbClr val="0B1F3A"/>
+                </a:solidFill>
+                <a:latin typeface="Montserrat"/>
+                <a:ea typeface="Montserrat"/>
+                <a:cs typeface="Montserrat"/>
+              </a:rPr>
+              <a:t>Validate and prepare</a:t>
+            </a:r>
+          </a:p>
+        </p:txBody>
+      </p:sp>
+      <p:sp>
+        <p:nvSpPr>
+          <p:cNvPr id="10" name="">
+            <a:extLst>
+              <a:ext uri="{FF2B5EF4-FFF2-40B4-BE49-F238E27FC236}">
+                <ns2:creationId id="{1743E671-74D5-4CFA-8556-0AD90C65C06D}"/>
+              </a:ext>
+            </a:extLst>
+          </p:cNvPr>
+          <p:cNvSpPr>
+            <a:spLocks noGrp="1"/>
+          </p:cNvSpPr>
+          <p:nvPr/>
+        </p:nvSpPr>
+        <p:spPr>
+          <a:xfrm>
+            <a:off x="552450" y="2609850"/>
+            <a:ext cx="3381375" cy="247650"/>
+          </a:xfrm>
+          <a:prstGeom prst="rect">
+            <a:avLst/>
+          </a:prstGeom>
+          <a:noFill/>
+          <a:ln w="0">
+            <a:noFill/>
+          </a:ln>
+        </p:spPr>
+        <p:txBody>
+          <a:bodyPr wrap="square" lIns="0" tIns="0" rIns="0" bIns="0" anchor="t">
+            <a:noAutofit/>
+          </a:bodyPr>
+          <a:lstStyle>
+            <a:defPPr>
+              <a:defRPr sz="1200" b="1">
+                <a:solidFill>
+                  <a:srgbClr val="6B7280"/>
+                </a:solidFill>
+                <a:latin typeface="Lato"/>
+                <a:ea typeface="Lato"/>
+                <a:cs typeface="Lato"/>
+              </a:defRPr>
+            </a:defPPr>
+          </a:lstStyle>
+          <a:p>
+            <a:pPr>
+              <a:defRPr sz="1200" b="1">
+                <a:solidFill>
+                  <a:srgbClr val="6B7280"/>
+                </a:solidFill>
+                <a:latin typeface="Lato"/>
+                <a:ea typeface="Lato"/>
+                <a:cs typeface="Lato"/>
+              </a:defRPr>
+            </a:pPr>
+            <a:r>
+              <a:rPr sz="1200" b="1">
+                <a:solidFill>
+                  <a:srgbClr val="6B7280"/>
+                </a:solidFill>
+                <a:latin typeface="Lato"/>
+                <a:ea typeface="Lato"/>
+                <a:cs typeface="Lato"/>
+              </a:rPr>
+              <a:t>Finance + Network Planning</a:t>
+            </a:r>
+          </a:p>
+        </p:txBody>
+      </p:sp>
+      <p:sp>
+        <p:nvSpPr>
+          <p:cNvPr id="11" name="">
+            <a:extLst>
+              <a:ext uri="{FF2B5EF4-FFF2-40B4-BE49-F238E27FC236}">
+                <ns2:creationId id="{9034BA31-F3DE-4AB1-BBA4-0DF1F3CF6515}"/>
+              </a:ext>
+            </a:extLst>
+          </p:cNvPr>
+          <p:cNvSpPr>
+            <a:spLocks noGrp="1"/>
+          </p:cNvSpPr>
+          <p:nvPr/>
+        </p:nvSpPr>
+        <p:spPr>
+          <a:xfrm>
+            <a:off x="552450" y="3028950"/>
+            <a:ext cx="3286125" cy="971550"/>
+          </a:xfrm>
+          <a:prstGeom prst="rect">
+            <a:avLst/>
+          </a:prstGeom>
+          <a:noFill/>
+          <a:ln w="0">
+            <a:noFill/>
+          </a:ln>
+        </p:spPr>
+        <p:txBody>
+          <a:bodyPr wrap="square" lIns="0" tIns="0" rIns="0" bIns="0" anchor="t">
+            <a:noAutofit/>
+          </a:bodyPr>
+          <a:lstStyle>
+            <a:defPPr>
+              <a:defRPr sz="1500" b="0">
+                <a:solidFill>
+                  <a:srgbClr val="1F2937"/>
+                </a:solidFill>
+                <a:latin typeface="Lato"/>
+                <a:ea typeface="Lato"/>
+                <a:cs typeface="Lato"/>
+              </a:defRPr>
+            </a:defPPr>
+          </a:lstStyle>
+          <a:p>
+            <a:pPr>
+              <a:defRPr sz="1500" b="0">
+                <a:solidFill>
+                  <a:srgbClr val="1F2937"/>
+                </a:solidFill>
+                <a:latin typeface="Lato"/>
+                <a:ea typeface="Lato"/>
+                <a:cs typeface="Lato"/>
+              </a:defRPr>
+            </a:pPr>
+            <a:r>
+              <a:rPr sz="1500" b="0">
+                <a:solidFill>
+                  <a:srgbClr val="1F2937"/>
+                </a:solidFill>
+                <a:latin typeface="Lato"/>
+                <a:ea typeface="Lato"/>
+                <a:cs typeface="Lato"/>
+              </a:rPr>
+              <a:t>Link bookings to departures. Confirm avoidable costs, crew constraints and essential connections.</a:t>
+            </a:r>
+          </a:p>
+        </p:txBody>
+      </p:sp>
+      <p:sp>
+        <p:nvSpPr>
+          <p:cNvPr id="12" name="">
+            <a:extLst>
+              <a:ext uri="{FF2B5EF4-FFF2-40B4-BE49-F238E27FC236}">
+                <ns2:creationId id="{4A41F551-593C-477F-BCB1-7646241514E1}"/>
+              </a:ext>
+            </a:extLst>
+          </p:cNvPr>
+          <p:cNvSpPr>
+            <a:spLocks noGrp="1"/>
+          </p:cNvSpPr>
+          <p:nvPr/>
+        </p:nvSpPr>
+        <p:spPr>
+          <a:xfrm>
+            <a:off x="552450" y="4133850"/>
+            <a:ext cx="3381375" cy="219075"/>
+          </a:xfrm>
+          <a:prstGeom prst="rect">
+            <a:avLst/>
+          </a:prstGeom>
+          <a:noFill/>
+          <a:ln w="0">
+            <a:noFill/>
+          </a:ln>
+        </p:spPr>
+        <p:txBody>
+          <a:bodyPr wrap="square" lIns="0" tIns="0" rIns="0" bIns="0" anchor="t">
+            <a:noAutofit/>
+          </a:bodyPr>
+          <a:lstStyle>
+            <a:defPPr>
+              <a:defRPr sz="975" b="1">
+                <a:solidFill>
+                  <a:srgbClr val="E8692A"/>
+                </a:solidFill>
+                <a:latin typeface="Montserrat"/>
+                <a:ea typeface="Montserrat"/>
+                <a:cs typeface="Montserrat"/>
+              </a:defRPr>
+            </a:defPPr>
+          </a:lstStyle>
+          <a:p>
+            <a:pPr>
+              <a:defRPr sz="975" b="1">
+                <a:solidFill>
+                  <a:srgbClr val="E8692A"/>
+                </a:solidFill>
+                <a:latin typeface="Montserrat"/>
+                <a:ea typeface="Montserrat"/>
+                <a:cs typeface="Montserrat"/>
+              </a:defRPr>
+            </a:pPr>
+            <a:r>
+              <a:rPr sz="975" b="1">
+                <a:solidFill>
+                  <a:srgbClr val="E8692A"/>
+                </a:solidFill>
+                <a:latin typeface="Montserrat"/>
+                <a:ea typeface="Montserrat"/>
+                <a:cs typeface="Montserrat"/>
+              </a:rPr>
+              <a:t>OUTPUT</a:t>
+            </a:r>
+          </a:p>
+        </p:txBody>
+      </p:sp>
+      <p:sp>
+        <p:nvSpPr>
+          <p:cNvPr id="13" name="">
+            <a:extLst>
+              <a:ext uri="{FF2B5EF4-FFF2-40B4-BE49-F238E27FC236}">
+                <ns2:creationId id="{32169C7B-838B-4694-979C-2E64D30E085E}"/>
+              </a:ext>
+            </a:extLst>
+          </p:cNvPr>
+          <p:cNvSpPr>
+            <a:spLocks noGrp="1"/>
+          </p:cNvSpPr>
+          <p:nvPr/>
+        </p:nvSpPr>
+        <p:spPr>
+          <a:xfrm>
+            <a:off x="552450" y="4419600"/>
+            <a:ext cx="3333750" cy="428625"/>
+          </a:xfrm>
+          <a:prstGeom prst="rect">
+            <a:avLst/>
+          </a:prstGeom>
+          <a:noFill/>
+          <a:ln w="0">
+            <a:noFill/>
+          </a:ln>
+        </p:spPr>
+        <p:txBody>
+          <a:bodyPr wrap="square" lIns="0" tIns="0" rIns="0" bIns="0" anchor="t">
+            <a:noAutofit/>
+          </a:bodyPr>
+          <a:lstStyle>
+            <a:defPPr>
+              <a:defRPr sz="1425" b="1">
+                <a:solidFill>
+                  <a:srgbClr val="0B1F3A"/>
+                </a:solidFill>
+                <a:latin typeface="Lato"/>
+                <a:ea typeface="Lato"/>
+                <a:cs typeface="Lato"/>
+              </a:defRPr>
+            </a:defPPr>
+          </a:lstStyle>
+          <a:p>
+            <a:pPr>
+              <a:defRPr sz="1425" b="1">
+                <a:solidFill>
+                  <a:srgbClr val="0B1F3A"/>
+                </a:solidFill>
+                <a:latin typeface="Lato"/>
+                <a:ea typeface="Lato"/>
+                <a:cs typeface="Lato"/>
+              </a:defRPr>
+            </a:pPr>
+            <a:r>
+              <a:rPr sz="1425" b="1">
+                <a:solidFill>
+                  <a:srgbClr val="0B1F3A"/>
+                </a:solidFill>
+                <a:latin typeface="Lato"/>
+                <a:ea typeface="Lato"/>
+                <a:cs typeface="Lato"/>
+              </a:rPr>
+              <a:t>Cost baseline and pilot schedule</a:t>
+            </a:r>
+          </a:p>
+        </p:txBody>
+      </p:sp>
+      <p:sp>
+        <p:nvSpPr>
+          <p:cNvPr id="14" name="">
+            <a:extLst>
+              <a:ext uri="{FF2B5EF4-FFF2-40B4-BE49-F238E27FC236}">
+                <ns2:creationId id="{B945A885-4267-4FB7-A486-3A722EAFEC5A}"/>
+              </a:ext>
+            </a:extLst>
+          </p:cNvPr>
+          <p:cNvSpPr>
+            <a:spLocks noGrp="1"/>
+          </p:cNvSpPr>
+          <p:nvPr/>
+        </p:nvSpPr>
+        <p:spPr>
+          <a:xfrm>
+            <a:off x="4381500" y="1552575"/>
+            <a:ext cx="3381375" cy="276225"/>
+          </a:xfrm>
+          <a:prstGeom prst="rect">
+            <a:avLst/>
+          </a:prstGeom>
+          <a:noFill/>
+          <a:ln w="0">
+            <a:noFill/>
+          </a:ln>
+        </p:spPr>
+        <p:txBody>
+          <a:bodyPr wrap="square" lIns="0" tIns="0" rIns="0" bIns="0" anchor="t">
+            <a:noAutofit/>
+          </a:bodyPr>
+          <a:lstStyle>
+            <a:defPPr>
+              <a:defRPr sz="1200" b="1">
+                <a:solidFill>
+                  <a:srgbClr val="E8692A"/>
+                </a:solidFill>
+                <a:latin typeface="Montserrat"/>
+                <a:ea typeface="Montserrat"/>
+                <a:cs typeface="Montserrat"/>
+              </a:defRPr>
+            </a:defPPr>
+          </a:lstStyle>
+          <a:p>
+            <a:pPr>
+              <a:defRPr sz="1200" b="1">
+                <a:solidFill>
+                  <a:srgbClr val="E8692A"/>
+                </a:solidFill>
+                <a:latin typeface="Montserrat"/>
+                <a:ea typeface="Montserrat"/>
+                <a:cs typeface="Montserrat"/>
+              </a:defRPr>
+            </a:pPr>
+            <a:r>
+              <a:rPr sz="1200" b="1">
+                <a:solidFill>
+                  <a:srgbClr val="E8692A"/>
+                </a:solidFill>
+                <a:latin typeface="Montserrat"/>
+                <a:ea typeface="Montserrat"/>
+                <a:cs typeface="Montserrat"/>
+              </a:rPr>
+              <a:t>3–12 MONTHS</a:t>
+            </a:r>
+          </a:p>
+        </p:txBody>
+      </p:sp>
+      <p:sp>
+        <p:nvSpPr>
+          <p:cNvPr id="15" name="">
+            <a:extLst>
+              <a:ext uri="{FF2B5EF4-FFF2-40B4-BE49-F238E27FC236}">
+                <ns2:creationId id="{3B0F1974-C4DC-4674-A71C-9CA4D4CF1A98}"/>
+              </a:ext>
+            </a:extLst>
+          </p:cNvPr>
+          <p:cNvSpPr>
+            <a:spLocks noGrp="1"/>
+          </p:cNvSpPr>
+          <p:nvPr/>
+        </p:nvSpPr>
+        <p:spPr>
+          <a:xfrm>
+            <a:off x="4381500" y="1943100"/>
+            <a:ext cx="3333750" cy="9525"/>
+          </a:xfrm>
+          <a:prstGeom prst="rect">
+            <a:avLst/>
+          </a:prstGeom>
+          <a:solidFill>
+            <a:srgbClr val="0B1F3A"/>
+          </a:solidFill>
+          <a:ln w="0">
+            <a:noFill/>
+          </a:ln>
+        </p:spPr>
+      </p:sp>
+      <p:sp>
+        <p:nvSpPr>
+          <p:cNvPr id="16" name="">
+            <a:extLst>
+              <a:ext uri="{FF2B5EF4-FFF2-40B4-BE49-F238E27FC236}">
+                <ns2:creationId id="{48E0D73C-6E77-41FB-96CF-ADFE83BF3CDA}"/>
+              </a:ext>
+            </a:extLst>
+          </p:cNvPr>
+          <p:cNvSpPr>
+            <a:spLocks noGrp="1"/>
+          </p:cNvSpPr>
+          <p:nvPr/>
+        </p:nvSpPr>
+        <p:spPr>
+          <a:xfrm>
+            <a:off x="4381500" y="2143125"/>
+            <a:ext cx="3381375" cy="352425"/>
+          </a:xfrm>
+          <a:prstGeom prst="rect">
+            <a:avLst/>
+          </a:prstGeom>
+          <a:noFill/>
+          <a:ln w="0">
+            <a:noFill/>
+          </a:ln>
+        </p:spPr>
+        <p:txBody>
+          <a:bodyPr wrap="square" lIns="0" tIns="0" rIns="0" bIns="0" anchor="t">
+            <a:noAutofit/>
+          </a:bodyPr>
+          <a:lstStyle>
+            <a:defPPr>
+              <a:defRPr sz="1800" b="1">
+                <a:solidFill>
+                  <a:srgbClr val="0B1F3A"/>
+                </a:solidFill>
+                <a:latin typeface="Montserrat"/>
+                <a:ea typeface="Montserrat"/>
+                <a:cs typeface="Montserrat"/>
+              </a:defRPr>
+            </a:defPPr>
+          </a:lstStyle>
+          <a:p>
+            <a:pPr>
+              <a:defRPr sz="1800" b="1">
+                <a:solidFill>
+                  <a:srgbClr val="0B1F3A"/>
+                </a:solidFill>
+                <a:latin typeface="Montserrat"/>
+                <a:ea typeface="Montserrat"/>
+                <a:cs typeface="Montserrat"/>
+              </a:defRPr>
+            </a:pPr>
+            <a:r>
+              <a:rPr sz="1800" b="1">
+                <a:solidFill>
+                  <a:srgbClr val="0B1F3A"/>
+                </a:solidFill>
+                <a:latin typeface="Montserrat"/>
+                <a:ea typeface="Montserrat"/>
+                <a:cs typeface="Montserrat"/>
+              </a:rPr>
+              <a:t>Pilot and adjust</a:t>
+            </a:r>
+          </a:p>
+        </p:txBody>
+      </p:sp>
+      <p:sp>
+        <p:nvSpPr>
+          <p:cNvPr id="17" name="">
+            <a:extLst>
+              <a:ext uri="{FF2B5EF4-FFF2-40B4-BE49-F238E27FC236}">
+                <ns2:creationId id="{889D4F26-3DE0-40EB-BE0B-7B9520E34C36}"/>
+              </a:ext>
+            </a:extLst>
+          </p:cNvPr>
+          <p:cNvSpPr>
+            <a:spLocks noGrp="1"/>
+          </p:cNvSpPr>
+          <p:nvPr/>
+        </p:nvSpPr>
+        <p:spPr>
+          <a:xfrm>
+            <a:off x="4381500" y="2609850"/>
+            <a:ext cx="3381375" cy="247650"/>
+          </a:xfrm>
+          <a:prstGeom prst="rect">
+            <a:avLst/>
+          </a:prstGeom>
+          <a:noFill/>
+          <a:ln w="0">
+            <a:noFill/>
+          </a:ln>
+        </p:spPr>
+        <p:txBody>
+          <a:bodyPr wrap="square" lIns="0" tIns="0" rIns="0" bIns="0" anchor="t">
+            <a:noAutofit/>
+          </a:bodyPr>
+          <a:lstStyle>
+            <a:defPPr>
+              <a:defRPr sz="1200" b="1">
+                <a:solidFill>
+                  <a:srgbClr val="6B7280"/>
+                </a:solidFill>
+                <a:latin typeface="Lato"/>
+                <a:ea typeface="Lato"/>
+                <a:cs typeface="Lato"/>
+              </a:defRPr>
+            </a:defPPr>
+          </a:lstStyle>
+          <a:p>
+            <a:pPr>
+              <a:defRPr sz="1200" b="1">
+                <a:solidFill>
+                  <a:srgbClr val="6B7280"/>
+                </a:solidFill>
+                <a:latin typeface="Lato"/>
+                <a:ea typeface="Lato"/>
+                <a:cs typeface="Lato"/>
+              </a:defRPr>
+            </a:pPr>
+            <a:r>
+              <a:rPr sz="1200" b="1">
+                <a:solidFill>
+                  <a:srgbClr val="6B7280"/>
+                </a:solidFill>
+                <a:latin typeface="Lato"/>
+                <a:ea typeface="Lato"/>
+                <a:cs typeface="Lato"/>
+              </a:rPr>
+              <a:t>Operations + Commercial</a:t>
+            </a:r>
+          </a:p>
+        </p:txBody>
+      </p:sp>
+      <p:sp>
+        <p:nvSpPr>
+          <p:cNvPr id="18" name="">
+            <a:extLst>
+              <a:ext uri="{FF2B5EF4-FFF2-40B4-BE49-F238E27FC236}">
+                <ns2:creationId id="{3AC824C2-5FE7-41FF-9D87-135C63721502}"/>
+              </a:ext>
+            </a:extLst>
+          </p:cNvPr>
+          <p:cNvSpPr>
+            <a:spLocks noGrp="1"/>
+          </p:cNvSpPr>
+          <p:nvPr/>
+        </p:nvSpPr>
+        <p:spPr>
+          <a:xfrm>
+            <a:off x="4381500" y="3028950"/>
+            <a:ext cx="3286125" cy="971550"/>
+          </a:xfrm>
+          <a:prstGeom prst="rect">
+            <a:avLst/>
+          </a:prstGeom>
+          <a:noFill/>
+          <a:ln w="0">
+            <a:noFill/>
+          </a:ln>
+        </p:spPr>
+        <p:txBody>
+          <a:bodyPr wrap="square" lIns="0" tIns="0" rIns="0" bIns="0" anchor="t">
+            <a:noAutofit/>
+          </a:bodyPr>
+          <a:lstStyle>
+            <a:defPPr>
+              <a:defRPr sz="1500" b="0">
+                <a:solidFill>
+                  <a:srgbClr val="1F2937"/>
+                </a:solidFill>
+                <a:latin typeface="Lato"/>
+                <a:ea typeface="Lato"/>
+                <a:cs typeface="Lato"/>
+              </a:defRPr>
+            </a:defPPr>
+          </a:lstStyle>
+          <a:p>
+            <a:pPr>
+              <a:defRPr sz="1500" b="0">
+                <a:solidFill>
+                  <a:srgbClr val="1F2937"/>
+                </a:solidFill>
+                <a:latin typeface="Lato"/>
+                <a:ea typeface="Lato"/>
+                <a:cs typeface="Lato"/>
+              </a:defRPr>
+            </a:pPr>
+            <a:r>
+              <a:rPr sz="1500" b="0">
+                <a:solidFill>
+                  <a:srgbClr val="1F2937"/>
+                </a:solidFill>
+                <a:latin typeface="Lato"/>
+                <a:ea typeface="Lato"/>
+                <a:cs typeface="Lato"/>
+              </a:rPr>
+              <a:t>Pilot trunk reductions, then phase the wider changes. Run new-market trials and revenue tests.</a:t>
+            </a:r>
+          </a:p>
+        </p:txBody>
+      </p:sp>
+      <p:sp>
+        <p:nvSpPr>
+          <p:cNvPr id="19" name="">
+            <a:extLst>
+              <a:ext uri="{FF2B5EF4-FFF2-40B4-BE49-F238E27FC236}">
+                <ns2:creationId id="{39870264-36D2-4FEA-A784-DF3D8F805F95}"/>
+              </a:ext>
+            </a:extLst>
+          </p:cNvPr>
+          <p:cNvSpPr>
+            <a:spLocks noGrp="1"/>
+          </p:cNvSpPr>
+          <p:nvPr/>
+        </p:nvSpPr>
+        <p:spPr>
+          <a:xfrm>
+            <a:off x="4381500" y="4133850"/>
+            <a:ext cx="3381375" cy="219075"/>
+          </a:xfrm>
+          <a:prstGeom prst="rect">
+            <a:avLst/>
+          </a:prstGeom>
+          <a:noFill/>
+          <a:ln w="0">
+            <a:noFill/>
+          </a:ln>
+        </p:spPr>
+        <p:txBody>
+          <a:bodyPr wrap="square" lIns="0" tIns="0" rIns="0" bIns="0" anchor="t">
+            <a:noAutofit/>
+          </a:bodyPr>
+          <a:lstStyle>
+            <a:defPPr>
+              <a:defRPr sz="975" b="1">
+                <a:solidFill>
+                  <a:srgbClr val="E8692A"/>
+                </a:solidFill>
+                <a:latin typeface="Montserrat"/>
+                <a:ea typeface="Montserrat"/>
+                <a:cs typeface="Montserrat"/>
+              </a:defRPr>
+            </a:defPPr>
+          </a:lstStyle>
+          <a:p>
+            <a:pPr>
+              <a:defRPr sz="975" b="1">
+                <a:solidFill>
+                  <a:srgbClr val="E8692A"/>
+                </a:solidFill>
+                <a:latin typeface="Montserrat"/>
+                <a:ea typeface="Montserrat"/>
+                <a:cs typeface="Montserrat"/>
+              </a:defRPr>
+            </a:pPr>
+            <a:r>
+              <a:rPr sz="975" b="1">
+                <a:solidFill>
+                  <a:srgbClr val="E8692A"/>
+                </a:solidFill>
+                <a:latin typeface="Montserrat"/>
+                <a:ea typeface="Montserrat"/>
+                <a:cs typeface="Montserrat"/>
+              </a:rPr>
+              <a:t>OUTPUT</a:t>
+            </a:r>
+          </a:p>
+        </p:txBody>
+      </p:sp>
+      <p:sp>
+        <p:nvSpPr>
+          <p:cNvPr id="20" name="">
+            <a:extLst>
+              <a:ext uri="{FF2B5EF4-FFF2-40B4-BE49-F238E27FC236}">
+                <ns2:creationId id="{68DA9941-E566-42CD-8A63-EF053E07680D}"/>
+              </a:ext>
+            </a:extLst>
+          </p:cNvPr>
+          <p:cNvSpPr>
+            <a:spLocks noGrp="1"/>
+          </p:cNvSpPr>
+          <p:nvPr/>
+        </p:nvSpPr>
+        <p:spPr>
+          <a:xfrm>
+            <a:off x="4381500" y="4419600"/>
+            <a:ext cx="3333750" cy="428625"/>
+          </a:xfrm>
+          <a:prstGeom prst="rect">
+            <a:avLst/>
+          </a:prstGeom>
+          <a:noFill/>
+          <a:ln w="0">
+            <a:noFill/>
+          </a:ln>
+        </p:spPr>
+        <p:txBody>
+          <a:bodyPr wrap="square" lIns="0" tIns="0" rIns="0" bIns="0" anchor="t">
+            <a:noAutofit/>
+          </a:bodyPr>
+          <a:lstStyle>
+            <a:defPPr>
+              <a:defRPr sz="1425" b="1">
+                <a:solidFill>
+                  <a:srgbClr val="0B1F3A"/>
+                </a:solidFill>
+                <a:latin typeface="Lato"/>
+                <a:ea typeface="Lato"/>
+                <a:cs typeface="Lato"/>
+              </a:defRPr>
+            </a:defPPr>
+          </a:lstStyle>
+          <a:p>
+            <a:pPr>
+              <a:defRPr sz="1425" b="1">
+                <a:solidFill>
+                  <a:srgbClr val="0B1F3A"/>
+                </a:solidFill>
+                <a:latin typeface="Lato"/>
+                <a:ea typeface="Lato"/>
+                <a:cs typeface="Lato"/>
+              </a:defRPr>
+            </a:pPr>
+            <a:r>
+              <a:rPr sz="1425" b="1">
+                <a:solidFill>
+                  <a:srgbClr val="0B1F3A"/>
+                </a:solidFill>
+                <a:latin typeface="Lato"/>
+                <a:ea typeface="Lato"/>
+                <a:cs typeface="Lato"/>
+              </a:rPr>
+              <a:t>Measured retention and savings</a:t>
+            </a:r>
+          </a:p>
+        </p:txBody>
+      </p:sp>
+      <p:sp>
+        <p:nvSpPr>
+          <p:cNvPr id="21" name="">
+            <a:extLst>
+              <a:ext uri="{FF2B5EF4-FFF2-40B4-BE49-F238E27FC236}">
+                <ns2:creationId id="{55A7A10D-45A3-4DD9-B673-3DAAAA4F6538}"/>
+              </a:ext>
+            </a:extLst>
+          </p:cNvPr>
+          <p:cNvSpPr>
+            <a:spLocks noGrp="1"/>
+          </p:cNvSpPr>
+          <p:nvPr/>
+        </p:nvSpPr>
+        <p:spPr>
+          <a:xfrm>
+            <a:off x="8210550" y="1552575"/>
+            <a:ext cx="3381375" cy="276225"/>
+          </a:xfrm>
+          <a:prstGeom prst="rect">
+            <a:avLst/>
+          </a:prstGeom>
+          <a:noFill/>
+          <a:ln w="0">
+            <a:noFill/>
+          </a:ln>
+        </p:spPr>
+        <p:txBody>
+          <a:bodyPr wrap="square" lIns="0" tIns="0" rIns="0" bIns="0" anchor="t">
+            <a:noAutofit/>
+          </a:bodyPr>
+          <a:lstStyle>
+            <a:defPPr>
+              <a:defRPr sz="1200" b="1">
+                <a:solidFill>
+                  <a:srgbClr val="E8692A"/>
+                </a:solidFill>
+                <a:latin typeface="Montserrat"/>
+                <a:ea typeface="Montserrat"/>
+                <a:cs typeface="Montserrat"/>
+              </a:defRPr>
+            </a:defPPr>
+          </a:lstStyle>
+          <a:p>
+            <a:pPr>
+              <a:defRPr sz="1200" b="1">
+                <a:solidFill>
+                  <a:srgbClr val="E8692A"/>
+                </a:solidFill>
+                <a:latin typeface="Montserrat"/>
+                <a:ea typeface="Montserrat"/>
+                <a:cs typeface="Montserrat"/>
+              </a:defRPr>
+            </a:pPr>
+            <a:r>
+              <a:rPr sz="1200" b="1">
+                <a:solidFill>
+                  <a:srgbClr val="E8692A"/>
+                </a:solidFill>
+                <a:latin typeface="Montserrat"/>
+                <a:ea typeface="Montserrat"/>
+                <a:cs typeface="Montserrat"/>
+              </a:rPr>
+              <a:t>12+ MONTHS</a:t>
+            </a:r>
+          </a:p>
+        </p:txBody>
+      </p:sp>
+      <p:sp>
+        <p:nvSpPr>
+          <p:cNvPr id="22" name="">
+            <a:extLst>
+              <a:ext uri="{FF2B5EF4-FFF2-40B4-BE49-F238E27FC236}">
+                <ns2:creationId id="{5DBBA47D-FB87-498A-82AF-259BCA2505F4}"/>
+              </a:ext>
+            </a:extLst>
+          </p:cNvPr>
+          <p:cNvSpPr>
+            <a:spLocks noGrp="1"/>
+          </p:cNvSpPr>
+          <p:nvPr/>
+        </p:nvSpPr>
+        <p:spPr>
+          <a:xfrm>
+            <a:off x="8210550" y="1943100"/>
+            <a:ext cx="3333750" cy="9525"/>
+          </a:xfrm>
+          <a:prstGeom prst="rect">
+            <a:avLst/>
+          </a:prstGeom>
+          <a:solidFill>
+            <a:srgbClr val="0B1F3A"/>
+          </a:solidFill>
+          <a:ln w="0">
+            <a:noFill/>
+          </a:ln>
+        </p:spPr>
+      </p:sp>
+      <p:sp>
+        <p:nvSpPr>
+          <p:cNvPr id="23" name="">
+            <a:extLst>
+              <a:ext uri="{FF2B5EF4-FFF2-40B4-BE49-F238E27FC236}">
+                <ns2:creationId id="{C34C5B1A-0DAF-4F9E-B6B0-E97BA018B786}"/>
+              </a:ext>
+            </a:extLst>
+          </p:cNvPr>
+          <p:cNvSpPr>
+            <a:spLocks noGrp="1"/>
+          </p:cNvSpPr>
+          <p:nvPr/>
+        </p:nvSpPr>
+        <p:spPr>
+          <a:xfrm>
+            <a:off x="8210550" y="2143125"/>
+            <a:ext cx="3381375" cy="352425"/>
+          </a:xfrm>
+          <a:prstGeom prst="rect">
+            <a:avLst/>
+          </a:prstGeom>
+          <a:noFill/>
+          <a:ln w="0">
+            <a:noFill/>
+          </a:ln>
+        </p:spPr>
+        <p:txBody>
+          <a:bodyPr wrap="square" lIns="0" tIns="0" rIns="0" bIns="0" anchor="t">
+            <a:noAutofit/>
+          </a:bodyPr>
+          <a:lstStyle>
+            <a:defPPr>
+              <a:defRPr sz="1800" b="1">
+                <a:solidFill>
+                  <a:srgbClr val="0B1F3A"/>
+                </a:solidFill>
+                <a:latin typeface="Montserrat"/>
+                <a:ea typeface="Montserrat"/>
+                <a:cs typeface="Montserrat"/>
+              </a:defRPr>
+            </a:defPPr>
+          </a:lstStyle>
+          <a:p>
+            <a:pPr>
+              <a:defRPr sz="1800" b="1">
+                <a:solidFill>
+                  <a:srgbClr val="0B1F3A"/>
+                </a:solidFill>
+                <a:latin typeface="Montserrat"/>
+                <a:ea typeface="Montserrat"/>
+                <a:cs typeface="Montserrat"/>
+              </a:defRPr>
+            </a:pPr>
+            <a:r>
+              <a:rPr sz="1800" b="1">
+                <a:solidFill>
+                  <a:srgbClr val="0B1F3A"/>
+                </a:solidFill>
+                <a:latin typeface="Montserrat"/>
+                <a:ea typeface="Montserrat"/>
+                <a:cs typeface="Montserrat"/>
+              </a:rPr>
+              <a:t>Review and recover</a:t>
+            </a:r>
+          </a:p>
+        </p:txBody>
+      </p:sp>
+      <p:sp>
+        <p:nvSpPr>
+          <p:cNvPr id="24" name="">
+            <a:extLst>
+              <a:ext uri="{FF2B5EF4-FFF2-40B4-BE49-F238E27FC236}">
+                <ns2:creationId id="{DC4F225E-F05F-4CA2-84D7-4F98EC8FC3B1}"/>
+              </a:ext>
+            </a:extLst>
+          </p:cNvPr>
+          <p:cNvSpPr>
+            <a:spLocks noGrp="1"/>
+          </p:cNvSpPr>
+          <p:nvPr/>
+        </p:nvSpPr>
+        <p:spPr>
+          <a:xfrm>
+            <a:off x="8210550" y="2609850"/>
+            <a:ext cx="3381375" cy="247650"/>
+          </a:xfrm>
+          <a:prstGeom prst="rect">
+            <a:avLst/>
+          </a:prstGeom>
+          <a:noFill/>
+          <a:ln w="0">
+            <a:noFill/>
+          </a:ln>
+        </p:spPr>
+        <p:txBody>
+          <a:bodyPr wrap="square" lIns="0" tIns="0" rIns="0" bIns="0" anchor="t">
+            <a:noAutofit/>
+          </a:bodyPr>
+          <a:lstStyle>
+            <a:defPPr>
+              <a:defRPr sz="1200" b="1">
+                <a:solidFill>
+                  <a:srgbClr val="6B7280"/>
+                </a:solidFill>
+                <a:latin typeface="Lato"/>
+                <a:ea typeface="Lato"/>
+                <a:cs typeface="Lato"/>
+              </a:defRPr>
+            </a:defPPr>
+          </a:lstStyle>
+          <a:p>
+            <a:pPr>
+              <a:defRPr sz="1200" b="1">
+                <a:solidFill>
+                  <a:srgbClr val="6B7280"/>
+                </a:solidFill>
+                <a:latin typeface="Lato"/>
+                <a:ea typeface="Lato"/>
+                <a:cs typeface="Lato"/>
+              </a:defRPr>
+            </a:pPr>
+            <a:r>
+              <a:rPr sz="1200" b="1">
+                <a:solidFill>
+                  <a:srgbClr val="6B7280"/>
+                </a:solidFill>
+                <a:latin typeface="Lato"/>
+                <a:ea typeface="Lato"/>
+                <a:cs typeface="Lato"/>
+              </a:rPr>
+              <a:t>CFO + Network Planning</a:t>
+            </a:r>
+          </a:p>
+        </p:txBody>
+      </p:sp>
+      <p:sp>
+        <p:nvSpPr>
+          <p:cNvPr id="25" name="">
+            <a:extLst>
+              <a:ext uri="{FF2B5EF4-FFF2-40B4-BE49-F238E27FC236}">
+                <ns2:creationId id="{2FA76D39-7000-4B0C-9BC8-D3312BB16ACD}"/>
+              </a:ext>
+            </a:extLst>
+          </p:cNvPr>
+          <p:cNvSpPr>
+            <a:spLocks noGrp="1"/>
+          </p:cNvSpPr>
+          <p:nvPr/>
+        </p:nvSpPr>
+        <p:spPr>
+          <a:xfrm>
+            <a:off x="8210550" y="3028950"/>
+            <a:ext cx="3286125" cy="971550"/>
+          </a:xfrm>
+          <a:prstGeom prst="rect">
+            <a:avLst/>
+          </a:prstGeom>
+          <a:noFill/>
+          <a:ln w="0">
+            <a:noFill/>
+          </a:ln>
+        </p:spPr>
+        <p:txBody>
+          <a:bodyPr wrap="square" lIns="0" tIns="0" rIns="0" bIns="0" anchor="t">
+            <a:noAutofit/>
+          </a:bodyPr>
+          <a:lstStyle>
+            <a:defPPr>
+              <a:defRPr sz="1500" b="0">
+                <a:solidFill>
+                  <a:srgbClr val="1F2937"/>
+                </a:solidFill>
+                <a:latin typeface="Lato"/>
+                <a:ea typeface="Lato"/>
+                <a:cs typeface="Lato"/>
+              </a:defRPr>
+            </a:defPPr>
+          </a:lstStyle>
+          <a:p>
+            <a:pPr>
+              <a:defRPr sz="1500" b="0">
+                <a:solidFill>
+                  <a:srgbClr val="1F2937"/>
+                </a:solidFill>
+                <a:latin typeface="Lato"/>
+                <a:ea typeface="Lato"/>
+                <a:cs typeface="Lato"/>
+              </a:defRPr>
+            </a:pPr>
+            <a:r>
+              <a:rPr sz="1500" b="0">
+                <a:solidFill>
+                  <a:srgbClr val="1F2937"/>
+                </a:solidFill>
+                <a:latin typeface="Lato"/>
+                <a:ea typeface="Lato"/>
+                <a:cs typeface="Lato"/>
+              </a:rPr>
+              <a:t>Review route P&amp;Ls monthly. Add peak flights only with positive incremental contribution.</a:t>
+            </a:r>
+          </a:p>
+        </p:txBody>
+      </p:sp>
+      <p:sp>
+        <p:nvSpPr>
+          <p:cNvPr id="26" name="">
+            <a:extLst>
+              <a:ext uri="{FF2B5EF4-FFF2-40B4-BE49-F238E27FC236}">
+                <ns2:creationId id="{CFB43E7F-CD92-4F5C-8876-7987E71DA4AE}"/>
+              </a:ext>
+            </a:extLst>
+          </p:cNvPr>
+          <p:cNvSpPr>
+            <a:spLocks noGrp="1"/>
+          </p:cNvSpPr>
+          <p:nvPr/>
+        </p:nvSpPr>
+        <p:spPr>
+          <a:xfrm>
+            <a:off x="8210550" y="4133850"/>
+            <a:ext cx="3381375" cy="219075"/>
+          </a:xfrm>
+          <a:prstGeom prst="rect">
+            <a:avLst/>
+          </a:prstGeom>
+          <a:noFill/>
+          <a:ln w="0">
+            <a:noFill/>
+          </a:ln>
+        </p:spPr>
+        <p:txBody>
+          <a:bodyPr wrap="square" lIns="0" tIns="0" rIns="0" bIns="0" anchor="t">
+            <a:noAutofit/>
+          </a:bodyPr>
+          <a:lstStyle>
+            <a:defPPr>
+              <a:defRPr sz="975" b="1">
+                <a:solidFill>
+                  <a:srgbClr val="E8692A"/>
+                </a:solidFill>
+                <a:latin typeface="Montserrat"/>
+                <a:ea typeface="Montserrat"/>
+                <a:cs typeface="Montserrat"/>
+              </a:defRPr>
+            </a:defPPr>
+          </a:lstStyle>
+          <a:p>
+            <a:pPr>
+              <a:defRPr sz="975" b="1">
+                <a:solidFill>
+                  <a:srgbClr val="E8692A"/>
+                </a:solidFill>
+                <a:latin typeface="Montserrat"/>
+                <a:ea typeface="Montserrat"/>
+                <a:cs typeface="Montserrat"/>
+              </a:defRPr>
+            </a:pPr>
+            <a:r>
+              <a:rPr sz="975" b="1">
+                <a:solidFill>
+                  <a:srgbClr val="E8692A"/>
+                </a:solidFill>
+                <a:latin typeface="Montserrat"/>
+                <a:ea typeface="Montserrat"/>
+                <a:cs typeface="Montserrat"/>
+              </a:rPr>
+              <a:t>OUTPUT</a:t>
+            </a:r>
+          </a:p>
+        </p:txBody>
+      </p:sp>
+      <p:sp>
+        <p:nvSpPr>
+          <p:cNvPr id="27" name="">
+            <a:extLst>
+              <a:ext uri="{FF2B5EF4-FFF2-40B4-BE49-F238E27FC236}">
+                <ns2:creationId id="{D27B7956-A72B-4452-9C76-F14757512478}"/>
+              </a:ext>
+            </a:extLst>
+          </p:cNvPr>
+          <p:cNvSpPr>
+            <a:spLocks noGrp="1"/>
+          </p:cNvSpPr>
+          <p:nvPr/>
+        </p:nvSpPr>
+        <p:spPr>
+          <a:xfrm>
+            <a:off x="8210550" y="4419600"/>
+            <a:ext cx="3333750" cy="428625"/>
+          </a:xfrm>
+          <a:prstGeom prst="rect">
+            <a:avLst/>
+          </a:prstGeom>
+          <a:noFill/>
+          <a:ln w="0">
+            <a:noFill/>
+          </a:ln>
+        </p:spPr>
+        <p:txBody>
+          <a:bodyPr wrap="square" lIns="0" tIns="0" rIns="0" bIns="0" anchor="t">
+            <a:noAutofit/>
+          </a:bodyPr>
+          <a:lstStyle>
+            <a:defPPr>
+              <a:defRPr sz="1425" b="1">
+                <a:solidFill>
+                  <a:srgbClr val="0B1F3A"/>
+                </a:solidFill>
+                <a:latin typeface="Lato"/>
+                <a:ea typeface="Lato"/>
+                <a:cs typeface="Lato"/>
+              </a:defRPr>
+            </a:defPPr>
+          </a:lstStyle>
+          <a:p>
+            <a:pPr>
+              <a:defRPr sz="1425" b="1">
+                <a:solidFill>
+                  <a:srgbClr val="0B1F3A"/>
+                </a:solidFill>
+                <a:latin typeface="Lato"/>
+                <a:ea typeface="Lato"/>
+                <a:cs typeface="Lato"/>
+              </a:defRPr>
+            </a:pPr>
+            <a:r>
+              <a:rPr sz="1425" b="1">
+                <a:solidFill>
+                  <a:srgbClr val="0B1F3A"/>
+                </a:solidFill>
+                <a:latin typeface="Lato"/>
+                <a:ea typeface="Lato"/>
+                <a:cs typeface="Lato"/>
+              </a:rPr>
+              <a:t>FY27–28 break-even plan</a:t>
+            </a:r>
+          </a:p>
+        </p:txBody>
+      </p:sp>
+      <p:sp>
+        <p:nvSpPr>
+          <p:cNvPr id="28" name="">
+            <a:extLst>
+              <a:ext uri="{FF2B5EF4-FFF2-40B4-BE49-F238E27FC236}">
+                <ns2:creationId id="{AA7C6F21-BB5C-4BCD-8413-B8E0F47B83E5}"/>
+              </a:ext>
+            </a:extLst>
+          </p:cNvPr>
+          <p:cNvSpPr>
+            <a:spLocks noGrp="1"/>
+          </p:cNvSpPr>
+          <p:nvPr/>
+        </p:nvSpPr>
+        <p:spPr>
+          <a:xfrm>
+            <a:off x="552450" y="5038725"/>
+            <a:ext cx="5334000" cy="609600"/>
           </a:xfrm>
           <a:prstGeom prst="rect">
             <a:avLst/>
@@ -19313,204 +22468,165 @@
           <a:solidFill>
             <a:srgbClr val="F3F5F8"/>
           </a:solidFill>
-          <a:ln>
+          <a:ln w="0">
             <a:noFill/>
           </a:ln>
-          <a:effectLst/>
-        </p:spPr>
-        <p:style>
-          <a:lnRef idx="1">
-            <a:schemeClr val="accent1"/>
-          </a:lnRef>
-          <a:fillRef idx="3">
-            <a:schemeClr val="accent1"/>
-          </a:fillRef>
-          <a:effectRef idx="2">
-            <a:schemeClr val="accent1"/>
-          </a:effectRef>
-          <a:fontRef idx="minor">
-            <a:schemeClr val="lt1"/>
-          </a:fontRef>
-        </p:style>
-        <p:txBody>
-          <a:bodyPr rtlCol="0" anchor="ctr"/>
-          <a:lstStyle/>
-          <a:p>
-            <a:pPr algn="ctr"/>
-          </a:p>
-        </p:txBody>
-      </p:sp>
-      <p:sp>
-        <p:nvSpPr>
-          <p:cNvPr id="6" name="TextBox 5"/>
-          <p:cNvSpPr txBox="1"/>
-          <p:nvPr/>
-        </p:nvSpPr>
-        <p:spPr>
-          <a:xfrm>
-            <a:off x="548640" y="6446520"/>
-            <a:ext cx="9601200" cy="274320"/>
+        </p:spPr>
+      </p:sp>
+      <p:sp>
+        <p:nvSpPr>
+          <p:cNvPr id="29" name="">
+            <a:extLst>
+              <a:ext uri="{FF2B5EF4-FFF2-40B4-BE49-F238E27FC236}">
+                <ns2:creationId id="{2FB51E7D-E285-4F93-AB97-E2C91CEED6A9}"/>
+              </a:ext>
+            </a:extLst>
+          </p:cNvPr>
+          <p:cNvSpPr>
+            <a:spLocks noGrp="1"/>
+          </p:cNvSpPr>
+          <p:nvPr/>
+        </p:nvSpPr>
+        <p:spPr>
+          <a:xfrm>
+            <a:off x="714375" y="5133975"/>
+            <a:ext cx="4953000" cy="219075"/>
           </a:xfrm>
           <a:prstGeom prst="rect">
             <a:avLst/>
           </a:prstGeom>
           <a:noFill/>
-        </p:spPr>
-        <p:txBody>
-          <a:bodyPr wrap="square" anchor="t">
-            <a:spAutoFit/>
-          </a:bodyPr>
-          <a:lstStyle/>
-          <a:p>
-            <a:pPr algn="l">
-              <a:spcAft>
-                <a:spcPts val="600"/>
-              </a:spcAft>
-            </a:pPr>
-            <a:r>
-              <a:rPr sz="900" b="0">
-                <a:solidFill>
-                  <a:srgbClr val="6B7280"/>
-                </a:solidFill>
-                <a:latin typeface="Lato"/>
-              </a:rPr>
-              <a:t>Source: NorthByte transactions, costs &amp; gates (Sep 2024–Aug 2026); team analysis</a:t>
-            </a:r>
-          </a:p>
-        </p:txBody>
-      </p:sp>
-      <p:sp>
-        <p:nvSpPr>
-          <p:cNvPr id="7" name="TextBox 6"/>
-          <p:cNvSpPr txBox="1"/>
-          <p:nvPr/>
-        </p:nvSpPr>
-        <p:spPr>
-          <a:xfrm>
-            <a:off x="10972800" y="6446520"/>
-            <a:ext cx="667512" cy="274320"/>
-          </a:xfrm>
-          <a:prstGeom prst="rect">
-            <a:avLst/>
-          </a:prstGeom>
-          <a:noFill/>
-        </p:spPr>
-        <p:txBody>
-          <a:bodyPr wrap="square" anchor="t">
-            <a:spAutoFit/>
-          </a:bodyPr>
-          <a:lstStyle/>
-          <a:p>
-            <a:pPr algn="r">
-              <a:spcAft>
-                <a:spcPts val="600"/>
-              </a:spcAft>
-            </a:pPr>
-            <a:r>
-              <a:rPr sz="900" b="0">
-                <a:solidFill>
-                  <a:srgbClr val="6B7280"/>
-                </a:solidFill>
-                <a:latin typeface="Lato"/>
-              </a:rPr>
-              <a:t>19</a:t>
-            </a:r>
-          </a:p>
-        </p:txBody>
-      </p:sp>
-      <p:sp>
-        <p:nvSpPr>
-          <p:cNvPr id="8" name="Pentagon 7"/>
-          <p:cNvSpPr/>
-          <p:nvPr/>
-        </p:nvSpPr>
-        <p:spPr>
-          <a:xfrm>
-            <a:off x="548640" y="1645920"/>
-            <a:ext cx="3566160" cy="502920"/>
-          </a:xfrm>
-          <a:prstGeom prst="homePlate">
-            <a:avLst/>
-          </a:prstGeom>
-          <a:solidFill>
-            <a:srgbClr val="0B1F3A"/>
-          </a:solidFill>
-          <a:ln>
+          <a:ln w="0">
             <a:noFill/>
           </a:ln>
-          <a:effectLst/>
-        </p:spPr>
-        <p:style>
-          <a:lnRef idx="1">
-            <a:schemeClr val="accent1"/>
-          </a:lnRef>
-          <a:fillRef idx="3">
-            <a:schemeClr val="accent1"/>
-          </a:fillRef>
-          <a:effectRef idx="2">
-            <a:schemeClr val="accent1"/>
-          </a:effectRef>
-          <a:fontRef idx="minor">
-            <a:schemeClr val="lt1"/>
-          </a:fontRef>
-        </p:style>
-        <p:txBody>
-          <a:bodyPr rtlCol="0" anchor="ctr"/>
-          <a:lstStyle/>
-          <a:p>
-            <a:pPr algn="ctr"/>
-          </a:p>
-        </p:txBody>
-      </p:sp>
-      <p:sp>
-        <p:nvSpPr>
-          <p:cNvPr id="9" name="TextBox 8"/>
-          <p:cNvSpPr txBox="1"/>
-          <p:nvPr/>
-        </p:nvSpPr>
-        <p:spPr>
-          <a:xfrm>
-            <a:off x="822959" y="1691640"/>
-            <a:ext cx="3108960" cy="411480"/>
+        </p:spPr>
+        <p:txBody>
+          <a:bodyPr wrap="square" lIns="0" tIns="0" rIns="0" bIns="0" anchor="t">
+            <a:noAutofit/>
+          </a:bodyPr>
+          <a:lstStyle>
+            <a:defPPr>
+              <a:defRPr sz="1275" b="1">
+                <a:solidFill>
+                  <a:srgbClr val="E8692A"/>
+                </a:solidFill>
+                <a:latin typeface="Montserrat"/>
+                <a:ea typeface="Montserrat"/>
+                <a:cs typeface="Montserrat"/>
+              </a:defRPr>
+            </a:defPPr>
+          </a:lstStyle>
+          <a:p>
+            <a:pPr>
+              <a:defRPr sz="1275" b="1">
+                <a:solidFill>
+                  <a:srgbClr val="E8692A"/>
+                </a:solidFill>
+                <a:latin typeface="Montserrat"/>
+                <a:ea typeface="Montserrat"/>
+                <a:cs typeface="Montserrat"/>
+              </a:defRPr>
+            </a:pPr>
+            <a:r>
+              <a:rPr sz="1275" b="1">
+                <a:solidFill>
+                  <a:srgbClr val="E8692A"/>
+                </a:solidFill>
+                <a:latin typeface="Montserrat"/>
+                <a:ea typeface="Montserrat"/>
+                <a:cs typeface="Montserrat"/>
+              </a:rPr>
+              <a:t>GATE 1  Expand or reset the pilot?</a:t>
+            </a:r>
+          </a:p>
+        </p:txBody>
+      </p:sp>
+      <p:sp>
+        <p:nvSpPr>
+          <p:cNvPr id="30" name="">
+            <a:extLst>
+              <a:ext uri="{FF2B5EF4-FFF2-40B4-BE49-F238E27FC236}">
+                <ns2:creationId id="{CDF3EC69-B826-4E0F-BC3F-9A113CCACD8F}"/>
+              </a:ext>
+            </a:extLst>
+          </p:cNvPr>
+          <p:cNvSpPr>
+            <a:spLocks noGrp="1"/>
+          </p:cNvSpPr>
+          <p:nvPr/>
+        </p:nvSpPr>
+        <p:spPr>
+          <a:xfrm>
+            <a:off x="714375" y="5381625"/>
+            <a:ext cx="4953000" cy="238125"/>
           </a:xfrm>
           <a:prstGeom prst="rect">
             <a:avLst/>
           </a:prstGeom>
           <a:noFill/>
-        </p:spPr>
-        <p:txBody>
-          <a:bodyPr wrap="square" anchor="ctr">
-            <a:spAutoFit/>
+          <a:ln w="0">
+            <a:noFill/>
+          </a:ln>
+        </p:spPr>
+        <p:txBody>
+          <a:bodyPr wrap="square" lIns="0" tIns="0" rIns="0" bIns="0" anchor="t">
+            <a:noAutofit/>
           </a:bodyPr>
-          <a:lstStyle/>
-          <a:p>
-            <a:pPr algn="l">
-              <a:spcAft>
-                <a:spcPts val="600"/>
-              </a:spcAft>
+          <a:lstStyle>
+            <a:defPPr>
+              <a:defRPr sz="1200" b="0">
+                <a:solidFill>
+                  <a:srgbClr val="1F2937"/>
+                </a:solidFill>
+                <a:latin typeface="Lato"/>
+                <a:ea typeface="Lato"/>
+                <a:cs typeface="Lato"/>
+              </a:defRPr>
+            </a:defPPr>
+          </a:lstStyle>
+          <a:p>
+            <a:pPr>
+              <a:defRPr sz="1200" b="0">
+                <a:solidFill>
+                  <a:srgbClr val="1F2937"/>
+                </a:solidFill>
+                <a:latin typeface="Lato"/>
+                <a:ea typeface="Lato"/>
+                <a:cs typeface="Lato"/>
+              </a:defRPr>
             </a:pPr>
             <a:r>
-              <a:rPr sz="1300" b="1">
-                <a:solidFill>
-                  <a:srgbClr val="FFFFFF"/>
-                </a:solidFill>
-                <a:latin typeface="Montserrat"/>
-              </a:rPr>
-              <a:t>Phase 1  ·  0–3 months</a:t>
-            </a:r>
-          </a:p>
-        </p:txBody>
-      </p:sp>
-      <p:sp>
-        <p:nvSpPr>
-          <p:cNvPr id="10" name="Rectangle 9"/>
-          <p:cNvSpPr/>
-          <p:nvPr/>
-        </p:nvSpPr>
-        <p:spPr>
-          <a:xfrm>
-            <a:off x="548640" y="2331720"/>
-            <a:ext cx="3566160" cy="2743200"/>
+              <a:rPr sz="1200" b="0">
+                <a:solidFill>
+                  <a:srgbClr val="1F2937"/>
+                </a:solidFill>
+                <a:latin typeface="Lato"/>
+                <a:ea typeface="Lato"/>
+                <a:cs typeface="Lato"/>
+              </a:rPr>
+              <a:t>Proceed only when retention and verified savings support it.</a:t>
+            </a:r>
+          </a:p>
+        </p:txBody>
+      </p:sp>
+      <p:sp>
+        <p:nvSpPr>
+          <p:cNvPr id="31" name="">
+            <a:extLst>
+              <a:ext uri="{FF2B5EF4-FFF2-40B4-BE49-F238E27FC236}">
+                <ns2:creationId id="{EBA10586-147A-4AB8-A707-DD35CB45547B}"/>
+              </a:ext>
+            </a:extLst>
+          </p:cNvPr>
+          <p:cNvSpPr>
+            <a:spLocks noGrp="1"/>
+          </p:cNvSpPr>
+          <p:nvPr/>
+        </p:nvSpPr>
+        <p:spPr>
+          <a:xfrm>
+            <a:off x="6286500" y="5038725"/>
+            <a:ext cx="5334000" cy="609600"/>
           </a:xfrm>
           <a:prstGeom prst="rect">
             <a:avLst/>
@@ -19518,498 +22634,211 @@
           <a:solidFill>
             <a:srgbClr val="F3F5F8"/>
           </a:solidFill>
-          <a:ln w="15875">
-            <a:solidFill>
-              <a:srgbClr val="9CA3AF"/>
-            </a:solidFill>
-            <a:prstDash val="dash"/>
-          </a:ln>
-          <a:effectLst/>
-        </p:spPr>
-        <p:style>
-          <a:lnRef idx="1">
-            <a:schemeClr val="accent1"/>
-          </a:lnRef>
-          <a:fillRef idx="3">
-            <a:schemeClr val="accent1"/>
-          </a:fillRef>
-          <a:effectRef idx="2">
-            <a:schemeClr val="accent1"/>
-          </a:effectRef>
-          <a:fontRef idx="minor">
-            <a:schemeClr val="lt1"/>
-          </a:fontRef>
-        </p:style>
-        <p:txBody>
-          <a:bodyPr rtlCol="0" anchor="ctr"/>
-          <a:lstStyle/>
-          <a:p>
-            <a:pPr algn="ctr"/>
-          </a:p>
-        </p:txBody>
-      </p:sp>
-      <p:sp>
-        <p:nvSpPr>
-          <p:cNvPr id="11" name="TextBox 10"/>
-          <p:cNvSpPr txBox="1"/>
-          <p:nvPr/>
-        </p:nvSpPr>
-        <p:spPr>
-          <a:xfrm>
-            <a:off x="685800" y="2423160"/>
-            <a:ext cx="3291840" cy="2560320"/>
-          </a:xfrm>
-          <a:prstGeom prst="rect">
-            <a:avLst/>
-          </a:prstGeom>
-          <a:noFill/>
-        </p:spPr>
-        <p:txBody>
-          <a:bodyPr wrap="square" anchor="ctr">
-            <a:spAutoFit/>
-          </a:bodyPr>
-          <a:lstStyle/>
-          <a:p>
-            <a:pPr algn="ctr">
-              <a:spcAft>
-                <a:spcPts val="600"/>
-              </a:spcAft>
-            </a:pPr>
-            <a:r>
-              <a:rPr sz="1200" b="0">
-                <a:solidFill>
-                  <a:srgbClr val="9CA3AF"/>
-                </a:solidFill>
-                <a:latin typeface="Lato"/>
-              </a:rPr>
-              <a:t>[Actions]
-[Owner]</a:t>
-            </a:r>
-          </a:p>
-        </p:txBody>
-      </p:sp>
-      <p:sp>
-        <p:nvSpPr>
-          <p:cNvPr id="12" name="Chevron 11"/>
-          <p:cNvSpPr/>
-          <p:nvPr/>
-        </p:nvSpPr>
-        <p:spPr>
-          <a:xfrm>
-            <a:off x="4297679" y="1645920"/>
-            <a:ext cx="3566160" cy="502920"/>
-          </a:xfrm>
-          <a:prstGeom prst="chevron">
-            <a:avLst/>
-          </a:prstGeom>
-          <a:solidFill>
-            <a:srgbClr val="0B1F3A"/>
-          </a:solidFill>
-          <a:ln>
+          <a:ln w="0">
             <a:noFill/>
           </a:ln>
-          <a:effectLst/>
-        </p:spPr>
-        <p:style>
-          <a:lnRef idx="1">
-            <a:schemeClr val="accent1"/>
-          </a:lnRef>
-          <a:fillRef idx="3">
-            <a:schemeClr val="accent1"/>
-          </a:fillRef>
-          <a:effectRef idx="2">
-            <a:schemeClr val="accent1"/>
-          </a:effectRef>
-          <a:fontRef idx="minor">
-            <a:schemeClr val="lt1"/>
-          </a:fontRef>
-        </p:style>
-        <p:txBody>
-          <a:bodyPr rtlCol="0" anchor="ctr"/>
-          <a:lstStyle/>
-          <a:p>
-            <a:pPr algn="ctr"/>
-          </a:p>
-        </p:txBody>
-      </p:sp>
-      <p:sp>
-        <p:nvSpPr>
-          <p:cNvPr id="13" name="TextBox 12"/>
-          <p:cNvSpPr txBox="1"/>
-          <p:nvPr/>
-        </p:nvSpPr>
-        <p:spPr>
-          <a:xfrm>
-            <a:off x="4571999" y="1691640"/>
-            <a:ext cx="3108960" cy="411480"/>
+        </p:spPr>
+      </p:sp>
+      <p:sp>
+        <p:nvSpPr>
+          <p:cNvPr id="32" name="">
+            <a:extLst>
+              <a:ext uri="{FF2B5EF4-FFF2-40B4-BE49-F238E27FC236}">
+                <ns2:creationId id="{0E5BB520-790F-41C6-BC57-EC49EE3357AD}"/>
+              </a:ext>
+            </a:extLst>
+          </p:cNvPr>
+          <p:cNvSpPr>
+            <a:spLocks noGrp="1"/>
+          </p:cNvSpPr>
+          <p:nvPr/>
+        </p:nvSpPr>
+        <p:spPr>
+          <a:xfrm>
+            <a:off x="6448425" y="5133975"/>
+            <a:ext cx="4953000" cy="219075"/>
           </a:xfrm>
           <a:prstGeom prst="rect">
             <a:avLst/>
           </a:prstGeom>
           <a:noFill/>
-        </p:spPr>
-        <p:txBody>
-          <a:bodyPr wrap="square" anchor="ctr">
-            <a:spAutoFit/>
-          </a:bodyPr>
-          <a:lstStyle/>
-          <a:p>
-            <a:pPr algn="l">
-              <a:spcAft>
-                <a:spcPts val="600"/>
-              </a:spcAft>
-            </a:pPr>
-            <a:r>
-              <a:rPr sz="1300" b="1">
-                <a:solidFill>
-                  <a:srgbClr val="FFFFFF"/>
-                </a:solidFill>
-                <a:latin typeface="Montserrat"/>
-              </a:rPr>
-              <a:t>Phase 2  ·  3–12 months</a:t>
-            </a:r>
-          </a:p>
-        </p:txBody>
-      </p:sp>
-      <p:sp>
-        <p:nvSpPr>
-          <p:cNvPr id="14" name="Rectangle 13"/>
-          <p:cNvSpPr/>
-          <p:nvPr/>
-        </p:nvSpPr>
-        <p:spPr>
-          <a:xfrm>
-            <a:off x="4297679" y="2331720"/>
-            <a:ext cx="3566160" cy="2743200"/>
-          </a:xfrm>
-          <a:prstGeom prst="rect">
-            <a:avLst/>
-          </a:prstGeom>
-          <a:solidFill>
-            <a:srgbClr val="F3F5F8"/>
-          </a:solidFill>
-          <a:ln w="15875">
-            <a:solidFill>
-              <a:srgbClr val="9CA3AF"/>
-            </a:solidFill>
-            <a:prstDash val="dash"/>
-          </a:ln>
-          <a:effectLst/>
-        </p:spPr>
-        <p:style>
-          <a:lnRef idx="1">
-            <a:schemeClr val="accent1"/>
-          </a:lnRef>
-          <a:fillRef idx="3">
-            <a:schemeClr val="accent1"/>
-          </a:fillRef>
-          <a:effectRef idx="2">
-            <a:schemeClr val="accent1"/>
-          </a:effectRef>
-          <a:fontRef idx="minor">
-            <a:schemeClr val="lt1"/>
-          </a:fontRef>
-        </p:style>
-        <p:txBody>
-          <a:bodyPr rtlCol="0" anchor="ctr"/>
-          <a:lstStyle/>
-          <a:p>
-            <a:pPr algn="ctr"/>
-          </a:p>
-        </p:txBody>
-      </p:sp>
-      <p:sp>
-        <p:nvSpPr>
-          <p:cNvPr id="15" name="TextBox 14"/>
-          <p:cNvSpPr txBox="1"/>
-          <p:nvPr/>
-        </p:nvSpPr>
-        <p:spPr>
-          <a:xfrm>
-            <a:off x="4434840" y="2423160"/>
-            <a:ext cx="3291840" cy="2560320"/>
-          </a:xfrm>
-          <a:prstGeom prst="rect">
-            <a:avLst/>
-          </a:prstGeom>
-          <a:noFill/>
-        </p:spPr>
-        <p:txBody>
-          <a:bodyPr wrap="square" anchor="ctr">
-            <a:spAutoFit/>
-          </a:bodyPr>
-          <a:lstStyle/>
-          <a:p>
-            <a:pPr algn="ctr">
-              <a:spcAft>
-                <a:spcPts val="600"/>
-              </a:spcAft>
-            </a:pPr>
-            <a:r>
-              <a:rPr sz="1200" b="0">
-                <a:solidFill>
-                  <a:srgbClr val="9CA3AF"/>
-                </a:solidFill>
-                <a:latin typeface="Lato"/>
-              </a:rPr>
-              <a:t>[Actions]
-[Owner]</a:t>
-            </a:r>
-          </a:p>
-        </p:txBody>
-      </p:sp>
-      <p:sp>
-        <p:nvSpPr>
-          <p:cNvPr id="16" name="Chevron 15"/>
-          <p:cNvSpPr/>
-          <p:nvPr/>
-        </p:nvSpPr>
-        <p:spPr>
-          <a:xfrm>
-            <a:off x="8046719" y="1645920"/>
-            <a:ext cx="3566160" cy="502920"/>
-          </a:xfrm>
-          <a:prstGeom prst="chevron">
-            <a:avLst/>
-          </a:prstGeom>
-          <a:solidFill>
-            <a:srgbClr val="0B1F3A"/>
-          </a:solidFill>
-          <a:ln>
+          <a:ln w="0">
             <a:noFill/>
           </a:ln>
-          <a:effectLst/>
-        </p:spPr>
-        <p:style>
-          <a:lnRef idx="1">
-            <a:schemeClr val="accent1"/>
-          </a:lnRef>
-          <a:fillRef idx="3">
-            <a:schemeClr val="accent1"/>
-          </a:fillRef>
-          <a:effectRef idx="2">
-            <a:schemeClr val="accent1"/>
-          </a:effectRef>
-          <a:fontRef idx="minor">
-            <a:schemeClr val="lt1"/>
-          </a:fontRef>
-        </p:style>
-        <p:txBody>
-          <a:bodyPr rtlCol="0" anchor="ctr"/>
-          <a:lstStyle/>
-          <a:p>
-            <a:pPr algn="ctr"/>
-          </a:p>
-        </p:txBody>
-      </p:sp>
-      <p:sp>
-        <p:nvSpPr>
-          <p:cNvPr id="17" name="TextBox 16"/>
-          <p:cNvSpPr txBox="1"/>
-          <p:nvPr/>
-        </p:nvSpPr>
-        <p:spPr>
-          <a:xfrm>
-            <a:off x="8321040" y="1691640"/>
-            <a:ext cx="3108960" cy="411480"/>
+        </p:spPr>
+        <p:txBody>
+          <a:bodyPr wrap="square" lIns="0" tIns="0" rIns="0" bIns="0" anchor="t">
+            <a:noAutofit/>
+          </a:bodyPr>
+          <a:lstStyle>
+            <a:defPPr>
+              <a:defRPr sz="1275" b="1">
+                <a:solidFill>
+                  <a:srgbClr val="E8692A"/>
+                </a:solidFill>
+                <a:latin typeface="Montserrat"/>
+                <a:ea typeface="Montserrat"/>
+                <a:cs typeface="Montserrat"/>
+              </a:defRPr>
+            </a:defPPr>
+          </a:lstStyle>
+          <a:p>
+            <a:pPr>
+              <a:defRPr sz="1275" b="1">
+                <a:solidFill>
+                  <a:srgbClr val="E8692A"/>
+                </a:solidFill>
+                <a:latin typeface="Montserrat"/>
+                <a:ea typeface="Montserrat"/>
+                <a:cs typeface="Montserrat"/>
+              </a:defRPr>
+            </a:pPr>
+            <a:r>
+              <a:rPr sz="1275" b="1">
+                <a:solidFill>
+                  <a:srgbClr val="E8692A"/>
+                </a:solidFill>
+                <a:latin typeface="Montserrat"/>
+                <a:ea typeface="Montserrat"/>
+                <a:cs typeface="Montserrat"/>
+              </a:rPr>
+              <a:t>GATE 2  Continue or exit new-market trials?</a:t>
+            </a:r>
+          </a:p>
+        </p:txBody>
+      </p:sp>
+      <p:sp>
+        <p:nvSpPr>
+          <p:cNvPr id="33" name="">
+            <a:extLst>
+              <a:ext uri="{FF2B5EF4-FFF2-40B4-BE49-F238E27FC236}">
+                <ns2:creationId id="{B56B5078-098D-4022-8C81-AC1995A67FE0}"/>
+              </a:ext>
+            </a:extLst>
+          </p:cNvPr>
+          <p:cNvSpPr>
+            <a:spLocks noGrp="1"/>
+          </p:cNvSpPr>
+          <p:nvPr/>
+        </p:nvSpPr>
+        <p:spPr>
+          <a:xfrm>
+            <a:off x="6448425" y="5381625"/>
+            <a:ext cx="4953000" cy="238125"/>
           </a:xfrm>
           <a:prstGeom prst="rect">
             <a:avLst/>
           </a:prstGeom>
           <a:noFill/>
-        </p:spPr>
-        <p:txBody>
-          <a:bodyPr wrap="square" anchor="ctr">
-            <a:spAutoFit/>
+          <a:ln w="0">
+            <a:noFill/>
+          </a:ln>
+        </p:spPr>
+        <p:txBody>
+          <a:bodyPr wrap="square" lIns="0" tIns="0" rIns="0" bIns="0" anchor="t">
+            <a:noAutofit/>
           </a:bodyPr>
-          <a:lstStyle/>
-          <a:p>
-            <a:pPr algn="l">
-              <a:spcAft>
-                <a:spcPts val="600"/>
-              </a:spcAft>
+          <a:lstStyle>
+            <a:defPPr>
+              <a:defRPr sz="1200" b="0">
+                <a:solidFill>
+                  <a:srgbClr val="1F2937"/>
+                </a:solidFill>
+                <a:latin typeface="Lato"/>
+                <a:ea typeface="Lato"/>
+                <a:cs typeface="Lato"/>
+              </a:defRPr>
+            </a:defPPr>
+          </a:lstStyle>
+          <a:p>
+            <a:pPr>
+              <a:defRPr sz="1200" b="0">
+                <a:solidFill>
+                  <a:srgbClr val="1F2937"/>
+                </a:solidFill>
+                <a:latin typeface="Lato"/>
+                <a:ea typeface="Lato"/>
+                <a:cs typeface="Lato"/>
+              </a:defRPr>
             </a:pPr>
             <a:r>
-              <a:rPr sz="1300" b="1">
-                <a:solidFill>
-                  <a:srgbClr val="FFFFFF"/>
-                </a:solidFill>
-                <a:latin typeface="Montserrat"/>
-              </a:rPr>
-              <a:t>Phase 3  ·  12+ months</a:t>
-            </a:r>
-          </a:p>
-        </p:txBody>
-      </p:sp>
-      <p:sp>
-        <p:nvSpPr>
-          <p:cNvPr id="18" name="Rectangle 17"/>
-          <p:cNvSpPr/>
-          <p:nvPr/>
-        </p:nvSpPr>
-        <p:spPr>
-          <a:xfrm>
-            <a:off x="8046719" y="2331720"/>
-            <a:ext cx="3566160" cy="2743200"/>
-          </a:xfrm>
-          <a:prstGeom prst="rect">
-            <a:avLst/>
-          </a:prstGeom>
-          <a:solidFill>
-            <a:srgbClr val="F3F5F8"/>
-          </a:solidFill>
-          <a:ln w="15875">
-            <a:solidFill>
-              <a:srgbClr val="9CA3AF"/>
-            </a:solidFill>
-            <a:prstDash val="dash"/>
+              <a:rPr sz="1200" b="0">
+                <a:solidFill>
+                  <a:srgbClr val="1F2937"/>
+                </a:solidFill>
+                <a:latin typeface="Lato"/>
+                <a:ea typeface="Lato"/>
+                <a:cs typeface="Lato"/>
+              </a:rPr>
+              <a:t>Six-month review against a capped loss budget and recovery plan.</a:t>
+            </a:r>
+          </a:p>
+        </p:txBody>
+      </p:sp>
+      <p:sp>
+        <p:nvSpPr>
+          <p:cNvPr id="34" name="">
+            <a:extLst>
+              <a:ext uri="{FF2B5EF4-FFF2-40B4-BE49-F238E27FC236}">
+                <ns2:creationId id="{E7FC4719-B48F-416E-A1C8-F323FDAF4301}"/>
+              </a:ext>
+            </a:extLst>
+          </p:cNvPr>
+          <p:cNvSpPr>
+            <a:spLocks noGrp="1"/>
+          </p:cNvSpPr>
+          <p:nvPr/>
+        </p:nvSpPr>
+        <p:spPr>
+          <a:xfrm>
+            <a:off x="552450" y="5905500"/>
+            <a:ext cx="11049000" cy="352425"/>
+          </a:xfrm>
+          <a:prstGeom prst="rect">
+            <a:avLst/>
+          </a:prstGeom>
+          <a:noFill/>
+          <a:ln w="0">
+            <a:noFill/>
           </a:ln>
-          <a:effectLst/>
-        </p:spPr>
-        <p:style>
-          <a:lnRef idx="1">
-            <a:schemeClr val="accent1"/>
-          </a:lnRef>
-          <a:fillRef idx="3">
-            <a:schemeClr val="accent1"/>
-          </a:fillRef>
-          <a:effectRef idx="2">
-            <a:schemeClr val="accent1"/>
-          </a:effectRef>
-          <a:fontRef idx="minor">
-            <a:schemeClr val="lt1"/>
-          </a:fontRef>
-        </p:style>
-        <p:txBody>
-          <a:bodyPr rtlCol="0" anchor="ctr"/>
-          <a:lstStyle/>
-          <a:p>
-            <a:pPr algn="ctr"/>
-          </a:p>
-        </p:txBody>
-      </p:sp>
-      <p:sp>
-        <p:nvSpPr>
-          <p:cNvPr id="19" name="TextBox 18"/>
-          <p:cNvSpPr txBox="1"/>
-          <p:nvPr/>
-        </p:nvSpPr>
-        <p:spPr>
-          <a:xfrm>
-            <a:off x="8183879" y="2423160"/>
-            <a:ext cx="3291840" cy="2560320"/>
-          </a:xfrm>
-          <a:prstGeom prst="rect">
-            <a:avLst/>
-          </a:prstGeom>
-          <a:noFill/>
-        </p:spPr>
-        <p:txBody>
-          <a:bodyPr wrap="square" anchor="ctr">
-            <a:spAutoFit/>
+        </p:spPr>
+        <p:txBody>
+          <a:bodyPr wrap="square" lIns="0" tIns="0" rIns="0" bIns="0" anchor="t">
+            <a:noAutofit/>
           </a:bodyPr>
-          <a:lstStyle/>
-          <a:p>
-            <a:pPr algn="ctr">
-              <a:spcAft>
-                <a:spcPts val="600"/>
-              </a:spcAft>
+          <a:lstStyle>
+            <a:defPPr>
+              <a:defRPr sz="1275" b="1">
+                <a:solidFill>
+                  <a:srgbClr val="0B1F3A"/>
+                </a:solidFill>
+                <a:latin typeface="Lato"/>
+                <a:ea typeface="Lato"/>
+                <a:cs typeface="Lato"/>
+              </a:defRPr>
+            </a:defPPr>
+          </a:lstStyle>
+          <a:p>
+            <a:pPr>
+              <a:defRPr sz="1275" b="1">
+                <a:solidFill>
+                  <a:srgbClr val="0B1F3A"/>
+                </a:solidFill>
+                <a:latin typeface="Lato"/>
+                <a:ea typeface="Lato"/>
+                <a:cs typeface="Lato"/>
+              </a:defRPr>
             </a:pPr>
             <a:r>
-              <a:rPr sz="1200" b="0">
-                <a:solidFill>
-                  <a:srgbClr val="9CA3AF"/>
+              <a:rPr sz="1275" b="1">
+                <a:solidFill>
+                  <a:srgbClr val="0B1F3A"/>
                 </a:solidFill>
                 <a:latin typeface="Lato"/>
-              </a:rPr>
-              <a:t>[Actions]
-[Owner]</a:t>
-            </a:r>
-          </a:p>
-        </p:txBody>
-      </p:sp>
-      <p:sp>
-        <p:nvSpPr>
-          <p:cNvPr id="20" name="Rectangle 19"/>
-          <p:cNvSpPr/>
-          <p:nvPr/>
-        </p:nvSpPr>
-        <p:spPr>
-          <a:xfrm>
-            <a:off x="548640" y="5257800"/>
-            <a:ext cx="11091672" cy="914400"/>
-          </a:xfrm>
-          <a:prstGeom prst="rect">
-            <a:avLst/>
-          </a:prstGeom>
-          <a:solidFill>
-            <a:srgbClr val="F3F5F8"/>
-          </a:solidFill>
-          <a:ln w="15875">
-            <a:solidFill>
-              <a:srgbClr val="9CA3AF"/>
-            </a:solidFill>
-            <a:prstDash val="dash"/>
-          </a:ln>
-          <a:effectLst/>
-        </p:spPr>
-        <p:style>
-          <a:lnRef idx="1">
-            <a:schemeClr val="accent1"/>
-          </a:lnRef>
-          <a:fillRef idx="3">
-            <a:schemeClr val="accent1"/>
-          </a:fillRef>
-          <a:effectRef idx="2">
-            <a:schemeClr val="accent1"/>
-          </a:effectRef>
-          <a:fontRef idx="minor">
-            <a:schemeClr val="lt1"/>
-          </a:fontRef>
-        </p:style>
-        <p:txBody>
-          <a:bodyPr rtlCol="0" anchor="ctr"/>
-          <a:lstStyle/>
-          <a:p>
-            <a:pPr algn="ctr"/>
-          </a:p>
-        </p:txBody>
-      </p:sp>
-      <p:sp>
-        <p:nvSpPr>
-          <p:cNvPr id="21" name="TextBox 20"/>
-          <p:cNvSpPr txBox="1"/>
-          <p:nvPr/>
-        </p:nvSpPr>
-        <p:spPr>
-          <a:xfrm>
-            <a:off x="685800" y="5349240"/>
-            <a:ext cx="10817352" cy="731520"/>
-          </a:xfrm>
-          <a:prstGeom prst="rect">
-            <a:avLst/>
-          </a:prstGeom>
-          <a:noFill/>
-        </p:spPr>
-        <p:txBody>
-          <a:bodyPr wrap="square" anchor="ctr">
-            <a:spAutoFit/>
-          </a:bodyPr>
-          <a:lstStyle/>
-          <a:p>
-            <a:pPr algn="ctr">
-              <a:spcAft>
-                <a:spcPts val="600"/>
-              </a:spcAft>
-            </a:pPr>
-            <a:r>
-              <a:rPr sz="1200" b="0">
-                <a:solidFill>
-                  <a:srgbClr val="9CA3AF"/>
-                </a:solidFill>
-                <a:latin typeface="Lato"/>
-              </a:rPr>
-              <a:t>[KPIs &amp; targets]</a:t>
+                <a:ea typeface="Lato"/>
+                <a:cs typeface="Lato"/>
+              </a:rPr>
+              <a:t>MONTHLY CHECKS    ≥90% trunk recapture*     Realized savings     Route contribution     Essential connections</a:t>
             </a:r>
           </a:p>
         </p:txBody>
@@ -21203,7 +24032,7 @@
 </file>
 
 <file path=ppt/slides/slide20.xml><?xml version="1.0" encoding="utf-8"?>
-<p:sld xmlns:a="http://schemas.openxmlformats.org/drawingml/2006/main" xmlns:p="http://schemas.openxmlformats.org/presentationml/2006/main" xmlns:r="http://schemas.openxmlformats.org/officeDocument/2006/relationships">
+<p:sld xmlns:a="http://schemas.openxmlformats.org/drawingml/2006/main" xmlns:ns2="http://schemas.microsoft.com/office/drawing/2014/main" xmlns:p="http://schemas.openxmlformats.org/presentationml/2006/main">
   <p:cSld>
     <p:spTree>
       <p:nvGrpSpPr>
@@ -21211,17 +24040,27 @@
         <p:cNvGrpSpPr/>
         <p:nvPr/>
       </p:nvGrpSpPr>
-      <p:grpSpPr/>
-      <p:sp>
-        <p:nvSpPr>
-          <p:cNvPr id="2" name="Rectangle 1"/>
-          <p:cNvSpPr/>
+      <p:grpSpPr>
+        <a:xfrm/>
+      </p:grpSpPr>
+      <p:sp>
+        <p:nvSpPr>
+          <p:cNvPr id="24" name="">
+            <a:extLst>
+              <a:ext uri="{FF2B5EF4-FFF2-40B4-BE49-F238E27FC236}">
+                <ns2:creationId id="{43D7897B-BD59-4EC1-B9B6-1E8786609287}"/>
+              </a:ext>
+            </a:extLst>
+          </p:cNvPr>
+          <p:cNvSpPr>
+            <a:spLocks noGrp="1"/>
+          </p:cNvSpPr>
           <p:nvPr/>
         </p:nvSpPr>
         <p:spPr>
           <a:xfrm>
             <a:off x="0" y="0"/>
-            <a:ext cx="12191695" cy="109728"/>
+            <a:ext cx="12192000" cy="109728"/>
           </a:xfrm>
           <a:prstGeom prst="rect">
             <a:avLst/>
@@ -21229,711 +24068,1355 @@
           <a:solidFill>
             <a:srgbClr val="0B1F3A"/>
           </a:solidFill>
-          <a:ln>
+          <a:ln w="0">
             <a:noFill/>
           </a:ln>
-          <a:effectLst/>
-        </p:spPr>
-        <p:style>
-          <a:lnRef idx="1">
-            <a:schemeClr val="accent1"/>
-          </a:lnRef>
-          <a:fillRef idx="3">
-            <a:schemeClr val="accent1"/>
-          </a:fillRef>
-          <a:effectRef idx="2">
-            <a:schemeClr val="accent1"/>
-          </a:effectRef>
-          <a:fontRef idx="minor">
-            <a:schemeClr val="lt1"/>
-          </a:fontRef>
-        </p:style>
-        <p:txBody>
-          <a:bodyPr rtlCol="0" anchor="ctr"/>
-          <a:lstStyle/>
-          <a:p>
-            <a:pPr algn="ctr"/>
-          </a:p>
-        </p:txBody>
-      </p:sp>
-      <p:sp>
-        <p:nvSpPr>
-          <p:cNvPr id="3" name="TextBox 2"/>
-          <p:cNvSpPr txBox="1"/>
+        </p:spPr>
+      </p:sp>
+      <p:sp>
+        <p:nvSpPr>
+          <p:cNvPr id="2" name="">
+            <a:extLst>
+              <a:ext uri="{FF2B5EF4-FFF2-40B4-BE49-F238E27FC236}">
+                <ns2:creationId id="{4B91516A-3368-45A9-B9F1-6BF764288E58}"/>
+              </a:ext>
+            </a:extLst>
+          </p:cNvPr>
+          <p:cNvSpPr>
+            <a:spLocks noGrp="1"/>
+          </p:cNvSpPr>
           <p:nvPr/>
         </p:nvSpPr>
         <p:spPr>
           <a:xfrm>
             <a:off x="548640" y="320040"/>
-            <a:ext cx="8229600" cy="274320"/>
+            <a:ext cx="10477500" cy="276225"/>
           </a:xfrm>
           <a:prstGeom prst="rect">
             <a:avLst/>
           </a:prstGeom>
           <a:noFill/>
-        </p:spPr>
-        <p:txBody>
-          <a:bodyPr wrap="square" anchor="t">
-            <a:spAutoFit/>
-          </a:bodyPr>
-          <a:lstStyle/>
-          <a:p>
-            <a:pPr algn="l">
-              <a:spcAft>
-                <a:spcPts val="600"/>
-              </a:spcAft>
-            </a:pPr>
-            <a:r>
-              <a:rPr sz="1100" b="1">
-                <a:solidFill>
-                  <a:srgbClr val="E8692A"/>
-                </a:solidFill>
-                <a:latin typeface="Montserrat"/>
-              </a:rPr>
-              <a:t>RISKS</a:t>
-            </a:r>
-          </a:p>
-        </p:txBody>
-      </p:sp>
-      <p:sp>
-        <p:nvSpPr>
-          <p:cNvPr id="4" name="TextBox 3"/>
-          <p:cNvSpPr txBox="1"/>
-          <p:nvPr/>
-        </p:nvSpPr>
-        <p:spPr>
-          <a:xfrm>
-            <a:off x="548640" y="566928"/>
-            <a:ext cx="11064240" cy="914400"/>
-          </a:xfrm>
-          <a:prstGeom prst="rect">
-            <a:avLst/>
-          </a:prstGeom>
-          <a:noFill/>
-        </p:spPr>
-        <p:txBody>
-          <a:bodyPr wrap="square" anchor="t">
-            <a:spAutoFit/>
-          </a:bodyPr>
-          <a:lstStyle/>
-          <a:p>
-            <a:pPr algn="l">
-              <a:spcAft>
-                <a:spcPts val="600"/>
-              </a:spcAft>
-            </a:pPr>
-            <a:r>
-              <a:rPr sz="2400" b="1">
-                <a:solidFill>
-                  <a:srgbClr val="0B1F3A"/>
-                </a:solidFill>
-                <a:latin typeface="Montserrat"/>
-              </a:rPr>
-              <a:t>[Headline: key risks and how we mitigate them]</a:t>
-            </a:r>
-          </a:p>
-        </p:txBody>
-      </p:sp>
-      <p:sp>
-        <p:nvSpPr>
-          <p:cNvPr id="5" name="Rectangle 4"/>
-          <p:cNvSpPr/>
-          <p:nvPr/>
-        </p:nvSpPr>
-        <p:spPr>
-          <a:xfrm>
-            <a:off x="548640" y="6400800"/>
-            <a:ext cx="11091672" cy="9144"/>
-          </a:xfrm>
-          <a:prstGeom prst="rect">
-            <a:avLst/>
-          </a:prstGeom>
-          <a:solidFill>
-            <a:srgbClr val="F3F5F8"/>
-          </a:solidFill>
-          <a:ln>
+          <a:ln w="0">
             <a:noFill/>
           </a:ln>
-          <a:effectLst/>
-        </p:spPr>
-        <p:style>
-          <a:lnRef idx="1">
-            <a:schemeClr val="accent1"/>
-          </a:lnRef>
-          <a:fillRef idx="3">
-            <a:schemeClr val="accent1"/>
-          </a:fillRef>
-          <a:effectRef idx="2">
-            <a:schemeClr val="accent1"/>
-          </a:effectRef>
-          <a:fontRef idx="minor">
-            <a:schemeClr val="lt1"/>
-          </a:fontRef>
-        </p:style>
-        <p:txBody>
-          <a:bodyPr rtlCol="0" anchor="ctr"/>
-          <a:lstStyle/>
-          <a:p>
-            <a:pPr algn="ctr"/>
-          </a:p>
-        </p:txBody>
-      </p:sp>
-      <p:sp>
-        <p:nvSpPr>
-          <p:cNvPr id="6" name="TextBox 5"/>
-          <p:cNvSpPr txBox="1"/>
-          <p:nvPr/>
-        </p:nvSpPr>
-        <p:spPr>
-          <a:xfrm>
-            <a:off x="548640" y="6446520"/>
-            <a:ext cx="9601200" cy="274320"/>
+        </p:spPr>
+        <p:txBody>
+          <a:bodyPr wrap="square" lIns="0" tIns="0" rIns="0" bIns="0" anchor="t">
+            <a:noAutofit/>
+          </a:bodyPr>
+          <a:lstStyle>
+            <a:defPPr>
+              <a:defRPr sz="1100" b="1">
+                <a:solidFill>
+                  <a:srgbClr val="E8692A"/>
+                </a:solidFill>
+                <a:latin typeface="Montserrat"/>
+                <a:ea typeface="Montserrat"/>
+                <a:cs typeface="Montserrat"/>
+              </a:defRPr>
+            </a:defPPr>
+          </a:lstStyle>
+          <a:p>
+            <a:pPr>
+              <a:defRPr sz="1100" b="1">
+                <a:solidFill>
+                  <a:srgbClr val="E8692A"/>
+                </a:solidFill>
+                <a:latin typeface="Montserrat"/>
+                <a:ea typeface="Montserrat"/>
+                <a:cs typeface="Montserrat"/>
+              </a:defRPr>
+            </a:pPr>
+            <a:r>
+              <a:rPr sz="1100" b="1">
+                <a:solidFill>
+                  <a:srgbClr val="E8692A"/>
+                </a:solidFill>
+                <a:latin typeface="Montserrat"/>
+                <a:ea typeface="Montserrat"/>
+                <a:cs typeface="Montserrat"/>
+              </a:rPr>
+              <a:t>RISKS</a:t>
+            </a:r>
+          </a:p>
+        </p:txBody>
+      </p:sp>
+      <p:sp>
+        <p:nvSpPr>
+          <p:cNvPr id="3" name="">
+            <a:extLst>
+              <a:ext uri="{FF2B5EF4-FFF2-40B4-BE49-F238E27FC236}">
+                <ns2:creationId id="{784CAB3B-3863-4092-8B68-BC64DE21FEFE}"/>
+              </a:ext>
+            </a:extLst>
+          </p:cNvPr>
+          <p:cNvSpPr>
+            <a:spLocks noGrp="1"/>
+          </p:cNvSpPr>
+          <p:nvPr/>
+        </p:nvSpPr>
+        <p:spPr>
+          <a:xfrm>
+            <a:off x="548640" y="619125"/>
+            <a:ext cx="11087100" cy="762000"/>
           </a:xfrm>
           <a:prstGeom prst="rect">
             <a:avLst/>
           </a:prstGeom>
           <a:noFill/>
-        </p:spPr>
-        <p:txBody>
-          <a:bodyPr wrap="square" anchor="t">
-            <a:spAutoFit/>
+          <a:ln w="0">
+            <a:noFill/>
+          </a:ln>
+        </p:spPr>
+        <p:txBody>
+          <a:bodyPr wrap="square" lIns="0" tIns="0" rIns="0" bIns="0" anchor="t">
+            <a:noAutofit/>
           </a:bodyPr>
-          <a:lstStyle/>
-          <a:p>
-            <a:pPr algn="l">
-              <a:spcAft>
-                <a:spcPts val="600"/>
-              </a:spcAft>
+          <a:lstStyle>
+            <a:defPPr>
+              <a:defRPr sz="2400" b="1">
+                <a:solidFill>
+                  <a:srgbClr val="0B1F3A"/>
+                </a:solidFill>
+                <a:latin typeface="Montserrat"/>
+                <a:ea typeface="Montserrat"/>
+                <a:cs typeface="Montserrat"/>
+              </a:defRPr>
+            </a:defPPr>
+          </a:lstStyle>
+          <a:p>
+            <a:pPr>
+              <a:defRPr sz="2400" b="1">
+                <a:solidFill>
+                  <a:srgbClr val="0B1F3A"/>
+                </a:solidFill>
+                <a:latin typeface="Montserrat"/>
+                <a:ea typeface="Montserrat"/>
+                <a:cs typeface="Montserrat"/>
+              </a:defRPr>
             </a:pPr>
             <a:r>
+              <a:rPr sz="2400" b="1">
+                <a:solidFill>
+                  <a:srgbClr val="0B1F3A"/>
+                </a:solidFill>
+                <a:latin typeface="Montserrat"/>
+                <a:ea typeface="Montserrat"/>
+                <a:cs typeface="Montserrat"/>
+              </a:rPr>
+              <a:t>Revenue retention and avoidable costs are the two critical tests</a:t>
+            </a:r>
+          </a:p>
+        </p:txBody>
+      </p:sp>
+      <p:sp>
+        <p:nvSpPr>
+          <p:cNvPr id="4" name="">
+            <a:extLst>
+              <a:ext uri="{FF2B5EF4-FFF2-40B4-BE49-F238E27FC236}">
+                <ns2:creationId id="{7B6D3F03-17F2-46FD-9044-B48F23F9643A}"/>
+              </a:ext>
+            </a:extLst>
+          </p:cNvPr>
+          <p:cNvSpPr>
+            <a:spLocks noGrp="1"/>
+          </p:cNvSpPr>
+          <p:nvPr/>
+        </p:nvSpPr>
+        <p:spPr>
+          <a:xfrm>
+            <a:off x="548640" y="6400800"/>
+            <a:ext cx="11087100" cy="9525"/>
+          </a:xfrm>
+          <a:prstGeom prst="rect">
+            <a:avLst/>
+          </a:prstGeom>
+          <a:solidFill>
+            <a:srgbClr val="D1D5DB"/>
+          </a:solidFill>
+          <a:ln w="0">
+            <a:noFill/>
+          </a:ln>
+        </p:spPr>
+      </p:sp>
+      <p:sp>
+        <p:nvSpPr>
+          <p:cNvPr id="5" name="">
+            <a:extLst>
+              <a:ext uri="{FF2B5EF4-FFF2-40B4-BE49-F238E27FC236}">
+                <ns2:creationId id="{1D7BB3E3-CD04-4B58-AC6A-0DE700628DB4}"/>
+              </a:ext>
+            </a:extLst>
+          </p:cNvPr>
+          <p:cNvSpPr>
+            <a:spLocks noGrp="1"/>
+          </p:cNvSpPr>
+          <p:nvPr/>
+        </p:nvSpPr>
+        <p:spPr>
+          <a:xfrm>
+            <a:off x="548640" y="6467475"/>
+            <a:ext cx="10477500" cy="285750"/>
+          </a:xfrm>
+          <a:prstGeom prst="rect">
+            <a:avLst/>
+          </a:prstGeom>
+          <a:noFill/>
+          <a:ln w="0">
+            <a:noFill/>
+          </a:ln>
+        </p:spPr>
+        <p:txBody>
+          <a:bodyPr wrap="square" lIns="0" tIns="0" rIns="0" bIns="0" anchor="t">
+            <a:noAutofit/>
+          </a:bodyPr>
+          <a:lstStyle>
+            <a:defPPr>
+              <a:defRPr sz="825" b="0">
+                <a:solidFill>
+                  <a:srgbClr val="6B7280"/>
+                </a:solidFill>
+                <a:latin typeface="Lato"/>
+                <a:ea typeface="Lato"/>
+                <a:cs typeface="Lato"/>
+              </a:defRPr>
+            </a:defPPr>
+          </a:lstStyle>
+          <a:p>
+            <a:pPr>
+              <a:defRPr sz="825" b="0">
+                <a:solidFill>
+                  <a:srgbClr val="6B7280"/>
+                </a:solidFill>
+                <a:latin typeface="Lato"/>
+                <a:ea typeface="Lato"/>
+                <a:cs typeface="Lato"/>
+              </a:defRPr>
+            </a:pPr>
+            <a:r>
+              <a:rPr sz="825" b="0">
+                <a:solidFill>
+                  <a:srgbClr val="6B7280"/>
+                </a:solidFill>
+                <a:latin typeface="Lato"/>
+                <a:ea typeface="Lato"/>
+                <a:cs typeface="Lato"/>
+              </a:rPr>
+              <a:t>Source: team alternatives model and sensitivity checks. Estimates are conditional, not guaranteed savings or net profit.</a:t>
+            </a:r>
+          </a:p>
+        </p:txBody>
+      </p:sp>
+      <p:sp>
+        <p:nvSpPr>
+          <p:cNvPr id="6" name="">
+            <a:extLst>
+              <a:ext uri="{FF2B5EF4-FFF2-40B4-BE49-F238E27FC236}">
+                <ns2:creationId id="{4AC77538-E6EB-45C5-B9D0-BEDAD4095E3E}"/>
+              </a:ext>
+            </a:extLst>
+          </p:cNvPr>
+          <p:cNvSpPr>
+            <a:spLocks noGrp="1"/>
+          </p:cNvSpPr>
+          <p:nvPr/>
+        </p:nvSpPr>
+        <p:spPr>
+          <a:xfrm>
+            <a:off x="11191875" y="6467475"/>
+            <a:ext cx="428625" cy="228600"/>
+          </a:xfrm>
+          <a:prstGeom prst="rect">
+            <a:avLst/>
+          </a:prstGeom>
+          <a:noFill/>
+          <a:ln w="0">
+            <a:noFill/>
+          </a:ln>
+        </p:spPr>
+        <p:txBody>
+          <a:bodyPr wrap="square" lIns="0" tIns="0" rIns="0" bIns="0" anchor="t">
+            <a:noAutofit/>
+          </a:bodyPr>
+          <a:lstStyle>
+            <a:defPPr>
+              <a:defRPr sz="900" b="0">
+                <a:solidFill>
+                  <a:srgbClr val="6B7280"/>
+                </a:solidFill>
+                <a:latin typeface="Lato"/>
+                <a:ea typeface="Lato"/>
+                <a:cs typeface="Lato"/>
+              </a:defRPr>
+            </a:defPPr>
+          </a:lstStyle>
+          <a:p>
+            <a:pPr>
+              <a:defRPr sz="900" b="0">
+                <a:solidFill>
+                  <a:srgbClr val="6B7280"/>
+                </a:solidFill>
+                <a:latin typeface="Lato"/>
+                <a:ea typeface="Lato"/>
+                <a:cs typeface="Lato"/>
+              </a:defRPr>
+            </a:pPr>
+            <a:r>
               <a:rPr sz="900" b="0">
                 <a:solidFill>
                   <a:srgbClr val="6B7280"/>
                 </a:solidFill>
                 <a:latin typeface="Lato"/>
-              </a:rPr>
-              <a:t>Source: NorthByte transactions, costs &amp; gates (Sep 2024–Aug 2026); team analysis</a:t>
-            </a:r>
-          </a:p>
-        </p:txBody>
-      </p:sp>
-      <p:sp>
-        <p:nvSpPr>
-          <p:cNvPr id="7" name="TextBox 6"/>
-          <p:cNvSpPr txBox="1"/>
-          <p:nvPr/>
-        </p:nvSpPr>
-        <p:spPr>
-          <a:xfrm>
-            <a:off x="10972800" y="6446520"/>
-            <a:ext cx="667512" cy="274320"/>
+                <a:ea typeface="Lato"/>
+                <a:cs typeface="Lato"/>
+              </a:rPr>
+              <a:t>20</a:t>
+            </a:r>
+          </a:p>
+        </p:txBody>
+      </p:sp>
+      <p:sp>
+        <p:nvSpPr>
+          <p:cNvPr id="7" name="">
+            <a:extLst>
+              <a:ext uri="{FF2B5EF4-FFF2-40B4-BE49-F238E27FC236}">
+                <ns2:creationId id="{C3F76970-F841-4E7E-B774-05B3A91CD372}"/>
+              </a:ext>
+            </a:extLst>
+          </p:cNvPr>
+          <p:cNvSpPr>
+            <a:spLocks noGrp="1"/>
+          </p:cNvSpPr>
+          <p:nvPr/>
+        </p:nvSpPr>
+        <p:spPr>
+          <a:xfrm>
+            <a:off x="552450" y="1543050"/>
+            <a:ext cx="5191125" cy="333375"/>
           </a:xfrm>
           <a:prstGeom prst="rect">
             <a:avLst/>
           </a:prstGeom>
           <a:noFill/>
-        </p:spPr>
-        <p:txBody>
-          <a:bodyPr wrap="square" anchor="t">
-            <a:spAutoFit/>
+          <a:ln w="0">
+            <a:noFill/>
+          </a:ln>
+        </p:spPr>
+        <p:txBody>
+          <a:bodyPr wrap="square" lIns="0" tIns="0" rIns="0" bIns="0" anchor="t">
+            <a:noAutofit/>
           </a:bodyPr>
-          <a:lstStyle/>
-          <a:p>
-            <a:pPr algn="r">
-              <a:spcAft>
-                <a:spcPts val="600"/>
-              </a:spcAft>
+          <a:lstStyle>
+            <a:defPPr>
+              <a:defRPr sz="1200" b="1">
+                <a:solidFill>
+                  <a:srgbClr val="E8692A"/>
+                </a:solidFill>
+                <a:latin typeface="Montserrat"/>
+                <a:ea typeface="Montserrat"/>
+                <a:cs typeface="Montserrat"/>
+              </a:defRPr>
+            </a:defPPr>
+          </a:lstStyle>
+          <a:p>
+            <a:pPr>
+              <a:defRPr sz="1200" b="1">
+                <a:solidFill>
+                  <a:srgbClr val="E8692A"/>
+                </a:solidFill>
+                <a:latin typeface="Montserrat"/>
+                <a:ea typeface="Montserrat"/>
+                <a:cs typeface="Montserrat"/>
+              </a:defRPr>
             </a:pPr>
             <a:r>
-              <a:rPr sz="900" b="0">
-                <a:solidFill>
-                  <a:srgbClr val="6B7280"/>
+              <a:rPr sz="1200" b="1">
+                <a:solidFill>
+                  <a:srgbClr val="E8692A"/>
+                </a:solidFill>
+                <a:latin typeface="Montserrat"/>
+                <a:ea typeface="Montserrat"/>
+                <a:cs typeface="Montserrat"/>
+              </a:rPr>
+              <a:t>REVENUE RETENTION</a:t>
+            </a:r>
+          </a:p>
+        </p:txBody>
+      </p:sp>
+      <p:sp>
+        <p:nvSpPr>
+          <p:cNvPr id="8" name="">
+            <a:extLst>
+              <a:ext uri="{FF2B5EF4-FFF2-40B4-BE49-F238E27FC236}">
+                <ns2:creationId id="{6BE8A96C-1B7F-462B-A771-BEA196A3E3FF}"/>
+              </a:ext>
+            </a:extLst>
+          </p:cNvPr>
+          <p:cNvSpPr>
+            <a:spLocks noGrp="1"/>
+          </p:cNvSpPr>
+          <p:nvPr/>
+        </p:nvSpPr>
+        <p:spPr>
+          <a:xfrm>
+            <a:off x="6286500" y="1543050"/>
+            <a:ext cx="5286375" cy="333375"/>
+          </a:xfrm>
+          <a:prstGeom prst="rect">
+            <a:avLst/>
+          </a:prstGeom>
+          <a:noFill/>
+          <a:ln w="0">
+            <a:noFill/>
+          </a:ln>
+        </p:spPr>
+        <p:txBody>
+          <a:bodyPr wrap="square" lIns="0" tIns="0" rIns="0" bIns="0" anchor="t">
+            <a:noAutofit/>
+          </a:bodyPr>
+          <a:lstStyle>
+            <a:defPPr>
+              <a:defRPr sz="1200" b="1">
+                <a:solidFill>
+                  <a:srgbClr val="E8692A"/>
+                </a:solidFill>
+                <a:latin typeface="Montserrat"/>
+                <a:ea typeface="Montserrat"/>
+                <a:cs typeface="Montserrat"/>
+              </a:defRPr>
+            </a:defPPr>
+          </a:lstStyle>
+          <a:p>
+            <a:pPr>
+              <a:defRPr sz="1200" b="1">
+                <a:solidFill>
+                  <a:srgbClr val="E8692A"/>
+                </a:solidFill>
+                <a:latin typeface="Montserrat"/>
+                <a:ea typeface="Montserrat"/>
+                <a:cs typeface="Montserrat"/>
+              </a:defRPr>
+            </a:pPr>
+            <a:r>
+              <a:rPr sz="1200" b="1">
+                <a:solidFill>
+                  <a:srgbClr val="E8692A"/>
+                </a:solidFill>
+                <a:latin typeface="Montserrat"/>
+                <a:ea typeface="Montserrat"/>
+                <a:cs typeface="Montserrat"/>
+              </a:rPr>
+              <a:t>COST AVOIDABILITY</a:t>
+            </a:r>
+          </a:p>
+        </p:txBody>
+      </p:sp>
+      <p:sp>
+        <p:nvSpPr>
+          <p:cNvPr id="9" name="">
+            <a:extLst>
+              <a:ext uri="{FF2B5EF4-FFF2-40B4-BE49-F238E27FC236}">
+                <ns2:creationId id="{5F8FF1B0-A2BE-4172-B03C-9D405BC95CD3}"/>
+              </a:ext>
+            </a:extLst>
+          </p:cNvPr>
+          <p:cNvSpPr>
+            <a:spLocks noGrp="1"/>
+          </p:cNvSpPr>
+          <p:nvPr/>
+        </p:nvSpPr>
+        <p:spPr>
+          <a:xfrm>
+            <a:off x="552450" y="1933575"/>
+            <a:ext cx="4953000" cy="790575"/>
+          </a:xfrm>
+          <a:prstGeom prst="rect">
+            <a:avLst/>
+          </a:prstGeom>
+          <a:noFill/>
+          <a:ln w="0">
+            <a:noFill/>
+          </a:ln>
+        </p:spPr>
+        <p:txBody>
+          <a:bodyPr wrap="square" lIns="0" tIns="0" rIns="0" bIns="0" anchor="t">
+            <a:noAutofit/>
+          </a:bodyPr>
+          <a:lstStyle>
+            <a:defPPr>
+              <a:defRPr sz="4800" b="1">
+                <a:solidFill>
+                  <a:srgbClr val="0B1F3A"/>
+                </a:solidFill>
+                <a:latin typeface="Montserrat"/>
+                <a:ea typeface="Montserrat"/>
+                <a:cs typeface="Montserrat"/>
+              </a:defRPr>
+            </a:defPPr>
+          </a:lstStyle>
+          <a:p>
+            <a:pPr>
+              <a:defRPr sz="4800" b="1">
+                <a:solidFill>
+                  <a:srgbClr val="0B1F3A"/>
+                </a:solidFill>
+                <a:latin typeface="Montserrat"/>
+                <a:ea typeface="Montserrat"/>
+                <a:cs typeface="Montserrat"/>
+              </a:defRPr>
+            </a:pPr>
+            <a:r>
+              <a:rPr sz="4800" b="1">
+                <a:solidFill>
+                  <a:srgbClr val="0B1F3A"/>
+                </a:solidFill>
+                <a:latin typeface="Montserrat"/>
+                <a:ea typeface="Montserrat"/>
+                <a:cs typeface="Montserrat"/>
+              </a:rPr>
+              <a:t>≈90%</a:t>
+            </a:r>
+          </a:p>
+        </p:txBody>
+      </p:sp>
+      <p:sp>
+        <p:nvSpPr>
+          <p:cNvPr id="10" name="">
+            <a:extLst>
+              <a:ext uri="{FF2B5EF4-FFF2-40B4-BE49-F238E27FC236}">
+                <ns2:creationId id="{5ADD77BF-1D5A-4176-9FFE-DCF5E5F2B95F}"/>
+              </a:ext>
+            </a:extLst>
+          </p:cNvPr>
+          <p:cNvSpPr>
+            <a:spLocks noGrp="1"/>
+          </p:cNvSpPr>
+          <p:nvPr/>
+        </p:nvSpPr>
+        <p:spPr>
+          <a:xfrm>
+            <a:off x="6286500" y="1933575"/>
+            <a:ext cx="5286375" cy="790575"/>
+          </a:xfrm>
+          <a:prstGeom prst="rect">
+            <a:avLst/>
+          </a:prstGeom>
+          <a:noFill/>
+          <a:ln w="0">
+            <a:noFill/>
+          </a:ln>
+        </p:spPr>
+        <p:txBody>
+          <a:bodyPr wrap="square" lIns="0" tIns="0" rIns="0" bIns="0" anchor="t">
+            <a:noAutofit/>
+          </a:bodyPr>
+          <a:lstStyle>
+            <a:defPPr>
+              <a:defRPr sz="4800" b="1">
+                <a:solidFill>
+                  <a:srgbClr val="0B1F3A"/>
+                </a:solidFill>
+                <a:latin typeface="Montserrat"/>
+                <a:ea typeface="Montserrat"/>
+                <a:cs typeface="Montserrat"/>
+              </a:defRPr>
+            </a:defPPr>
+          </a:lstStyle>
+          <a:p>
+            <a:pPr>
+              <a:defRPr sz="4800" b="1">
+                <a:solidFill>
+                  <a:srgbClr val="0B1F3A"/>
+                </a:solidFill>
+                <a:latin typeface="Montserrat"/>
+                <a:ea typeface="Montserrat"/>
+                <a:cs typeface="Montserrat"/>
+              </a:defRPr>
+            </a:pPr>
+            <a:r>
+              <a:rPr sz="4800" b="1">
+                <a:solidFill>
+                  <a:srgbClr val="0B1F3A"/>
+                </a:solidFill>
+                <a:latin typeface="Montserrat"/>
+                <a:ea typeface="Montserrat"/>
+                <a:cs typeface="Montserrat"/>
+              </a:rPr>
+              <a:t>−$7.4M</a:t>
+            </a:r>
+          </a:p>
+        </p:txBody>
+      </p:sp>
+      <p:sp>
+        <p:nvSpPr>
+          <p:cNvPr id="11" name="">
+            <a:extLst>
+              <a:ext uri="{FF2B5EF4-FFF2-40B4-BE49-F238E27FC236}">
+                <ns2:creationId id="{16784EEF-0E5F-4263-ABC5-F4D427C90AB4}"/>
+              </a:ext>
+            </a:extLst>
+          </p:cNvPr>
+          <p:cNvSpPr>
+            <a:spLocks noGrp="1"/>
+          </p:cNvSpPr>
+          <p:nvPr/>
+        </p:nvSpPr>
+        <p:spPr>
+          <a:xfrm>
+            <a:off x="552450" y="2847975"/>
+            <a:ext cx="5048250" cy="581025"/>
+          </a:xfrm>
+          <a:prstGeom prst="rect">
+            <a:avLst/>
+          </a:prstGeom>
+          <a:noFill/>
+          <a:ln w="0">
+            <a:noFill/>
+          </a:ln>
+        </p:spPr>
+        <p:txBody>
+          <a:bodyPr wrap="square" lIns="0" tIns="0" rIns="0" bIns="0" anchor="t">
+            <a:noAutofit/>
+          </a:bodyPr>
+          <a:lstStyle>
+            <a:defPPr>
+              <a:defRPr sz="1575" b="1">
+                <a:solidFill>
+                  <a:srgbClr val="0B1F3A"/>
                 </a:solidFill>
                 <a:latin typeface="Lato"/>
-              </a:rPr>
-              <a:t>20</a:t>
-            </a:r>
-          </a:p>
-        </p:txBody>
-      </p:sp>
-      <p:graphicFrame>
-        <p:nvGraphicFramePr>
-          <p:cNvPr id="8" name="Table 7"/>
-          <p:cNvGraphicFramePr>
-            <a:graphicFrameLocks noGrp="1"/>
-          </p:cNvGraphicFramePr>
-          <p:nvPr/>
-        </p:nvGraphicFramePr>
-        <p:xfrm>
-          <a:off x="548640" y="1645920"/>
-          <a:ext cx="11091672" cy="4389120"/>
-        </p:xfrm>
-        <a:graphic>
-          <a:graphicData uri="http://schemas.openxmlformats.org/drawingml/2006/table">
-            <a:tbl>
-              <a:tblPr firstRow="1" bandRow="1">
-                <a:tableStyleId>{5C22544A-7EE6-4342-B048-85BDC9FD1C3A}</a:tableStyleId>
-              </a:tblPr>
-              <a:tblGrid>
-                <a:gridCol w="3291840"/>
-                <a:gridCol w="1463040"/>
-                <a:gridCol w="1463040"/>
-                <a:gridCol w="4873752"/>
-              </a:tblGrid>
-              <a:tr h="877824">
-                <a:tc>
-                  <a:txBody>
-                    <a:bodyPr/>
-                    <a:lstStyle/>
-                    <a:p>
-                      <a:r>
-                        <a:rPr sz="1200" b="1">
-                          <a:solidFill>
-                            <a:srgbClr val="FFFFFF"/>
-                          </a:solidFill>
-                          <a:latin typeface="Montserrat"/>
-                        </a:rPr>
-                        <a:t>Risk</a:t>
-                      </a:r>
-                    </a:p>
-                  </a:txBody>
-                  <a:tcPr>
-                    <a:solidFill>
-                      <a:srgbClr val="0B1F3A"/>
-                    </a:solidFill>
-                  </a:tcPr>
-                </a:tc>
-                <a:tc>
-                  <a:txBody>
-                    <a:bodyPr/>
-                    <a:lstStyle/>
-                    <a:p>
-                      <a:r>
-                        <a:rPr sz="1200" b="1">
-                          <a:solidFill>
-                            <a:srgbClr val="FFFFFF"/>
-                          </a:solidFill>
-                          <a:latin typeface="Montserrat"/>
-                        </a:rPr>
-                        <a:t>Likelihood</a:t>
-                      </a:r>
-                    </a:p>
-                  </a:txBody>
-                  <a:tcPr>
-                    <a:solidFill>
-                      <a:srgbClr val="0B1F3A"/>
-                    </a:solidFill>
-                  </a:tcPr>
-                </a:tc>
-                <a:tc>
-                  <a:txBody>
-                    <a:bodyPr/>
-                    <a:lstStyle/>
-                    <a:p>
-                      <a:r>
-                        <a:rPr sz="1200" b="1">
-                          <a:solidFill>
-                            <a:srgbClr val="FFFFFF"/>
-                          </a:solidFill>
-                          <a:latin typeface="Montserrat"/>
-                        </a:rPr>
-                        <a:t>Impact</a:t>
-                      </a:r>
-                    </a:p>
-                  </a:txBody>
-                  <a:tcPr>
-                    <a:solidFill>
-                      <a:srgbClr val="0B1F3A"/>
-                    </a:solidFill>
-                  </a:tcPr>
-                </a:tc>
-                <a:tc>
-                  <a:txBody>
-                    <a:bodyPr/>
-                    <a:lstStyle/>
-                    <a:p>
-                      <a:r>
-                        <a:rPr sz="1200" b="1">
-                          <a:solidFill>
-                            <a:srgbClr val="FFFFFF"/>
-                          </a:solidFill>
-                          <a:latin typeface="Montserrat"/>
-                        </a:rPr>
-                        <a:t>Mitigation</a:t>
-                      </a:r>
-                    </a:p>
-                  </a:txBody>
-                  <a:tcPr>
-                    <a:solidFill>
-                      <a:srgbClr val="0B1F3A"/>
-                    </a:solidFill>
-                  </a:tcPr>
-                </a:tc>
-              </a:tr>
-              <a:tr h="877824">
-                <a:tc>
-                  <a:txBody>
-                    <a:bodyPr/>
-                    <a:lstStyle/>
-                    <a:p>
-                      <a:r>
-                        <a:rPr sz="1200">
-                          <a:solidFill>
-                            <a:srgbClr val="9CA3AF"/>
-                          </a:solidFill>
-                          <a:latin typeface="Lato"/>
-                        </a:rPr>
-                        <a:t>[Risk 1]</a:t>
-                      </a:r>
-                    </a:p>
-                  </a:txBody>
-                  <a:tcPr>
-                    <a:solidFill>
-                      <a:srgbClr val="F3F5F8"/>
-                    </a:solidFill>
-                  </a:tcPr>
-                </a:tc>
-                <a:tc>
-                  <a:txBody>
-                    <a:bodyPr/>
-                    <a:lstStyle/>
-                    <a:p>
-                      <a:r>
-                        <a:rPr sz="1200">
-                          <a:solidFill>
-                            <a:srgbClr val="9CA3AF"/>
-                          </a:solidFill>
-                          <a:latin typeface="Lato"/>
-                        </a:rPr>
-                        <a:t>[ ]</a:t>
-                      </a:r>
-                    </a:p>
-                  </a:txBody>
-                  <a:tcPr>
-                    <a:solidFill>
-                      <a:srgbClr val="F3F5F8"/>
-                    </a:solidFill>
-                  </a:tcPr>
-                </a:tc>
-                <a:tc>
-                  <a:txBody>
-                    <a:bodyPr/>
-                    <a:lstStyle/>
-                    <a:p>
-                      <a:r>
-                        <a:rPr sz="1200">
-                          <a:solidFill>
-                            <a:srgbClr val="9CA3AF"/>
-                          </a:solidFill>
-                          <a:latin typeface="Lato"/>
-                        </a:rPr>
-                        <a:t>[ ]</a:t>
-                      </a:r>
-                    </a:p>
-                  </a:txBody>
-                  <a:tcPr>
-                    <a:solidFill>
-                      <a:srgbClr val="F3F5F8"/>
-                    </a:solidFill>
-                  </a:tcPr>
-                </a:tc>
-                <a:tc>
-                  <a:txBody>
-                    <a:bodyPr/>
-                    <a:lstStyle/>
-                    <a:p>
-                      <a:r>
-                        <a:rPr sz="1200">
-                          <a:solidFill>
-                            <a:srgbClr val="9CA3AF"/>
-                          </a:solidFill>
-                          <a:latin typeface="Lato"/>
-                        </a:rPr>
-                        <a:t>[ ]</a:t>
-                      </a:r>
-                    </a:p>
-                  </a:txBody>
-                  <a:tcPr>
-                    <a:solidFill>
-                      <a:srgbClr val="F3F5F8"/>
-                    </a:solidFill>
-                  </a:tcPr>
-                </a:tc>
-              </a:tr>
-              <a:tr h="877824">
-                <a:tc>
-                  <a:txBody>
-                    <a:bodyPr/>
-                    <a:lstStyle/>
-                    <a:p>
-                      <a:r>
-                        <a:rPr sz="1200">
-                          <a:solidFill>
-                            <a:srgbClr val="9CA3AF"/>
-                          </a:solidFill>
-                          <a:latin typeface="Lato"/>
-                        </a:rPr>
-                        <a:t>[Risk 2]</a:t>
-                      </a:r>
-                    </a:p>
-                  </a:txBody>
-                  <a:tcPr>
-                    <a:solidFill>
-                      <a:srgbClr val="FFFFFF"/>
-                    </a:solidFill>
-                  </a:tcPr>
-                </a:tc>
-                <a:tc>
-                  <a:txBody>
-                    <a:bodyPr/>
-                    <a:lstStyle/>
-                    <a:p>
-                      <a:r>
-                        <a:rPr sz="1200">
-                          <a:solidFill>
-                            <a:srgbClr val="9CA3AF"/>
-                          </a:solidFill>
-                          <a:latin typeface="Lato"/>
-                        </a:rPr>
-                        <a:t>[ ]</a:t>
-                      </a:r>
-                    </a:p>
-                  </a:txBody>
-                  <a:tcPr>
-                    <a:solidFill>
-                      <a:srgbClr val="FFFFFF"/>
-                    </a:solidFill>
-                  </a:tcPr>
-                </a:tc>
-                <a:tc>
-                  <a:txBody>
-                    <a:bodyPr/>
-                    <a:lstStyle/>
-                    <a:p>
-                      <a:r>
-                        <a:rPr sz="1200">
-                          <a:solidFill>
-                            <a:srgbClr val="9CA3AF"/>
-                          </a:solidFill>
-                          <a:latin typeface="Lato"/>
-                        </a:rPr>
-                        <a:t>[ ]</a:t>
-                      </a:r>
-                    </a:p>
-                  </a:txBody>
-                  <a:tcPr>
-                    <a:solidFill>
-                      <a:srgbClr val="FFFFFF"/>
-                    </a:solidFill>
-                  </a:tcPr>
-                </a:tc>
-                <a:tc>
-                  <a:txBody>
-                    <a:bodyPr/>
-                    <a:lstStyle/>
-                    <a:p>
-                      <a:r>
-                        <a:rPr sz="1200">
-                          <a:solidFill>
-                            <a:srgbClr val="9CA3AF"/>
-                          </a:solidFill>
-                          <a:latin typeface="Lato"/>
-                        </a:rPr>
-                        <a:t>[ ]</a:t>
-                      </a:r>
-                    </a:p>
-                  </a:txBody>
-                  <a:tcPr>
-                    <a:solidFill>
-                      <a:srgbClr val="FFFFFF"/>
-                    </a:solidFill>
-                  </a:tcPr>
-                </a:tc>
-              </a:tr>
-              <a:tr h="877824">
-                <a:tc>
-                  <a:txBody>
-                    <a:bodyPr/>
-                    <a:lstStyle/>
-                    <a:p>
-                      <a:r>
-                        <a:rPr sz="1200">
-                          <a:solidFill>
-                            <a:srgbClr val="9CA3AF"/>
-                          </a:solidFill>
-                          <a:latin typeface="Lato"/>
-                        </a:rPr>
-                        <a:t>[Risk 3]</a:t>
-                      </a:r>
-                    </a:p>
-                  </a:txBody>
-                  <a:tcPr>
-                    <a:solidFill>
-                      <a:srgbClr val="F3F5F8"/>
-                    </a:solidFill>
-                  </a:tcPr>
-                </a:tc>
-                <a:tc>
-                  <a:txBody>
-                    <a:bodyPr/>
-                    <a:lstStyle/>
-                    <a:p>
-                      <a:r>
-                        <a:rPr sz="1200">
-                          <a:solidFill>
-                            <a:srgbClr val="9CA3AF"/>
-                          </a:solidFill>
-                          <a:latin typeface="Lato"/>
-                        </a:rPr>
-                        <a:t>[ ]</a:t>
-                      </a:r>
-                    </a:p>
-                  </a:txBody>
-                  <a:tcPr>
-                    <a:solidFill>
-                      <a:srgbClr val="F3F5F8"/>
-                    </a:solidFill>
-                  </a:tcPr>
-                </a:tc>
-                <a:tc>
-                  <a:txBody>
-                    <a:bodyPr/>
-                    <a:lstStyle/>
-                    <a:p>
-                      <a:r>
-                        <a:rPr sz="1200">
-                          <a:solidFill>
-                            <a:srgbClr val="9CA3AF"/>
-                          </a:solidFill>
-                          <a:latin typeface="Lato"/>
-                        </a:rPr>
-                        <a:t>[ ]</a:t>
-                      </a:r>
-                    </a:p>
-                  </a:txBody>
-                  <a:tcPr>
-                    <a:solidFill>
-                      <a:srgbClr val="F3F5F8"/>
-                    </a:solidFill>
-                  </a:tcPr>
-                </a:tc>
-                <a:tc>
-                  <a:txBody>
-                    <a:bodyPr/>
-                    <a:lstStyle/>
-                    <a:p>
-                      <a:r>
-                        <a:rPr sz="1200">
-                          <a:solidFill>
-                            <a:srgbClr val="9CA3AF"/>
-                          </a:solidFill>
-                          <a:latin typeface="Lato"/>
-                        </a:rPr>
-                        <a:t>[ ]</a:t>
-                      </a:r>
-                    </a:p>
-                  </a:txBody>
-                  <a:tcPr>
-                    <a:solidFill>
-                      <a:srgbClr val="F3F5F8"/>
-                    </a:solidFill>
-                  </a:tcPr>
-                </a:tc>
-              </a:tr>
-              <a:tr h="877824">
-                <a:tc>
-                  <a:txBody>
-                    <a:bodyPr/>
-                    <a:lstStyle/>
-                    <a:p>
-                      <a:r>
-                        <a:rPr sz="1200">
-                          <a:solidFill>
-                            <a:srgbClr val="9CA3AF"/>
-                          </a:solidFill>
-                          <a:latin typeface="Lato"/>
-                        </a:rPr>
-                        <a:t>[Risk 4]</a:t>
-                      </a:r>
-                    </a:p>
-                  </a:txBody>
-                  <a:tcPr>
-                    <a:solidFill>
-                      <a:srgbClr val="FFFFFF"/>
-                    </a:solidFill>
-                  </a:tcPr>
-                </a:tc>
-                <a:tc>
-                  <a:txBody>
-                    <a:bodyPr/>
-                    <a:lstStyle/>
-                    <a:p>
-                      <a:r>
-                        <a:rPr sz="1200">
-                          <a:solidFill>
-                            <a:srgbClr val="9CA3AF"/>
-                          </a:solidFill>
-                          <a:latin typeface="Lato"/>
-                        </a:rPr>
-                        <a:t>[ ]</a:t>
-                      </a:r>
-                    </a:p>
-                  </a:txBody>
-                  <a:tcPr>
-                    <a:solidFill>
-                      <a:srgbClr val="FFFFFF"/>
-                    </a:solidFill>
-                  </a:tcPr>
-                </a:tc>
-                <a:tc>
-                  <a:txBody>
-                    <a:bodyPr/>
-                    <a:lstStyle/>
-                    <a:p>
-                      <a:r>
-                        <a:rPr sz="1200">
-                          <a:solidFill>
-                            <a:srgbClr val="9CA3AF"/>
-                          </a:solidFill>
-                          <a:latin typeface="Lato"/>
-                        </a:rPr>
-                        <a:t>[ ]</a:t>
-                      </a:r>
-                    </a:p>
-                  </a:txBody>
-                  <a:tcPr>
-                    <a:solidFill>
-                      <a:srgbClr val="FFFFFF"/>
-                    </a:solidFill>
-                  </a:tcPr>
-                </a:tc>
-                <a:tc>
-                  <a:txBody>
-                    <a:bodyPr/>
-                    <a:lstStyle/>
-                    <a:p>
-                      <a:r>
-                        <a:rPr sz="1200">
-                          <a:solidFill>
-                            <a:srgbClr val="9CA3AF"/>
-                          </a:solidFill>
-                          <a:latin typeface="Lato"/>
-                        </a:rPr>
-                        <a:t>[ ]</a:t>
-                      </a:r>
-                    </a:p>
-                  </a:txBody>
-                  <a:tcPr>
-                    <a:solidFill>
-                      <a:srgbClr val="FFFFFF"/>
-                    </a:solidFill>
-                  </a:tcPr>
-                </a:tc>
-              </a:tr>
-            </a:tbl>
-          </a:graphicData>
-        </a:graphic>
-      </p:graphicFrame>
+                <a:ea typeface="Lato"/>
+                <a:cs typeface="Lato"/>
+              </a:defRPr>
+            </a:defPPr>
+          </a:lstStyle>
+          <a:p>
+            <a:pPr>
+              <a:defRPr sz="1575" b="1">
+                <a:solidFill>
+                  <a:srgbClr val="0B1F3A"/>
+                </a:solidFill>
+                <a:latin typeface="Lato"/>
+                <a:ea typeface="Lato"/>
+                <a:cs typeface="Lato"/>
+              </a:defRPr>
+            </a:pPr>
+            <a:r>
+              <a:rPr sz="1575" b="1">
+                <a:solidFill>
+                  <a:srgbClr val="0B1F3A"/>
+                </a:solidFill>
+                <a:latin typeface="Lato"/>
+                <a:ea typeface="Lato"/>
+                <a:cs typeface="Lato"/>
+              </a:rPr>
+              <a:t>Trunk recapture needed for break-even, with other central assumptions fixed.</a:t>
+            </a:r>
+          </a:p>
+        </p:txBody>
+      </p:sp>
+      <p:sp>
+        <p:nvSpPr>
+          <p:cNvPr id="12" name="">
+            <a:extLst>
+              <a:ext uri="{FF2B5EF4-FFF2-40B4-BE49-F238E27FC236}">
+                <ns2:creationId id="{97796C2F-7A8F-41CC-B392-DA4872550EBB}"/>
+              </a:ext>
+            </a:extLst>
+          </p:cNvPr>
+          <p:cNvSpPr>
+            <a:spLocks noGrp="1"/>
+          </p:cNvSpPr>
+          <p:nvPr/>
+        </p:nvSpPr>
+        <p:spPr>
+          <a:xfrm>
+            <a:off x="6286500" y="2847975"/>
+            <a:ext cx="5191125" cy="581025"/>
+          </a:xfrm>
+          <a:prstGeom prst="rect">
+            <a:avLst/>
+          </a:prstGeom>
+          <a:noFill/>
+          <a:ln w="0">
+            <a:noFill/>
+          </a:ln>
+        </p:spPr>
+        <p:txBody>
+          <a:bodyPr wrap="square" lIns="0" tIns="0" rIns="0" bIns="0" anchor="t">
+            <a:noAutofit/>
+          </a:bodyPr>
+          <a:lstStyle>
+            <a:defPPr>
+              <a:defRPr sz="1575" b="1">
+                <a:solidFill>
+                  <a:srgbClr val="0B1F3A"/>
+                </a:solidFill>
+                <a:latin typeface="Lato"/>
+                <a:ea typeface="Lato"/>
+                <a:cs typeface="Lato"/>
+              </a:defRPr>
+            </a:defPPr>
+          </a:lstStyle>
+          <a:p>
+            <a:pPr>
+              <a:defRPr sz="1575" b="1">
+                <a:solidFill>
+                  <a:srgbClr val="0B1F3A"/>
+                </a:solidFill>
+                <a:latin typeface="Lato"/>
+                <a:ea typeface="Lato"/>
+                <a:cs typeface="Lato"/>
+              </a:defRPr>
+            </a:pPr>
+            <a:r>
+              <a:rPr sz="1575" b="1">
+                <a:solidFill>
+                  <a:srgbClr val="0B1F3A"/>
+                </a:solidFill>
+                <a:latin typeface="Lato"/>
+                <a:ea typeface="Lato"/>
+                <a:cs typeface="Lato"/>
+              </a:rPr>
+              <a:t>Less improvement if 10% of the costs assumed removable remain fixed.</a:t>
+            </a:r>
+          </a:p>
+        </p:txBody>
+      </p:sp>
+      <p:sp>
+        <p:nvSpPr>
+          <p:cNvPr id="13" name="">
+            <a:extLst>
+              <a:ext uri="{FF2B5EF4-FFF2-40B4-BE49-F238E27FC236}">
+                <ns2:creationId id="{50E346E2-6986-4313-80D2-5B3C4BE659E5}"/>
+              </a:ext>
+            </a:extLst>
+          </p:cNvPr>
+          <p:cNvSpPr>
+            <a:spLocks noGrp="1"/>
+          </p:cNvSpPr>
+          <p:nvPr/>
+        </p:nvSpPr>
+        <p:spPr>
+          <a:xfrm>
+            <a:off x="552450" y="3629025"/>
+            <a:ext cx="5191125" cy="9525"/>
+          </a:xfrm>
+          <a:prstGeom prst="rect">
+            <a:avLst/>
+          </a:prstGeom>
+          <a:solidFill>
+            <a:srgbClr val="D1D5DB"/>
+          </a:solidFill>
+          <a:ln w="0">
+            <a:noFill/>
+          </a:ln>
+        </p:spPr>
+      </p:sp>
+      <p:sp>
+        <p:nvSpPr>
+          <p:cNvPr id="14" name="">
+            <a:extLst>
+              <a:ext uri="{FF2B5EF4-FFF2-40B4-BE49-F238E27FC236}">
+                <ns2:creationId id="{2D999621-BECC-4385-A5D9-616E8A9304B3}"/>
+              </a:ext>
+            </a:extLst>
+          </p:cNvPr>
+          <p:cNvSpPr>
+            <a:spLocks noGrp="1"/>
+          </p:cNvSpPr>
+          <p:nvPr/>
+        </p:nvSpPr>
+        <p:spPr>
+          <a:xfrm>
+            <a:off x="6286500" y="3629025"/>
+            <a:ext cx="5334000" cy="9525"/>
+          </a:xfrm>
+          <a:prstGeom prst="rect">
+            <a:avLst/>
+          </a:prstGeom>
+          <a:solidFill>
+            <a:srgbClr val="D1D5DB"/>
+          </a:solidFill>
+          <a:ln w="0">
+            <a:noFill/>
+          </a:ln>
+        </p:spPr>
+      </p:sp>
+      <p:sp>
+        <p:nvSpPr>
+          <p:cNvPr id="15" name="">
+            <a:extLst>
+              <a:ext uri="{FF2B5EF4-FFF2-40B4-BE49-F238E27FC236}">
+                <ns2:creationId id="{278683E0-EF15-47DA-9657-6C57D02F0ED4}"/>
+              </a:ext>
+            </a:extLst>
+          </p:cNvPr>
+          <p:cNvSpPr>
+            <a:spLocks noGrp="1"/>
+          </p:cNvSpPr>
+          <p:nvPr/>
+        </p:nvSpPr>
+        <p:spPr>
+          <a:xfrm>
+            <a:off x="552450" y="3829050"/>
+            <a:ext cx="4953000" cy="266700"/>
+          </a:xfrm>
+          <a:prstGeom prst="rect">
+            <a:avLst/>
+          </a:prstGeom>
+          <a:noFill/>
+          <a:ln w="0">
+            <a:noFill/>
+          </a:ln>
+        </p:spPr>
+        <p:txBody>
+          <a:bodyPr wrap="square" lIns="0" tIns="0" rIns="0" bIns="0" anchor="t">
+            <a:noAutofit/>
+          </a:bodyPr>
+          <a:lstStyle>
+            <a:defPPr>
+              <a:defRPr sz="1100" b="1">
+                <a:solidFill>
+                  <a:srgbClr val="2E7D5B"/>
+                </a:solidFill>
+                <a:latin typeface="Montserrat"/>
+                <a:ea typeface="Montserrat"/>
+                <a:cs typeface="Montserrat"/>
+              </a:defRPr>
+            </a:defPPr>
+          </a:lstStyle>
+          <a:p>
+            <a:pPr>
+              <a:defRPr sz="1100" b="1">
+                <a:solidFill>
+                  <a:srgbClr val="2E7D5B"/>
+                </a:solidFill>
+                <a:latin typeface="Montserrat"/>
+                <a:ea typeface="Montserrat"/>
+                <a:cs typeface="Montserrat"/>
+              </a:defRPr>
+            </a:pPr>
+            <a:r>
+              <a:rPr sz="1100" b="1">
+                <a:solidFill>
+                  <a:srgbClr val="2E7D5B"/>
+                </a:solidFill>
+                <a:latin typeface="Montserrat"/>
+                <a:ea typeface="Montserrat"/>
+                <a:cs typeface="Montserrat"/>
+              </a:rPr>
+              <a:t>RESPONSE</a:t>
+            </a:r>
+          </a:p>
+        </p:txBody>
+      </p:sp>
+      <p:sp>
+        <p:nvSpPr>
+          <p:cNvPr id="16" name="">
+            <a:extLst>
+              <a:ext uri="{FF2B5EF4-FFF2-40B4-BE49-F238E27FC236}">
+                <ns2:creationId id="{7C8F8EB2-3108-44E5-A276-8E435D15CFEE}"/>
+              </a:ext>
+            </a:extLst>
+          </p:cNvPr>
+          <p:cNvSpPr>
+            <a:spLocks noGrp="1"/>
+          </p:cNvSpPr>
+          <p:nvPr/>
+        </p:nvSpPr>
+        <p:spPr>
+          <a:xfrm>
+            <a:off x="6286500" y="3829050"/>
+            <a:ext cx="4953000" cy="266700"/>
+          </a:xfrm>
+          <a:prstGeom prst="rect">
+            <a:avLst/>
+          </a:prstGeom>
+          <a:noFill/>
+          <a:ln w="0">
+            <a:noFill/>
+          </a:ln>
+        </p:spPr>
+        <p:txBody>
+          <a:bodyPr wrap="square" lIns="0" tIns="0" rIns="0" bIns="0" anchor="t">
+            <a:noAutofit/>
+          </a:bodyPr>
+          <a:lstStyle>
+            <a:defPPr>
+              <a:defRPr sz="1100" b="1">
+                <a:solidFill>
+                  <a:srgbClr val="2E7D5B"/>
+                </a:solidFill>
+                <a:latin typeface="Montserrat"/>
+                <a:ea typeface="Montserrat"/>
+                <a:cs typeface="Montserrat"/>
+              </a:defRPr>
+            </a:defPPr>
+          </a:lstStyle>
+          <a:p>
+            <a:pPr>
+              <a:defRPr sz="1100" b="1">
+                <a:solidFill>
+                  <a:srgbClr val="2E7D5B"/>
+                </a:solidFill>
+                <a:latin typeface="Montserrat"/>
+                <a:ea typeface="Montserrat"/>
+                <a:cs typeface="Montserrat"/>
+              </a:defRPr>
+            </a:pPr>
+            <a:r>
+              <a:rPr sz="1100" b="1">
+                <a:solidFill>
+                  <a:srgbClr val="2E7D5B"/>
+                </a:solidFill>
+                <a:latin typeface="Montserrat"/>
+                <a:ea typeface="Montserrat"/>
+                <a:cs typeface="Montserrat"/>
+              </a:rPr>
+              <a:t>RESPONSE</a:t>
+            </a:r>
+          </a:p>
+        </p:txBody>
+      </p:sp>
+      <p:sp>
+        <p:nvSpPr>
+          <p:cNvPr id="17" name="">
+            <a:extLst>
+              <a:ext uri="{FF2B5EF4-FFF2-40B4-BE49-F238E27FC236}">
+                <ns2:creationId id="{091DEF20-BD27-450F-99B0-CD8B75D96E9C}"/>
+              </a:ext>
+            </a:extLst>
+          </p:cNvPr>
+          <p:cNvSpPr>
+            <a:spLocks noGrp="1"/>
+          </p:cNvSpPr>
+          <p:nvPr/>
+        </p:nvSpPr>
+        <p:spPr>
+          <a:xfrm>
+            <a:off x="552450" y="4191000"/>
+            <a:ext cx="5143500" cy="742950"/>
+          </a:xfrm>
+          <a:prstGeom prst="rect">
+            <a:avLst/>
+          </a:prstGeom>
+          <a:noFill/>
+          <a:ln w="0">
+            <a:noFill/>
+          </a:ln>
+        </p:spPr>
+        <p:txBody>
+          <a:bodyPr wrap="square" lIns="0" tIns="0" rIns="0" bIns="0" anchor="t">
+            <a:noAutofit/>
+          </a:bodyPr>
+          <a:lstStyle>
+            <a:defPPr>
+              <a:defRPr sz="1500" b="0">
+                <a:solidFill>
+                  <a:srgbClr val="1F2937"/>
+                </a:solidFill>
+                <a:latin typeface="Lato"/>
+                <a:ea typeface="Lato"/>
+                <a:cs typeface="Lato"/>
+              </a:defRPr>
+            </a:defPPr>
+          </a:lstStyle>
+          <a:p>
+            <a:pPr>
+              <a:defRPr sz="1500" b="0">
+                <a:solidFill>
+                  <a:srgbClr val="1F2937"/>
+                </a:solidFill>
+                <a:latin typeface="Lato"/>
+                <a:ea typeface="Lato"/>
+                <a:cs typeface="Lato"/>
+              </a:defRPr>
+            </a:pPr>
+            <a:r>
+              <a:rPr sz="1500" b="0">
+                <a:solidFill>
+                  <a:srgbClr val="1F2937"/>
+                </a:solidFill>
+                <a:latin typeface="Lato"/>
+                <a:ea typeface="Lato"/>
+                <a:cs typeface="Lato"/>
+              </a:rPr>
+              <a:t>Pilot one market. Track retained booking revenue, fares and connections. Pause wider cuts if results miss the plan.</a:t>
+            </a:r>
+          </a:p>
+        </p:txBody>
+      </p:sp>
+      <p:sp>
+        <p:nvSpPr>
+          <p:cNvPr id="18" name="">
+            <a:extLst>
+              <a:ext uri="{FF2B5EF4-FFF2-40B4-BE49-F238E27FC236}">
+                <ns2:creationId id="{6F5D0A19-A7D6-4F7C-A83D-4C2100B25F98}"/>
+              </a:ext>
+            </a:extLst>
+          </p:cNvPr>
+          <p:cNvSpPr>
+            <a:spLocks noGrp="1"/>
+          </p:cNvSpPr>
+          <p:nvPr/>
+        </p:nvSpPr>
+        <p:spPr>
+          <a:xfrm>
+            <a:off x="6286500" y="4191000"/>
+            <a:ext cx="5143500" cy="742950"/>
+          </a:xfrm>
+          <a:prstGeom prst="rect">
+            <a:avLst/>
+          </a:prstGeom>
+          <a:noFill/>
+          <a:ln w="0">
+            <a:noFill/>
+          </a:ln>
+        </p:spPr>
+        <p:txBody>
+          <a:bodyPr wrap="square" lIns="0" tIns="0" rIns="0" bIns="0" anchor="t">
+            <a:noAutofit/>
+          </a:bodyPr>
+          <a:lstStyle>
+            <a:defPPr>
+              <a:defRPr sz="1500" b="0">
+                <a:solidFill>
+                  <a:srgbClr val="1F2937"/>
+                </a:solidFill>
+                <a:latin typeface="Lato"/>
+                <a:ea typeface="Lato"/>
+                <a:cs typeface="Lato"/>
+              </a:defRPr>
+            </a:defPPr>
+          </a:lstStyle>
+          <a:p>
+            <a:pPr>
+              <a:defRPr sz="1500" b="0">
+                <a:solidFill>
+                  <a:srgbClr val="1F2937"/>
+                </a:solidFill>
+                <a:latin typeface="Lato"/>
+                <a:ea typeface="Lato"/>
+                <a:cs typeface="Lato"/>
+              </a:defRPr>
+            </a:pPr>
+            <a:r>
+              <a:rPr sz="1500" b="0">
+                <a:solidFill>
+                  <a:srgbClr val="1F2937"/>
+                </a:solidFill>
+                <a:latin typeface="Lato"/>
+                <a:ea typeface="Lato"/>
+                <a:cs typeface="Lato"/>
+              </a:rPr>
+              <a:t>Validate contracts and staffing before cutting flights. Reforecast savings monthly for fuel, crew and transition costs.</a:t>
+            </a:r>
+          </a:p>
+        </p:txBody>
+      </p:sp>
+      <p:sp>
+        <p:nvSpPr>
+          <p:cNvPr id="19" name="">
+            <a:extLst>
+              <a:ext uri="{FF2B5EF4-FFF2-40B4-BE49-F238E27FC236}">
+                <ns2:creationId id="{95B1F617-EF4F-4A33-9673-4B81876AF1A9}"/>
+              </a:ext>
+            </a:extLst>
+          </p:cNvPr>
+          <p:cNvSpPr>
+            <a:spLocks noGrp="1"/>
+          </p:cNvSpPr>
+          <p:nvPr/>
+        </p:nvSpPr>
+        <p:spPr>
+          <a:xfrm>
+            <a:off x="552450" y="5172075"/>
+            <a:ext cx="11087100" cy="9525"/>
+          </a:xfrm>
+          <a:prstGeom prst="rect">
+            <a:avLst/>
+          </a:prstGeom>
+          <a:solidFill>
+            <a:srgbClr val="D1D5DB"/>
+          </a:solidFill>
+          <a:ln w="0">
+            <a:noFill/>
+          </a:ln>
+        </p:spPr>
+      </p:sp>
+      <p:sp>
+        <p:nvSpPr>
+          <p:cNvPr id="20" name="">
+            <a:extLst>
+              <a:ext uri="{FF2B5EF4-FFF2-40B4-BE49-F238E27FC236}">
+                <ns2:creationId id="{47D919AD-F672-47B2-9EA6-5679A279B5EC}"/>
+              </a:ext>
+            </a:extLst>
+          </p:cNvPr>
+          <p:cNvSpPr>
+            <a:spLocks noGrp="1"/>
+          </p:cNvSpPr>
+          <p:nvPr/>
+        </p:nvSpPr>
+        <p:spPr>
+          <a:xfrm>
+            <a:off x="552450" y="5381625"/>
+            <a:ext cx="2571750" cy="247650"/>
+          </a:xfrm>
+          <a:prstGeom prst="rect">
+            <a:avLst/>
+          </a:prstGeom>
+          <a:noFill/>
+          <a:ln w="0">
+            <a:noFill/>
+          </a:ln>
+        </p:spPr>
+        <p:txBody>
+          <a:bodyPr wrap="square" lIns="0" tIns="0" rIns="0" bIns="0" anchor="t">
+            <a:noAutofit/>
+          </a:bodyPr>
+          <a:lstStyle>
+            <a:defPPr>
+              <a:defRPr sz="1125" b="1">
+                <a:solidFill>
+                  <a:srgbClr val="E8692A"/>
+                </a:solidFill>
+                <a:latin typeface="Montserrat"/>
+                <a:ea typeface="Montserrat"/>
+                <a:cs typeface="Montserrat"/>
+              </a:defRPr>
+            </a:defPPr>
+          </a:lstStyle>
+          <a:p>
+            <a:pPr>
+              <a:defRPr sz="1125" b="1">
+                <a:solidFill>
+                  <a:srgbClr val="E8692A"/>
+                </a:solidFill>
+                <a:latin typeface="Montserrat"/>
+                <a:ea typeface="Montserrat"/>
+                <a:cs typeface="Montserrat"/>
+              </a:defRPr>
+            </a:pPr>
+            <a:r>
+              <a:rPr sz="1125" b="1">
+                <a:solidFill>
+                  <a:srgbClr val="E8692A"/>
+                </a:solidFill>
+                <a:latin typeface="Montserrat"/>
+                <a:ea typeface="Montserrat"/>
+                <a:cs typeface="Montserrat"/>
+              </a:rPr>
+              <a:t>NEW-MARKET VIABILITY</a:t>
+            </a:r>
+          </a:p>
+        </p:txBody>
+      </p:sp>
+      <p:sp>
+        <p:nvSpPr>
+          <p:cNvPr id="21" name="">
+            <a:extLst>
+              <a:ext uri="{FF2B5EF4-FFF2-40B4-BE49-F238E27FC236}">
+                <ns2:creationId id="{7983321B-738F-452C-8366-EF643722DEDA}"/>
+              </a:ext>
+            </a:extLst>
+          </p:cNvPr>
+          <p:cNvSpPr>
+            <a:spLocks noGrp="1"/>
+          </p:cNvSpPr>
+          <p:nvPr/>
+        </p:nvSpPr>
+        <p:spPr>
+          <a:xfrm>
+            <a:off x="3333750" y="5381625"/>
+            <a:ext cx="8191500" cy="400050"/>
+          </a:xfrm>
+          <a:prstGeom prst="rect">
+            <a:avLst/>
+          </a:prstGeom>
+          <a:noFill/>
+          <a:ln w="0">
+            <a:noFill/>
+          </a:ln>
+        </p:spPr>
+        <p:txBody>
+          <a:bodyPr wrap="square" lIns="0" tIns="0" rIns="0" bIns="0" anchor="t">
+            <a:noAutofit/>
+          </a:bodyPr>
+          <a:lstStyle>
+            <a:defPPr>
+              <a:defRPr sz="1350" b="0">
+                <a:solidFill>
+                  <a:srgbClr val="1F2937"/>
+                </a:solidFill>
+                <a:latin typeface="Lato"/>
+                <a:ea typeface="Lato"/>
+                <a:cs typeface="Lato"/>
+              </a:defRPr>
+            </a:defPPr>
+          </a:lstStyle>
+          <a:p>
+            <a:pPr>
+              <a:defRPr sz="1350" b="0">
+                <a:solidFill>
+                  <a:srgbClr val="1F2937"/>
+                </a:solidFill>
+                <a:latin typeface="Lato"/>
+                <a:ea typeface="Lato"/>
+                <a:cs typeface="Lato"/>
+              </a:defRPr>
+            </a:pPr>
+            <a:r>
+              <a:rPr sz="1350" b="0">
+                <a:solidFill>
+                  <a:srgbClr val="1F2937"/>
+                </a:solidFill>
+                <a:latin typeface="Lato"/>
+                <a:ea typeface="Lato"/>
+                <a:cs typeface="Lato"/>
+              </a:rPr>
+              <a:t>Six-month trial and capped losses. Continue only with a recovery plan or explicit service funding.</a:t>
+            </a:r>
+          </a:p>
+        </p:txBody>
+      </p:sp>
+      <p:sp>
+        <p:nvSpPr>
+          <p:cNvPr id="22" name="">
+            <a:extLst>
+              <a:ext uri="{FF2B5EF4-FFF2-40B4-BE49-F238E27FC236}">
+                <ns2:creationId id="{162ADF97-2D7F-4671-A2EA-406DFCE5F271}"/>
+              </a:ext>
+            </a:extLst>
+          </p:cNvPr>
+          <p:cNvSpPr>
+            <a:spLocks noGrp="1"/>
+          </p:cNvSpPr>
+          <p:nvPr/>
+        </p:nvSpPr>
+        <p:spPr>
+          <a:xfrm>
+            <a:off x="552450" y="5886450"/>
+            <a:ext cx="2571750" cy="266700"/>
+          </a:xfrm>
+          <a:prstGeom prst="rect">
+            <a:avLst/>
+          </a:prstGeom>
+          <a:noFill/>
+          <a:ln w="0">
+            <a:noFill/>
+          </a:ln>
+        </p:spPr>
+        <p:txBody>
+          <a:bodyPr wrap="square" lIns="0" tIns="0" rIns="0" bIns="0" anchor="t">
+            <a:noAutofit/>
+          </a:bodyPr>
+          <a:lstStyle>
+            <a:defPPr>
+              <a:defRPr sz="1125" b="1">
+                <a:solidFill>
+                  <a:srgbClr val="E8692A"/>
+                </a:solidFill>
+                <a:latin typeface="Montserrat"/>
+                <a:ea typeface="Montserrat"/>
+                <a:cs typeface="Montserrat"/>
+              </a:defRPr>
+            </a:defPPr>
+          </a:lstStyle>
+          <a:p>
+            <a:pPr>
+              <a:defRPr sz="1125" b="1">
+                <a:solidFill>
+                  <a:srgbClr val="E8692A"/>
+                </a:solidFill>
+                <a:latin typeface="Montserrat"/>
+                <a:ea typeface="Montserrat"/>
+                <a:cs typeface="Montserrat"/>
+              </a:defRPr>
+            </a:pPr>
+            <a:r>
+              <a:rPr sz="1125" b="1">
+                <a:solidFill>
+                  <a:srgbClr val="E8692A"/>
+                </a:solidFill>
+                <a:latin typeface="Montserrat"/>
+                <a:ea typeface="Montserrat"/>
+                <a:cs typeface="Montserrat"/>
+              </a:rPr>
+              <a:t>SERVICE AND STAFFING</a:t>
+            </a:r>
+          </a:p>
+        </p:txBody>
+      </p:sp>
+      <p:sp>
+        <p:nvSpPr>
+          <p:cNvPr id="23" name="">
+            <a:extLst>
+              <a:ext uri="{FF2B5EF4-FFF2-40B4-BE49-F238E27FC236}">
+                <ns2:creationId id="{761AB4D7-752C-4B46-AEEE-F4BD6AF9524C}"/>
+              </a:ext>
+            </a:extLst>
+          </p:cNvPr>
+          <p:cNvSpPr>
+            <a:spLocks noGrp="1"/>
+          </p:cNvSpPr>
+          <p:nvPr/>
+        </p:nvSpPr>
+        <p:spPr>
+          <a:xfrm>
+            <a:off x="3333750" y="5886450"/>
+            <a:ext cx="8191500" cy="400050"/>
+          </a:xfrm>
+          <a:prstGeom prst="rect">
+            <a:avLst/>
+          </a:prstGeom>
+          <a:noFill/>
+          <a:ln w="0">
+            <a:noFill/>
+          </a:ln>
+        </p:spPr>
+        <p:txBody>
+          <a:bodyPr wrap="square" lIns="0" tIns="0" rIns="0" bIns="0" anchor="t">
+            <a:noAutofit/>
+          </a:bodyPr>
+          <a:lstStyle>
+            <a:defPPr>
+              <a:defRPr sz="1350" b="0">
+                <a:solidFill>
+                  <a:srgbClr val="1F2937"/>
+                </a:solidFill>
+                <a:latin typeface="Lato"/>
+                <a:ea typeface="Lato"/>
+                <a:cs typeface="Lato"/>
+              </a:defRPr>
+            </a:defPPr>
+          </a:lstStyle>
+          <a:p>
+            <a:pPr>
+              <a:defRPr sz="1350" b="0">
+                <a:solidFill>
+                  <a:srgbClr val="1F2937"/>
+                </a:solidFill>
+                <a:latin typeface="Lato"/>
+                <a:ea typeface="Lato"/>
+                <a:cs typeface="Lato"/>
+              </a:defRPr>
+            </a:pPr>
+            <a:r>
+              <a:rPr sz="1350" b="0">
+                <a:solidFill>
+                  <a:srgbClr val="1F2937"/>
+                </a:solidFill>
+                <a:latin typeface="Lato"/>
+                <a:ea typeface="Lato"/>
+                <a:cs typeface="Lato"/>
+              </a:rPr>
+              <a:t>Protect key connections. Consult crews, prioritize redeployment and offer rebooking or refunds.</a:t>
+            </a:r>
+          </a:p>
+        </p:txBody>
+      </p:sp>
     </p:spTree>
   </p:cSld>
   <p:clrMapOvr>
